--- a/slides/synchronization_part_1.pptx
+++ b/slides/synchronization_part_1.pptx
@@ -181,22 +181,6 @@
 
 <file path=ppt/changesInfos/changesInfo1.xml><?xml version="1.0" encoding="utf-8"?>
 <pc:chgInfo xmlns:a="http://schemas.openxmlformats.org/drawingml/2006/main" xmlns:r="http://schemas.openxmlformats.org/officeDocument/2006/relationships" xmlns:ac="http://schemas.microsoft.com/office/drawing/2013/main/command" xmlns:pc="http://schemas.microsoft.com/office/powerpoint/2013/main/command">
-  <pc:docChgLst>
-    <pc:chgData name="Vincenzo Massimiliano Gulisano" userId="887d7398-9e41-4331-abd4-9c23f064ea90" providerId="ADAL" clId="{6259EB42-2F4C-334B-A99B-A5E9EA13789A}"/>
-    <pc:docChg chg="undo custSel modSld">
-      <pc:chgData name="Vincenzo Massimiliano Gulisano" userId="887d7398-9e41-4331-abd4-9c23f064ea90" providerId="ADAL" clId="{6259EB42-2F4C-334B-A99B-A5E9EA13789A}" dt="2022-09-19T06:46:23.441" v="7" actId="20577"/>
-      <pc:docMkLst>
-        <pc:docMk/>
-      </pc:docMkLst>
-      <pc:sldChg chg="modSp mod">
-        <pc:chgData name="Vincenzo Massimiliano Gulisano" userId="887d7398-9e41-4331-abd4-9c23f064ea90" providerId="ADAL" clId="{6259EB42-2F4C-334B-A99B-A5E9EA13789A}" dt="2022-09-19T06:46:23.441" v="7" actId="20577"/>
-        <pc:sldMkLst>
-          <pc:docMk/>
-          <pc:sldMk cId="4168396551" sldId="300"/>
-        </pc:sldMkLst>
-      </pc:sldChg>
-    </pc:docChg>
-  </pc:docChgLst>
   <pc:docChgLst>
     <pc:chgData name="Vincenzo Massimiliano Gulisano" userId="887d7398-9e41-4331-abd4-9c23f064ea90" providerId="ADAL" clId="{8EA10870-6395-588A-9409-E8E4CA631CF7}"/>
     <pc:docChg chg="undo redo custSel addSld delSld modSld">
@@ -473,6 +457,22 @@
       </pc:sldChg>
     </pc:docChg>
   </pc:docChgLst>
+  <pc:docChgLst>
+    <pc:chgData name="Vincenzo Massimiliano Gulisano" userId="887d7398-9e41-4331-abd4-9c23f064ea90" providerId="ADAL" clId="{6259EB42-2F4C-334B-A99B-A5E9EA13789A}"/>
+    <pc:docChg chg="undo custSel modSld">
+      <pc:chgData name="Vincenzo Massimiliano Gulisano" userId="887d7398-9e41-4331-abd4-9c23f064ea90" providerId="ADAL" clId="{6259EB42-2F4C-334B-A99B-A5E9EA13789A}" dt="2022-09-19T06:46:23.441" v="7" actId="20577"/>
+      <pc:docMkLst>
+        <pc:docMk/>
+      </pc:docMkLst>
+      <pc:sldChg chg="modSp mod">
+        <pc:chgData name="Vincenzo Massimiliano Gulisano" userId="887d7398-9e41-4331-abd4-9c23f064ea90" providerId="ADAL" clId="{6259EB42-2F4C-334B-A99B-A5E9EA13789A}" dt="2022-09-19T06:46:23.441" v="7" actId="20577"/>
+        <pc:sldMkLst>
+          <pc:docMk/>
+          <pc:sldMk cId="4168396551" sldId="300"/>
+        </pc:sldMkLst>
+      </pc:sldChg>
+    </pc:docChg>
+  </pc:docChgLst>
 </pc:chgInfo>
 </file>
 
@@ -558,7 +558,7 @@
           <a:p>
             <a:fld id="{B9670FC7-431C-3445-825C-360F18AD9FB0}" type="datetimeFigureOut">
               <a:rPr lang="en-US" smtClean="0"/>
-              <a:t>10/2/25</a:t>
+              <a:t>7/14/26</a:t>
             </a:fld>
             <a:endParaRPr lang="en-US"/>
           </a:p>
@@ -7876,7 +7876,10 @@
           <a:bodyPr/>
           <a:lstStyle/>
           <a:p>
-            <a:endParaRPr lang="en-US"/>
+            <a:r>
+              <a:rPr lang="en-US"/>
+              <a:t>Vincenzo Gulisano</a:t>
+            </a:r>
           </a:p>
         </p:txBody>
       </p:sp>
@@ -8072,7 +8075,10 @@
           <a:bodyPr/>
           <a:lstStyle/>
           <a:p>
-            <a:endParaRPr lang="en-US"/>
+            <a:r>
+              <a:rPr lang="en-US"/>
+              <a:t>Vincenzo Gulisano</a:t>
+            </a:r>
           </a:p>
         </p:txBody>
       </p:sp>
@@ -8278,7 +8284,10 @@
           <a:bodyPr/>
           <a:lstStyle/>
           <a:p>
-            <a:endParaRPr lang="en-US"/>
+            <a:r>
+              <a:rPr lang="en-US"/>
+              <a:t>Vincenzo Gulisano</a:t>
+            </a:r>
           </a:p>
         </p:txBody>
       </p:sp>
@@ -8836,7 +8845,10 @@
           <a:bodyPr/>
           <a:lstStyle/>
           <a:p>
-            <a:endParaRPr lang="en-US"/>
+            <a:r>
+              <a:rPr lang="en-US"/>
+              <a:t>Vincenzo Gulisano</a:t>
+            </a:r>
           </a:p>
         </p:txBody>
       </p:sp>
@@ -9108,7 +9120,10 @@
           <a:bodyPr/>
           <a:lstStyle/>
           <a:p>
-            <a:endParaRPr lang="en-US"/>
+            <a:r>
+              <a:rPr lang="en-US"/>
+              <a:t>Vincenzo Gulisano</a:t>
+            </a:r>
           </a:p>
         </p:txBody>
       </p:sp>
@@ -9372,7 +9387,10 @@
           <a:bodyPr/>
           <a:lstStyle/>
           <a:p>
-            <a:endParaRPr lang="en-US"/>
+            <a:r>
+              <a:rPr lang="en-US"/>
+              <a:t>Vincenzo Gulisano</a:t>
+            </a:r>
           </a:p>
         </p:txBody>
       </p:sp>
@@ -9783,7 +9801,10 @@
           <a:bodyPr/>
           <a:lstStyle/>
           <a:p>
-            <a:endParaRPr lang="en-US"/>
+            <a:r>
+              <a:rPr lang="en-US"/>
+              <a:t>Vincenzo Gulisano</a:t>
+            </a:r>
           </a:p>
         </p:txBody>
       </p:sp>
@@ -9921,7 +9942,10 @@
           <a:bodyPr/>
           <a:lstStyle/>
           <a:p>
-            <a:endParaRPr lang="en-US"/>
+            <a:r>
+              <a:rPr lang="en-US"/>
+              <a:t>Vincenzo Gulisano</a:t>
+            </a:r>
           </a:p>
         </p:txBody>
       </p:sp>
@@ -10030,7 +10054,10 @@
           <a:bodyPr/>
           <a:lstStyle/>
           <a:p>
-            <a:endParaRPr lang="en-US"/>
+            <a:r>
+              <a:rPr lang="en-US"/>
+              <a:t>Vincenzo Gulisano</a:t>
+            </a:r>
           </a:p>
         </p:txBody>
       </p:sp>
@@ -10339,7 +10366,10 @@
           <a:bodyPr/>
           <a:lstStyle/>
           <a:p>
-            <a:endParaRPr lang="en-US"/>
+            <a:r>
+              <a:rPr lang="en-US"/>
+              <a:t>Vincenzo Gulisano</a:t>
+            </a:r>
           </a:p>
         </p:txBody>
       </p:sp>
@@ -10624,7 +10654,10 @@
           <a:bodyPr/>
           <a:lstStyle/>
           <a:p>
-            <a:endParaRPr lang="en-US"/>
+            <a:r>
+              <a:rPr lang="en-US"/>
+              <a:t>Vincenzo Gulisano</a:t>
+            </a:r>
           </a:p>
         </p:txBody>
       </p:sp>
@@ -10863,7 +10896,10 @@
             </a:lvl1pPr>
           </a:lstStyle>
           <a:p>
-            <a:endParaRPr lang="en-US"/>
+            <a:r>
+              <a:rPr lang="en-US"/>
+              <a:t>Vincenzo Gulisano</a:t>
+            </a:r>
           </a:p>
         </p:txBody>
       </p:sp>
@@ -10980,7 +11016,7 @@
     <p:sldLayoutId id="2147483665" r:id="rId12"/>
     <p:sldLayoutId id="2147483666" r:id="rId13"/>
   </p:sldLayoutIdLst>
-  <p:hf hdr="0" ftr="0" dt="0"/>
+  <p:hf hdr="0" ftr="0"/>
   <p:txStyles>
     <p:titleStyle>
       <a:lvl1pPr algn="l" defTabSz="914400" rtl="0" eaLnBrk="1" latinLnBrk="0" hangingPunct="1">
@@ -11335,88 +11371,104 @@
           </a:p>
         </p:txBody>
       </p:sp>
-      <p:pic>
-        <p:nvPicPr>
-          <p:cNvPr id="3078" name="Picture 6" descr="http://upload.wikimedia.org/wikipedia/en/5/5c/Chalmers_logo.png"/>
-          <p:cNvPicPr>
-            <a:picLocks noChangeAspect="1" noChangeArrowheads="1"/>
-          </p:cNvPicPr>
-          <p:nvPr/>
-        </p:nvPicPr>
-        <p:blipFill>
-          <a:blip r:embed="rId3">
+      <p:grpSp>
+        <p:nvGrpSpPr>
+          <p:cNvPr id="2" name="Group 1">
             <a:extLst>
-              <a:ext uri="{28A0092B-C50C-407E-A947-70E740481C1C}">
-                <a14:useLocalDpi xmlns:a14="http://schemas.microsoft.com/office/drawing/2010/main" val="0"/>
+              <a:ext uri="{FF2B5EF4-FFF2-40B4-BE49-F238E27FC236}">
+                <a16:creationId xmlns:a16="http://schemas.microsoft.com/office/drawing/2014/main" id="{DE77F173-1DA6-4223-61E1-FEDFE24BD549}"/>
               </a:ext>
             </a:extLst>
-          </a:blip>
-          <a:srcRect/>
-          <a:stretch>
-            <a:fillRect/>
-          </a:stretch>
-        </p:blipFill>
-        <p:spPr bwMode="auto">
+          </p:cNvPr>
+          <p:cNvGrpSpPr/>
+          <p:nvPr/>
+        </p:nvGrpSpPr>
+        <p:grpSpPr>
           <a:xfrm>
-            <a:off x="4100831" y="4512849"/>
-            <a:ext cx="1880870" cy="1747712"/>
+            <a:off x="2543614" y="4468860"/>
+            <a:ext cx="7104771" cy="1547400"/>
+            <a:chOff x="777241" y="4793437"/>
+            <a:chExt cx="7104771" cy="1547400"/>
           </a:xfrm>
-          <a:prstGeom prst="rect">
-            <a:avLst/>
-          </a:prstGeom>
-          <a:noFill/>
-          <a:extLst>
-            <a:ext uri="{909E8E84-426E-40DD-AFC4-6F175D3DCCD1}">
-              <a14:hiddenFill xmlns:a14="http://schemas.microsoft.com/office/drawing/2010/main">
-                <a:solidFill>
-                  <a:srgbClr val="FFFFFF"/>
-                </a:solidFill>
-              </a14:hiddenFill>
-            </a:ext>
-          </a:extLst>
-        </p:spPr>
-      </p:pic>
-      <p:pic>
-        <p:nvPicPr>
-          <p:cNvPr id="3080" name="Picture 8" descr="http://sgroup.be/sites/default/files/LOGUeng_cen2r.gif"/>
-          <p:cNvPicPr>
-            <a:picLocks noChangeAspect="1" noChangeArrowheads="1"/>
-          </p:cNvPicPr>
-          <p:nvPr/>
-        </p:nvPicPr>
-        <p:blipFill>
-          <a:blip r:embed="rId4">
+        </p:grpSpPr>
+        <p:pic>
+          <p:nvPicPr>
+            <p:cNvPr id="3" name="Picture 2">
+              <a:extLst>
+                <a:ext uri="{FF2B5EF4-FFF2-40B4-BE49-F238E27FC236}">
+                  <a16:creationId xmlns:a16="http://schemas.microsoft.com/office/drawing/2014/main" id="{3D79F06A-3449-CCAB-D741-749395BD7373}"/>
+                </a:ext>
+              </a:extLst>
+            </p:cNvPr>
+            <p:cNvPicPr>
+              <a:picLocks noChangeAspect="1" noChangeArrowheads="1"/>
+            </p:cNvPicPr>
+            <p:nvPr/>
+          </p:nvPicPr>
+          <p:blipFill>
+            <a:blip r:embed="rId3">
+              <a:extLst>
+                <a:ext uri="{28A0092B-C50C-407E-A947-70E740481C1C}">
+                  <a14:useLocalDpi xmlns:a14="http://schemas.microsoft.com/office/drawing/2010/main" val="0"/>
+                </a:ext>
+              </a:extLst>
+            </a:blip>
+            <a:srcRect/>
+            <a:stretch>
+              <a:fillRect/>
+            </a:stretch>
+          </p:blipFill>
+          <p:spPr bwMode="auto">
+            <a:xfrm>
+              <a:off x="5803022" y="4793437"/>
+              <a:ext cx="2078990" cy="1547400"/>
+            </a:xfrm>
+            <a:prstGeom prst="rect">
+              <a:avLst/>
+            </a:prstGeom>
+            <a:noFill/>
             <a:extLst>
-              <a:ext uri="{28A0092B-C50C-407E-A947-70E740481C1C}">
-                <a14:useLocalDpi xmlns:a14="http://schemas.microsoft.com/office/drawing/2010/main" val="0"/>
+              <a:ext uri="{909E8E84-426E-40DD-AFC4-6F175D3DCCD1}">
+                <a14:hiddenFill xmlns:a14="http://schemas.microsoft.com/office/drawing/2010/main">
+                  <a:solidFill>
+                    <a:srgbClr val="FFFFFF"/>
+                  </a:solidFill>
+                </a14:hiddenFill>
               </a:ext>
             </a:extLst>
-          </a:blip>
-          <a:srcRect/>
-          <a:stretch>
-            <a:fillRect/>
-          </a:stretch>
-        </p:blipFill>
-        <p:spPr bwMode="auto">
-          <a:xfrm>
-            <a:off x="6173471" y="4613005"/>
-            <a:ext cx="2078990" cy="1547400"/>
-          </a:xfrm>
-          <a:prstGeom prst="rect">
-            <a:avLst/>
-          </a:prstGeom>
-          <a:noFill/>
-          <a:extLst>
-            <a:ext uri="{909E8E84-426E-40DD-AFC4-6F175D3DCCD1}">
-              <a14:hiddenFill xmlns:a14="http://schemas.microsoft.com/office/drawing/2010/main">
-                <a:solidFill>
-                  <a:srgbClr val="FFFFFF"/>
-                </a:solidFill>
-              </a14:hiddenFill>
-            </a:ext>
-          </a:extLst>
-        </p:spPr>
-      </p:pic>
+          </p:spPr>
+        </p:pic>
+        <p:pic>
+          <p:nvPicPr>
+            <p:cNvPr id="4" name="Picture 3">
+              <a:extLst>
+                <a:ext uri="{FF2B5EF4-FFF2-40B4-BE49-F238E27FC236}">
+                  <a16:creationId xmlns:a16="http://schemas.microsoft.com/office/drawing/2014/main" id="{42649405-C12D-D2F0-F97F-F744386C276B}"/>
+                </a:ext>
+              </a:extLst>
+            </p:cNvPr>
+            <p:cNvPicPr>
+              <a:picLocks noChangeAspect="1"/>
+            </p:cNvPicPr>
+            <p:nvPr/>
+          </p:nvPicPr>
+          <p:blipFill>
+            <a:blip r:embed="rId4"/>
+            <a:stretch>
+              <a:fillRect/>
+            </a:stretch>
+          </p:blipFill>
+          <p:spPr>
+            <a:xfrm>
+              <a:off x="777241" y="4973870"/>
+              <a:ext cx="4724632" cy="1186535"/>
+            </a:xfrm>
+            <a:prstGeom prst="rect">
+              <a:avLst/>
+            </a:prstGeom>
+          </p:spPr>
+        </p:pic>
+      </p:grpSp>
     </p:spTree>
   </p:cSld>
   <p:clrMapOvr>
@@ -11692,6 +11744,34 @@
             <a:r>
               <a:rPr lang="en-US"/>
               <a:t>/thread</a:t>
+            </a:r>
+          </a:p>
+        </p:txBody>
+      </p:sp>
+      <p:sp>
+        <p:nvSpPr>
+          <p:cNvPr id="4" name="Date Placeholder 3">
+            <a:extLst>
+              <a:ext uri="{FF2B5EF4-FFF2-40B4-BE49-F238E27FC236}">
+                <a16:creationId xmlns:a16="http://schemas.microsoft.com/office/drawing/2014/main" id="{195A329A-2DA9-A207-3B1A-DC21278AC887}"/>
+              </a:ext>
+            </a:extLst>
+          </p:cNvPr>
+          <p:cNvSpPr>
+            <a:spLocks noGrp="1"/>
+          </p:cNvSpPr>
+          <p:nvPr>
+            <p:ph type="dt" sz="half" idx="10"/>
+          </p:nvPr>
+        </p:nvSpPr>
+        <p:spPr/>
+        <p:txBody>
+          <a:bodyPr/>
+          <a:lstStyle/>
+          <a:p>
+            <a:r>
+              <a:rPr lang="en-US"/>
+              <a:t>Vincenzo Gulisano</a:t>
             </a:r>
           </a:p>
         </p:txBody>
@@ -12948,6 +13028,34 @@
           </a:p>
         </p:txBody>
       </p:sp>
+      <p:sp>
+        <p:nvSpPr>
+          <p:cNvPr id="5" name="Date Placeholder 4">
+            <a:extLst>
+              <a:ext uri="{FF2B5EF4-FFF2-40B4-BE49-F238E27FC236}">
+                <a16:creationId xmlns:a16="http://schemas.microsoft.com/office/drawing/2014/main" id="{5BF15EE3-5310-7204-DA4C-314176D3E13C}"/>
+              </a:ext>
+            </a:extLst>
+          </p:cNvPr>
+          <p:cNvSpPr>
+            <a:spLocks noGrp="1"/>
+          </p:cNvSpPr>
+          <p:nvPr>
+            <p:ph type="dt" sz="half" idx="10"/>
+          </p:nvPr>
+        </p:nvSpPr>
+        <p:spPr/>
+        <p:txBody>
+          <a:bodyPr/>
+          <a:lstStyle/>
+          <a:p>
+            <a:r>
+              <a:rPr lang="en-US"/>
+              <a:t>Vincenzo Gulisano</a:t>
+            </a:r>
+          </a:p>
+        </p:txBody>
+      </p:sp>
     </p:spTree>
     <p:extLst>
       <p:ext uri="{BB962C8B-B14F-4D97-AF65-F5344CB8AC3E}">
@@ -13650,6 +13758,34 @@
               <a:t>check-competition approach</a:t>
             </a:r>
             <a:endParaRPr lang="sv-SE" dirty="0"/>
+          </a:p>
+        </p:txBody>
+      </p:sp>
+      <p:sp>
+        <p:nvSpPr>
+          <p:cNvPr id="2" name="Date Placeholder 1">
+            <a:extLst>
+              <a:ext uri="{FF2B5EF4-FFF2-40B4-BE49-F238E27FC236}">
+                <a16:creationId xmlns:a16="http://schemas.microsoft.com/office/drawing/2014/main" id="{17C55493-BD0C-F762-7CF4-CCCBBCFE7FB7}"/>
+              </a:ext>
+            </a:extLst>
+          </p:cNvPr>
+          <p:cNvSpPr>
+            <a:spLocks noGrp="1"/>
+          </p:cNvSpPr>
+          <p:nvPr>
+            <p:ph type="dt" sz="half" idx="10"/>
+          </p:nvPr>
+        </p:nvSpPr>
+        <p:spPr/>
+        <p:txBody>
+          <a:bodyPr/>
+          <a:lstStyle/>
+          <a:p>
+            <a:r>
+              <a:rPr lang="en-US"/>
+              <a:t>Vincenzo Gulisano</a:t>
+            </a:r>
           </a:p>
         </p:txBody>
       </p:sp>
@@ -14532,10 +14668,10 @@
           <p:nvPr/>
         </p:nvPicPr>
         <p:blipFill>
-          <a:blip r:embed="rId3">
+          <a:blip>
             <a:extLst>
               <a:ext uri="{96DAC541-7B7A-43D3-8B79-37D633B846F1}">
-                <asvg:svgBlip xmlns:asvg="http://schemas.microsoft.com/office/drawing/2016/SVG/main" r:embed="rId4"/>
+                <asvg:svgBlip xmlns:asvg="http://schemas.microsoft.com/office/drawing/2016/SVG/main" r:embed="rId3"/>
               </a:ext>
             </a:extLst>
           </a:blip>
@@ -14677,6 +14813,34 @@
               <a:t>13</a:t>
             </a:fld>
             <a:endParaRPr lang="en-US"/>
+          </a:p>
+        </p:txBody>
+      </p:sp>
+      <p:sp>
+        <p:nvSpPr>
+          <p:cNvPr id="4" name="Date Placeholder 3">
+            <a:extLst>
+              <a:ext uri="{FF2B5EF4-FFF2-40B4-BE49-F238E27FC236}">
+                <a16:creationId xmlns:a16="http://schemas.microsoft.com/office/drawing/2014/main" id="{8E4036EA-BA5D-0350-333B-5B34B07AE7CD}"/>
+              </a:ext>
+            </a:extLst>
+          </p:cNvPr>
+          <p:cNvSpPr>
+            <a:spLocks noGrp="1"/>
+          </p:cNvSpPr>
+          <p:nvPr>
+            <p:ph type="dt" sz="half" idx="10"/>
+          </p:nvPr>
+        </p:nvSpPr>
+        <p:spPr/>
+        <p:txBody>
+          <a:bodyPr/>
+          <a:lstStyle/>
+          <a:p>
+            <a:r>
+              <a:rPr lang="en-US"/>
+              <a:t>Vincenzo Gulisano</a:t>
+            </a:r>
           </a:p>
         </p:txBody>
       </p:sp>
@@ -14972,10 +15136,10 @@
           <p:nvPr/>
         </p:nvPicPr>
         <p:blipFill>
-          <a:blip r:embed="rId3">
+          <a:blip>
             <a:extLst>
               <a:ext uri="{96DAC541-7B7A-43D3-8B79-37D633B846F1}">
-                <asvg:svgBlip xmlns:asvg="http://schemas.microsoft.com/office/drawing/2016/SVG/main" r:embed="rId4"/>
+                <asvg:svgBlip xmlns:asvg="http://schemas.microsoft.com/office/drawing/2016/SVG/main" r:embed="rId3"/>
               </a:ext>
             </a:extLst>
           </a:blip>
@@ -16190,6 +16354,34 @@
           </a:p>
         </p:txBody>
       </p:sp>
+      <p:sp>
+        <p:nvSpPr>
+          <p:cNvPr id="3" name="Date Placeholder 2">
+            <a:extLst>
+              <a:ext uri="{FF2B5EF4-FFF2-40B4-BE49-F238E27FC236}">
+                <a16:creationId xmlns:a16="http://schemas.microsoft.com/office/drawing/2014/main" id="{88BACE61-AE58-09D9-EBC5-B0CA424EAFDC}"/>
+              </a:ext>
+            </a:extLst>
+          </p:cNvPr>
+          <p:cNvSpPr>
+            <a:spLocks noGrp="1"/>
+          </p:cNvSpPr>
+          <p:nvPr>
+            <p:ph type="dt" sz="half" idx="10"/>
+          </p:nvPr>
+        </p:nvSpPr>
+        <p:spPr/>
+        <p:txBody>
+          <a:bodyPr/>
+          <a:lstStyle/>
+          <a:p>
+            <a:r>
+              <a:rPr lang="en-US"/>
+              <a:t>Vincenzo Gulisano</a:t>
+            </a:r>
+          </a:p>
+        </p:txBody>
+      </p:sp>
     </p:spTree>
     <p:extLst>
       <p:ext uri="{BB962C8B-B14F-4D97-AF65-F5344CB8AC3E}">
@@ -16392,10 +16584,10 @@
           <p:nvPr/>
         </p:nvPicPr>
         <p:blipFill>
-          <a:blip r:embed="rId3">
+          <a:blip>
             <a:extLst>
               <a:ext uri="{96DAC541-7B7A-43D3-8B79-37D633B846F1}">
-                <asvg:svgBlip xmlns:asvg="http://schemas.microsoft.com/office/drawing/2016/SVG/main" r:embed="rId4"/>
+                <asvg:svgBlip xmlns:asvg="http://schemas.microsoft.com/office/drawing/2016/SVG/main" r:embed="rId3"/>
               </a:ext>
             </a:extLst>
           </a:blip>
@@ -17596,7 +17788,7 @@
           <p:nvPr/>
         </p:nvPicPr>
         <p:blipFill>
-          <a:blip r:embed="rId5">
+          <a:blip r:embed="rId4">
             <a:clrChange>
               <a:clrFrom>
                 <a:srgbClr val="FFFFFF"/>
@@ -17664,6 +17856,34 @@
               <a:t>15</a:t>
             </a:fld>
             <a:endParaRPr lang="en-US"/>
+          </a:p>
+        </p:txBody>
+      </p:sp>
+      <p:sp>
+        <p:nvSpPr>
+          <p:cNvPr id="4" name="Date Placeholder 3">
+            <a:extLst>
+              <a:ext uri="{FF2B5EF4-FFF2-40B4-BE49-F238E27FC236}">
+                <a16:creationId xmlns:a16="http://schemas.microsoft.com/office/drawing/2014/main" id="{ECFAF097-B3E2-5D98-C024-627971509A33}"/>
+              </a:ext>
+            </a:extLst>
+          </p:cNvPr>
+          <p:cNvSpPr>
+            <a:spLocks noGrp="1"/>
+          </p:cNvSpPr>
+          <p:nvPr>
+            <p:ph type="dt" sz="half" idx="10"/>
+          </p:nvPr>
+        </p:nvSpPr>
+        <p:spPr/>
+        <p:txBody>
+          <a:bodyPr/>
+          <a:lstStyle/>
+          <a:p>
+            <a:r>
+              <a:rPr lang="en-US"/>
+              <a:t>Vincenzo Gulisano</a:t>
+            </a:r>
           </a:p>
         </p:txBody>
       </p:sp>
@@ -17892,6 +18112,34 @@
           </a:p>
         </p:txBody>
       </p:sp>
+      <p:sp>
+        <p:nvSpPr>
+          <p:cNvPr id="5" name="Date Placeholder 4">
+            <a:extLst>
+              <a:ext uri="{FF2B5EF4-FFF2-40B4-BE49-F238E27FC236}">
+                <a16:creationId xmlns:a16="http://schemas.microsoft.com/office/drawing/2014/main" id="{BAF396B7-2BA7-F804-E6D1-FC7CD9081152}"/>
+              </a:ext>
+            </a:extLst>
+          </p:cNvPr>
+          <p:cNvSpPr>
+            <a:spLocks noGrp="1"/>
+          </p:cNvSpPr>
+          <p:nvPr>
+            <p:ph type="dt" sz="half" idx="10"/>
+          </p:nvPr>
+        </p:nvSpPr>
+        <p:spPr/>
+        <p:txBody>
+          <a:bodyPr/>
+          <a:lstStyle/>
+          <a:p>
+            <a:r>
+              <a:rPr lang="en-US"/>
+              <a:t>Vincenzo Gulisano</a:t>
+            </a:r>
+          </a:p>
+        </p:txBody>
+      </p:sp>
     </p:spTree>
     <p:extLst>
       <p:ext uri="{BB962C8B-B14F-4D97-AF65-F5344CB8AC3E}">
@@ -18531,6 +18779,34 @@
               <a:t>) approach</a:t>
             </a:r>
             <a:endParaRPr lang="sv-SE" dirty="0"/>
+          </a:p>
+        </p:txBody>
+      </p:sp>
+      <p:sp>
+        <p:nvSpPr>
+          <p:cNvPr id="2" name="Date Placeholder 1">
+            <a:extLst>
+              <a:ext uri="{FF2B5EF4-FFF2-40B4-BE49-F238E27FC236}">
+                <a16:creationId xmlns:a16="http://schemas.microsoft.com/office/drawing/2014/main" id="{5003AEA0-F203-64A8-9AD8-2542C4C05961}"/>
+              </a:ext>
+            </a:extLst>
+          </p:cNvPr>
+          <p:cNvSpPr>
+            <a:spLocks noGrp="1"/>
+          </p:cNvSpPr>
+          <p:nvPr>
+            <p:ph type="dt" sz="half" idx="10"/>
+          </p:nvPr>
+        </p:nvSpPr>
+        <p:spPr/>
+        <p:txBody>
+          <a:bodyPr/>
+          <a:lstStyle/>
+          <a:p>
+            <a:r>
+              <a:rPr lang="en-US"/>
+              <a:t>Vincenzo Gulisano</a:t>
+            </a:r>
           </a:p>
         </p:txBody>
       </p:sp>
@@ -18579,10 +18855,10 @@
           <p:nvPr/>
         </p:nvPicPr>
         <p:blipFill>
-          <a:blip r:embed="rId3">
+          <a:blip>
             <a:extLst>
               <a:ext uri="{96DAC541-7B7A-43D3-8B79-37D633B846F1}">
-                <asvg:svgBlip xmlns:asvg="http://schemas.microsoft.com/office/drawing/2016/SVG/main" r:embed="rId4"/>
+                <asvg:svgBlip xmlns:asvg="http://schemas.microsoft.com/office/drawing/2016/SVG/main" r:embed="rId3"/>
               </a:ext>
             </a:extLst>
           </a:blip>
@@ -19476,10 +19752,10 @@
           <p:nvPr/>
         </p:nvPicPr>
         <p:blipFill>
-          <a:blip r:embed="rId5">
+          <a:blip r:embed="rId4">
             <a:extLst>
               <a:ext uri="{837473B0-CC2E-450A-ABE3-18F120FF3D39}">
-                <a1611:picAttrSrcUrl xmlns:a1611="http://schemas.microsoft.com/office/drawing/2016/11/main" r:id="rId6"/>
+                <a1611:picAttrSrcUrl xmlns:a1611="http://schemas.microsoft.com/office/drawing/2016/11/main" r:id="rId5"/>
               </a:ext>
             </a:extLst>
           </a:blip>
@@ -19523,6 +19799,34 @@
               <a:t>18</a:t>
             </a:fld>
             <a:endParaRPr lang="en-US"/>
+          </a:p>
+        </p:txBody>
+      </p:sp>
+      <p:sp>
+        <p:nvSpPr>
+          <p:cNvPr id="3" name="Date Placeholder 2">
+            <a:extLst>
+              <a:ext uri="{FF2B5EF4-FFF2-40B4-BE49-F238E27FC236}">
+                <a16:creationId xmlns:a16="http://schemas.microsoft.com/office/drawing/2014/main" id="{1FC5CCF7-1409-935C-C59A-7C458F4070A3}"/>
+              </a:ext>
+            </a:extLst>
+          </p:cNvPr>
+          <p:cNvSpPr>
+            <a:spLocks noGrp="1"/>
+          </p:cNvSpPr>
+          <p:nvPr>
+            <p:ph type="dt" sz="half" idx="10"/>
+          </p:nvPr>
+        </p:nvSpPr>
+        <p:spPr/>
+        <p:txBody>
+          <a:bodyPr/>
+          <a:lstStyle/>
+          <a:p>
+            <a:r>
+              <a:rPr lang="en-US"/>
+              <a:t>Vincenzo Gulisano</a:t>
+            </a:r>
           </a:p>
         </p:txBody>
       </p:sp>
@@ -19736,10 +20040,10 @@
           <p:nvPr/>
         </p:nvPicPr>
         <p:blipFill>
-          <a:blip r:embed="rId3">
+          <a:blip>
             <a:extLst>
               <a:ext uri="{96DAC541-7B7A-43D3-8B79-37D633B846F1}">
-                <asvg:svgBlip xmlns:asvg="http://schemas.microsoft.com/office/drawing/2016/SVG/main" r:embed="rId4"/>
+                <asvg:svgBlip xmlns:asvg="http://schemas.microsoft.com/office/drawing/2016/SVG/main" r:embed="rId3"/>
               </a:ext>
             </a:extLst>
           </a:blip>
@@ -20865,33 +21169,33 @@
           <a:custGeom>
             <a:avLst/>
             <a:gdLst>
-              <a:gd name="connsiteX0" fmla="*/ 0 w 3995413"/>
-              <a:gd name="connsiteY0" fmla="*/ 0 h 4208118"/>
-              <a:gd name="connsiteX1" fmla="*/ 3995413 w 3995413"/>
-              <a:gd name="connsiteY1" fmla="*/ 0 h 4208118"/>
-              <a:gd name="connsiteX2" fmla="*/ 3995413 w 3995413"/>
-              <a:gd name="connsiteY2" fmla="*/ 4208118 h 4208118"/>
-              <a:gd name="connsiteX3" fmla="*/ 0 w 3995413"/>
-              <a:gd name="connsiteY3" fmla="*/ 4208118 h 4208118"/>
-              <a:gd name="connsiteX4" fmla="*/ 0 w 3995413"/>
-              <a:gd name="connsiteY4" fmla="*/ 0 h 4208118"/>
+              <a:gd name="csX0" fmla="*/ 0 w 3995413"/>
+              <a:gd name="csY0" fmla="*/ 0 h 4208118"/>
+              <a:gd name="csX1" fmla="*/ 3995413 w 3995413"/>
+              <a:gd name="csY1" fmla="*/ 0 h 4208118"/>
+              <a:gd name="csX2" fmla="*/ 3995413 w 3995413"/>
+              <a:gd name="csY2" fmla="*/ 4208118 h 4208118"/>
+              <a:gd name="csX3" fmla="*/ 0 w 3995413"/>
+              <a:gd name="csY3" fmla="*/ 4208118 h 4208118"/>
+              <a:gd name="csX4" fmla="*/ 0 w 3995413"/>
+              <a:gd name="csY4" fmla="*/ 0 h 4208118"/>
             </a:gdLst>
             <a:ahLst/>
             <a:cxnLst>
               <a:cxn ang="0">
-                <a:pos x="connsiteX0" y="connsiteY0"/>
+                <a:pos x="csX0" y="csY0"/>
               </a:cxn>
               <a:cxn ang="0">
-                <a:pos x="connsiteX1" y="connsiteY1"/>
+                <a:pos x="csX1" y="csY1"/>
               </a:cxn>
               <a:cxn ang="0">
-                <a:pos x="connsiteX2" y="connsiteY2"/>
+                <a:pos x="csX2" y="csY2"/>
               </a:cxn>
               <a:cxn ang="0">
-                <a:pos x="connsiteX3" y="connsiteY3"/>
+                <a:pos x="csX3" y="csY3"/>
               </a:cxn>
               <a:cxn ang="0">
-                <a:pos x="connsiteX4" y="connsiteY4"/>
+                <a:pos x="csX4" y="csY4"/>
               </a:cxn>
             </a:cxnLst>
             <a:rect l="l" t="t" r="r" b="b"/>
@@ -20994,6 +21298,34 @@
               <a:t>19</a:t>
             </a:fld>
             <a:endParaRPr lang="en-US"/>
+          </a:p>
+        </p:txBody>
+      </p:sp>
+      <p:sp>
+        <p:nvSpPr>
+          <p:cNvPr id="4" name="Date Placeholder 3">
+            <a:extLst>
+              <a:ext uri="{FF2B5EF4-FFF2-40B4-BE49-F238E27FC236}">
+                <a16:creationId xmlns:a16="http://schemas.microsoft.com/office/drawing/2014/main" id="{D1D5B559-2C99-2E8A-848D-4A6A08DF8F06}"/>
+              </a:ext>
+            </a:extLst>
+          </p:cNvPr>
+          <p:cNvSpPr>
+            <a:spLocks noGrp="1"/>
+          </p:cNvSpPr>
+          <p:nvPr>
+            <p:ph type="dt" sz="half" idx="10"/>
+          </p:nvPr>
+        </p:nvSpPr>
+        <p:spPr/>
+        <p:txBody>
+          <a:bodyPr/>
+          <a:lstStyle/>
+          <a:p>
+            <a:r>
+              <a:rPr lang="en-US"/>
+              <a:t>Vincenzo Gulisano</a:t>
+            </a:r>
           </a:p>
         </p:txBody>
       </p:sp>
@@ -21339,31 +21671,8 @@
           <a:lstStyle/>
           <a:p>
             <a:r>
-              <a:rPr lang="sv-SE"/>
+              <a:rPr lang="en-US"/>
               <a:t>Vincenzo Gulisano</a:t>
-            </a:r>
-            <a:endParaRPr lang="en-US"/>
-          </a:p>
-        </p:txBody>
-      </p:sp>
-      <p:sp>
-        <p:nvSpPr>
-          <p:cNvPr id="5" name="Footer Placeholder 4"/>
-          <p:cNvSpPr>
-            <a:spLocks noGrp="1"/>
-          </p:cNvSpPr>
-          <p:nvPr>
-            <p:ph type="ftr" sz="quarter" idx="11"/>
-          </p:nvPr>
-        </p:nvSpPr>
-        <p:spPr/>
-        <p:txBody>
-          <a:bodyPr/>
-          <a:lstStyle/>
-          <a:p>
-            <a:r>
-              <a:rPr lang="en-US"/>
-              <a:t>Operating Systems - Lecture 2 - Processes</a:t>
             </a:r>
           </a:p>
         </p:txBody>
@@ -21436,10 +21745,10 @@
           <p:nvPr/>
         </p:nvPicPr>
         <p:blipFill>
-          <a:blip r:embed="rId3">
+          <a:blip>
             <a:extLst>
               <a:ext uri="{96DAC541-7B7A-43D3-8B79-37D633B846F1}">
-                <asvg:svgBlip xmlns:asvg="http://schemas.microsoft.com/office/drawing/2016/SVG/main" r:embed="rId4"/>
+                <asvg:svgBlip xmlns:asvg="http://schemas.microsoft.com/office/drawing/2016/SVG/main" r:embed="rId3"/>
               </a:ext>
             </a:extLst>
           </a:blip>
@@ -22035,10 +22344,10 @@
           <p:nvPr/>
         </p:nvPicPr>
         <p:blipFill>
-          <a:blip r:embed="rId5">
+          <a:blip r:embed="rId4">
             <a:extLst>
               <a:ext uri="{837473B0-CC2E-450A-ABE3-18F120FF3D39}">
-                <a1611:picAttrSrcUrl xmlns:a1611="http://schemas.microsoft.com/office/drawing/2016/11/main" r:id="rId6"/>
+                <a1611:picAttrSrcUrl xmlns:a1611="http://schemas.microsoft.com/office/drawing/2016/11/main" r:id="rId5"/>
               </a:ext>
             </a:extLst>
           </a:blip>
@@ -22082,6 +22391,34 @@
               <a:t>20</a:t>
             </a:fld>
             <a:endParaRPr lang="en-US"/>
+          </a:p>
+        </p:txBody>
+      </p:sp>
+      <p:sp>
+        <p:nvSpPr>
+          <p:cNvPr id="4" name="Date Placeholder 3">
+            <a:extLst>
+              <a:ext uri="{FF2B5EF4-FFF2-40B4-BE49-F238E27FC236}">
+                <a16:creationId xmlns:a16="http://schemas.microsoft.com/office/drawing/2014/main" id="{33E7ECBC-7A5D-F837-FDFC-96E3699C4657}"/>
+              </a:ext>
+            </a:extLst>
+          </p:cNvPr>
+          <p:cNvSpPr>
+            <a:spLocks noGrp="1"/>
+          </p:cNvSpPr>
+          <p:nvPr>
+            <p:ph type="dt" sz="half" idx="10"/>
+          </p:nvPr>
+        </p:nvSpPr>
+        <p:spPr/>
+        <p:txBody>
+          <a:bodyPr/>
+          <a:lstStyle/>
+          <a:p>
+            <a:r>
+              <a:rPr lang="en-US"/>
+              <a:t>Vincenzo Gulisano</a:t>
+            </a:r>
           </a:p>
         </p:txBody>
       </p:sp>
@@ -22232,10 +22569,10 @@
           <p:nvPr/>
         </p:nvPicPr>
         <p:blipFill>
-          <a:blip r:embed="rId3">
+          <a:blip>
             <a:extLst>
               <a:ext uri="{96DAC541-7B7A-43D3-8B79-37D633B846F1}">
-                <asvg:svgBlip xmlns:asvg="http://schemas.microsoft.com/office/drawing/2016/SVG/main" r:embed="rId4"/>
+                <asvg:svgBlip xmlns:asvg="http://schemas.microsoft.com/office/drawing/2016/SVG/main" r:embed="rId3"/>
               </a:ext>
             </a:extLst>
           </a:blip>
@@ -22831,10 +23168,10 @@
           <p:nvPr/>
         </p:nvPicPr>
         <p:blipFill>
-          <a:blip r:embed="rId5">
+          <a:blip r:embed="rId4">
             <a:extLst>
               <a:ext uri="{837473B0-CC2E-450A-ABE3-18F120FF3D39}">
-                <a1611:picAttrSrcUrl xmlns:a1611="http://schemas.microsoft.com/office/drawing/2016/11/main" r:id="rId6"/>
+                <a1611:picAttrSrcUrl xmlns:a1611="http://schemas.microsoft.com/office/drawing/2016/11/main" r:id="rId5"/>
               </a:ext>
             </a:extLst>
           </a:blip>
@@ -22867,7 +23204,7 @@
           <p:nvPr/>
         </p:nvPicPr>
         <p:blipFill>
-          <a:blip r:embed="rId7">
+          <a:blip r:embed="rId6">
             <a:clrChange>
               <a:clrFrom>
                 <a:srgbClr val="FFFFFF"/>
@@ -22935,6 +23272,34 @@
               <a:t>21</a:t>
             </a:fld>
             <a:endParaRPr lang="en-US"/>
+          </a:p>
+        </p:txBody>
+      </p:sp>
+      <p:sp>
+        <p:nvSpPr>
+          <p:cNvPr id="4" name="Date Placeholder 3">
+            <a:extLst>
+              <a:ext uri="{FF2B5EF4-FFF2-40B4-BE49-F238E27FC236}">
+                <a16:creationId xmlns:a16="http://schemas.microsoft.com/office/drawing/2014/main" id="{30961991-94B5-9078-A19B-46A3E0C66CCB}"/>
+              </a:ext>
+            </a:extLst>
+          </p:cNvPr>
+          <p:cNvSpPr>
+            <a:spLocks noGrp="1"/>
+          </p:cNvSpPr>
+          <p:nvPr>
+            <p:ph type="dt" sz="half" idx="10"/>
+          </p:nvPr>
+        </p:nvSpPr>
+        <p:spPr/>
+        <p:txBody>
+          <a:bodyPr/>
+          <a:lstStyle/>
+          <a:p>
+            <a:r>
+              <a:rPr lang="en-US"/>
+              <a:t>Vincenzo Gulisano</a:t>
+            </a:r>
           </a:p>
         </p:txBody>
       </p:sp>
@@ -23163,6 +23528,34 @@
           </a:p>
         </p:txBody>
       </p:sp>
+      <p:sp>
+        <p:nvSpPr>
+          <p:cNvPr id="5" name="Date Placeholder 4">
+            <a:extLst>
+              <a:ext uri="{FF2B5EF4-FFF2-40B4-BE49-F238E27FC236}">
+                <a16:creationId xmlns:a16="http://schemas.microsoft.com/office/drawing/2014/main" id="{6A2E21A0-AC4B-1399-9F8C-065965FA98FC}"/>
+              </a:ext>
+            </a:extLst>
+          </p:cNvPr>
+          <p:cNvSpPr>
+            <a:spLocks noGrp="1"/>
+          </p:cNvSpPr>
+          <p:nvPr>
+            <p:ph type="dt" sz="half" idx="10"/>
+          </p:nvPr>
+        </p:nvSpPr>
+        <p:spPr/>
+        <p:txBody>
+          <a:bodyPr/>
+          <a:lstStyle/>
+          <a:p>
+            <a:r>
+              <a:rPr lang="en-US"/>
+              <a:t>Vincenzo Gulisano</a:t>
+            </a:r>
+          </a:p>
+        </p:txBody>
+      </p:sp>
     </p:spTree>
     <p:extLst>
       <p:ext uri="{BB962C8B-B14F-4D97-AF65-F5344CB8AC3E}">
@@ -23948,6 +24341,34 @@
               <a:t>) approach</a:t>
             </a:r>
             <a:endParaRPr lang="sv-SE" dirty="0"/>
+          </a:p>
+        </p:txBody>
+      </p:sp>
+      <p:sp>
+        <p:nvSpPr>
+          <p:cNvPr id="3" name="Date Placeholder 2">
+            <a:extLst>
+              <a:ext uri="{FF2B5EF4-FFF2-40B4-BE49-F238E27FC236}">
+                <a16:creationId xmlns:a16="http://schemas.microsoft.com/office/drawing/2014/main" id="{C0AFD284-39B2-FD6A-D4D1-186E07088292}"/>
+              </a:ext>
+            </a:extLst>
+          </p:cNvPr>
+          <p:cNvSpPr>
+            <a:spLocks noGrp="1"/>
+          </p:cNvSpPr>
+          <p:nvPr>
+            <p:ph type="dt" sz="half" idx="10"/>
+          </p:nvPr>
+        </p:nvSpPr>
+        <p:spPr/>
+        <p:txBody>
+          <a:bodyPr/>
+          <a:lstStyle/>
+          <a:p>
+            <a:r>
+              <a:rPr lang="en-US"/>
+              <a:t>Vincenzo Gulisano</a:t>
+            </a:r>
           </a:p>
         </p:txBody>
       </p:sp>
@@ -24264,10 +24685,10 @@
           <p:nvPr/>
         </p:nvPicPr>
         <p:blipFill>
-          <a:blip r:embed="rId3">
+          <a:blip>
             <a:extLst>
               <a:ext uri="{96DAC541-7B7A-43D3-8B79-37D633B846F1}">
-                <asvg:svgBlip xmlns:asvg="http://schemas.microsoft.com/office/drawing/2016/SVG/main" r:embed="rId4"/>
+                <asvg:svgBlip xmlns:asvg="http://schemas.microsoft.com/office/drawing/2016/SVG/main" r:embed="rId3"/>
               </a:ext>
             </a:extLst>
           </a:blip>
@@ -25481,10 +25902,10 @@
           <p:nvPr/>
         </p:nvPicPr>
         <p:blipFill>
-          <a:blip r:embed="rId5">
+          <a:blip r:embed="rId4">
             <a:extLst>
               <a:ext uri="{837473B0-CC2E-450A-ABE3-18F120FF3D39}">
-                <a1611:picAttrSrcUrl xmlns:a1611="http://schemas.microsoft.com/office/drawing/2016/11/main" r:id="rId6"/>
+                <a1611:picAttrSrcUrl xmlns:a1611="http://schemas.microsoft.com/office/drawing/2016/11/main" r:id="rId5"/>
               </a:ext>
             </a:extLst>
           </a:blip>
@@ -25528,6 +25949,34 @@
               <a:t>24</a:t>
             </a:fld>
             <a:endParaRPr lang="en-US"/>
+          </a:p>
+        </p:txBody>
+      </p:sp>
+      <p:sp>
+        <p:nvSpPr>
+          <p:cNvPr id="4" name="Date Placeholder 3">
+            <a:extLst>
+              <a:ext uri="{FF2B5EF4-FFF2-40B4-BE49-F238E27FC236}">
+                <a16:creationId xmlns:a16="http://schemas.microsoft.com/office/drawing/2014/main" id="{12670123-1BB6-F9A7-57B8-1F0100345376}"/>
+              </a:ext>
+            </a:extLst>
+          </p:cNvPr>
+          <p:cNvSpPr>
+            <a:spLocks noGrp="1"/>
+          </p:cNvSpPr>
+          <p:nvPr>
+            <p:ph type="dt" sz="half" idx="10"/>
+          </p:nvPr>
+        </p:nvSpPr>
+        <p:spPr/>
+        <p:txBody>
+          <a:bodyPr/>
+          <a:lstStyle/>
+          <a:p>
+            <a:r>
+              <a:rPr lang="en-US"/>
+              <a:t>Vincenzo Gulisano</a:t>
+            </a:r>
           </a:p>
         </p:txBody>
       </p:sp>
@@ -26008,10 +26457,10 @@
           <p:nvPr/>
         </p:nvPicPr>
         <p:blipFill>
-          <a:blip r:embed="rId3">
+          <a:blip>
             <a:extLst>
               <a:ext uri="{96DAC541-7B7A-43D3-8B79-37D633B846F1}">
-                <asvg:svgBlip xmlns:asvg="http://schemas.microsoft.com/office/drawing/2016/SVG/main" r:embed="rId4"/>
+                <asvg:svgBlip xmlns:asvg="http://schemas.microsoft.com/office/drawing/2016/SVG/main" r:embed="rId3"/>
               </a:ext>
             </a:extLst>
           </a:blip>
@@ -27056,10 +27505,10 @@
           <p:nvPr/>
         </p:nvPicPr>
         <p:blipFill>
-          <a:blip r:embed="rId5">
+          <a:blip r:embed="rId4">
             <a:extLst>
               <a:ext uri="{837473B0-CC2E-450A-ABE3-18F120FF3D39}">
-                <a1611:picAttrSrcUrl xmlns:a1611="http://schemas.microsoft.com/office/drawing/2016/11/main" r:id="rId6"/>
+                <a1611:picAttrSrcUrl xmlns:a1611="http://schemas.microsoft.com/office/drawing/2016/11/main" r:id="rId5"/>
               </a:ext>
             </a:extLst>
           </a:blip>
@@ -27460,6 +27909,34 @@
           </a:fontRef>
         </p:style>
       </p:cxnSp>
+      <p:sp>
+        <p:nvSpPr>
+          <p:cNvPr id="2" name="Date Placeholder 1">
+            <a:extLst>
+              <a:ext uri="{FF2B5EF4-FFF2-40B4-BE49-F238E27FC236}">
+                <a16:creationId xmlns:a16="http://schemas.microsoft.com/office/drawing/2014/main" id="{96A1946D-9133-D0AD-5DCC-401372ADEB8B}"/>
+              </a:ext>
+            </a:extLst>
+          </p:cNvPr>
+          <p:cNvSpPr>
+            <a:spLocks noGrp="1"/>
+          </p:cNvSpPr>
+          <p:nvPr>
+            <p:ph type="dt" sz="half" idx="10"/>
+          </p:nvPr>
+        </p:nvSpPr>
+        <p:spPr/>
+        <p:txBody>
+          <a:bodyPr/>
+          <a:lstStyle/>
+          <a:p>
+            <a:r>
+              <a:rPr lang="en-US"/>
+              <a:t>Vincenzo Gulisano</a:t>
+            </a:r>
+          </a:p>
+        </p:txBody>
+      </p:sp>
     </p:spTree>
     <p:extLst>
       <p:ext uri="{BB962C8B-B14F-4D97-AF65-F5344CB8AC3E}">
@@ -27946,10 +28423,10 @@
           <p:nvPr/>
         </p:nvPicPr>
         <p:blipFill>
-          <a:blip r:embed="rId3">
+          <a:blip>
             <a:extLst>
               <a:ext uri="{96DAC541-7B7A-43D3-8B79-37D633B846F1}">
-                <asvg:svgBlip xmlns:asvg="http://schemas.microsoft.com/office/drawing/2016/SVG/main" r:embed="rId4"/>
+                <asvg:svgBlip xmlns:asvg="http://schemas.microsoft.com/office/drawing/2016/SVG/main" r:embed="rId3"/>
               </a:ext>
             </a:extLst>
           </a:blip>
@@ -28479,10 +28956,10 @@
           <p:nvPr/>
         </p:nvPicPr>
         <p:blipFill>
-          <a:blip r:embed="rId5">
+          <a:blip r:embed="rId4">
             <a:extLst>
               <a:ext uri="{837473B0-CC2E-450A-ABE3-18F120FF3D39}">
-                <a1611:picAttrSrcUrl xmlns:a1611="http://schemas.microsoft.com/office/drawing/2016/11/main" r:id="rId6"/>
+                <a1611:picAttrSrcUrl xmlns:a1611="http://schemas.microsoft.com/office/drawing/2016/11/main" r:id="rId5"/>
               </a:ext>
             </a:extLst>
           </a:blip>
@@ -28515,10 +28992,10 @@
           <p:nvPr/>
         </p:nvPicPr>
         <p:blipFill>
-          <a:blip r:embed="rId7">
+          <a:blip r:embed="rId6">
             <a:extLst>
               <a:ext uri="{837473B0-CC2E-450A-ABE3-18F120FF3D39}">
-                <a1611:picAttrSrcUrl xmlns:a1611="http://schemas.microsoft.com/office/drawing/2016/11/main" r:id="rId8"/>
+                <a1611:picAttrSrcUrl xmlns:a1611="http://schemas.microsoft.com/office/drawing/2016/11/main" r:id="rId7"/>
               </a:ext>
             </a:extLst>
           </a:blip>
@@ -28588,6 +29065,34 @@
                 </a:solidFill>
               </a:rPr>
               <a:t> B in RS</a:t>
+            </a:r>
+          </a:p>
+        </p:txBody>
+      </p:sp>
+      <p:sp>
+        <p:nvSpPr>
+          <p:cNvPr id="2" name="Date Placeholder 1">
+            <a:extLst>
+              <a:ext uri="{FF2B5EF4-FFF2-40B4-BE49-F238E27FC236}">
+                <a16:creationId xmlns:a16="http://schemas.microsoft.com/office/drawing/2014/main" id="{B43E847D-57DD-88F2-282F-A3981B3D0EC4}"/>
+              </a:ext>
+            </a:extLst>
+          </p:cNvPr>
+          <p:cNvSpPr>
+            <a:spLocks noGrp="1"/>
+          </p:cNvSpPr>
+          <p:nvPr>
+            <p:ph type="dt" sz="half" idx="10"/>
+          </p:nvPr>
+        </p:nvSpPr>
+        <p:spPr/>
+        <p:txBody>
+          <a:bodyPr/>
+          <a:lstStyle/>
+          <a:p>
+            <a:r>
+              <a:rPr lang="en-US"/>
+              <a:t>Vincenzo Gulisano</a:t>
             </a:r>
           </a:p>
         </p:txBody>
@@ -28937,10 +29442,10 @@
           <p:nvPr/>
         </p:nvPicPr>
         <p:blipFill>
-          <a:blip r:embed="rId3">
+          <a:blip>
             <a:extLst>
               <a:ext uri="{96DAC541-7B7A-43D3-8B79-37D633B846F1}">
-                <asvg:svgBlip xmlns:asvg="http://schemas.microsoft.com/office/drawing/2016/SVG/main" r:embed="rId4"/>
+                <asvg:svgBlip xmlns:asvg="http://schemas.microsoft.com/office/drawing/2016/SVG/main" r:embed="rId3"/>
               </a:ext>
             </a:extLst>
           </a:blip>
@@ -30305,10 +30810,10 @@
           <p:nvPr/>
         </p:nvPicPr>
         <p:blipFill>
-          <a:blip r:embed="rId5">
+          <a:blip r:embed="rId4">
             <a:extLst>
               <a:ext uri="{837473B0-CC2E-450A-ABE3-18F120FF3D39}">
-                <a1611:picAttrSrcUrl xmlns:a1611="http://schemas.microsoft.com/office/drawing/2016/11/main" r:id="rId6"/>
+                <a1611:picAttrSrcUrl xmlns:a1611="http://schemas.microsoft.com/office/drawing/2016/11/main" r:id="rId5"/>
               </a:ext>
             </a:extLst>
           </a:blip>
@@ -30326,6 +30831,34 @@
           </a:prstGeom>
         </p:spPr>
       </p:pic>
+      <p:sp>
+        <p:nvSpPr>
+          <p:cNvPr id="2" name="Date Placeholder 1">
+            <a:extLst>
+              <a:ext uri="{FF2B5EF4-FFF2-40B4-BE49-F238E27FC236}">
+                <a16:creationId xmlns:a16="http://schemas.microsoft.com/office/drawing/2014/main" id="{2A80CC11-EC85-6888-7D13-E9F1A4AEC455}"/>
+              </a:ext>
+            </a:extLst>
+          </p:cNvPr>
+          <p:cNvSpPr>
+            <a:spLocks noGrp="1"/>
+          </p:cNvSpPr>
+          <p:nvPr>
+            <p:ph type="dt" sz="half" idx="10"/>
+          </p:nvPr>
+        </p:nvSpPr>
+        <p:spPr/>
+        <p:txBody>
+          <a:bodyPr/>
+          <a:lstStyle/>
+          <a:p>
+            <a:r>
+              <a:rPr lang="en-US"/>
+              <a:t>Vincenzo Gulisano</a:t>
+            </a:r>
+          </a:p>
+        </p:txBody>
+      </p:sp>
     </p:spTree>
     <p:extLst>
       <p:ext uri="{BB962C8B-B14F-4D97-AF65-F5344CB8AC3E}">
@@ -31182,6 +31715,34 @@
           </a:p>
         </p:txBody>
       </p:sp>
+      <p:sp>
+        <p:nvSpPr>
+          <p:cNvPr id="5" name="Date Placeholder 4">
+            <a:extLst>
+              <a:ext uri="{FF2B5EF4-FFF2-40B4-BE49-F238E27FC236}">
+                <a16:creationId xmlns:a16="http://schemas.microsoft.com/office/drawing/2014/main" id="{AEDFC993-C53F-3474-D722-26BF2BC4DAE7}"/>
+              </a:ext>
+            </a:extLst>
+          </p:cNvPr>
+          <p:cNvSpPr>
+            <a:spLocks noGrp="1"/>
+          </p:cNvSpPr>
+          <p:nvPr>
+            <p:ph type="dt" sz="half" idx="10"/>
+          </p:nvPr>
+        </p:nvSpPr>
+        <p:spPr/>
+        <p:txBody>
+          <a:bodyPr/>
+          <a:lstStyle/>
+          <a:p>
+            <a:r>
+              <a:rPr lang="en-US"/>
+              <a:t>Vincenzo Gulisano</a:t>
+            </a:r>
+          </a:p>
+        </p:txBody>
+      </p:sp>
     </p:spTree>
     <p:extLst>
       <p:ext uri="{BB962C8B-B14F-4D97-AF65-F5344CB8AC3E}">
@@ -31398,6 +31959,34 @@
               <a:t>29</a:t>
             </a:fld>
             <a:endParaRPr lang="en-US"/>
+          </a:p>
+        </p:txBody>
+      </p:sp>
+      <p:sp>
+        <p:nvSpPr>
+          <p:cNvPr id="5" name="Date Placeholder 4">
+            <a:extLst>
+              <a:ext uri="{FF2B5EF4-FFF2-40B4-BE49-F238E27FC236}">
+                <a16:creationId xmlns:a16="http://schemas.microsoft.com/office/drawing/2014/main" id="{16BB206C-7083-4A51-41D6-584C0CF2DD57}"/>
+              </a:ext>
+            </a:extLst>
+          </p:cNvPr>
+          <p:cNvSpPr>
+            <a:spLocks noGrp="1"/>
+          </p:cNvSpPr>
+          <p:nvPr>
+            <p:ph type="dt" sz="half" idx="10"/>
+          </p:nvPr>
+        </p:nvSpPr>
+        <p:spPr/>
+        <p:txBody>
+          <a:bodyPr/>
+          <a:lstStyle/>
+          <a:p>
+            <a:r>
+              <a:rPr lang="en-US"/>
+              <a:t>Vincenzo Gulisano</a:t>
+            </a:r>
           </a:p>
         </p:txBody>
       </p:sp>
@@ -31578,6 +32167,34 @@
           </a:p>
         </p:txBody>
       </p:sp>
+      <p:sp>
+        <p:nvSpPr>
+          <p:cNvPr id="5" name="Date Placeholder 4">
+            <a:extLst>
+              <a:ext uri="{FF2B5EF4-FFF2-40B4-BE49-F238E27FC236}">
+                <a16:creationId xmlns:a16="http://schemas.microsoft.com/office/drawing/2014/main" id="{250FF07C-441C-9402-4788-85FB5CF6AA46}"/>
+              </a:ext>
+            </a:extLst>
+          </p:cNvPr>
+          <p:cNvSpPr>
+            <a:spLocks noGrp="1"/>
+          </p:cNvSpPr>
+          <p:nvPr>
+            <p:ph type="dt" sz="half" idx="10"/>
+          </p:nvPr>
+        </p:nvSpPr>
+        <p:spPr/>
+        <p:txBody>
+          <a:bodyPr/>
+          <a:lstStyle/>
+          <a:p>
+            <a:r>
+              <a:rPr lang="en-US"/>
+              <a:t>Vincenzo Gulisano</a:t>
+            </a:r>
+          </a:p>
+        </p:txBody>
+      </p:sp>
     </p:spTree>
     <p:extLst>
       <p:ext uri="{BB962C8B-B14F-4D97-AF65-F5344CB8AC3E}">
@@ -31904,7 +32521,7 @@
             <a:prstTxWarp prst="textNoShape">
               <a:avLst/>
             </a:prstTxWarp>
-            <a:normAutofit fontScale="85000" lnSpcReduction="10000"/>
+            <a:normAutofit fontScale="92500"/>
           </a:bodyPr>
           <a:lstStyle>
             <a:lvl1pPr algn="l" defTabSz="914400" rtl="0" eaLnBrk="1" latinLnBrk="0" hangingPunct="1">
@@ -32322,6 +32939,34 @@
                 <a:prstClr val="black"/>
               </a:solidFill>
             </a:endParaRPr>
+          </a:p>
+        </p:txBody>
+      </p:sp>
+      <p:sp>
+        <p:nvSpPr>
+          <p:cNvPr id="3" name="Date Placeholder 2">
+            <a:extLst>
+              <a:ext uri="{FF2B5EF4-FFF2-40B4-BE49-F238E27FC236}">
+                <a16:creationId xmlns:a16="http://schemas.microsoft.com/office/drawing/2014/main" id="{969F46F4-777F-8D5F-2228-F40D8E0C91EC}"/>
+              </a:ext>
+            </a:extLst>
+          </p:cNvPr>
+          <p:cNvSpPr>
+            <a:spLocks noGrp="1"/>
+          </p:cNvSpPr>
+          <p:nvPr>
+            <p:ph type="dt" sz="half" idx="10"/>
+          </p:nvPr>
+        </p:nvSpPr>
+        <p:spPr/>
+        <p:txBody>
+          <a:bodyPr/>
+          <a:lstStyle/>
+          <a:p>
+            <a:r>
+              <a:rPr lang="en-US"/>
+              <a:t>Vincenzo Gulisano</a:t>
+            </a:r>
           </a:p>
         </p:txBody>
       </p:sp>
@@ -33918,7 +34563,7 @@
             <a:prstTxWarp prst="textNoShape">
               <a:avLst/>
             </a:prstTxWarp>
-            <a:normAutofit fontScale="70000" lnSpcReduction="20000"/>
+            <a:normAutofit fontScale="77500" lnSpcReduction="20000"/>
           </a:bodyPr>
           <a:lstStyle>
             <a:lvl1pPr algn="l" defTabSz="914400" rtl="0" eaLnBrk="1" latinLnBrk="0" hangingPunct="1">
@@ -33962,6 +34607,34 @@
                 </a:schemeClr>
               </a:solidFill>
             </a:endParaRPr>
+          </a:p>
+        </p:txBody>
+      </p:sp>
+      <p:sp>
+        <p:nvSpPr>
+          <p:cNvPr id="3" name="Date Placeholder 2">
+            <a:extLst>
+              <a:ext uri="{FF2B5EF4-FFF2-40B4-BE49-F238E27FC236}">
+                <a16:creationId xmlns:a16="http://schemas.microsoft.com/office/drawing/2014/main" id="{4FF3762C-91DB-91F7-8CFD-594F2B5BA6CA}"/>
+              </a:ext>
+            </a:extLst>
+          </p:cNvPr>
+          <p:cNvSpPr>
+            <a:spLocks noGrp="1"/>
+          </p:cNvSpPr>
+          <p:nvPr>
+            <p:ph type="dt" sz="half" idx="10"/>
+          </p:nvPr>
+        </p:nvSpPr>
+        <p:spPr/>
+        <p:txBody>
+          <a:bodyPr/>
+          <a:lstStyle/>
+          <a:p>
+            <a:r>
+              <a:rPr lang="en-US"/>
+              <a:t>Vincenzo Gulisano</a:t>
+            </a:r>
           </a:p>
         </p:txBody>
       </p:sp>
@@ -36460,7 +37133,7 @@
             <a:prstTxWarp prst="textNoShape">
               <a:avLst/>
             </a:prstTxWarp>
-            <a:normAutofit fontScale="70000" lnSpcReduction="20000"/>
+            <a:normAutofit fontScale="77500" lnSpcReduction="20000"/>
           </a:bodyPr>
           <a:lstStyle>
             <a:lvl1pPr algn="l" defTabSz="914400" rtl="0" eaLnBrk="1" latinLnBrk="0" hangingPunct="1">
@@ -36504,6 +37177,34 @@
                 </a:schemeClr>
               </a:solidFill>
             </a:endParaRPr>
+          </a:p>
+        </p:txBody>
+      </p:sp>
+      <p:sp>
+        <p:nvSpPr>
+          <p:cNvPr id="2" name="Date Placeholder 1">
+            <a:extLst>
+              <a:ext uri="{FF2B5EF4-FFF2-40B4-BE49-F238E27FC236}">
+                <a16:creationId xmlns:a16="http://schemas.microsoft.com/office/drawing/2014/main" id="{E0839D43-5589-6D24-192D-2F068CDDE360}"/>
+              </a:ext>
+            </a:extLst>
+          </p:cNvPr>
+          <p:cNvSpPr>
+            <a:spLocks noGrp="1"/>
+          </p:cNvSpPr>
+          <p:nvPr>
+            <p:ph type="dt" sz="half" idx="10"/>
+          </p:nvPr>
+        </p:nvSpPr>
+        <p:spPr/>
+        <p:txBody>
+          <a:bodyPr/>
+          <a:lstStyle/>
+          <a:p>
+            <a:r>
+              <a:rPr lang="en-US"/>
+              <a:t>Vincenzo Gulisano</a:t>
+            </a:r>
           </a:p>
         </p:txBody>
       </p:sp>
@@ -36945,6 +37646,34 @@
                 </a:schemeClr>
               </a:solidFill>
             </a:endParaRPr>
+          </a:p>
+        </p:txBody>
+      </p:sp>
+      <p:sp>
+        <p:nvSpPr>
+          <p:cNvPr id="2" name="Date Placeholder 1">
+            <a:extLst>
+              <a:ext uri="{FF2B5EF4-FFF2-40B4-BE49-F238E27FC236}">
+                <a16:creationId xmlns:a16="http://schemas.microsoft.com/office/drawing/2014/main" id="{ED9401B8-C34A-EA0A-3712-7610BBC389BB}"/>
+              </a:ext>
+            </a:extLst>
+          </p:cNvPr>
+          <p:cNvSpPr>
+            <a:spLocks noGrp="1"/>
+          </p:cNvSpPr>
+          <p:nvPr>
+            <p:ph type="dt" sz="half" idx="10"/>
+          </p:nvPr>
+        </p:nvSpPr>
+        <p:spPr/>
+        <p:txBody>
+          <a:bodyPr/>
+          <a:lstStyle/>
+          <a:p>
+            <a:r>
+              <a:rPr lang="en-US"/>
+              <a:t>Vincenzo Gulisano</a:t>
+            </a:r>
           </a:p>
         </p:txBody>
       </p:sp>
@@ -38438,6 +39167,34 @@
           </a:p>
         </p:txBody>
       </p:sp>
+      <p:sp>
+        <p:nvSpPr>
+          <p:cNvPr id="3" name="Date Placeholder 2">
+            <a:extLst>
+              <a:ext uri="{FF2B5EF4-FFF2-40B4-BE49-F238E27FC236}">
+                <a16:creationId xmlns:a16="http://schemas.microsoft.com/office/drawing/2014/main" id="{F8C66E5E-CDAB-0D12-038B-8AB3AEF7C160}"/>
+              </a:ext>
+            </a:extLst>
+          </p:cNvPr>
+          <p:cNvSpPr>
+            <a:spLocks noGrp="1"/>
+          </p:cNvSpPr>
+          <p:nvPr>
+            <p:ph type="dt" sz="half" idx="10"/>
+          </p:nvPr>
+        </p:nvSpPr>
+        <p:spPr/>
+        <p:txBody>
+          <a:bodyPr/>
+          <a:lstStyle/>
+          <a:p>
+            <a:r>
+              <a:rPr lang="en-US"/>
+              <a:t>Vincenzo Gulisano</a:t>
+            </a:r>
+          </a:p>
+        </p:txBody>
+      </p:sp>
     </p:spTree>
     <p:extLst>
       <p:ext uri="{BB962C8B-B14F-4D97-AF65-F5344CB8AC3E}">
@@ -38667,6 +39424,34 @@
               <a:t>35</a:t>
             </a:fld>
             <a:endParaRPr lang="en-US"/>
+          </a:p>
+        </p:txBody>
+      </p:sp>
+      <p:sp>
+        <p:nvSpPr>
+          <p:cNvPr id="5" name="Date Placeholder 4">
+            <a:extLst>
+              <a:ext uri="{FF2B5EF4-FFF2-40B4-BE49-F238E27FC236}">
+                <a16:creationId xmlns:a16="http://schemas.microsoft.com/office/drawing/2014/main" id="{E2080648-2C6A-43ED-3C78-8CBFFBBBEBE9}"/>
+              </a:ext>
+            </a:extLst>
+          </p:cNvPr>
+          <p:cNvSpPr>
+            <a:spLocks noGrp="1"/>
+          </p:cNvSpPr>
+          <p:nvPr>
+            <p:ph type="dt" sz="half" idx="10"/>
+          </p:nvPr>
+        </p:nvSpPr>
+        <p:spPr/>
+        <p:txBody>
+          <a:bodyPr/>
+          <a:lstStyle/>
+          <a:p>
+            <a:r>
+              <a:rPr lang="en-US"/>
+              <a:t>Vincenzo Gulisano</a:t>
+            </a:r>
           </a:p>
         </p:txBody>
       </p:sp>
@@ -39845,13 +40630,13 @@
           <p:nvPr/>
         </p:nvPicPr>
         <p:blipFill>
-          <a:blip r:embed="rId3">
+          <a:blip>
             <a:extLst>
               <a:ext uri="{28A0092B-C50C-407E-A947-70E740481C1C}">
                 <a14:useLocalDpi xmlns:a14="http://schemas.microsoft.com/office/drawing/2010/main" val="0"/>
               </a:ext>
               <a:ext uri="{96DAC541-7B7A-43D3-8B79-37D633B846F1}">
-                <asvg:svgBlip xmlns:asvg="http://schemas.microsoft.com/office/drawing/2016/SVG/main" r:embed="rId4"/>
+                <asvg:svgBlip xmlns:asvg="http://schemas.microsoft.com/office/drawing/2016/SVG/main" r:embed="rId3"/>
               </a:ext>
             </a:extLst>
           </a:blip>
@@ -39884,13 +40669,13 @@
           <p:nvPr/>
         </p:nvPicPr>
         <p:blipFill>
-          <a:blip r:embed="rId3">
+          <a:blip>
             <a:extLst>
               <a:ext uri="{28A0092B-C50C-407E-A947-70E740481C1C}">
                 <a14:useLocalDpi xmlns:a14="http://schemas.microsoft.com/office/drawing/2010/main" val="0"/>
               </a:ext>
               <a:ext uri="{96DAC541-7B7A-43D3-8B79-37D633B846F1}">
-                <asvg:svgBlip xmlns:asvg="http://schemas.microsoft.com/office/drawing/2016/SVG/main" r:embed="rId4"/>
+                <asvg:svgBlip xmlns:asvg="http://schemas.microsoft.com/office/drawing/2016/SVG/main" r:embed="rId3"/>
               </a:ext>
             </a:extLst>
           </a:blip>
@@ -39987,6 +40772,34 @@
                 </a:schemeClr>
               </a:solidFill>
             </a:endParaRPr>
+          </a:p>
+        </p:txBody>
+      </p:sp>
+      <p:sp>
+        <p:nvSpPr>
+          <p:cNvPr id="7" name="Date Placeholder 6">
+            <a:extLst>
+              <a:ext uri="{FF2B5EF4-FFF2-40B4-BE49-F238E27FC236}">
+                <a16:creationId xmlns:a16="http://schemas.microsoft.com/office/drawing/2014/main" id="{9814F6B1-FDC1-0EC4-A659-2E55F1B3AE6C}"/>
+              </a:ext>
+            </a:extLst>
+          </p:cNvPr>
+          <p:cNvSpPr>
+            <a:spLocks noGrp="1"/>
+          </p:cNvSpPr>
+          <p:nvPr>
+            <p:ph type="dt" sz="half" idx="10"/>
+          </p:nvPr>
+        </p:nvSpPr>
+        <p:spPr/>
+        <p:txBody>
+          <a:bodyPr/>
+          <a:lstStyle/>
+          <a:p>
+            <a:r>
+              <a:rPr lang="en-US"/>
+              <a:t>Vincenzo Gulisano</a:t>
+            </a:r>
           </a:p>
         </p:txBody>
       </p:sp>
@@ -40783,6 +41596,34 @@
           </a:p>
         </p:txBody>
       </p:sp>
+      <p:sp>
+        <p:nvSpPr>
+          <p:cNvPr id="2" name="Date Placeholder 1">
+            <a:extLst>
+              <a:ext uri="{FF2B5EF4-FFF2-40B4-BE49-F238E27FC236}">
+                <a16:creationId xmlns:a16="http://schemas.microsoft.com/office/drawing/2014/main" id="{7E844D0A-D191-734A-DA31-271D06471E24}"/>
+              </a:ext>
+            </a:extLst>
+          </p:cNvPr>
+          <p:cNvSpPr>
+            <a:spLocks noGrp="1"/>
+          </p:cNvSpPr>
+          <p:nvPr>
+            <p:ph type="dt" sz="half" idx="10"/>
+          </p:nvPr>
+        </p:nvSpPr>
+        <p:spPr/>
+        <p:txBody>
+          <a:bodyPr/>
+          <a:lstStyle/>
+          <a:p>
+            <a:r>
+              <a:rPr lang="en-US"/>
+              <a:t>Vincenzo Gulisano</a:t>
+            </a:r>
+          </a:p>
+        </p:txBody>
+      </p:sp>
     </p:spTree>
     <p:extLst>
       <p:ext uri="{BB962C8B-B14F-4D97-AF65-F5344CB8AC3E}">
@@ -41328,6 +42169,34 @@
               <a:ea typeface="+mn-ea"/>
               <a:cs typeface="+mn-cs"/>
             </a:endParaRPr>
+          </a:p>
+        </p:txBody>
+      </p:sp>
+      <p:sp>
+        <p:nvSpPr>
+          <p:cNvPr id="2" name="Date Placeholder 1">
+            <a:extLst>
+              <a:ext uri="{FF2B5EF4-FFF2-40B4-BE49-F238E27FC236}">
+                <a16:creationId xmlns:a16="http://schemas.microsoft.com/office/drawing/2014/main" id="{DAB68789-C7D3-99D3-CD87-00DB00139FB8}"/>
+              </a:ext>
+            </a:extLst>
+          </p:cNvPr>
+          <p:cNvSpPr>
+            <a:spLocks noGrp="1"/>
+          </p:cNvSpPr>
+          <p:nvPr>
+            <p:ph type="dt" sz="half" idx="10"/>
+          </p:nvPr>
+        </p:nvSpPr>
+        <p:spPr/>
+        <p:txBody>
+          <a:bodyPr/>
+          <a:lstStyle/>
+          <a:p>
+            <a:r>
+              <a:rPr lang="en-US"/>
+              <a:t>Vincenzo Gulisano</a:t>
+            </a:r>
           </a:p>
         </p:txBody>
       </p:sp>
@@ -41758,6 +42627,34 @@
           </a:p>
         </p:txBody>
       </p:sp>
+      <p:sp>
+        <p:nvSpPr>
+          <p:cNvPr id="5" name="Date Placeholder 4">
+            <a:extLst>
+              <a:ext uri="{FF2B5EF4-FFF2-40B4-BE49-F238E27FC236}">
+                <a16:creationId xmlns:a16="http://schemas.microsoft.com/office/drawing/2014/main" id="{60686EA4-3EF2-9CCB-9B69-DE20621C290E}"/>
+              </a:ext>
+            </a:extLst>
+          </p:cNvPr>
+          <p:cNvSpPr>
+            <a:spLocks noGrp="1"/>
+          </p:cNvSpPr>
+          <p:nvPr>
+            <p:ph type="dt" sz="half" idx="10"/>
+          </p:nvPr>
+        </p:nvSpPr>
+        <p:spPr/>
+        <p:txBody>
+          <a:bodyPr/>
+          <a:lstStyle/>
+          <a:p>
+            <a:r>
+              <a:rPr lang="en-US"/>
+              <a:t>Vincenzo Gulisano</a:t>
+            </a:r>
+          </a:p>
+        </p:txBody>
+      </p:sp>
     </p:spTree>
     <p:extLst>
       <p:ext uri="{BB962C8B-B14F-4D97-AF65-F5344CB8AC3E}">
@@ -41980,6 +42877,34 @@
               <a:t>4</a:t>
             </a:fld>
             <a:endParaRPr lang="en-US"/>
+          </a:p>
+        </p:txBody>
+      </p:sp>
+      <p:sp>
+        <p:nvSpPr>
+          <p:cNvPr id="5" name="Date Placeholder 4">
+            <a:extLst>
+              <a:ext uri="{FF2B5EF4-FFF2-40B4-BE49-F238E27FC236}">
+                <a16:creationId xmlns:a16="http://schemas.microsoft.com/office/drawing/2014/main" id="{A49C7B4E-7AA0-2BAF-DDA0-08940A8C5E6E}"/>
+              </a:ext>
+            </a:extLst>
+          </p:cNvPr>
+          <p:cNvSpPr>
+            <a:spLocks noGrp="1"/>
+          </p:cNvSpPr>
+          <p:nvPr>
+            <p:ph type="dt" sz="half" idx="10"/>
+          </p:nvPr>
+        </p:nvSpPr>
+        <p:spPr/>
+        <p:txBody>
+          <a:bodyPr/>
+          <a:lstStyle/>
+          <a:p>
+            <a:r>
+              <a:rPr lang="en-US"/>
+              <a:t>Vincenzo Gulisano</a:t>
+            </a:r>
           </a:p>
         </p:txBody>
       </p:sp>
@@ -42392,6 +43317,34 @@
           </a:p>
         </p:txBody>
       </p:sp>
+      <p:sp>
+        <p:nvSpPr>
+          <p:cNvPr id="5" name="Date Placeholder 4">
+            <a:extLst>
+              <a:ext uri="{FF2B5EF4-FFF2-40B4-BE49-F238E27FC236}">
+                <a16:creationId xmlns:a16="http://schemas.microsoft.com/office/drawing/2014/main" id="{6BC5B370-1790-62C9-8849-5F400FB524DF}"/>
+              </a:ext>
+            </a:extLst>
+          </p:cNvPr>
+          <p:cNvSpPr>
+            <a:spLocks noGrp="1"/>
+          </p:cNvSpPr>
+          <p:nvPr>
+            <p:ph type="dt" sz="half" idx="10"/>
+          </p:nvPr>
+        </p:nvSpPr>
+        <p:spPr/>
+        <p:txBody>
+          <a:bodyPr/>
+          <a:lstStyle/>
+          <a:p>
+            <a:r>
+              <a:rPr lang="en-US"/>
+              <a:t>Vincenzo Gulisano</a:t>
+            </a:r>
+          </a:p>
+        </p:txBody>
+      </p:sp>
     </p:spTree>
     <p:extLst>
       <p:ext uri="{BB962C8B-B14F-4D97-AF65-F5344CB8AC3E}">
@@ -42849,6 +43802,34 @@
           </a:p>
         </p:txBody>
       </p:sp>
+      <p:sp>
+        <p:nvSpPr>
+          <p:cNvPr id="5" name="Date Placeholder 4">
+            <a:extLst>
+              <a:ext uri="{FF2B5EF4-FFF2-40B4-BE49-F238E27FC236}">
+                <a16:creationId xmlns:a16="http://schemas.microsoft.com/office/drawing/2014/main" id="{220F3303-F6E2-D538-3110-41892067A978}"/>
+              </a:ext>
+            </a:extLst>
+          </p:cNvPr>
+          <p:cNvSpPr>
+            <a:spLocks noGrp="1"/>
+          </p:cNvSpPr>
+          <p:nvPr>
+            <p:ph type="dt" sz="half" idx="10"/>
+          </p:nvPr>
+        </p:nvSpPr>
+        <p:spPr/>
+        <p:txBody>
+          <a:bodyPr/>
+          <a:lstStyle/>
+          <a:p>
+            <a:r>
+              <a:rPr lang="en-US"/>
+              <a:t>Vincenzo Gulisano</a:t>
+            </a:r>
+          </a:p>
+        </p:txBody>
+      </p:sp>
     </p:spTree>
     <p:extLst>
       <p:ext uri="{BB962C8B-B14F-4D97-AF65-F5344CB8AC3E}">
@@ -43071,6 +44052,34 @@
               <a:t>42</a:t>
             </a:fld>
             <a:endParaRPr lang="en-US"/>
+          </a:p>
+        </p:txBody>
+      </p:sp>
+      <p:sp>
+        <p:nvSpPr>
+          <p:cNvPr id="5" name="Date Placeholder 4">
+            <a:extLst>
+              <a:ext uri="{FF2B5EF4-FFF2-40B4-BE49-F238E27FC236}">
+                <a16:creationId xmlns:a16="http://schemas.microsoft.com/office/drawing/2014/main" id="{FDED5A16-2593-A024-3581-4950965F1A9E}"/>
+              </a:ext>
+            </a:extLst>
+          </p:cNvPr>
+          <p:cNvSpPr>
+            <a:spLocks noGrp="1"/>
+          </p:cNvSpPr>
+          <p:nvPr>
+            <p:ph type="dt" sz="half" idx="10"/>
+          </p:nvPr>
+        </p:nvSpPr>
+        <p:spPr/>
+        <p:txBody>
+          <a:bodyPr/>
+          <a:lstStyle/>
+          <a:p>
+            <a:r>
+              <a:rPr lang="en-US"/>
+              <a:t>Vincenzo Gulisano</a:t>
+            </a:r>
           </a:p>
         </p:txBody>
       </p:sp>
@@ -43775,6 +44784,34 @@
           </a:p>
         </p:txBody>
       </p:sp>
+      <p:sp>
+        <p:nvSpPr>
+          <p:cNvPr id="5" name="Date Placeholder 4">
+            <a:extLst>
+              <a:ext uri="{FF2B5EF4-FFF2-40B4-BE49-F238E27FC236}">
+                <a16:creationId xmlns:a16="http://schemas.microsoft.com/office/drawing/2014/main" id="{50E8729E-EC4B-E010-CAB3-BF2D876DD7FE}"/>
+              </a:ext>
+            </a:extLst>
+          </p:cNvPr>
+          <p:cNvSpPr>
+            <a:spLocks noGrp="1"/>
+          </p:cNvSpPr>
+          <p:nvPr>
+            <p:ph type="dt" sz="half" idx="10"/>
+          </p:nvPr>
+        </p:nvSpPr>
+        <p:spPr/>
+        <p:txBody>
+          <a:bodyPr/>
+          <a:lstStyle/>
+          <a:p>
+            <a:r>
+              <a:rPr lang="en-US"/>
+              <a:t>Vincenzo Gulisano</a:t>
+            </a:r>
+          </a:p>
+        </p:txBody>
+      </p:sp>
     </p:spTree>
     <p:extLst>
       <p:ext uri="{BB962C8B-B14F-4D97-AF65-F5344CB8AC3E}">
@@ -44064,6 +45101,34 @@
           </a:p>
         </p:txBody>
       </p:sp>
+      <p:sp>
+        <p:nvSpPr>
+          <p:cNvPr id="3" name="Date Placeholder 2">
+            <a:extLst>
+              <a:ext uri="{FF2B5EF4-FFF2-40B4-BE49-F238E27FC236}">
+                <a16:creationId xmlns:a16="http://schemas.microsoft.com/office/drawing/2014/main" id="{1CF7641F-D3D9-0CC7-938D-A4C3C774749B}"/>
+              </a:ext>
+            </a:extLst>
+          </p:cNvPr>
+          <p:cNvSpPr>
+            <a:spLocks noGrp="1"/>
+          </p:cNvSpPr>
+          <p:nvPr>
+            <p:ph type="dt" sz="half" idx="10"/>
+          </p:nvPr>
+        </p:nvSpPr>
+        <p:spPr/>
+        <p:txBody>
+          <a:bodyPr/>
+          <a:lstStyle/>
+          <a:p>
+            <a:r>
+              <a:rPr lang="en-US"/>
+              <a:t>Vincenzo Gulisano</a:t>
+            </a:r>
+          </a:p>
+        </p:txBody>
+      </p:sp>
     </p:spTree>
     <p:extLst>
       <p:ext uri="{BB962C8B-B14F-4D97-AF65-F5344CB8AC3E}">
@@ -44544,6 +45609,34 @@
               <a:ea typeface="+mj-ea"/>
               <a:cs typeface="+mj-cs"/>
             </a:endParaRPr>
+          </a:p>
+        </p:txBody>
+      </p:sp>
+      <p:sp>
+        <p:nvSpPr>
+          <p:cNvPr id="3" name="Date Placeholder 2">
+            <a:extLst>
+              <a:ext uri="{FF2B5EF4-FFF2-40B4-BE49-F238E27FC236}">
+                <a16:creationId xmlns:a16="http://schemas.microsoft.com/office/drawing/2014/main" id="{5AB89A1B-3719-3D82-7C1D-9154CC396088}"/>
+              </a:ext>
+            </a:extLst>
+          </p:cNvPr>
+          <p:cNvSpPr>
+            <a:spLocks noGrp="1"/>
+          </p:cNvSpPr>
+          <p:nvPr>
+            <p:ph type="dt" sz="half" idx="10"/>
+          </p:nvPr>
+        </p:nvSpPr>
+        <p:spPr/>
+        <p:txBody>
+          <a:bodyPr/>
+          <a:lstStyle/>
+          <a:p>
+            <a:r>
+              <a:rPr lang="en-US"/>
+              <a:t>Vincenzo Gulisano</a:t>
+            </a:r>
           </a:p>
         </p:txBody>
       </p:sp>
@@ -44933,188 +46026,188 @@
           <a:custGeom>
             <a:avLst/>
             <a:gdLst>
-              <a:gd name="connsiteX0" fmla="*/ 0 w 10853928"/>
-              <a:gd name="connsiteY0" fmla="*/ 0 h 18288"/>
-              <a:gd name="connsiteX1" fmla="*/ 461292 w 10853928"/>
-              <a:gd name="connsiteY1" fmla="*/ 0 h 18288"/>
-              <a:gd name="connsiteX2" fmla="*/ 1139662 w 10853928"/>
-              <a:gd name="connsiteY2" fmla="*/ 0 h 18288"/>
-              <a:gd name="connsiteX3" fmla="*/ 1926572 w 10853928"/>
-              <a:gd name="connsiteY3" fmla="*/ 0 h 18288"/>
-              <a:gd name="connsiteX4" fmla="*/ 2279325 w 10853928"/>
-              <a:gd name="connsiteY4" fmla="*/ 0 h 18288"/>
-              <a:gd name="connsiteX5" fmla="*/ 2632078 w 10853928"/>
-              <a:gd name="connsiteY5" fmla="*/ 0 h 18288"/>
-              <a:gd name="connsiteX6" fmla="*/ 3527527 w 10853928"/>
-              <a:gd name="connsiteY6" fmla="*/ 0 h 18288"/>
-              <a:gd name="connsiteX7" fmla="*/ 4205897 w 10853928"/>
-              <a:gd name="connsiteY7" fmla="*/ 0 h 18288"/>
-              <a:gd name="connsiteX8" fmla="*/ 4558650 w 10853928"/>
-              <a:gd name="connsiteY8" fmla="*/ 0 h 18288"/>
-              <a:gd name="connsiteX9" fmla="*/ 5237020 w 10853928"/>
-              <a:gd name="connsiteY9" fmla="*/ 0 h 18288"/>
-              <a:gd name="connsiteX10" fmla="*/ 6132469 w 10853928"/>
-              <a:gd name="connsiteY10" fmla="*/ 0 h 18288"/>
-              <a:gd name="connsiteX11" fmla="*/ 6702301 w 10853928"/>
-              <a:gd name="connsiteY11" fmla="*/ 0 h 18288"/>
-              <a:gd name="connsiteX12" fmla="*/ 7272132 w 10853928"/>
-              <a:gd name="connsiteY12" fmla="*/ 0 h 18288"/>
-              <a:gd name="connsiteX13" fmla="*/ 7950502 w 10853928"/>
-              <a:gd name="connsiteY13" fmla="*/ 0 h 18288"/>
-              <a:gd name="connsiteX14" fmla="*/ 8737412 w 10853928"/>
-              <a:gd name="connsiteY14" fmla="*/ 0 h 18288"/>
-              <a:gd name="connsiteX15" fmla="*/ 9524322 w 10853928"/>
-              <a:gd name="connsiteY15" fmla="*/ 0 h 18288"/>
-              <a:gd name="connsiteX16" fmla="*/ 10853928 w 10853928"/>
-              <a:gd name="connsiteY16" fmla="*/ 0 h 18288"/>
-              <a:gd name="connsiteX17" fmla="*/ 10853928 w 10853928"/>
-              <a:gd name="connsiteY17" fmla="*/ 18288 h 18288"/>
-              <a:gd name="connsiteX18" fmla="*/ 10392636 w 10853928"/>
-              <a:gd name="connsiteY18" fmla="*/ 18288 h 18288"/>
-              <a:gd name="connsiteX19" fmla="*/ 9497187 w 10853928"/>
-              <a:gd name="connsiteY19" fmla="*/ 18288 h 18288"/>
-              <a:gd name="connsiteX20" fmla="*/ 8818817 w 10853928"/>
-              <a:gd name="connsiteY20" fmla="*/ 18288 h 18288"/>
-              <a:gd name="connsiteX21" fmla="*/ 8466064 w 10853928"/>
-              <a:gd name="connsiteY21" fmla="*/ 18288 h 18288"/>
-              <a:gd name="connsiteX22" fmla="*/ 7787693 w 10853928"/>
-              <a:gd name="connsiteY22" fmla="*/ 18288 h 18288"/>
-              <a:gd name="connsiteX23" fmla="*/ 7217862 w 10853928"/>
-              <a:gd name="connsiteY23" fmla="*/ 18288 h 18288"/>
-              <a:gd name="connsiteX24" fmla="*/ 6648031 w 10853928"/>
-              <a:gd name="connsiteY24" fmla="*/ 18288 h 18288"/>
-              <a:gd name="connsiteX25" fmla="*/ 6078200 w 10853928"/>
-              <a:gd name="connsiteY25" fmla="*/ 18288 h 18288"/>
-              <a:gd name="connsiteX26" fmla="*/ 5508368 w 10853928"/>
-              <a:gd name="connsiteY26" fmla="*/ 18288 h 18288"/>
-              <a:gd name="connsiteX27" fmla="*/ 4721459 w 10853928"/>
-              <a:gd name="connsiteY27" fmla="*/ 18288 h 18288"/>
-              <a:gd name="connsiteX28" fmla="*/ 4043088 w 10853928"/>
-              <a:gd name="connsiteY28" fmla="*/ 18288 h 18288"/>
-              <a:gd name="connsiteX29" fmla="*/ 3690336 w 10853928"/>
-              <a:gd name="connsiteY29" fmla="*/ 18288 h 18288"/>
-              <a:gd name="connsiteX30" fmla="*/ 3120504 w 10853928"/>
-              <a:gd name="connsiteY30" fmla="*/ 18288 h 18288"/>
-              <a:gd name="connsiteX31" fmla="*/ 2333595 w 10853928"/>
-              <a:gd name="connsiteY31" fmla="*/ 18288 h 18288"/>
-              <a:gd name="connsiteX32" fmla="*/ 1872303 w 10853928"/>
-              <a:gd name="connsiteY32" fmla="*/ 18288 h 18288"/>
-              <a:gd name="connsiteX33" fmla="*/ 976854 w 10853928"/>
-              <a:gd name="connsiteY33" fmla="*/ 18288 h 18288"/>
-              <a:gd name="connsiteX34" fmla="*/ 0 w 10853928"/>
-              <a:gd name="connsiteY34" fmla="*/ 18288 h 18288"/>
-              <a:gd name="connsiteX35" fmla="*/ 0 w 10853928"/>
-              <a:gd name="connsiteY35" fmla="*/ 0 h 18288"/>
+              <a:gd name="csX0" fmla="*/ 0 w 10853928"/>
+              <a:gd name="csY0" fmla="*/ 0 h 18288"/>
+              <a:gd name="csX1" fmla="*/ 461292 w 10853928"/>
+              <a:gd name="csY1" fmla="*/ 0 h 18288"/>
+              <a:gd name="csX2" fmla="*/ 1139662 w 10853928"/>
+              <a:gd name="csY2" fmla="*/ 0 h 18288"/>
+              <a:gd name="csX3" fmla="*/ 1926572 w 10853928"/>
+              <a:gd name="csY3" fmla="*/ 0 h 18288"/>
+              <a:gd name="csX4" fmla="*/ 2279325 w 10853928"/>
+              <a:gd name="csY4" fmla="*/ 0 h 18288"/>
+              <a:gd name="csX5" fmla="*/ 2632078 w 10853928"/>
+              <a:gd name="csY5" fmla="*/ 0 h 18288"/>
+              <a:gd name="csX6" fmla="*/ 3527527 w 10853928"/>
+              <a:gd name="csY6" fmla="*/ 0 h 18288"/>
+              <a:gd name="csX7" fmla="*/ 4205897 w 10853928"/>
+              <a:gd name="csY7" fmla="*/ 0 h 18288"/>
+              <a:gd name="csX8" fmla="*/ 4558650 w 10853928"/>
+              <a:gd name="csY8" fmla="*/ 0 h 18288"/>
+              <a:gd name="csX9" fmla="*/ 5237020 w 10853928"/>
+              <a:gd name="csY9" fmla="*/ 0 h 18288"/>
+              <a:gd name="csX10" fmla="*/ 6132469 w 10853928"/>
+              <a:gd name="csY10" fmla="*/ 0 h 18288"/>
+              <a:gd name="csX11" fmla="*/ 6702301 w 10853928"/>
+              <a:gd name="csY11" fmla="*/ 0 h 18288"/>
+              <a:gd name="csX12" fmla="*/ 7272132 w 10853928"/>
+              <a:gd name="csY12" fmla="*/ 0 h 18288"/>
+              <a:gd name="csX13" fmla="*/ 7950502 w 10853928"/>
+              <a:gd name="csY13" fmla="*/ 0 h 18288"/>
+              <a:gd name="csX14" fmla="*/ 8737412 w 10853928"/>
+              <a:gd name="csY14" fmla="*/ 0 h 18288"/>
+              <a:gd name="csX15" fmla="*/ 9524322 w 10853928"/>
+              <a:gd name="csY15" fmla="*/ 0 h 18288"/>
+              <a:gd name="csX16" fmla="*/ 10853928 w 10853928"/>
+              <a:gd name="csY16" fmla="*/ 0 h 18288"/>
+              <a:gd name="csX17" fmla="*/ 10853928 w 10853928"/>
+              <a:gd name="csY17" fmla="*/ 18288 h 18288"/>
+              <a:gd name="csX18" fmla="*/ 10392636 w 10853928"/>
+              <a:gd name="csY18" fmla="*/ 18288 h 18288"/>
+              <a:gd name="csX19" fmla="*/ 9497187 w 10853928"/>
+              <a:gd name="csY19" fmla="*/ 18288 h 18288"/>
+              <a:gd name="csX20" fmla="*/ 8818817 w 10853928"/>
+              <a:gd name="csY20" fmla="*/ 18288 h 18288"/>
+              <a:gd name="csX21" fmla="*/ 8466064 w 10853928"/>
+              <a:gd name="csY21" fmla="*/ 18288 h 18288"/>
+              <a:gd name="csX22" fmla="*/ 7787693 w 10853928"/>
+              <a:gd name="csY22" fmla="*/ 18288 h 18288"/>
+              <a:gd name="csX23" fmla="*/ 7217862 w 10853928"/>
+              <a:gd name="csY23" fmla="*/ 18288 h 18288"/>
+              <a:gd name="csX24" fmla="*/ 6648031 w 10853928"/>
+              <a:gd name="csY24" fmla="*/ 18288 h 18288"/>
+              <a:gd name="csX25" fmla="*/ 6078200 w 10853928"/>
+              <a:gd name="csY25" fmla="*/ 18288 h 18288"/>
+              <a:gd name="csX26" fmla="*/ 5508368 w 10853928"/>
+              <a:gd name="csY26" fmla="*/ 18288 h 18288"/>
+              <a:gd name="csX27" fmla="*/ 4721459 w 10853928"/>
+              <a:gd name="csY27" fmla="*/ 18288 h 18288"/>
+              <a:gd name="csX28" fmla="*/ 4043088 w 10853928"/>
+              <a:gd name="csY28" fmla="*/ 18288 h 18288"/>
+              <a:gd name="csX29" fmla="*/ 3690336 w 10853928"/>
+              <a:gd name="csY29" fmla="*/ 18288 h 18288"/>
+              <a:gd name="csX30" fmla="*/ 3120504 w 10853928"/>
+              <a:gd name="csY30" fmla="*/ 18288 h 18288"/>
+              <a:gd name="csX31" fmla="*/ 2333595 w 10853928"/>
+              <a:gd name="csY31" fmla="*/ 18288 h 18288"/>
+              <a:gd name="csX32" fmla="*/ 1872303 w 10853928"/>
+              <a:gd name="csY32" fmla="*/ 18288 h 18288"/>
+              <a:gd name="csX33" fmla="*/ 976854 w 10853928"/>
+              <a:gd name="csY33" fmla="*/ 18288 h 18288"/>
+              <a:gd name="csX34" fmla="*/ 0 w 10853928"/>
+              <a:gd name="csY34" fmla="*/ 18288 h 18288"/>
+              <a:gd name="csX35" fmla="*/ 0 w 10853928"/>
+              <a:gd name="csY35" fmla="*/ 0 h 18288"/>
             </a:gdLst>
             <a:ahLst/>
             <a:cxnLst>
               <a:cxn ang="0">
-                <a:pos x="connsiteX0" y="connsiteY0"/>
+                <a:pos x="csX0" y="csY0"/>
               </a:cxn>
               <a:cxn ang="0">
-                <a:pos x="connsiteX1" y="connsiteY1"/>
+                <a:pos x="csX1" y="csY1"/>
               </a:cxn>
               <a:cxn ang="0">
-                <a:pos x="connsiteX2" y="connsiteY2"/>
+                <a:pos x="csX2" y="csY2"/>
               </a:cxn>
               <a:cxn ang="0">
-                <a:pos x="connsiteX3" y="connsiteY3"/>
+                <a:pos x="csX3" y="csY3"/>
               </a:cxn>
               <a:cxn ang="0">
-                <a:pos x="connsiteX4" y="connsiteY4"/>
+                <a:pos x="csX4" y="csY4"/>
               </a:cxn>
               <a:cxn ang="0">
-                <a:pos x="connsiteX5" y="connsiteY5"/>
+                <a:pos x="csX5" y="csY5"/>
               </a:cxn>
               <a:cxn ang="0">
-                <a:pos x="connsiteX6" y="connsiteY6"/>
+                <a:pos x="csX6" y="csY6"/>
               </a:cxn>
               <a:cxn ang="0">
-                <a:pos x="connsiteX7" y="connsiteY7"/>
+                <a:pos x="csX7" y="csY7"/>
               </a:cxn>
               <a:cxn ang="0">
-                <a:pos x="connsiteX8" y="connsiteY8"/>
+                <a:pos x="csX8" y="csY8"/>
               </a:cxn>
               <a:cxn ang="0">
-                <a:pos x="connsiteX9" y="connsiteY9"/>
+                <a:pos x="csX9" y="csY9"/>
               </a:cxn>
               <a:cxn ang="0">
-                <a:pos x="connsiteX10" y="connsiteY10"/>
+                <a:pos x="csX10" y="csY10"/>
               </a:cxn>
               <a:cxn ang="0">
-                <a:pos x="connsiteX11" y="connsiteY11"/>
+                <a:pos x="csX11" y="csY11"/>
               </a:cxn>
               <a:cxn ang="0">
-                <a:pos x="connsiteX12" y="connsiteY12"/>
+                <a:pos x="csX12" y="csY12"/>
               </a:cxn>
               <a:cxn ang="0">
-                <a:pos x="connsiteX13" y="connsiteY13"/>
+                <a:pos x="csX13" y="csY13"/>
               </a:cxn>
               <a:cxn ang="0">
-                <a:pos x="connsiteX14" y="connsiteY14"/>
+                <a:pos x="csX14" y="csY14"/>
               </a:cxn>
               <a:cxn ang="0">
-                <a:pos x="connsiteX15" y="connsiteY15"/>
+                <a:pos x="csX15" y="csY15"/>
               </a:cxn>
               <a:cxn ang="0">
-                <a:pos x="connsiteX16" y="connsiteY16"/>
+                <a:pos x="csX16" y="csY16"/>
               </a:cxn>
               <a:cxn ang="0">
-                <a:pos x="connsiteX17" y="connsiteY17"/>
+                <a:pos x="csX17" y="csY17"/>
               </a:cxn>
               <a:cxn ang="0">
-                <a:pos x="connsiteX18" y="connsiteY18"/>
+                <a:pos x="csX18" y="csY18"/>
               </a:cxn>
               <a:cxn ang="0">
-                <a:pos x="connsiteX19" y="connsiteY19"/>
+                <a:pos x="csX19" y="csY19"/>
               </a:cxn>
               <a:cxn ang="0">
-                <a:pos x="connsiteX20" y="connsiteY20"/>
+                <a:pos x="csX20" y="csY20"/>
               </a:cxn>
               <a:cxn ang="0">
-                <a:pos x="connsiteX21" y="connsiteY21"/>
+                <a:pos x="csX21" y="csY21"/>
               </a:cxn>
               <a:cxn ang="0">
-                <a:pos x="connsiteX22" y="connsiteY22"/>
+                <a:pos x="csX22" y="csY22"/>
               </a:cxn>
               <a:cxn ang="0">
-                <a:pos x="connsiteX23" y="connsiteY23"/>
+                <a:pos x="csX23" y="csY23"/>
               </a:cxn>
               <a:cxn ang="0">
-                <a:pos x="connsiteX24" y="connsiteY24"/>
+                <a:pos x="csX24" y="csY24"/>
               </a:cxn>
               <a:cxn ang="0">
-                <a:pos x="connsiteX25" y="connsiteY25"/>
+                <a:pos x="csX25" y="csY25"/>
               </a:cxn>
               <a:cxn ang="0">
-                <a:pos x="connsiteX26" y="connsiteY26"/>
+                <a:pos x="csX26" y="csY26"/>
               </a:cxn>
               <a:cxn ang="0">
-                <a:pos x="connsiteX27" y="connsiteY27"/>
+                <a:pos x="csX27" y="csY27"/>
               </a:cxn>
               <a:cxn ang="0">
-                <a:pos x="connsiteX28" y="connsiteY28"/>
+                <a:pos x="csX28" y="csY28"/>
               </a:cxn>
               <a:cxn ang="0">
-                <a:pos x="connsiteX29" y="connsiteY29"/>
+                <a:pos x="csX29" y="csY29"/>
               </a:cxn>
               <a:cxn ang="0">
-                <a:pos x="connsiteX30" y="connsiteY30"/>
+                <a:pos x="csX30" y="csY30"/>
               </a:cxn>
               <a:cxn ang="0">
-                <a:pos x="connsiteX31" y="connsiteY31"/>
+                <a:pos x="csX31" y="csY31"/>
               </a:cxn>
               <a:cxn ang="0">
-                <a:pos x="connsiteX32" y="connsiteY32"/>
+                <a:pos x="csX32" y="csY32"/>
               </a:cxn>
               <a:cxn ang="0">
-                <a:pos x="connsiteX33" y="connsiteY33"/>
+                <a:pos x="csX33" y="csY33"/>
               </a:cxn>
               <a:cxn ang="0">
-                <a:pos x="connsiteX34" y="connsiteY34"/>
+                <a:pos x="csX34" y="csY34"/>
               </a:cxn>
               <a:cxn ang="0">
-                <a:pos x="connsiteX35" y="connsiteY35"/>
+                <a:pos x="csX35" y="csY35"/>
               </a:cxn>
             </a:cxnLst>
             <a:rect l="l" t="t" r="r" b="b"/>
@@ -45795,6 +46888,34 @@
               <a:t>5</a:t>
             </a:fld>
             <a:endParaRPr lang="en-US"/>
+          </a:p>
+        </p:txBody>
+      </p:sp>
+      <p:sp>
+        <p:nvSpPr>
+          <p:cNvPr id="3" name="Date Placeholder 2">
+            <a:extLst>
+              <a:ext uri="{FF2B5EF4-FFF2-40B4-BE49-F238E27FC236}">
+                <a16:creationId xmlns:a16="http://schemas.microsoft.com/office/drawing/2014/main" id="{A632FEA2-FE6C-7CDB-C8FA-6CD084B67921}"/>
+              </a:ext>
+            </a:extLst>
+          </p:cNvPr>
+          <p:cNvSpPr>
+            <a:spLocks noGrp="1"/>
+          </p:cNvSpPr>
+          <p:nvPr>
+            <p:ph type="dt" sz="half" idx="10"/>
+          </p:nvPr>
+        </p:nvSpPr>
+        <p:spPr/>
+        <p:txBody>
+          <a:bodyPr/>
+          <a:lstStyle/>
+          <a:p>
+            <a:r>
+              <a:rPr lang="en-US"/>
+              <a:t>Vincenzo Gulisano</a:t>
+            </a:r>
           </a:p>
         </p:txBody>
       </p:sp>
@@ -46582,6 +47703,34 @@
               <a:t>6</a:t>
             </a:fld>
             <a:endParaRPr lang="en-US"/>
+          </a:p>
+        </p:txBody>
+      </p:sp>
+      <p:sp>
+        <p:nvSpPr>
+          <p:cNvPr id="4" name="Date Placeholder 3">
+            <a:extLst>
+              <a:ext uri="{FF2B5EF4-FFF2-40B4-BE49-F238E27FC236}">
+                <a16:creationId xmlns:a16="http://schemas.microsoft.com/office/drawing/2014/main" id="{1BE142D0-C9B6-D693-88D5-623B3C06AE2B}"/>
+              </a:ext>
+            </a:extLst>
+          </p:cNvPr>
+          <p:cNvSpPr>
+            <a:spLocks noGrp="1"/>
+          </p:cNvSpPr>
+          <p:nvPr>
+            <p:ph type="dt" sz="half" idx="10"/>
+          </p:nvPr>
+        </p:nvSpPr>
+        <p:spPr/>
+        <p:txBody>
+          <a:bodyPr/>
+          <a:lstStyle/>
+          <a:p>
+            <a:r>
+              <a:rPr lang="en-US"/>
+              <a:t>Vincenzo Gulisano</a:t>
+            </a:r>
           </a:p>
         </p:txBody>
       </p:sp>
@@ -48180,6 +49329,34 @@
           </a:p>
         </p:txBody>
       </p:sp>
+      <p:sp>
+        <p:nvSpPr>
+          <p:cNvPr id="4" name="Date Placeholder 3">
+            <a:extLst>
+              <a:ext uri="{FF2B5EF4-FFF2-40B4-BE49-F238E27FC236}">
+                <a16:creationId xmlns:a16="http://schemas.microsoft.com/office/drawing/2014/main" id="{9A849DE9-C85F-1FC8-CFD3-9BD7ED47120D}"/>
+              </a:ext>
+            </a:extLst>
+          </p:cNvPr>
+          <p:cNvSpPr>
+            <a:spLocks noGrp="1"/>
+          </p:cNvSpPr>
+          <p:nvPr>
+            <p:ph type="dt" sz="half" idx="10"/>
+          </p:nvPr>
+        </p:nvSpPr>
+        <p:spPr/>
+        <p:txBody>
+          <a:bodyPr/>
+          <a:lstStyle/>
+          <a:p>
+            <a:r>
+              <a:rPr lang="en-US"/>
+              <a:t>Vincenzo Gulisano</a:t>
+            </a:r>
+          </a:p>
+        </p:txBody>
+      </p:sp>
     </p:spTree>
     <p:extLst>
       <p:ext uri="{BB962C8B-B14F-4D97-AF65-F5344CB8AC3E}">
@@ -48775,6 +49952,34 @@
           </a:p>
         </p:txBody>
       </p:sp>
+      <p:sp>
+        <p:nvSpPr>
+          <p:cNvPr id="5" name="Date Placeholder 4">
+            <a:extLst>
+              <a:ext uri="{FF2B5EF4-FFF2-40B4-BE49-F238E27FC236}">
+                <a16:creationId xmlns:a16="http://schemas.microsoft.com/office/drawing/2014/main" id="{83F0F789-2BC9-D73B-D703-CEF455FBD7C3}"/>
+              </a:ext>
+            </a:extLst>
+          </p:cNvPr>
+          <p:cNvSpPr>
+            <a:spLocks noGrp="1"/>
+          </p:cNvSpPr>
+          <p:nvPr>
+            <p:ph type="dt" sz="half" idx="10"/>
+          </p:nvPr>
+        </p:nvSpPr>
+        <p:spPr/>
+        <p:txBody>
+          <a:bodyPr/>
+          <a:lstStyle/>
+          <a:p>
+            <a:r>
+              <a:rPr lang="en-US"/>
+              <a:t>Vincenzo Gulisano</a:t>
+            </a:r>
+          </a:p>
+        </p:txBody>
+      </p:sp>
     </p:spTree>
     <p:extLst>
       <p:ext uri="{BB962C8B-B14F-4D97-AF65-F5344CB8AC3E}">
@@ -49887,6 +51092,34 @@
                 </a:solidFill>
               </a:rPr>
               <a:t>.  Variety of formulations, e.g., FCFS; or bounded #bypasses, …</a:t>
+            </a:r>
+          </a:p>
+        </p:txBody>
+      </p:sp>
+      <p:sp>
+        <p:nvSpPr>
+          <p:cNvPr id="2" name="Date Placeholder 1">
+            <a:extLst>
+              <a:ext uri="{FF2B5EF4-FFF2-40B4-BE49-F238E27FC236}">
+                <a16:creationId xmlns:a16="http://schemas.microsoft.com/office/drawing/2014/main" id="{40986FEB-3C84-EF97-2B0A-7DF363F74840}"/>
+              </a:ext>
+            </a:extLst>
+          </p:cNvPr>
+          <p:cNvSpPr>
+            <a:spLocks noGrp="1"/>
+          </p:cNvSpPr>
+          <p:nvPr>
+            <p:ph type="dt" sz="half" idx="10"/>
+          </p:nvPr>
+        </p:nvSpPr>
+        <p:spPr/>
+        <p:txBody>
+          <a:bodyPr/>
+          <a:lstStyle/>
+          <a:p>
+            <a:r>
+              <a:rPr lang="en-US"/>
+              <a:t>Vincenzo Gulisano</a:t>
             </a:r>
           </a:p>
         </p:txBody>

--- a/slides/synchronization_part_1.pptx
+++ b/slides/synchronization_part_1.pptx
@@ -558,7 +558,7 @@
           <a:p>
             <a:fld id="{B9670FC7-431C-3445-825C-360F18AD9FB0}" type="datetimeFigureOut">
               <a:rPr lang="en-US" smtClean="0"/>
-              <a:t>7/14/26</a:t>
+              <a:t>7/15/26</a:t>
             </a:fld>
             <a:endParaRPr lang="en-US"/>
           </a:p>
@@ -21540,30 +21540,7 @@
           <a:p>
             <a:r>
               <a:rPr lang="en-US" dirty="0"/>
-              <a:t>4</a:t>
-            </a:r>
-            <a:r>
-              <a:rPr lang="en-US" baseline="30000" dirty="0"/>
-              <a:t>th</a:t>
-            </a:r>
-            <a:r>
-              <a:rPr lang="en-US" dirty="0"/>
-              <a:t> edition</a:t>
-            </a:r>
-          </a:p>
-          <a:p>
-            <a:pPr lvl="1"/>
-            <a:r>
-              <a:rPr lang="en-US" dirty="0"/>
-              <a:t>Chapter 2.3.1-2.3.6, </a:t>
-            </a:r>
-            <a:r>
-              <a:rPr lang="en-GB" dirty="0"/>
-              <a:t>2.5.1-</a:t>
-            </a:r>
-            <a:r>
-              <a:rPr lang="en-US" dirty="0"/>
-              <a:t>2.5.2, </a:t>
+              <a:t>Chapter 2.4.1-2.4.6, </a:t>
             </a:r>
             <a:r>
               <a:rPr lang="en-GB" dirty="0"/>
@@ -21575,81 +21552,13 @@
             </a:r>
           </a:p>
           <a:p>
-            <a:pPr lvl="1"/>
             <a:r>
               <a:rPr lang="en-US" dirty="0"/>
-              <a:t>Quicker reading, for awareness, of sections 2.3.7-2.3.10, </a:t>
-            </a:r>
-            <a:r>
-              <a:rPr lang="en-GB" dirty="0"/>
+              <a:t>Quicker reading, for awareness, of sections 2.3.7-2.3.9, 2.3.11, </a:t>
+            </a:r>
+            <a:r>
+              <a:rPr lang="en-GB"/>
               <a:t>6.3</a:t>
-            </a:r>
-          </a:p>
-          <a:p>
-            <a:r>
-              <a:rPr lang="en-US" dirty="0"/>
-              <a:t>5</a:t>
-            </a:r>
-            <a:r>
-              <a:rPr lang="en-US" baseline="30000" dirty="0"/>
-              <a:t>th</a:t>
-            </a:r>
-            <a:r>
-              <a:rPr lang="en-US" dirty="0"/>
-              <a:t> edition</a:t>
-            </a:r>
-          </a:p>
-          <a:p>
-            <a:pPr lvl="1"/>
-            <a:r>
-              <a:rPr lang="en-US" dirty="0"/>
-              <a:t>Chapter 2.4.1-2.4.6, </a:t>
-            </a:r>
-            <a:r>
-              <a:rPr lang="en-GB" dirty="0"/>
-              <a:t>6.1-6.2, 6.5-6.6, 6.7.3-6.7.4</a:t>
-            </a:r>
-            <a:r>
-              <a:rPr lang="en-US" dirty="0"/>
-              <a:t>; </a:t>
-            </a:r>
-          </a:p>
-          <a:p>
-            <a:pPr lvl="1"/>
-            <a:r>
-              <a:rPr lang="en-US" dirty="0"/>
-              <a:t>Quicker reading, for awareness, of </a:t>
-            </a:r>
-            <a:r>
-              <a:rPr lang="en-US"/>
-              <a:t>sections 2.3.7-2.3.9, 2.3.11, </a:t>
-            </a:r>
-            <a:r>
-              <a:rPr lang="en-GB" dirty="0"/>
-              <a:t>6.3</a:t>
-            </a:r>
-            <a:br>
-              <a:rPr lang="en-US" dirty="0"/>
-            </a:br>
-            <a:br>
-              <a:rPr lang="en-US" dirty="0"/>
-            </a:br>
-            <a:br>
-              <a:rPr lang="en-US" dirty="0"/>
-            </a:br>
-            <a:endParaRPr lang="en-US" dirty="0"/>
-          </a:p>
-          <a:p>
-            <a:pPr marL="457200" lvl="1" indent="0">
-              <a:buNone/>
-            </a:pPr>
-            <a:r>
-              <a:rPr lang="en-US" dirty="0"/>
-              <a:t>(</a:t>
-            </a:r>
-            <a:r>
-              <a:rPr lang="en-GB" dirty="0"/>
-              <a:t>facultative reading: sections 6.1-6.7, 6.9, 7.1-7.5, 7.6-7.8 from OS Concepts by Silberschatz et-al).</a:t>
             </a:r>
             <a:endParaRPr lang="en-US" dirty="0"/>
           </a:p>

--- a/slides/synchronization_part_1.pptx
+++ b/slides/synchronization_part_1.pptx
@@ -3,57 +3,61 @@
 <p:presentation xmlns:a="http://schemas.openxmlformats.org/drawingml/2006/main" xmlns:r="http://schemas.openxmlformats.org/officeDocument/2006/relationships" xmlns:p="http://schemas.openxmlformats.org/presentationml/2006/main" saveSubsetFonts="1" autoCompressPictures="0">
   <p:sldMasterIdLst>
     <p:sldMasterId id="2147483648" r:id="rId1"/>
+    <p:sldMasterId id="2147483667" r:id="rId2"/>
   </p:sldMasterIdLst>
   <p:notesMasterIdLst>
-    <p:notesMasterId r:id="rId48"/>
+    <p:notesMasterId r:id="rId52"/>
   </p:notesMasterIdLst>
   <p:sldIdLst>
-    <p:sldId id="330" r:id="rId2"/>
-    <p:sldId id="526" r:id="rId3"/>
-    <p:sldId id="332" r:id="rId4"/>
-    <p:sldId id="334" r:id="rId5"/>
-    <p:sldId id="257" r:id="rId6"/>
-    <p:sldId id="260" r:id="rId7"/>
-    <p:sldId id="530" r:id="rId8"/>
-    <p:sldId id="335" r:id="rId9"/>
-    <p:sldId id="261" r:id="rId10"/>
-    <p:sldId id="262" r:id="rId11"/>
-    <p:sldId id="263" r:id="rId12"/>
-    <p:sldId id="311" r:id="rId13"/>
-    <p:sldId id="312" r:id="rId14"/>
-    <p:sldId id="313" r:id="rId15"/>
-    <p:sldId id="314" r:id="rId16"/>
-    <p:sldId id="336" r:id="rId17"/>
-    <p:sldId id="315" r:id="rId18"/>
-    <p:sldId id="316" r:id="rId19"/>
-    <p:sldId id="318" r:id="rId20"/>
-    <p:sldId id="328" r:id="rId21"/>
-    <p:sldId id="329" r:id="rId22"/>
-    <p:sldId id="337" r:id="rId23"/>
-    <p:sldId id="321" r:id="rId24"/>
-    <p:sldId id="322" r:id="rId25"/>
-    <p:sldId id="323" r:id="rId26"/>
-    <p:sldId id="324" r:id="rId27"/>
-    <p:sldId id="325" r:id="rId28"/>
-    <p:sldId id="306" r:id="rId29"/>
-    <p:sldId id="338" r:id="rId30"/>
-    <p:sldId id="272" r:id="rId31"/>
-    <p:sldId id="331" r:id="rId32"/>
-    <p:sldId id="274" r:id="rId33"/>
-    <p:sldId id="275" r:id="rId34"/>
-    <p:sldId id="300" r:id="rId35"/>
-    <p:sldId id="339" r:id="rId36"/>
-    <p:sldId id="277" r:id="rId37"/>
-    <p:sldId id="278" r:id="rId38"/>
-    <p:sldId id="279" r:id="rId39"/>
-    <p:sldId id="527" r:id="rId40"/>
-    <p:sldId id="528" r:id="rId41"/>
-    <p:sldId id="529" r:id="rId42"/>
-    <p:sldId id="340" r:id="rId43"/>
-    <p:sldId id="280" r:id="rId44"/>
-    <p:sldId id="283" r:id="rId45"/>
-    <p:sldId id="282" r:id="rId46"/>
-    <p:sldId id="284" r:id="rId47"/>
+    <p:sldId id="330" r:id="rId3"/>
+    <p:sldId id="526" r:id="rId4"/>
+    <p:sldId id="332" r:id="rId5"/>
+    <p:sldId id="334" r:id="rId6"/>
+    <p:sldId id="257" r:id="rId7"/>
+    <p:sldId id="260" r:id="rId8"/>
+    <p:sldId id="530" r:id="rId9"/>
+    <p:sldId id="335" r:id="rId10"/>
+    <p:sldId id="261" r:id="rId11"/>
+    <p:sldId id="262" r:id="rId12"/>
+    <p:sldId id="263" r:id="rId13"/>
+    <p:sldId id="311" r:id="rId14"/>
+    <p:sldId id="312" r:id="rId15"/>
+    <p:sldId id="313" r:id="rId16"/>
+    <p:sldId id="314" r:id="rId17"/>
+    <p:sldId id="336" r:id="rId18"/>
+    <p:sldId id="315" r:id="rId19"/>
+    <p:sldId id="316" r:id="rId20"/>
+    <p:sldId id="318" r:id="rId21"/>
+    <p:sldId id="328" r:id="rId22"/>
+    <p:sldId id="329" r:id="rId23"/>
+    <p:sldId id="337" r:id="rId24"/>
+    <p:sldId id="321" r:id="rId25"/>
+    <p:sldId id="322" r:id="rId26"/>
+    <p:sldId id="323" r:id="rId27"/>
+    <p:sldId id="324" r:id="rId28"/>
+    <p:sldId id="325" r:id="rId29"/>
+    <p:sldId id="306" r:id="rId30"/>
+    <p:sldId id="338" r:id="rId31"/>
+    <p:sldId id="272" r:id="rId32"/>
+    <p:sldId id="331" r:id="rId33"/>
+    <p:sldId id="274" r:id="rId34"/>
+    <p:sldId id="275" r:id="rId35"/>
+    <p:sldId id="300" r:id="rId36"/>
+    <p:sldId id="339" r:id="rId37"/>
+    <p:sldId id="277" r:id="rId38"/>
+    <p:sldId id="278" r:id="rId39"/>
+    <p:sldId id="279" r:id="rId40"/>
+    <p:sldId id="340" r:id="rId41"/>
+    <p:sldId id="280" r:id="rId42"/>
+    <p:sldId id="283" r:id="rId43"/>
+    <p:sldId id="282" r:id="rId44"/>
+    <p:sldId id="284" r:id="rId45"/>
+    <p:sldId id="533" r:id="rId46"/>
+    <p:sldId id="527" r:id="rId47"/>
+    <p:sldId id="528" r:id="rId48"/>
+    <p:sldId id="529" r:id="rId49"/>
+    <p:sldId id="534" r:id="rId50"/>
+    <p:sldId id="535" r:id="rId51"/>
   </p:sldIdLst>
   <p:sldSz cx="12192000" cy="6858000"/>
   <p:notesSz cx="6858000" cy="9144000"/>
@@ -5361,10 +5365,7 @@
           <a:bodyPr/>
           <a:lstStyle/>
           <a:p>
-            <a:r>
-              <a:rPr lang="en-US" dirty="0"/>
-              <a:t>no</a:t>
-            </a:r>
+            <a:endParaRPr lang="en-US" dirty="0"/>
           </a:p>
         </p:txBody>
       </p:sp>
@@ -5394,7 +5395,7 @@
     </p:spTree>
     <p:extLst>
       <p:ext uri="{BB962C8B-B14F-4D97-AF65-F5344CB8AC3E}">
-        <p14:creationId xmlns:p14="http://schemas.microsoft.com/office/powerpoint/2010/main" val="4181208129"/>
+        <p14:creationId xmlns:p14="http://schemas.microsoft.com/office/powerpoint/2010/main" val="3949418870"/>
       </p:ext>
     </p:extLst>
   </p:cSld>
@@ -5423,65 +5424,195 @@
       </p:grpSpPr>
       <p:sp>
         <p:nvSpPr>
-          <p:cNvPr id="2" name="Slide Image Placeholder 1"/>
+          <p:cNvPr id="86018" name="Rectangle 7"/>
           <p:cNvSpPr>
-            <a:spLocks noGrp="1" noRot="1" noChangeAspect="1"/>
+            <a:spLocks noGrp="1" noChangeArrowheads="1"/>
+          </p:cNvSpPr>
+          <p:nvPr>
+            <p:ph type="sldNum" sz="quarter" idx="5"/>
+          </p:nvPr>
+        </p:nvSpPr>
+        <p:spPr>
+          <a:noFill/>
+        </p:spPr>
+        <p:txBody>
+          <a:bodyPr/>
+          <a:lstStyle/>
+          <a:p>
+            <a:pPr marL="0" marR="0" lvl="0" indent="0" algn="r" defTabSz="914400" rtl="0" eaLnBrk="1" fontAlgn="auto" latinLnBrk="0" hangingPunct="1">
+              <a:lnSpc>
+                <a:spcPct val="100000"/>
+              </a:lnSpc>
+              <a:spcBef>
+                <a:spcPts val="0"/>
+              </a:spcBef>
+              <a:spcAft>
+                <a:spcPts val="0"/>
+              </a:spcAft>
+              <a:buClrTx/>
+              <a:buSzTx/>
+              <a:buFontTx/>
+              <a:buNone/>
+              <a:tabLst/>
+              <a:defRPr/>
+            </a:pPr>
+            <a:fld id="{48243FCA-7A08-4468-A667-3967CDB9A6A2}" type="slidenum">
+              <a:rPr kumimoji="0" lang="en-US" sz="1200" b="0" i="0" u="none" strike="noStrike" kern="1200" cap="none" spc="0" normalizeH="0" baseline="0" noProof="0">
+                <a:ln>
+                  <a:noFill/>
+                </a:ln>
+                <a:solidFill>
+                  <a:prstClr val="black"/>
+                </a:solidFill>
+                <a:effectLst/>
+                <a:uLnTx/>
+                <a:uFillTx/>
+                <a:latin typeface="Calibri" panose="020F0502020204030204"/>
+                <a:ea typeface="+mn-ea"/>
+                <a:cs typeface="+mn-cs"/>
+              </a:rPr>
+              <a:pPr marL="0" marR="0" lvl="0" indent="0" algn="r" defTabSz="914400" rtl="0" eaLnBrk="1" fontAlgn="auto" latinLnBrk="0" hangingPunct="1">
+                <a:lnSpc>
+                  <a:spcPct val="100000"/>
+                </a:lnSpc>
+                <a:spcBef>
+                  <a:spcPts val="0"/>
+                </a:spcBef>
+                <a:spcAft>
+                  <a:spcPts val="0"/>
+                </a:spcAft>
+                <a:buClrTx/>
+                <a:buSzTx/>
+                <a:buFontTx/>
+                <a:buNone/>
+                <a:tabLst/>
+                <a:defRPr/>
+              </a:pPr>
+              <a:t>40</a:t>
+            </a:fld>
+            <a:endParaRPr kumimoji="0" lang="en-US" sz="1200" b="0" i="0" u="none" strike="noStrike" kern="1200" cap="none" spc="0" normalizeH="0" baseline="0" noProof="0">
+              <a:ln>
+                <a:noFill/>
+              </a:ln>
+              <a:solidFill>
+                <a:prstClr val="black"/>
+              </a:solidFill>
+              <a:effectLst/>
+              <a:uLnTx/>
+              <a:uFillTx/>
+              <a:latin typeface="Calibri" panose="020F0502020204030204"/>
+              <a:ea typeface="+mn-ea"/>
+              <a:cs typeface="+mn-cs"/>
+            </a:endParaRPr>
+          </a:p>
+        </p:txBody>
+      </p:sp>
+      <p:sp>
+        <p:nvSpPr>
+          <p:cNvPr id="86019" name="Rectangle 2"/>
+          <p:cNvSpPr>
+            <a:spLocks noGrp="1" noRot="1" noChangeAspect="1" noChangeArrowheads="1" noTextEdit="1"/>
           </p:cNvSpPr>
           <p:nvPr>
             <p:ph type="sldImg"/>
           </p:nvPr>
         </p:nvSpPr>
-        <p:spPr/>
+        <p:spPr>
+          <a:ln/>
+        </p:spPr>
       </p:sp>
       <p:sp>
         <p:nvSpPr>
-          <p:cNvPr id="3" name="Notes Placeholder 2"/>
+          <p:cNvPr id="86020" name="Rectangle 3"/>
           <p:cNvSpPr>
-            <a:spLocks noGrp="1"/>
+            <a:spLocks noGrp="1" noChangeArrowheads="1"/>
           </p:cNvSpPr>
           <p:nvPr>
             <p:ph type="body" idx="1"/>
           </p:nvPr>
         </p:nvSpPr>
-        <p:spPr/>
+        <p:spPr>
+          <a:noFill/>
+          <a:ln/>
+        </p:spPr>
         <p:txBody>
           <a:bodyPr/>
           <a:lstStyle/>
           <a:p>
+            <a:pPr marL="0" lvl="1" defTabSz="921625" eaLnBrk="0" fontAlgn="base" hangingPunct="0">
+              <a:spcBef>
+                <a:spcPct val="30000"/>
+              </a:spcBef>
+              <a:spcAft>
+                <a:spcPct val="0"/>
+              </a:spcAft>
+              <a:defRPr/>
+            </a:pPr>
             <a:r>
               <a:rPr lang="en-US" dirty="0"/>
-              <a:t>a b c a b c</a:t>
-            </a:r>
-          </a:p>
-        </p:txBody>
-      </p:sp>
-      <p:sp>
-        <p:nvSpPr>
-          <p:cNvPr id="4" name="Slide Number Placeholder 3"/>
-          <p:cNvSpPr>
-            <a:spLocks noGrp="1"/>
-          </p:cNvSpPr>
-          <p:nvPr>
-            <p:ph type="sldNum" sz="quarter" idx="5"/>
-          </p:nvPr>
-        </p:nvSpPr>
-        <p:spPr/>
-        <p:txBody>
-          <a:bodyPr/>
-          <a:lstStyle/>
-          <a:p>
-            <a:fld id="{20BC1079-C5C6-1A45-8E7E-B20B607B09A1}" type="slidenum">
-              <a:rPr lang="en-US" smtClean="0"/>
-              <a:t>40</a:t>
-            </a:fld>
-            <a:endParaRPr lang="en-US"/>
+              <a:t>Notice that besides RMW instructions and semaphores, there are more available synchronization mechanisms.</a:t>
+            </a:r>
+          </a:p>
+          <a:p>
+            <a:pPr marL="0" lvl="1" defTabSz="921625" eaLnBrk="0" fontAlgn="base" hangingPunct="0">
+              <a:spcBef>
+                <a:spcPct val="30000"/>
+              </a:spcBef>
+              <a:spcAft>
+                <a:spcPct val="0"/>
+              </a:spcAft>
+              <a:defRPr/>
+            </a:pPr>
+            <a:r>
+              <a:rPr lang="en-US" dirty="0"/>
+              <a:t>Linux for instance offers synchronization primitives like mutex, condition variables, monitors, and barriers, among others.</a:t>
+            </a:r>
+          </a:p>
+          <a:p>
+            <a:pPr marL="0" lvl="1" defTabSz="921625" eaLnBrk="0" fontAlgn="base" hangingPunct="0">
+              <a:spcBef>
+                <a:spcPct val="30000"/>
+              </a:spcBef>
+              <a:spcAft>
+                <a:spcPct val="0"/>
+              </a:spcAft>
+              <a:defRPr/>
+            </a:pPr>
+            <a:endParaRPr lang="en-US" dirty="0"/>
+          </a:p>
+          <a:p>
+            <a:pPr marL="0" lvl="1" defTabSz="921625" eaLnBrk="0" fontAlgn="base" hangingPunct="0">
+              <a:spcBef>
+                <a:spcPct val="30000"/>
+              </a:spcBef>
+              <a:spcAft>
+                <a:spcPct val="0"/>
+              </a:spcAft>
+              <a:defRPr/>
+            </a:pPr>
+            <a:r>
+              <a:rPr lang="en-US" dirty="0"/>
+              <a:t>Mutex and semaphores are not exactly the same thing. Semaphore can be binary but also have values greater than 1. It’s not really important who decrements the semaphore, while the mutex needs to be released by the one that acquires it</a:t>
+            </a:r>
+          </a:p>
+          <a:p>
+            <a:pPr marL="0" lvl="1" defTabSz="921625" eaLnBrk="0" fontAlgn="base" hangingPunct="0">
+              <a:spcBef>
+                <a:spcPct val="30000"/>
+              </a:spcBef>
+              <a:spcAft>
+                <a:spcPct val="0"/>
+              </a:spcAft>
+              <a:defRPr/>
+            </a:pPr>
+            <a:endParaRPr lang="en-US" dirty="0"/>
           </a:p>
         </p:txBody>
       </p:sp>
     </p:spTree>
     <p:extLst>
       <p:ext uri="{BB962C8B-B14F-4D97-AF65-F5344CB8AC3E}">
-        <p14:creationId xmlns:p14="http://schemas.microsoft.com/office/powerpoint/2010/main" val="3114456274"/>
+        <p14:creationId xmlns:p14="http://schemas.microsoft.com/office/powerpoint/2010/main" val="3986126721"/>
       </p:ext>
     </p:extLst>
   </p:cSld>
@@ -5611,65 +5742,163 @@
       </p:grpSpPr>
       <p:sp>
         <p:nvSpPr>
-          <p:cNvPr id="2" name="Slide Image Placeholder 1"/>
+          <p:cNvPr id="55298" name="Rectangle 7"/>
           <p:cNvSpPr>
-            <a:spLocks noGrp="1" noRot="1" noChangeAspect="1"/>
+            <a:spLocks noGrp="1" noChangeArrowheads="1"/>
+          </p:cNvSpPr>
+          <p:nvPr>
+            <p:ph type="sldNum" sz="quarter" idx="5"/>
+          </p:nvPr>
+        </p:nvSpPr>
+        <p:spPr>
+          <a:noFill/>
+        </p:spPr>
+        <p:txBody>
+          <a:bodyPr/>
+          <a:lstStyle/>
+          <a:p>
+            <a:pPr marL="0" marR="0" lvl="0" indent="0" algn="r" defTabSz="914400" rtl="0" eaLnBrk="1" fontAlgn="auto" latinLnBrk="0" hangingPunct="1">
+              <a:lnSpc>
+                <a:spcPct val="100000"/>
+              </a:lnSpc>
+              <a:spcBef>
+                <a:spcPts val="0"/>
+              </a:spcBef>
+              <a:spcAft>
+                <a:spcPts val="0"/>
+              </a:spcAft>
+              <a:buClrTx/>
+              <a:buSzTx/>
+              <a:buFontTx/>
+              <a:buNone/>
+              <a:tabLst/>
+              <a:defRPr/>
+            </a:pPr>
+            <a:fld id="{77C131F9-2B3B-450D-B45C-AF3D72CBFA2C}" type="slidenum">
+              <a:rPr kumimoji="0" lang="en-US" sz="1200" b="0" i="0" u="none" strike="noStrike" kern="1200" cap="none" spc="0" normalizeH="0" baseline="0" noProof="0" smtClean="0">
+                <a:ln>
+                  <a:noFill/>
+                </a:ln>
+                <a:solidFill>
+                  <a:prstClr val="black"/>
+                </a:solidFill>
+                <a:effectLst/>
+                <a:uLnTx/>
+                <a:uFillTx/>
+                <a:latin typeface="Calibri" panose="020F0502020204030204"/>
+                <a:ea typeface="+mn-ea"/>
+                <a:cs typeface="+mn-cs"/>
+              </a:rPr>
+              <a:pPr marL="0" marR="0" lvl="0" indent="0" algn="r" defTabSz="914400" rtl="0" eaLnBrk="1" fontAlgn="auto" latinLnBrk="0" hangingPunct="1">
+                <a:lnSpc>
+                  <a:spcPct val="100000"/>
+                </a:lnSpc>
+                <a:spcBef>
+                  <a:spcPts val="0"/>
+                </a:spcBef>
+                <a:spcAft>
+                  <a:spcPts val="0"/>
+                </a:spcAft>
+                <a:buClrTx/>
+                <a:buSzTx/>
+                <a:buFontTx/>
+                <a:buNone/>
+                <a:tabLst/>
+                <a:defRPr/>
+              </a:pPr>
+              <a:t>41</a:t>
+            </a:fld>
+            <a:endParaRPr kumimoji="0" lang="en-US" sz="1200" b="0" i="0" u="none" strike="noStrike" kern="1200" cap="none" spc="0" normalizeH="0" baseline="0" noProof="0">
+              <a:ln>
+                <a:noFill/>
+              </a:ln>
+              <a:solidFill>
+                <a:prstClr val="black"/>
+              </a:solidFill>
+              <a:effectLst/>
+              <a:uLnTx/>
+              <a:uFillTx/>
+              <a:latin typeface="Calibri" panose="020F0502020204030204"/>
+              <a:ea typeface="+mn-ea"/>
+              <a:cs typeface="+mn-cs"/>
+            </a:endParaRPr>
+          </a:p>
+        </p:txBody>
+      </p:sp>
+      <p:sp>
+        <p:nvSpPr>
+          <p:cNvPr id="55299" name="Rectangle 2"/>
+          <p:cNvSpPr>
+            <a:spLocks noGrp="1" noRot="1" noChangeAspect="1" noChangeArrowheads="1" noTextEdit="1"/>
           </p:cNvSpPr>
           <p:nvPr>
             <p:ph type="sldImg"/>
           </p:nvPr>
         </p:nvSpPr>
-        <p:spPr/>
+        <p:spPr>
+          <a:ln/>
+        </p:spPr>
       </p:sp>
       <p:sp>
         <p:nvSpPr>
-          <p:cNvPr id="3" name="Notes Placeholder 2"/>
+          <p:cNvPr id="55300" name="Rectangle 3"/>
           <p:cNvSpPr>
-            <a:spLocks noGrp="1"/>
+            <a:spLocks noGrp="1" noChangeArrowheads="1"/>
           </p:cNvSpPr>
           <p:nvPr>
             <p:ph type="body" idx="1"/>
           </p:nvPr>
         </p:nvSpPr>
-        <p:spPr/>
+        <p:spPr>
+          <a:noFill/>
+          <a:ln/>
+        </p:spPr>
         <p:txBody>
           <a:bodyPr/>
           <a:lstStyle/>
           <a:p>
+            <a:pPr marL="0" marR="0" lvl="0" indent="0" algn="l" defTabSz="914400" rtl="0" eaLnBrk="1" fontAlgn="auto" latinLnBrk="0" hangingPunct="1">
+              <a:lnSpc>
+                <a:spcPct val="100000"/>
+              </a:lnSpc>
+              <a:spcBef>
+                <a:spcPts val="0"/>
+              </a:spcBef>
+              <a:spcAft>
+                <a:spcPts val="0"/>
+              </a:spcAft>
+              <a:buClrTx/>
+              <a:buSzTx/>
+              <a:buFontTx/>
+              <a:buNone/>
+              <a:tabLst/>
+              <a:defRPr/>
+            </a:pPr>
             <a:r>
               <a:rPr lang="en-US" dirty="0"/>
-              <a:t>Yes</a:t>
-            </a:r>
-          </a:p>
-        </p:txBody>
-      </p:sp>
-      <p:sp>
-        <p:nvSpPr>
-          <p:cNvPr id="4" name="Slide Number Placeholder 3"/>
-          <p:cNvSpPr>
-            <a:spLocks noGrp="1"/>
-          </p:cNvSpPr>
-          <p:nvPr>
-            <p:ph type="sldNum" sz="quarter" idx="5"/>
-          </p:nvPr>
-        </p:nvSpPr>
-        <p:spPr/>
-        <p:txBody>
-          <a:bodyPr/>
-          <a:lstStyle/>
-          <a:p>
-            <a:fld id="{20BC1079-C5C6-1A45-8E7E-B20B607B09A1}" type="slidenum">
-              <a:rPr lang="en-US" smtClean="0"/>
-              <a:t>41</a:t>
-            </a:fld>
-            <a:endParaRPr lang="en-US"/>
+              <a:t>Which one to use is something that depends on the application. For instance, if you have to choose between an entry section that relies on spinning or one that uses a Linux </a:t>
+            </a:r>
+            <a:r>
+              <a:rPr lang="en-US" dirty="0" err="1"/>
+              <a:t>futex</a:t>
+            </a:r>
+            <a:r>
+              <a:rPr lang="en-US" dirty="0"/>
+              <a:t> (which tries to acquire a lock in the entry section but instead of spinning puts the thread in the waiting queue), you might want to consider how long the critical section is. It might be OK to spin and "waste" CPU for a relatively short critical section that happens sporadically, but maybe not for a long one that is executed frequently...</a:t>
+            </a:r>
+            <a:endParaRPr lang="sv-SE" dirty="0">
+              <a:latin typeface="Times New Roman" pitchFamily="18" charset="0"/>
+            </a:endParaRPr>
+          </a:p>
+          <a:p>
+            <a:endParaRPr lang="sv-SE" dirty="0"/>
           </a:p>
         </p:txBody>
       </p:sp>
     </p:spTree>
     <p:extLst>
       <p:ext uri="{BB962C8B-B14F-4D97-AF65-F5344CB8AC3E}">
-        <p14:creationId xmlns:p14="http://schemas.microsoft.com/office/powerpoint/2010/main" val="1108123815"/>
+        <p14:creationId xmlns:p14="http://schemas.microsoft.com/office/powerpoint/2010/main" val="2828596620"/>
       </p:ext>
     </p:extLst>
   </p:cSld>
@@ -5680,6 +5909,887 @@
 </file>
 
 <file path=ppt/notesSlides/notesSlide41.xml><?xml version="1.0" encoding="utf-8"?>
+<p:notes xmlns:a="http://schemas.openxmlformats.org/drawingml/2006/main" xmlns:r="http://schemas.openxmlformats.org/officeDocument/2006/relationships" xmlns:p="http://schemas.openxmlformats.org/presentationml/2006/main">
+  <p:cSld>
+    <p:spTree>
+      <p:nvGrpSpPr>
+        <p:cNvPr id="1" name=""/>
+        <p:cNvGrpSpPr/>
+        <p:nvPr/>
+      </p:nvGrpSpPr>
+      <p:grpSpPr>
+        <a:xfrm>
+          <a:off x="0" y="0"/>
+          <a:ext cx="0" cy="0"/>
+          <a:chOff x="0" y="0"/>
+          <a:chExt cx="0" cy="0"/>
+        </a:xfrm>
+      </p:grpSpPr>
+      <p:sp>
+        <p:nvSpPr>
+          <p:cNvPr id="54274" name="Rectangle 7"/>
+          <p:cNvSpPr>
+            <a:spLocks noGrp="1" noChangeArrowheads="1"/>
+          </p:cNvSpPr>
+          <p:nvPr>
+            <p:ph type="sldNum" sz="quarter" idx="5"/>
+          </p:nvPr>
+        </p:nvSpPr>
+        <p:spPr>
+          <a:noFill/>
+        </p:spPr>
+        <p:txBody>
+          <a:bodyPr/>
+          <a:lstStyle/>
+          <a:p>
+            <a:pPr marL="0" marR="0" lvl="0" indent="0" algn="r" defTabSz="914400" rtl="0" eaLnBrk="1" fontAlgn="auto" latinLnBrk="0" hangingPunct="1">
+              <a:lnSpc>
+                <a:spcPct val="100000"/>
+              </a:lnSpc>
+              <a:spcBef>
+                <a:spcPts val="0"/>
+              </a:spcBef>
+              <a:spcAft>
+                <a:spcPts val="0"/>
+              </a:spcAft>
+              <a:buClrTx/>
+              <a:buSzTx/>
+              <a:buFontTx/>
+              <a:buNone/>
+              <a:tabLst/>
+              <a:defRPr/>
+            </a:pPr>
+            <a:fld id="{B34677B0-FD6B-4B18-AFB8-01DF365B7CC8}" type="slidenum">
+              <a:rPr kumimoji="0" lang="en-US" sz="1200" b="0" i="0" u="none" strike="noStrike" kern="1200" cap="none" spc="0" normalizeH="0" baseline="0" noProof="0" smtClean="0">
+                <a:ln>
+                  <a:noFill/>
+                </a:ln>
+                <a:solidFill>
+                  <a:prstClr val="black"/>
+                </a:solidFill>
+                <a:effectLst/>
+                <a:uLnTx/>
+                <a:uFillTx/>
+                <a:latin typeface="Calibri" panose="020F0502020204030204"/>
+                <a:ea typeface="+mn-ea"/>
+                <a:cs typeface="+mn-cs"/>
+              </a:rPr>
+              <a:pPr marL="0" marR="0" lvl="0" indent="0" algn="r" defTabSz="914400" rtl="0" eaLnBrk="1" fontAlgn="auto" latinLnBrk="0" hangingPunct="1">
+                <a:lnSpc>
+                  <a:spcPct val="100000"/>
+                </a:lnSpc>
+                <a:spcBef>
+                  <a:spcPts val="0"/>
+                </a:spcBef>
+                <a:spcAft>
+                  <a:spcPts val="0"/>
+                </a:spcAft>
+                <a:buClrTx/>
+                <a:buSzTx/>
+                <a:buFontTx/>
+                <a:buNone/>
+                <a:tabLst/>
+                <a:defRPr/>
+              </a:pPr>
+              <a:t>42</a:t>
+            </a:fld>
+            <a:endParaRPr kumimoji="0" lang="en-US" sz="1200" b="0" i="0" u="none" strike="noStrike" kern="1200" cap="none" spc="0" normalizeH="0" baseline="0" noProof="0">
+              <a:ln>
+                <a:noFill/>
+              </a:ln>
+              <a:solidFill>
+                <a:prstClr val="black"/>
+              </a:solidFill>
+              <a:effectLst/>
+              <a:uLnTx/>
+              <a:uFillTx/>
+              <a:latin typeface="Calibri" panose="020F0502020204030204"/>
+              <a:ea typeface="+mn-ea"/>
+              <a:cs typeface="+mn-cs"/>
+            </a:endParaRPr>
+          </a:p>
+        </p:txBody>
+      </p:sp>
+      <p:sp>
+        <p:nvSpPr>
+          <p:cNvPr id="54275" name="Rectangle 2"/>
+          <p:cNvSpPr>
+            <a:spLocks noGrp="1" noRot="1" noChangeAspect="1" noChangeArrowheads="1" noTextEdit="1"/>
+          </p:cNvSpPr>
+          <p:nvPr>
+            <p:ph type="sldImg"/>
+          </p:nvPr>
+        </p:nvSpPr>
+        <p:spPr>
+          <a:ln/>
+        </p:spPr>
+      </p:sp>
+      <p:sp>
+        <p:nvSpPr>
+          <p:cNvPr id="54276" name="Rectangle 3"/>
+          <p:cNvSpPr>
+            <a:spLocks noGrp="1" noChangeArrowheads="1"/>
+          </p:cNvSpPr>
+          <p:nvPr>
+            <p:ph type="body" idx="1"/>
+          </p:nvPr>
+        </p:nvSpPr>
+        <p:spPr>
+          <a:noFill/>
+          <a:ln/>
+        </p:spPr>
+        <p:txBody>
+          <a:bodyPr/>
+          <a:lstStyle/>
+          <a:p>
+            <a:r>
+              <a:rPr lang="sv-SE" dirty="0"/>
+              <a:t>Windows </a:t>
+            </a:r>
+            <a:r>
+              <a:rPr lang="sv-SE" dirty="0" err="1"/>
+              <a:t>too</a:t>
+            </a:r>
+            <a:r>
+              <a:rPr lang="sv-SE" dirty="0"/>
+              <a:t> offers </a:t>
+            </a:r>
+            <a:r>
+              <a:rPr lang="sv-SE" dirty="0" err="1"/>
+              <a:t>synchronization</a:t>
+            </a:r>
+            <a:r>
+              <a:rPr lang="sv-SE" dirty="0"/>
+              <a:t> primitives, for </a:t>
+            </a:r>
+            <a:r>
+              <a:rPr lang="sv-SE" dirty="0" err="1"/>
+              <a:t>instance</a:t>
+            </a:r>
+            <a:r>
+              <a:rPr lang="sv-SE" dirty="0"/>
+              <a:t> </a:t>
+            </a:r>
+            <a:r>
+              <a:rPr lang="sv-SE" dirty="0" err="1"/>
+              <a:t>interrupt</a:t>
+            </a:r>
+            <a:r>
+              <a:rPr lang="sv-SE" dirty="0"/>
+              <a:t> masks to </a:t>
+            </a:r>
+            <a:r>
+              <a:rPr lang="sv-SE" dirty="0" err="1"/>
+              <a:t>protect</a:t>
+            </a:r>
+            <a:r>
+              <a:rPr lang="sv-SE" dirty="0"/>
+              <a:t> access to global </a:t>
+            </a:r>
+            <a:r>
+              <a:rPr lang="sv-SE" dirty="0" err="1"/>
+              <a:t>resources</a:t>
+            </a:r>
+            <a:r>
+              <a:rPr lang="sv-SE" dirty="0"/>
+              <a:t> on </a:t>
+            </a:r>
+            <a:r>
+              <a:rPr lang="sv-SE" dirty="0" err="1"/>
+              <a:t>uniprocessors</a:t>
+            </a:r>
+            <a:r>
+              <a:rPr lang="sv-SE" dirty="0"/>
+              <a:t> and </a:t>
+            </a:r>
+            <a:r>
+              <a:rPr lang="sv-SE" dirty="0" err="1"/>
+              <a:t>busy-wait</a:t>
+            </a:r>
+            <a:r>
+              <a:rPr lang="sv-SE" dirty="0"/>
+              <a:t> spinlocks for multiprocessors (</a:t>
+            </a:r>
+            <a:r>
+              <a:rPr lang="sv-SE" dirty="0" err="1"/>
+              <a:t>we</a:t>
+            </a:r>
+            <a:r>
+              <a:rPr lang="sv-SE" dirty="0"/>
+              <a:t> </a:t>
+            </a:r>
+            <a:r>
+              <a:rPr lang="sv-SE" dirty="0" err="1"/>
+              <a:t>have</a:t>
+            </a:r>
+            <a:r>
+              <a:rPr lang="sv-SE" dirty="0"/>
+              <a:t> </a:t>
+            </a:r>
+            <a:r>
+              <a:rPr lang="sv-SE" dirty="0" err="1"/>
+              <a:t>discussed</a:t>
+            </a:r>
+            <a:r>
+              <a:rPr lang="sv-SE" dirty="0"/>
+              <a:t> </a:t>
+            </a:r>
+            <a:r>
+              <a:rPr lang="sv-SE" dirty="0" err="1"/>
+              <a:t>before</a:t>
+            </a:r>
+            <a:r>
+              <a:rPr lang="sv-SE" dirty="0"/>
+              <a:t> </a:t>
+            </a:r>
+            <a:r>
+              <a:rPr lang="sv-SE" dirty="0" err="1"/>
+              <a:t>why</a:t>
+            </a:r>
+            <a:r>
+              <a:rPr lang="sv-SE" dirty="0"/>
+              <a:t> </a:t>
+            </a:r>
+            <a:r>
+              <a:rPr lang="sv-SE" dirty="0" err="1"/>
+              <a:t>disabling</a:t>
+            </a:r>
+            <a:r>
+              <a:rPr lang="sv-SE" dirty="0"/>
+              <a:t> </a:t>
+            </a:r>
+            <a:r>
+              <a:rPr lang="sv-SE" dirty="0" err="1"/>
+              <a:t>interrupts</a:t>
+            </a:r>
+            <a:r>
+              <a:rPr lang="sv-SE" dirty="0"/>
+              <a:t> on a </a:t>
+            </a:r>
+            <a:r>
+              <a:rPr lang="sv-SE" dirty="0" err="1"/>
+              <a:t>single</a:t>
+            </a:r>
+            <a:r>
+              <a:rPr lang="sv-SE" dirty="0"/>
+              <a:t> processor </a:t>
+            </a:r>
+            <a:r>
+              <a:rPr lang="sv-SE" dirty="0" err="1"/>
+              <a:t>might</a:t>
+            </a:r>
+            <a:r>
+              <a:rPr lang="sv-SE" dirty="0"/>
+              <a:t> be not </a:t>
+            </a:r>
+            <a:r>
+              <a:rPr lang="sv-SE" dirty="0" err="1"/>
+              <a:t>enough</a:t>
+            </a:r>
+            <a:r>
+              <a:rPr lang="sv-SE" dirty="0"/>
+              <a:t> to </a:t>
+            </a:r>
+            <a:r>
+              <a:rPr lang="sv-SE" dirty="0" err="1"/>
+              <a:t>have</a:t>
+            </a:r>
+            <a:r>
+              <a:rPr lang="sv-SE" dirty="0"/>
+              <a:t> valid solutions to the </a:t>
+            </a:r>
+            <a:r>
+              <a:rPr lang="sv-SE" dirty="0" err="1"/>
+              <a:t>critical</a:t>
+            </a:r>
+            <a:r>
+              <a:rPr lang="sv-SE" dirty="0"/>
+              <a:t> </a:t>
+            </a:r>
+            <a:r>
+              <a:rPr lang="sv-SE" dirty="0" err="1"/>
+              <a:t>section</a:t>
+            </a:r>
+            <a:r>
+              <a:rPr lang="sv-SE" dirty="0"/>
+              <a:t> problem). </a:t>
+            </a:r>
+            <a:r>
+              <a:rPr lang="sv-SE" dirty="0" err="1"/>
+              <a:t>Finally</a:t>
+            </a:r>
+            <a:r>
+              <a:rPr lang="sv-SE" dirty="0"/>
+              <a:t>, it </a:t>
+            </a:r>
+            <a:r>
+              <a:rPr lang="sv-SE" dirty="0" err="1"/>
+              <a:t>also</a:t>
+            </a:r>
+            <a:r>
+              <a:rPr lang="sv-SE" dirty="0"/>
+              <a:t> offers </a:t>
+            </a:r>
+            <a:r>
+              <a:rPr lang="sv-SE" dirty="0" err="1"/>
+              <a:t>objects</a:t>
+            </a:r>
+            <a:r>
+              <a:rPr lang="sv-SE" dirty="0"/>
+              <a:t> like </a:t>
+            </a:r>
+            <a:r>
+              <a:rPr lang="sv-SE" dirty="0" err="1"/>
+              <a:t>mutexes</a:t>
+            </a:r>
+            <a:r>
+              <a:rPr lang="sv-SE" dirty="0"/>
+              <a:t>, </a:t>
+            </a:r>
+            <a:r>
+              <a:rPr lang="sv-SE" dirty="0" err="1"/>
+              <a:t>semaphores</a:t>
+            </a:r>
+            <a:r>
+              <a:rPr lang="sv-SE" dirty="0"/>
+              <a:t> or to </a:t>
+            </a:r>
+            <a:r>
+              <a:rPr lang="sv-SE" dirty="0" err="1"/>
+              <a:t>provide</a:t>
+            </a:r>
+            <a:r>
+              <a:rPr lang="sv-SE" dirty="0"/>
+              <a:t> events (</a:t>
+            </a:r>
+            <a:r>
+              <a:rPr lang="sv-SE" dirty="0" err="1"/>
+              <a:t>similar</a:t>
+            </a:r>
+            <a:r>
+              <a:rPr lang="sv-SE" dirty="0"/>
+              <a:t> to </a:t>
+            </a:r>
+            <a:r>
+              <a:rPr lang="sv-SE" dirty="0" err="1"/>
+              <a:t>condition</a:t>
+            </a:r>
+            <a:r>
+              <a:rPr lang="sv-SE" dirty="0"/>
+              <a:t> </a:t>
+            </a:r>
+            <a:r>
+              <a:rPr lang="sv-SE" dirty="0" err="1"/>
+              <a:t>variables</a:t>
+            </a:r>
+            <a:r>
+              <a:rPr lang="sv-SE" dirty="0"/>
+              <a:t>).</a:t>
+            </a:r>
+          </a:p>
+        </p:txBody>
+      </p:sp>
+    </p:spTree>
+    <p:extLst>
+      <p:ext uri="{BB962C8B-B14F-4D97-AF65-F5344CB8AC3E}">
+        <p14:creationId xmlns:p14="http://schemas.microsoft.com/office/powerpoint/2010/main" val="3321594125"/>
+      </p:ext>
+    </p:extLst>
+  </p:cSld>
+  <p:clrMapOvr>
+    <a:masterClrMapping/>
+  </p:clrMapOvr>
+</p:notes>
+</file>
+
+<file path=ppt/notesSlides/notesSlide42.xml><?xml version="1.0" encoding="utf-8"?>
+<p:notes xmlns:a="http://schemas.openxmlformats.org/drawingml/2006/main" xmlns:r="http://schemas.openxmlformats.org/officeDocument/2006/relationships" xmlns:p="http://schemas.openxmlformats.org/presentationml/2006/main">
+  <p:cSld>
+    <p:spTree>
+      <p:nvGrpSpPr>
+        <p:cNvPr id="1" name=""/>
+        <p:cNvGrpSpPr/>
+        <p:nvPr/>
+      </p:nvGrpSpPr>
+      <p:grpSpPr>
+        <a:xfrm>
+          <a:off x="0" y="0"/>
+          <a:ext cx="0" cy="0"/>
+          <a:chOff x="0" y="0"/>
+          <a:chExt cx="0" cy="0"/>
+        </a:xfrm>
+      </p:grpSpPr>
+      <p:sp>
+        <p:nvSpPr>
+          <p:cNvPr id="56322" name="Rectangle 7"/>
+          <p:cNvSpPr>
+            <a:spLocks noGrp="1" noChangeArrowheads="1"/>
+          </p:cNvSpPr>
+          <p:nvPr>
+            <p:ph type="sldNum" sz="quarter" idx="5"/>
+          </p:nvPr>
+        </p:nvSpPr>
+        <p:spPr>
+          <a:noFill/>
+        </p:spPr>
+        <p:txBody>
+          <a:bodyPr/>
+          <a:lstStyle/>
+          <a:p>
+            <a:pPr marL="0" marR="0" lvl="0" indent="0" algn="r" defTabSz="914400" rtl="0" eaLnBrk="1" fontAlgn="auto" latinLnBrk="0" hangingPunct="1">
+              <a:lnSpc>
+                <a:spcPct val="100000"/>
+              </a:lnSpc>
+              <a:spcBef>
+                <a:spcPts val="0"/>
+              </a:spcBef>
+              <a:spcAft>
+                <a:spcPts val="0"/>
+              </a:spcAft>
+              <a:buClrTx/>
+              <a:buSzTx/>
+              <a:buFontTx/>
+              <a:buNone/>
+              <a:tabLst/>
+              <a:defRPr/>
+            </a:pPr>
+            <a:fld id="{4DB15479-77C4-4247-86C7-895882BE5E1E}" type="slidenum">
+              <a:rPr kumimoji="0" lang="en-US" sz="1200" b="0" i="0" u="none" strike="noStrike" kern="1200" cap="none" spc="0" normalizeH="0" baseline="0" noProof="0" smtClean="0">
+                <a:ln>
+                  <a:noFill/>
+                </a:ln>
+                <a:solidFill>
+                  <a:prstClr val="black"/>
+                </a:solidFill>
+                <a:effectLst/>
+                <a:uLnTx/>
+                <a:uFillTx/>
+                <a:latin typeface="Calibri" panose="020F0502020204030204"/>
+                <a:ea typeface="+mn-ea"/>
+                <a:cs typeface="+mn-cs"/>
+              </a:rPr>
+              <a:pPr marL="0" marR="0" lvl="0" indent="0" algn="r" defTabSz="914400" rtl="0" eaLnBrk="1" fontAlgn="auto" latinLnBrk="0" hangingPunct="1">
+                <a:lnSpc>
+                  <a:spcPct val="100000"/>
+                </a:lnSpc>
+                <a:spcBef>
+                  <a:spcPts val="0"/>
+                </a:spcBef>
+                <a:spcAft>
+                  <a:spcPts val="0"/>
+                </a:spcAft>
+                <a:buClrTx/>
+                <a:buSzTx/>
+                <a:buFontTx/>
+                <a:buNone/>
+                <a:tabLst/>
+                <a:defRPr/>
+              </a:pPr>
+              <a:t>43</a:t>
+            </a:fld>
+            <a:endParaRPr kumimoji="0" lang="en-US" sz="1200" b="0" i="0" u="none" strike="noStrike" kern="1200" cap="none" spc="0" normalizeH="0" baseline="0" noProof="0">
+              <a:ln>
+                <a:noFill/>
+              </a:ln>
+              <a:solidFill>
+                <a:prstClr val="black"/>
+              </a:solidFill>
+              <a:effectLst/>
+              <a:uLnTx/>
+              <a:uFillTx/>
+              <a:latin typeface="Calibri" panose="020F0502020204030204"/>
+              <a:ea typeface="+mn-ea"/>
+              <a:cs typeface="+mn-cs"/>
+            </a:endParaRPr>
+          </a:p>
+        </p:txBody>
+      </p:sp>
+      <p:sp>
+        <p:nvSpPr>
+          <p:cNvPr id="56323" name="Rectangle 2"/>
+          <p:cNvSpPr>
+            <a:spLocks noGrp="1" noRot="1" noChangeAspect="1" noChangeArrowheads="1" noTextEdit="1"/>
+          </p:cNvSpPr>
+          <p:nvPr>
+            <p:ph type="sldImg"/>
+          </p:nvPr>
+        </p:nvSpPr>
+        <p:spPr>
+          <a:ln/>
+        </p:spPr>
+      </p:sp>
+      <p:sp>
+        <p:nvSpPr>
+          <p:cNvPr id="56324" name="Rectangle 3"/>
+          <p:cNvSpPr>
+            <a:spLocks noGrp="1" noChangeArrowheads="1"/>
+          </p:cNvSpPr>
+          <p:nvPr>
+            <p:ph type="body" idx="1"/>
+          </p:nvPr>
+        </p:nvSpPr>
+        <p:spPr>
+          <a:noFill/>
+          <a:ln/>
+        </p:spPr>
+        <p:txBody>
+          <a:bodyPr/>
+          <a:lstStyle/>
+          <a:p>
+            <a:r>
+              <a:rPr lang="sv-SE" dirty="0"/>
+              <a:t>If </a:t>
+            </a:r>
+            <a:r>
+              <a:rPr lang="sv-SE" dirty="0" err="1"/>
+              <a:t>we</a:t>
+            </a:r>
+            <a:r>
+              <a:rPr lang="sv-SE" dirty="0"/>
+              <a:t> look at </a:t>
+            </a:r>
+            <a:r>
+              <a:rPr lang="sv-SE" dirty="0" err="1"/>
+              <a:t>pthreads</a:t>
+            </a:r>
+            <a:r>
+              <a:rPr lang="sv-SE" dirty="0"/>
+              <a:t>, </a:t>
+            </a:r>
+            <a:r>
+              <a:rPr lang="sv-SE" dirty="0" err="1"/>
+              <a:t>you</a:t>
+            </a:r>
+            <a:r>
+              <a:rPr lang="sv-SE" dirty="0"/>
+              <a:t> </a:t>
+            </a:r>
+            <a:r>
+              <a:rPr lang="sv-SE" dirty="0" err="1"/>
+              <a:t>will</a:t>
+            </a:r>
+            <a:r>
+              <a:rPr lang="sv-SE" dirty="0"/>
+              <a:t> </a:t>
+            </a:r>
+            <a:r>
+              <a:rPr lang="sv-SE" dirty="0" err="1"/>
+              <a:t>see</a:t>
+            </a:r>
+            <a:r>
+              <a:rPr lang="sv-SE" dirty="0"/>
+              <a:t> it </a:t>
+            </a:r>
+            <a:r>
+              <a:rPr lang="sv-SE" dirty="0" err="1"/>
+              <a:t>also</a:t>
+            </a:r>
+            <a:r>
+              <a:rPr lang="sv-SE" dirty="0"/>
+              <a:t> offers </a:t>
+            </a:r>
+            <a:r>
+              <a:rPr lang="sv-SE" dirty="0" err="1"/>
+              <a:t>synchronization</a:t>
+            </a:r>
+            <a:r>
+              <a:rPr lang="sv-SE" dirty="0"/>
+              <a:t> </a:t>
+            </a:r>
+            <a:r>
+              <a:rPr lang="sv-SE" dirty="0" err="1"/>
+              <a:t>mechanisms</a:t>
+            </a:r>
+            <a:r>
+              <a:rPr lang="sv-SE" dirty="0"/>
+              <a:t> like </a:t>
+            </a:r>
+            <a:r>
+              <a:rPr lang="sv-SE" dirty="0" err="1"/>
+              <a:t>mutex</a:t>
+            </a:r>
+            <a:r>
+              <a:rPr lang="sv-SE" dirty="0"/>
+              <a:t> locks </a:t>
+            </a:r>
+            <a:r>
+              <a:rPr lang="sv-SE" dirty="0" err="1"/>
+              <a:t>with</a:t>
+            </a:r>
+            <a:r>
+              <a:rPr lang="sv-SE" dirty="0"/>
+              <a:t> </a:t>
+            </a:r>
+            <a:r>
+              <a:rPr lang="sv-SE" dirty="0" err="1"/>
+              <a:t>blocking</a:t>
+            </a:r>
+            <a:r>
+              <a:rPr lang="sv-SE" dirty="0"/>
+              <a:t> </a:t>
+            </a:r>
+            <a:r>
+              <a:rPr lang="sv-SE" dirty="0" err="1"/>
+              <a:t>queues</a:t>
+            </a:r>
+            <a:r>
+              <a:rPr lang="sv-SE" dirty="0"/>
+              <a:t>, </a:t>
+            </a:r>
+            <a:r>
+              <a:rPr lang="sv-SE" dirty="0" err="1"/>
+              <a:t>which</a:t>
+            </a:r>
+            <a:r>
+              <a:rPr lang="sv-SE" dirty="0"/>
+              <a:t> </a:t>
+            </a:r>
+            <a:r>
+              <a:rPr lang="sv-SE" dirty="0" err="1"/>
+              <a:t>can</a:t>
+            </a:r>
+            <a:r>
+              <a:rPr lang="sv-SE" dirty="0"/>
+              <a:t> </a:t>
+            </a:r>
+            <a:r>
+              <a:rPr lang="sv-SE" dirty="0" err="1"/>
+              <a:t>also</a:t>
+            </a:r>
+            <a:r>
+              <a:rPr lang="sv-SE" dirty="0"/>
+              <a:t> support </a:t>
+            </a:r>
+            <a:r>
+              <a:rPr lang="sv-SE" dirty="0" err="1"/>
+              <a:t>fairness</a:t>
+            </a:r>
+            <a:r>
+              <a:rPr lang="sv-SE" dirty="0"/>
+              <a:t>, </a:t>
+            </a:r>
+            <a:r>
+              <a:rPr lang="sv-SE" dirty="0" err="1"/>
+              <a:t>condition</a:t>
+            </a:r>
+            <a:r>
+              <a:rPr lang="sv-SE" dirty="0"/>
+              <a:t> </a:t>
+            </a:r>
+            <a:r>
+              <a:rPr lang="sv-SE" dirty="0" err="1"/>
+              <a:t>variables</a:t>
+            </a:r>
+            <a:r>
+              <a:rPr lang="sv-SE" dirty="0"/>
+              <a:t>, and </a:t>
+            </a:r>
+            <a:r>
+              <a:rPr lang="sv-SE" dirty="0" err="1"/>
+              <a:t>other</a:t>
+            </a:r>
+            <a:r>
+              <a:rPr lang="sv-SE" dirty="0"/>
+              <a:t> non-portable extensions.</a:t>
+            </a:r>
+          </a:p>
+          <a:p>
+            <a:endParaRPr lang="sv-SE" dirty="0"/>
+          </a:p>
+          <a:p>
+            <a:r>
+              <a:rPr lang="sv-SE" dirty="0" err="1"/>
+              <a:t>Notice</a:t>
+            </a:r>
+            <a:r>
+              <a:rPr lang="sv-SE" dirty="0"/>
+              <a:t> </a:t>
+            </a:r>
+            <a:r>
+              <a:rPr lang="sv-SE" dirty="0" err="1"/>
+              <a:t>that</a:t>
+            </a:r>
+            <a:r>
+              <a:rPr lang="sv-SE" dirty="0"/>
+              <a:t> an OS </a:t>
+            </a:r>
+            <a:r>
+              <a:rPr lang="sv-SE" dirty="0" err="1"/>
+              <a:t>that</a:t>
+            </a:r>
+            <a:r>
+              <a:rPr lang="sv-SE" dirty="0"/>
+              <a:t> </a:t>
+            </a:r>
+            <a:r>
+              <a:rPr lang="sv-SE" dirty="0" err="1"/>
+              <a:t>defines</a:t>
+            </a:r>
+            <a:r>
+              <a:rPr lang="sv-SE" dirty="0"/>
+              <a:t> and offers </a:t>
+            </a:r>
+            <a:r>
+              <a:rPr lang="sv-SE" dirty="0" err="1"/>
+              <a:t>such</a:t>
+            </a:r>
+            <a:r>
+              <a:rPr lang="sv-SE" dirty="0"/>
+              <a:t> </a:t>
+            </a:r>
+            <a:r>
+              <a:rPr lang="sv-SE" dirty="0" err="1"/>
+              <a:t>synchronization</a:t>
+            </a:r>
+            <a:r>
+              <a:rPr lang="sv-SE" dirty="0"/>
+              <a:t> primitives </a:t>
+            </a:r>
+            <a:r>
+              <a:rPr lang="sv-SE" dirty="0" err="1"/>
+              <a:t>usually</a:t>
+            </a:r>
+            <a:r>
+              <a:rPr lang="sv-SE" dirty="0"/>
+              <a:t> </a:t>
+            </a:r>
+            <a:r>
+              <a:rPr lang="sv-SE" dirty="0" err="1"/>
+              <a:t>needs</a:t>
+            </a:r>
+            <a:r>
+              <a:rPr lang="sv-SE" dirty="0"/>
+              <a:t> </a:t>
+            </a:r>
+            <a:r>
+              <a:rPr lang="sv-SE" dirty="0" err="1"/>
+              <a:t>such</a:t>
+            </a:r>
+            <a:r>
+              <a:rPr lang="sv-SE" dirty="0"/>
+              <a:t> </a:t>
+            </a:r>
+            <a:r>
+              <a:rPr lang="sv-SE" dirty="0" err="1"/>
+              <a:t>synchronization</a:t>
+            </a:r>
+            <a:r>
+              <a:rPr lang="sv-SE" dirty="0"/>
+              <a:t> primitives </a:t>
+            </a:r>
+            <a:r>
+              <a:rPr lang="sv-SE" dirty="0" err="1"/>
+              <a:t>itself</a:t>
+            </a:r>
+            <a:r>
+              <a:rPr lang="sv-SE" dirty="0"/>
+              <a:t>, to </a:t>
+            </a:r>
+            <a:r>
+              <a:rPr lang="sv-SE" dirty="0" err="1"/>
+              <a:t>protect</a:t>
+            </a:r>
+            <a:r>
+              <a:rPr lang="sv-SE" dirty="0"/>
+              <a:t> </a:t>
+            </a:r>
+            <a:r>
+              <a:rPr lang="sv-SE" dirty="0" err="1"/>
+              <a:t>its</a:t>
+            </a:r>
+            <a:r>
+              <a:rPr lang="sv-SE" dirty="0"/>
+              <a:t> </a:t>
+            </a:r>
+            <a:r>
+              <a:rPr lang="sv-SE" dirty="0" err="1"/>
+              <a:t>shared</a:t>
+            </a:r>
+            <a:r>
+              <a:rPr lang="sv-SE" dirty="0"/>
+              <a:t> </a:t>
+            </a:r>
+            <a:r>
+              <a:rPr lang="sv-SE" dirty="0" err="1"/>
+              <a:t>variables</a:t>
+            </a:r>
+            <a:r>
+              <a:rPr lang="sv-SE" dirty="0"/>
+              <a:t> </a:t>
+            </a:r>
+            <a:r>
+              <a:rPr lang="sv-SE" dirty="0" err="1"/>
+              <a:t>when</a:t>
+            </a:r>
+            <a:r>
+              <a:rPr lang="sv-SE" dirty="0"/>
+              <a:t> </a:t>
+            </a:r>
+            <a:r>
+              <a:rPr lang="sv-SE" dirty="0" err="1"/>
+              <a:t>multiple</a:t>
+            </a:r>
+            <a:r>
+              <a:rPr lang="sv-SE" dirty="0"/>
+              <a:t> </a:t>
+            </a:r>
+            <a:r>
+              <a:rPr lang="sv-SE" dirty="0" err="1"/>
+              <a:t>concurrent</a:t>
+            </a:r>
+            <a:r>
+              <a:rPr lang="sv-SE" dirty="0"/>
+              <a:t>/</a:t>
+            </a:r>
+            <a:r>
+              <a:rPr lang="sv-SE" dirty="0" err="1"/>
+              <a:t>parallel</a:t>
+            </a:r>
+            <a:r>
+              <a:rPr lang="sv-SE" dirty="0"/>
+              <a:t> </a:t>
+            </a:r>
+            <a:r>
+              <a:rPr lang="sv-SE" dirty="0" err="1"/>
+              <a:t>threads</a:t>
+            </a:r>
+            <a:r>
+              <a:rPr lang="sv-SE" dirty="0"/>
+              <a:t> </a:t>
+            </a:r>
+            <a:r>
+              <a:rPr lang="sv-SE" dirty="0" err="1"/>
+              <a:t>run</a:t>
+            </a:r>
+            <a:r>
+              <a:rPr lang="sv-SE" dirty="0"/>
+              <a:t> the OS </a:t>
+            </a:r>
+            <a:r>
+              <a:rPr lang="sv-SE" dirty="0" err="1"/>
+              <a:t>code</a:t>
+            </a:r>
+            <a:r>
+              <a:rPr lang="sv-SE" dirty="0"/>
+              <a:t>!</a:t>
+            </a:r>
+          </a:p>
+        </p:txBody>
+      </p:sp>
+    </p:spTree>
+    <p:extLst>
+      <p:ext uri="{BB962C8B-B14F-4D97-AF65-F5344CB8AC3E}">
+        <p14:creationId xmlns:p14="http://schemas.microsoft.com/office/powerpoint/2010/main" val="1603240883"/>
+      </p:ext>
+    </p:extLst>
+  </p:cSld>
+  <p:clrMapOvr>
+    <a:masterClrMapping/>
+  </p:clrMapOvr>
+</p:notes>
+</file>
+
+<file path=ppt/notesSlides/notesSlide43.xml><?xml version="1.0" encoding="utf-8"?>
 <p:notes xmlns:a="http://schemas.openxmlformats.org/drawingml/2006/main" xmlns:r="http://schemas.openxmlformats.org/officeDocument/2006/relationships" xmlns:p="http://schemas.openxmlformats.org/presentationml/2006/main">
   <p:cSld>
     <p:spTree>
@@ -5723,7 +6833,10 @@
           <a:bodyPr/>
           <a:lstStyle/>
           <a:p>
-            <a:endParaRPr lang="en-US" dirty="0"/>
+            <a:r>
+              <a:rPr lang="en-US" dirty="0"/>
+              <a:t>no</a:t>
+            </a:r>
           </a:p>
         </p:txBody>
       </p:sp>
@@ -5744,7 +6857,7 @@
           <a:p>
             <a:fld id="{20BC1079-C5C6-1A45-8E7E-B20B607B09A1}" type="slidenum">
               <a:rPr lang="en-US" smtClean="0"/>
-              <a:t>42</a:t>
+              <a:t>45</a:t>
             </a:fld>
             <a:endParaRPr lang="en-US"/>
           </a:p>
@@ -5753,409 +6866,7 @@
     </p:spTree>
     <p:extLst>
       <p:ext uri="{BB962C8B-B14F-4D97-AF65-F5344CB8AC3E}">
-        <p14:creationId xmlns:p14="http://schemas.microsoft.com/office/powerpoint/2010/main" val="3949418870"/>
-      </p:ext>
-    </p:extLst>
-  </p:cSld>
-  <p:clrMapOvr>
-    <a:masterClrMapping/>
-  </p:clrMapOvr>
-</p:notes>
-</file>
-
-<file path=ppt/notesSlides/notesSlide42.xml><?xml version="1.0" encoding="utf-8"?>
-<p:notes xmlns:a="http://schemas.openxmlformats.org/drawingml/2006/main" xmlns:r="http://schemas.openxmlformats.org/officeDocument/2006/relationships" xmlns:p="http://schemas.openxmlformats.org/presentationml/2006/main">
-  <p:cSld>
-    <p:spTree>
-      <p:nvGrpSpPr>
-        <p:cNvPr id="1" name=""/>
-        <p:cNvGrpSpPr/>
-        <p:nvPr/>
-      </p:nvGrpSpPr>
-      <p:grpSpPr>
-        <a:xfrm>
-          <a:off x="0" y="0"/>
-          <a:ext cx="0" cy="0"/>
-          <a:chOff x="0" y="0"/>
-          <a:chExt cx="0" cy="0"/>
-        </a:xfrm>
-      </p:grpSpPr>
-      <p:sp>
-        <p:nvSpPr>
-          <p:cNvPr id="86018" name="Rectangle 7"/>
-          <p:cNvSpPr>
-            <a:spLocks noGrp="1" noChangeArrowheads="1"/>
-          </p:cNvSpPr>
-          <p:nvPr>
-            <p:ph type="sldNum" sz="quarter" idx="5"/>
-          </p:nvPr>
-        </p:nvSpPr>
-        <p:spPr>
-          <a:noFill/>
-        </p:spPr>
-        <p:txBody>
-          <a:bodyPr/>
-          <a:lstStyle/>
-          <a:p>
-            <a:pPr marL="0" marR="0" lvl="0" indent="0" algn="r" defTabSz="914400" rtl="0" eaLnBrk="1" fontAlgn="auto" latinLnBrk="0" hangingPunct="1">
-              <a:lnSpc>
-                <a:spcPct val="100000"/>
-              </a:lnSpc>
-              <a:spcBef>
-                <a:spcPts val="0"/>
-              </a:spcBef>
-              <a:spcAft>
-                <a:spcPts val="0"/>
-              </a:spcAft>
-              <a:buClrTx/>
-              <a:buSzTx/>
-              <a:buFontTx/>
-              <a:buNone/>
-              <a:tabLst/>
-              <a:defRPr/>
-            </a:pPr>
-            <a:fld id="{48243FCA-7A08-4468-A667-3967CDB9A6A2}" type="slidenum">
-              <a:rPr kumimoji="0" lang="en-US" sz="1200" b="0" i="0" u="none" strike="noStrike" kern="1200" cap="none" spc="0" normalizeH="0" baseline="0" noProof="0">
-                <a:ln>
-                  <a:noFill/>
-                </a:ln>
-                <a:solidFill>
-                  <a:prstClr val="black"/>
-                </a:solidFill>
-                <a:effectLst/>
-                <a:uLnTx/>
-                <a:uFillTx/>
-                <a:latin typeface="Calibri" panose="020F0502020204030204"/>
-                <a:ea typeface="+mn-ea"/>
-                <a:cs typeface="+mn-cs"/>
-              </a:rPr>
-              <a:pPr marL="0" marR="0" lvl="0" indent="0" algn="r" defTabSz="914400" rtl="0" eaLnBrk="1" fontAlgn="auto" latinLnBrk="0" hangingPunct="1">
-                <a:lnSpc>
-                  <a:spcPct val="100000"/>
-                </a:lnSpc>
-                <a:spcBef>
-                  <a:spcPts val="0"/>
-                </a:spcBef>
-                <a:spcAft>
-                  <a:spcPts val="0"/>
-                </a:spcAft>
-                <a:buClrTx/>
-                <a:buSzTx/>
-                <a:buFontTx/>
-                <a:buNone/>
-                <a:tabLst/>
-                <a:defRPr/>
-              </a:pPr>
-              <a:t>43</a:t>
-            </a:fld>
-            <a:endParaRPr kumimoji="0" lang="en-US" sz="1200" b="0" i="0" u="none" strike="noStrike" kern="1200" cap="none" spc="0" normalizeH="0" baseline="0" noProof="0">
-              <a:ln>
-                <a:noFill/>
-              </a:ln>
-              <a:solidFill>
-                <a:prstClr val="black"/>
-              </a:solidFill>
-              <a:effectLst/>
-              <a:uLnTx/>
-              <a:uFillTx/>
-              <a:latin typeface="Calibri" panose="020F0502020204030204"/>
-              <a:ea typeface="+mn-ea"/>
-              <a:cs typeface="+mn-cs"/>
-            </a:endParaRPr>
-          </a:p>
-        </p:txBody>
-      </p:sp>
-      <p:sp>
-        <p:nvSpPr>
-          <p:cNvPr id="86019" name="Rectangle 2"/>
-          <p:cNvSpPr>
-            <a:spLocks noGrp="1" noRot="1" noChangeAspect="1" noChangeArrowheads="1" noTextEdit="1"/>
-          </p:cNvSpPr>
-          <p:nvPr>
-            <p:ph type="sldImg"/>
-          </p:nvPr>
-        </p:nvSpPr>
-        <p:spPr>
-          <a:ln/>
-        </p:spPr>
-      </p:sp>
-      <p:sp>
-        <p:nvSpPr>
-          <p:cNvPr id="86020" name="Rectangle 3"/>
-          <p:cNvSpPr>
-            <a:spLocks noGrp="1" noChangeArrowheads="1"/>
-          </p:cNvSpPr>
-          <p:nvPr>
-            <p:ph type="body" idx="1"/>
-          </p:nvPr>
-        </p:nvSpPr>
-        <p:spPr>
-          <a:noFill/>
-          <a:ln/>
-        </p:spPr>
-        <p:txBody>
-          <a:bodyPr/>
-          <a:lstStyle/>
-          <a:p>
-            <a:pPr marL="0" lvl="1" defTabSz="921625" eaLnBrk="0" fontAlgn="base" hangingPunct="0">
-              <a:spcBef>
-                <a:spcPct val="30000"/>
-              </a:spcBef>
-              <a:spcAft>
-                <a:spcPct val="0"/>
-              </a:spcAft>
-              <a:defRPr/>
-            </a:pPr>
-            <a:r>
-              <a:rPr lang="en-US" dirty="0"/>
-              <a:t>Notice that besides RMW instructions and semaphores, there are more available synchronization mechanisms.</a:t>
-            </a:r>
-          </a:p>
-          <a:p>
-            <a:pPr marL="0" lvl="1" defTabSz="921625" eaLnBrk="0" fontAlgn="base" hangingPunct="0">
-              <a:spcBef>
-                <a:spcPct val="30000"/>
-              </a:spcBef>
-              <a:spcAft>
-                <a:spcPct val="0"/>
-              </a:spcAft>
-              <a:defRPr/>
-            </a:pPr>
-            <a:r>
-              <a:rPr lang="en-US" dirty="0"/>
-              <a:t>Linux for instance offers synchronization primitives like mutex, condition variables, monitors, and barriers, among others.</a:t>
-            </a:r>
-          </a:p>
-          <a:p>
-            <a:pPr marL="0" lvl="1" defTabSz="921625" eaLnBrk="0" fontAlgn="base" hangingPunct="0">
-              <a:spcBef>
-                <a:spcPct val="30000"/>
-              </a:spcBef>
-              <a:spcAft>
-                <a:spcPct val="0"/>
-              </a:spcAft>
-              <a:defRPr/>
-            </a:pPr>
-            <a:endParaRPr lang="en-US" dirty="0"/>
-          </a:p>
-          <a:p>
-            <a:pPr marL="0" lvl="1" defTabSz="921625" eaLnBrk="0" fontAlgn="base" hangingPunct="0">
-              <a:spcBef>
-                <a:spcPct val="30000"/>
-              </a:spcBef>
-              <a:spcAft>
-                <a:spcPct val="0"/>
-              </a:spcAft>
-              <a:defRPr/>
-            </a:pPr>
-            <a:r>
-              <a:rPr lang="en-US" dirty="0"/>
-              <a:t>Mutex and semaphores are not exactly the same thing. Semaphore can be binary but also have values greater than 1. It’s not really important who decrements the semaphore, while the mutex needs to be released by the one that acquires it</a:t>
-            </a:r>
-          </a:p>
-          <a:p>
-            <a:pPr marL="0" lvl="1" defTabSz="921625" eaLnBrk="0" fontAlgn="base" hangingPunct="0">
-              <a:spcBef>
-                <a:spcPct val="30000"/>
-              </a:spcBef>
-              <a:spcAft>
-                <a:spcPct val="0"/>
-              </a:spcAft>
-              <a:defRPr/>
-            </a:pPr>
-            <a:endParaRPr lang="en-US" dirty="0"/>
-          </a:p>
-        </p:txBody>
-      </p:sp>
-    </p:spTree>
-    <p:extLst>
-      <p:ext uri="{BB962C8B-B14F-4D97-AF65-F5344CB8AC3E}">
-        <p14:creationId xmlns:p14="http://schemas.microsoft.com/office/powerpoint/2010/main" val="3986126721"/>
-      </p:ext>
-    </p:extLst>
-  </p:cSld>
-  <p:clrMapOvr>
-    <a:masterClrMapping/>
-  </p:clrMapOvr>
-</p:notes>
-</file>
-
-<file path=ppt/notesSlides/notesSlide43.xml><?xml version="1.0" encoding="utf-8"?>
-<p:notes xmlns:a="http://schemas.openxmlformats.org/drawingml/2006/main" xmlns:r="http://schemas.openxmlformats.org/officeDocument/2006/relationships" xmlns:p="http://schemas.openxmlformats.org/presentationml/2006/main">
-  <p:cSld>
-    <p:spTree>
-      <p:nvGrpSpPr>
-        <p:cNvPr id="1" name=""/>
-        <p:cNvGrpSpPr/>
-        <p:nvPr/>
-      </p:nvGrpSpPr>
-      <p:grpSpPr>
-        <a:xfrm>
-          <a:off x="0" y="0"/>
-          <a:ext cx="0" cy="0"/>
-          <a:chOff x="0" y="0"/>
-          <a:chExt cx="0" cy="0"/>
-        </a:xfrm>
-      </p:grpSpPr>
-      <p:sp>
-        <p:nvSpPr>
-          <p:cNvPr id="55298" name="Rectangle 7"/>
-          <p:cNvSpPr>
-            <a:spLocks noGrp="1" noChangeArrowheads="1"/>
-          </p:cNvSpPr>
-          <p:nvPr>
-            <p:ph type="sldNum" sz="quarter" idx="5"/>
-          </p:nvPr>
-        </p:nvSpPr>
-        <p:spPr>
-          <a:noFill/>
-        </p:spPr>
-        <p:txBody>
-          <a:bodyPr/>
-          <a:lstStyle/>
-          <a:p>
-            <a:pPr marL="0" marR="0" lvl="0" indent="0" algn="r" defTabSz="914400" rtl="0" eaLnBrk="1" fontAlgn="auto" latinLnBrk="0" hangingPunct="1">
-              <a:lnSpc>
-                <a:spcPct val="100000"/>
-              </a:lnSpc>
-              <a:spcBef>
-                <a:spcPts val="0"/>
-              </a:spcBef>
-              <a:spcAft>
-                <a:spcPts val="0"/>
-              </a:spcAft>
-              <a:buClrTx/>
-              <a:buSzTx/>
-              <a:buFontTx/>
-              <a:buNone/>
-              <a:tabLst/>
-              <a:defRPr/>
-            </a:pPr>
-            <a:fld id="{77C131F9-2B3B-450D-B45C-AF3D72CBFA2C}" type="slidenum">
-              <a:rPr kumimoji="0" lang="en-US" sz="1200" b="0" i="0" u="none" strike="noStrike" kern="1200" cap="none" spc="0" normalizeH="0" baseline="0" noProof="0" smtClean="0">
-                <a:ln>
-                  <a:noFill/>
-                </a:ln>
-                <a:solidFill>
-                  <a:prstClr val="black"/>
-                </a:solidFill>
-                <a:effectLst/>
-                <a:uLnTx/>
-                <a:uFillTx/>
-                <a:latin typeface="Calibri" panose="020F0502020204030204"/>
-                <a:ea typeface="+mn-ea"/>
-                <a:cs typeface="+mn-cs"/>
-              </a:rPr>
-              <a:pPr marL="0" marR="0" lvl="0" indent="0" algn="r" defTabSz="914400" rtl="0" eaLnBrk="1" fontAlgn="auto" latinLnBrk="0" hangingPunct="1">
-                <a:lnSpc>
-                  <a:spcPct val="100000"/>
-                </a:lnSpc>
-                <a:spcBef>
-                  <a:spcPts val="0"/>
-                </a:spcBef>
-                <a:spcAft>
-                  <a:spcPts val="0"/>
-                </a:spcAft>
-                <a:buClrTx/>
-                <a:buSzTx/>
-                <a:buFontTx/>
-                <a:buNone/>
-                <a:tabLst/>
-                <a:defRPr/>
-              </a:pPr>
-              <a:t>44</a:t>
-            </a:fld>
-            <a:endParaRPr kumimoji="0" lang="en-US" sz="1200" b="0" i="0" u="none" strike="noStrike" kern="1200" cap="none" spc="0" normalizeH="0" baseline="0" noProof="0">
-              <a:ln>
-                <a:noFill/>
-              </a:ln>
-              <a:solidFill>
-                <a:prstClr val="black"/>
-              </a:solidFill>
-              <a:effectLst/>
-              <a:uLnTx/>
-              <a:uFillTx/>
-              <a:latin typeface="Calibri" panose="020F0502020204030204"/>
-              <a:ea typeface="+mn-ea"/>
-              <a:cs typeface="+mn-cs"/>
-            </a:endParaRPr>
-          </a:p>
-        </p:txBody>
-      </p:sp>
-      <p:sp>
-        <p:nvSpPr>
-          <p:cNvPr id="55299" name="Rectangle 2"/>
-          <p:cNvSpPr>
-            <a:spLocks noGrp="1" noRot="1" noChangeAspect="1" noChangeArrowheads="1" noTextEdit="1"/>
-          </p:cNvSpPr>
-          <p:nvPr>
-            <p:ph type="sldImg"/>
-          </p:nvPr>
-        </p:nvSpPr>
-        <p:spPr>
-          <a:ln/>
-        </p:spPr>
-      </p:sp>
-      <p:sp>
-        <p:nvSpPr>
-          <p:cNvPr id="55300" name="Rectangle 3"/>
-          <p:cNvSpPr>
-            <a:spLocks noGrp="1" noChangeArrowheads="1"/>
-          </p:cNvSpPr>
-          <p:nvPr>
-            <p:ph type="body" idx="1"/>
-          </p:nvPr>
-        </p:nvSpPr>
-        <p:spPr>
-          <a:noFill/>
-          <a:ln/>
-        </p:spPr>
-        <p:txBody>
-          <a:bodyPr/>
-          <a:lstStyle/>
-          <a:p>
-            <a:pPr marL="0" marR="0" lvl="0" indent="0" algn="l" defTabSz="914400" rtl="0" eaLnBrk="1" fontAlgn="auto" latinLnBrk="0" hangingPunct="1">
-              <a:lnSpc>
-                <a:spcPct val="100000"/>
-              </a:lnSpc>
-              <a:spcBef>
-                <a:spcPts val="0"/>
-              </a:spcBef>
-              <a:spcAft>
-                <a:spcPts val="0"/>
-              </a:spcAft>
-              <a:buClrTx/>
-              <a:buSzTx/>
-              <a:buFontTx/>
-              <a:buNone/>
-              <a:tabLst/>
-              <a:defRPr/>
-            </a:pPr>
-            <a:r>
-              <a:rPr lang="en-US" dirty="0"/>
-              <a:t>Which one to use is something that depends on the application. For instance, if you have to choose between an entry section that relies on spinning or one that uses a Linux </a:t>
-            </a:r>
-            <a:r>
-              <a:rPr lang="en-US" dirty="0" err="1"/>
-              <a:t>futex</a:t>
-            </a:r>
-            <a:r>
-              <a:rPr lang="en-US" dirty="0"/>
-              <a:t> (which tries to acquire a lock in the entry section but instead of spinning puts the thread in the waiting queue), you might want to consider how long the critical section is. It might be OK to spin and "waste" CPU for a relatively short critical section that happens sporadically, but maybe not for a long one that is executed frequently...</a:t>
-            </a:r>
-            <a:endParaRPr lang="sv-SE" dirty="0">
-              <a:latin typeface="Times New Roman" pitchFamily="18" charset="0"/>
-            </a:endParaRPr>
-          </a:p>
-          <a:p>
-            <a:endParaRPr lang="sv-SE" dirty="0"/>
-          </a:p>
-        </p:txBody>
-      </p:sp>
-    </p:spTree>
-    <p:extLst>
-      <p:ext uri="{BB962C8B-B14F-4D97-AF65-F5344CB8AC3E}">
-        <p14:creationId xmlns:p14="http://schemas.microsoft.com/office/powerpoint/2010/main" val="2828596620"/>
+        <p14:creationId xmlns:p14="http://schemas.microsoft.com/office/powerpoint/2010/main" val="4181208129"/>
       </p:ext>
     </p:extLst>
   </p:cSld>
@@ -6184,372 +6895,65 @@
       </p:grpSpPr>
       <p:sp>
         <p:nvSpPr>
-          <p:cNvPr id="54274" name="Rectangle 7"/>
+          <p:cNvPr id="2" name="Slide Image Placeholder 1"/>
           <p:cNvSpPr>
-            <a:spLocks noGrp="1" noChangeArrowheads="1"/>
+            <a:spLocks noGrp="1" noRot="1" noChangeAspect="1"/>
+          </p:cNvSpPr>
+          <p:nvPr>
+            <p:ph type="sldImg"/>
+          </p:nvPr>
+        </p:nvSpPr>
+        <p:spPr/>
+      </p:sp>
+      <p:sp>
+        <p:nvSpPr>
+          <p:cNvPr id="3" name="Notes Placeholder 2"/>
+          <p:cNvSpPr>
+            <a:spLocks noGrp="1"/>
+          </p:cNvSpPr>
+          <p:nvPr>
+            <p:ph type="body" idx="1"/>
+          </p:nvPr>
+        </p:nvSpPr>
+        <p:spPr/>
+        <p:txBody>
+          <a:bodyPr/>
+          <a:lstStyle/>
+          <a:p>
+            <a:r>
+              <a:rPr lang="en-US" dirty="0"/>
+              <a:t>a b c a b c</a:t>
+            </a:r>
+          </a:p>
+        </p:txBody>
+      </p:sp>
+      <p:sp>
+        <p:nvSpPr>
+          <p:cNvPr id="4" name="Slide Number Placeholder 3"/>
+          <p:cNvSpPr>
+            <a:spLocks noGrp="1"/>
           </p:cNvSpPr>
           <p:nvPr>
             <p:ph type="sldNum" sz="quarter" idx="5"/>
           </p:nvPr>
         </p:nvSpPr>
-        <p:spPr>
-          <a:noFill/>
-        </p:spPr>
+        <p:spPr/>
         <p:txBody>
           <a:bodyPr/>
           <a:lstStyle/>
           <a:p>
-            <a:pPr marL="0" marR="0" lvl="0" indent="0" algn="r" defTabSz="914400" rtl="0" eaLnBrk="1" fontAlgn="auto" latinLnBrk="0" hangingPunct="1">
-              <a:lnSpc>
-                <a:spcPct val="100000"/>
-              </a:lnSpc>
-              <a:spcBef>
-                <a:spcPts val="0"/>
-              </a:spcBef>
-              <a:spcAft>
-                <a:spcPts val="0"/>
-              </a:spcAft>
-              <a:buClrTx/>
-              <a:buSzTx/>
-              <a:buFontTx/>
-              <a:buNone/>
-              <a:tabLst/>
-              <a:defRPr/>
-            </a:pPr>
-            <a:fld id="{B34677B0-FD6B-4B18-AFB8-01DF365B7CC8}" type="slidenum">
-              <a:rPr kumimoji="0" lang="en-US" sz="1200" b="0" i="0" u="none" strike="noStrike" kern="1200" cap="none" spc="0" normalizeH="0" baseline="0" noProof="0" smtClean="0">
-                <a:ln>
-                  <a:noFill/>
-                </a:ln>
-                <a:solidFill>
-                  <a:prstClr val="black"/>
-                </a:solidFill>
-                <a:effectLst/>
-                <a:uLnTx/>
-                <a:uFillTx/>
-                <a:latin typeface="Calibri" panose="020F0502020204030204"/>
-                <a:ea typeface="+mn-ea"/>
-                <a:cs typeface="+mn-cs"/>
-              </a:rPr>
-              <a:pPr marL="0" marR="0" lvl="0" indent="0" algn="r" defTabSz="914400" rtl="0" eaLnBrk="1" fontAlgn="auto" latinLnBrk="0" hangingPunct="1">
-                <a:lnSpc>
-                  <a:spcPct val="100000"/>
-                </a:lnSpc>
-                <a:spcBef>
-                  <a:spcPts val="0"/>
-                </a:spcBef>
-                <a:spcAft>
-                  <a:spcPts val="0"/>
-                </a:spcAft>
-                <a:buClrTx/>
-                <a:buSzTx/>
-                <a:buFontTx/>
-                <a:buNone/>
-                <a:tabLst/>
-                <a:defRPr/>
-              </a:pPr>
-              <a:t>45</a:t>
+            <a:fld id="{20BC1079-C5C6-1A45-8E7E-B20B607B09A1}" type="slidenum">
+              <a:rPr lang="en-US" smtClean="0"/>
+              <a:t>46</a:t>
             </a:fld>
-            <a:endParaRPr kumimoji="0" lang="en-US" sz="1200" b="0" i="0" u="none" strike="noStrike" kern="1200" cap="none" spc="0" normalizeH="0" baseline="0" noProof="0">
-              <a:ln>
-                <a:noFill/>
-              </a:ln>
-              <a:solidFill>
-                <a:prstClr val="black"/>
-              </a:solidFill>
-              <a:effectLst/>
-              <a:uLnTx/>
-              <a:uFillTx/>
-              <a:latin typeface="Calibri" panose="020F0502020204030204"/>
-              <a:ea typeface="+mn-ea"/>
-              <a:cs typeface="+mn-cs"/>
-            </a:endParaRPr>
-          </a:p>
-        </p:txBody>
-      </p:sp>
-      <p:sp>
-        <p:nvSpPr>
-          <p:cNvPr id="54275" name="Rectangle 2"/>
-          <p:cNvSpPr>
-            <a:spLocks noGrp="1" noRot="1" noChangeAspect="1" noChangeArrowheads="1" noTextEdit="1"/>
-          </p:cNvSpPr>
-          <p:nvPr>
-            <p:ph type="sldImg"/>
-          </p:nvPr>
-        </p:nvSpPr>
-        <p:spPr>
-          <a:ln/>
-        </p:spPr>
-      </p:sp>
-      <p:sp>
-        <p:nvSpPr>
-          <p:cNvPr id="54276" name="Rectangle 3"/>
-          <p:cNvSpPr>
-            <a:spLocks noGrp="1" noChangeArrowheads="1"/>
-          </p:cNvSpPr>
-          <p:nvPr>
-            <p:ph type="body" idx="1"/>
-          </p:nvPr>
-        </p:nvSpPr>
-        <p:spPr>
-          <a:noFill/>
-          <a:ln/>
-        </p:spPr>
-        <p:txBody>
-          <a:bodyPr/>
-          <a:lstStyle/>
-          <a:p>
-            <a:r>
-              <a:rPr lang="sv-SE" dirty="0"/>
-              <a:t>Windows </a:t>
-            </a:r>
-            <a:r>
-              <a:rPr lang="sv-SE" dirty="0" err="1"/>
-              <a:t>too</a:t>
-            </a:r>
-            <a:r>
-              <a:rPr lang="sv-SE" dirty="0"/>
-              <a:t> offers </a:t>
-            </a:r>
-            <a:r>
-              <a:rPr lang="sv-SE" dirty="0" err="1"/>
-              <a:t>synchronization</a:t>
-            </a:r>
-            <a:r>
-              <a:rPr lang="sv-SE" dirty="0"/>
-              <a:t> primitives, for </a:t>
-            </a:r>
-            <a:r>
-              <a:rPr lang="sv-SE" dirty="0" err="1"/>
-              <a:t>instance</a:t>
-            </a:r>
-            <a:r>
-              <a:rPr lang="sv-SE" dirty="0"/>
-              <a:t> </a:t>
-            </a:r>
-            <a:r>
-              <a:rPr lang="sv-SE" dirty="0" err="1"/>
-              <a:t>interrupt</a:t>
-            </a:r>
-            <a:r>
-              <a:rPr lang="sv-SE" dirty="0"/>
-              <a:t> masks to </a:t>
-            </a:r>
-            <a:r>
-              <a:rPr lang="sv-SE" dirty="0" err="1"/>
-              <a:t>protect</a:t>
-            </a:r>
-            <a:r>
-              <a:rPr lang="sv-SE" dirty="0"/>
-              <a:t> access to global </a:t>
-            </a:r>
-            <a:r>
-              <a:rPr lang="sv-SE" dirty="0" err="1"/>
-              <a:t>resources</a:t>
-            </a:r>
-            <a:r>
-              <a:rPr lang="sv-SE" dirty="0"/>
-              <a:t> on </a:t>
-            </a:r>
-            <a:r>
-              <a:rPr lang="sv-SE" dirty="0" err="1"/>
-              <a:t>uniprocessors</a:t>
-            </a:r>
-            <a:r>
-              <a:rPr lang="sv-SE" dirty="0"/>
-              <a:t> and </a:t>
-            </a:r>
-            <a:r>
-              <a:rPr lang="sv-SE" dirty="0" err="1"/>
-              <a:t>busy-wait</a:t>
-            </a:r>
-            <a:r>
-              <a:rPr lang="sv-SE" dirty="0"/>
-              <a:t> spinlocks for multiprocessors (</a:t>
-            </a:r>
-            <a:r>
-              <a:rPr lang="sv-SE" dirty="0" err="1"/>
-              <a:t>we</a:t>
-            </a:r>
-            <a:r>
-              <a:rPr lang="sv-SE" dirty="0"/>
-              <a:t> </a:t>
-            </a:r>
-            <a:r>
-              <a:rPr lang="sv-SE" dirty="0" err="1"/>
-              <a:t>have</a:t>
-            </a:r>
-            <a:r>
-              <a:rPr lang="sv-SE" dirty="0"/>
-              <a:t> </a:t>
-            </a:r>
-            <a:r>
-              <a:rPr lang="sv-SE" dirty="0" err="1"/>
-              <a:t>discussed</a:t>
-            </a:r>
-            <a:r>
-              <a:rPr lang="sv-SE" dirty="0"/>
-              <a:t> </a:t>
-            </a:r>
-            <a:r>
-              <a:rPr lang="sv-SE" dirty="0" err="1"/>
-              <a:t>before</a:t>
-            </a:r>
-            <a:r>
-              <a:rPr lang="sv-SE" dirty="0"/>
-              <a:t> </a:t>
-            </a:r>
-            <a:r>
-              <a:rPr lang="sv-SE" dirty="0" err="1"/>
-              <a:t>why</a:t>
-            </a:r>
-            <a:r>
-              <a:rPr lang="sv-SE" dirty="0"/>
-              <a:t> </a:t>
-            </a:r>
-            <a:r>
-              <a:rPr lang="sv-SE" dirty="0" err="1"/>
-              <a:t>disabling</a:t>
-            </a:r>
-            <a:r>
-              <a:rPr lang="sv-SE" dirty="0"/>
-              <a:t> </a:t>
-            </a:r>
-            <a:r>
-              <a:rPr lang="sv-SE" dirty="0" err="1"/>
-              <a:t>interrupts</a:t>
-            </a:r>
-            <a:r>
-              <a:rPr lang="sv-SE" dirty="0"/>
-              <a:t> on a </a:t>
-            </a:r>
-            <a:r>
-              <a:rPr lang="sv-SE" dirty="0" err="1"/>
-              <a:t>single</a:t>
-            </a:r>
-            <a:r>
-              <a:rPr lang="sv-SE" dirty="0"/>
-              <a:t> processor </a:t>
-            </a:r>
-            <a:r>
-              <a:rPr lang="sv-SE" dirty="0" err="1"/>
-              <a:t>might</a:t>
-            </a:r>
-            <a:r>
-              <a:rPr lang="sv-SE" dirty="0"/>
-              <a:t> be not </a:t>
-            </a:r>
-            <a:r>
-              <a:rPr lang="sv-SE" dirty="0" err="1"/>
-              <a:t>enough</a:t>
-            </a:r>
-            <a:r>
-              <a:rPr lang="sv-SE" dirty="0"/>
-              <a:t> to </a:t>
-            </a:r>
-            <a:r>
-              <a:rPr lang="sv-SE" dirty="0" err="1"/>
-              <a:t>have</a:t>
-            </a:r>
-            <a:r>
-              <a:rPr lang="sv-SE" dirty="0"/>
-              <a:t> valid solutions to the </a:t>
-            </a:r>
-            <a:r>
-              <a:rPr lang="sv-SE" dirty="0" err="1"/>
-              <a:t>critical</a:t>
-            </a:r>
-            <a:r>
-              <a:rPr lang="sv-SE" dirty="0"/>
-              <a:t> </a:t>
-            </a:r>
-            <a:r>
-              <a:rPr lang="sv-SE" dirty="0" err="1"/>
-              <a:t>section</a:t>
-            </a:r>
-            <a:r>
-              <a:rPr lang="sv-SE" dirty="0"/>
-              <a:t> problem). </a:t>
-            </a:r>
-            <a:r>
-              <a:rPr lang="sv-SE" dirty="0" err="1"/>
-              <a:t>Finally</a:t>
-            </a:r>
-            <a:r>
-              <a:rPr lang="sv-SE" dirty="0"/>
-              <a:t>, it </a:t>
-            </a:r>
-            <a:r>
-              <a:rPr lang="sv-SE" dirty="0" err="1"/>
-              <a:t>also</a:t>
-            </a:r>
-            <a:r>
-              <a:rPr lang="sv-SE" dirty="0"/>
-              <a:t> offers </a:t>
-            </a:r>
-            <a:r>
-              <a:rPr lang="sv-SE" dirty="0" err="1"/>
-              <a:t>objects</a:t>
-            </a:r>
-            <a:r>
-              <a:rPr lang="sv-SE" dirty="0"/>
-              <a:t> like </a:t>
-            </a:r>
-            <a:r>
-              <a:rPr lang="sv-SE" dirty="0" err="1"/>
-              <a:t>mutexes</a:t>
-            </a:r>
-            <a:r>
-              <a:rPr lang="sv-SE" dirty="0"/>
-              <a:t>, </a:t>
-            </a:r>
-            <a:r>
-              <a:rPr lang="sv-SE" dirty="0" err="1"/>
-              <a:t>semaphores</a:t>
-            </a:r>
-            <a:r>
-              <a:rPr lang="sv-SE" dirty="0"/>
-              <a:t> or to </a:t>
-            </a:r>
-            <a:r>
-              <a:rPr lang="sv-SE" dirty="0" err="1"/>
-              <a:t>provide</a:t>
-            </a:r>
-            <a:r>
-              <a:rPr lang="sv-SE" dirty="0"/>
-              <a:t> events (</a:t>
-            </a:r>
-            <a:r>
-              <a:rPr lang="sv-SE" dirty="0" err="1"/>
-              <a:t>similar</a:t>
-            </a:r>
-            <a:r>
-              <a:rPr lang="sv-SE" dirty="0"/>
-              <a:t> to </a:t>
-            </a:r>
-            <a:r>
-              <a:rPr lang="sv-SE" dirty="0" err="1"/>
-              <a:t>condition</a:t>
-            </a:r>
-            <a:r>
-              <a:rPr lang="sv-SE" dirty="0"/>
-              <a:t> </a:t>
-            </a:r>
-            <a:r>
-              <a:rPr lang="sv-SE" dirty="0" err="1"/>
-              <a:t>variables</a:t>
-            </a:r>
-            <a:r>
-              <a:rPr lang="sv-SE" dirty="0"/>
-              <a:t>).</a:t>
-            </a:r>
+            <a:endParaRPr lang="en-US"/>
           </a:p>
         </p:txBody>
       </p:sp>
     </p:spTree>
     <p:extLst>
       <p:ext uri="{BB962C8B-B14F-4D97-AF65-F5344CB8AC3E}">
-        <p14:creationId xmlns:p14="http://schemas.microsoft.com/office/powerpoint/2010/main" val="3321594125"/>
+        <p14:creationId xmlns:p14="http://schemas.microsoft.com/office/powerpoint/2010/main" val="3114456274"/>
       </p:ext>
     </p:extLst>
   </p:cSld>
@@ -6578,465 +6982,239 @@
       </p:grpSpPr>
       <p:sp>
         <p:nvSpPr>
-          <p:cNvPr id="56322" name="Rectangle 7"/>
+          <p:cNvPr id="2" name="Slide Image Placeholder 1"/>
           <p:cNvSpPr>
-            <a:spLocks noGrp="1" noChangeArrowheads="1"/>
+            <a:spLocks noGrp="1" noRot="1" noChangeAspect="1"/>
+          </p:cNvSpPr>
+          <p:nvPr>
+            <p:ph type="sldImg"/>
+          </p:nvPr>
+        </p:nvSpPr>
+        <p:spPr/>
+      </p:sp>
+      <p:sp>
+        <p:nvSpPr>
+          <p:cNvPr id="3" name="Notes Placeholder 2"/>
+          <p:cNvSpPr>
+            <a:spLocks noGrp="1"/>
+          </p:cNvSpPr>
+          <p:nvPr>
+            <p:ph type="body" idx="1"/>
+          </p:nvPr>
+        </p:nvSpPr>
+        <p:spPr/>
+        <p:txBody>
+          <a:bodyPr/>
+          <a:lstStyle/>
+          <a:p>
+            <a:r>
+              <a:rPr lang="en-US" dirty="0"/>
+              <a:t>Yes</a:t>
+            </a:r>
+          </a:p>
+        </p:txBody>
+      </p:sp>
+      <p:sp>
+        <p:nvSpPr>
+          <p:cNvPr id="4" name="Slide Number Placeholder 3"/>
+          <p:cNvSpPr>
+            <a:spLocks noGrp="1"/>
           </p:cNvSpPr>
           <p:nvPr>
             <p:ph type="sldNum" sz="quarter" idx="5"/>
           </p:nvPr>
         </p:nvSpPr>
-        <p:spPr>
-          <a:noFill/>
-        </p:spPr>
+        <p:spPr/>
         <p:txBody>
           <a:bodyPr/>
           <a:lstStyle/>
           <a:p>
-            <a:pPr marL="0" marR="0" lvl="0" indent="0" algn="r" defTabSz="914400" rtl="0" eaLnBrk="1" fontAlgn="auto" latinLnBrk="0" hangingPunct="1">
-              <a:lnSpc>
-                <a:spcPct val="100000"/>
-              </a:lnSpc>
-              <a:spcBef>
-                <a:spcPts val="0"/>
-              </a:spcBef>
-              <a:spcAft>
-                <a:spcPts val="0"/>
-              </a:spcAft>
-              <a:buClrTx/>
-              <a:buSzTx/>
-              <a:buFontTx/>
-              <a:buNone/>
-              <a:tabLst/>
-              <a:defRPr/>
-            </a:pPr>
-            <a:fld id="{4DB15479-77C4-4247-86C7-895882BE5E1E}" type="slidenum">
-              <a:rPr kumimoji="0" lang="en-US" sz="1200" b="0" i="0" u="none" strike="noStrike" kern="1200" cap="none" spc="0" normalizeH="0" baseline="0" noProof="0" smtClean="0">
-                <a:ln>
-                  <a:noFill/>
-                </a:ln>
-                <a:solidFill>
-                  <a:prstClr val="black"/>
-                </a:solidFill>
-                <a:effectLst/>
-                <a:uLnTx/>
-                <a:uFillTx/>
-                <a:latin typeface="Calibri" panose="020F0502020204030204"/>
-                <a:ea typeface="+mn-ea"/>
-                <a:cs typeface="+mn-cs"/>
-              </a:rPr>
-              <a:pPr marL="0" marR="0" lvl="0" indent="0" algn="r" defTabSz="914400" rtl="0" eaLnBrk="1" fontAlgn="auto" latinLnBrk="0" hangingPunct="1">
-                <a:lnSpc>
-                  <a:spcPct val="100000"/>
-                </a:lnSpc>
-                <a:spcBef>
-                  <a:spcPts val="0"/>
-                </a:spcBef>
-                <a:spcAft>
-                  <a:spcPts val="0"/>
-                </a:spcAft>
-                <a:buClrTx/>
-                <a:buSzTx/>
-                <a:buFontTx/>
-                <a:buNone/>
-                <a:tabLst/>
-                <a:defRPr/>
-              </a:pPr>
-              <a:t>46</a:t>
+            <a:fld id="{20BC1079-C5C6-1A45-8E7E-B20B607B09A1}" type="slidenum">
+              <a:rPr lang="en-US" smtClean="0"/>
+              <a:t>47</a:t>
             </a:fld>
-            <a:endParaRPr kumimoji="0" lang="en-US" sz="1200" b="0" i="0" u="none" strike="noStrike" kern="1200" cap="none" spc="0" normalizeH="0" baseline="0" noProof="0">
-              <a:ln>
-                <a:noFill/>
-              </a:ln>
-              <a:solidFill>
-                <a:prstClr val="black"/>
-              </a:solidFill>
-              <a:effectLst/>
-              <a:uLnTx/>
-              <a:uFillTx/>
-              <a:latin typeface="Calibri" panose="020F0502020204030204"/>
-              <a:ea typeface="+mn-ea"/>
-              <a:cs typeface="+mn-cs"/>
-            </a:endParaRPr>
+            <a:endParaRPr lang="en-US"/>
           </a:p>
         </p:txBody>
       </p:sp>
+    </p:spTree>
+    <p:extLst>
+      <p:ext uri="{BB962C8B-B14F-4D97-AF65-F5344CB8AC3E}">
+        <p14:creationId xmlns:p14="http://schemas.microsoft.com/office/powerpoint/2010/main" val="1108123815"/>
+      </p:ext>
+    </p:extLst>
+  </p:cSld>
+  <p:clrMapOvr>
+    <a:masterClrMapping/>
+  </p:clrMapOvr>
+</p:notes>
+</file>
+
+<file path=ppt/notesSlides/notesSlide46.xml><?xml version="1.0" encoding="utf-8"?>
+<p:notes xmlns:a="http://schemas.openxmlformats.org/drawingml/2006/main" xmlns:r="http://schemas.openxmlformats.org/officeDocument/2006/relationships" xmlns:p="http://schemas.openxmlformats.org/presentationml/2006/main">
+  <p:cSld>
+    <p:spTree>
+      <p:nvGrpSpPr>
+        <p:cNvPr id="1" name=""/>
+        <p:cNvGrpSpPr/>
+        <p:nvPr/>
+      </p:nvGrpSpPr>
+      <p:grpSpPr>
+        <a:xfrm>
+          <a:off x="0" y="0"/>
+          <a:ext cx="0" cy="0"/>
+          <a:chOff x="0" y="0"/>
+          <a:chExt cx="0" cy="0"/>
+        </a:xfrm>
+      </p:grpSpPr>
       <p:sp>
         <p:nvSpPr>
-          <p:cNvPr id="56323" name="Rectangle 2"/>
+          <p:cNvPr id="2" name="Slide Image Placeholder 1"/>
           <p:cNvSpPr>
-            <a:spLocks noGrp="1" noRot="1" noChangeAspect="1" noChangeArrowheads="1" noTextEdit="1"/>
+            <a:spLocks noGrp="1" noRot="1" noChangeAspect="1"/>
           </p:cNvSpPr>
           <p:nvPr>
             <p:ph type="sldImg"/>
           </p:nvPr>
         </p:nvSpPr>
-        <p:spPr>
-          <a:ln/>
-        </p:spPr>
+        <p:spPr/>
       </p:sp>
       <p:sp>
         <p:nvSpPr>
-          <p:cNvPr id="56324" name="Rectangle 3"/>
+          <p:cNvPr id="3" name="Notes Placeholder 2"/>
           <p:cNvSpPr>
-            <a:spLocks noGrp="1" noChangeArrowheads="1"/>
+            <a:spLocks noGrp="1"/>
           </p:cNvSpPr>
           <p:nvPr>
             <p:ph type="body" idx="1"/>
           </p:nvPr>
         </p:nvSpPr>
-        <p:spPr>
-          <a:noFill/>
-          <a:ln/>
-        </p:spPr>
+        <p:spPr/>
         <p:txBody>
           <a:bodyPr/>
           <a:lstStyle/>
           <a:p>
             <a:r>
-              <a:rPr lang="sv-SE" dirty="0"/>
-              <a:t>If </a:t>
-            </a:r>
-            <a:r>
-              <a:rPr lang="sv-SE" dirty="0" err="1"/>
-              <a:t>we</a:t>
-            </a:r>
-            <a:r>
-              <a:rPr lang="sv-SE" dirty="0"/>
-              <a:t> look at </a:t>
-            </a:r>
-            <a:r>
-              <a:rPr lang="sv-SE" dirty="0" err="1"/>
-              <a:t>pthreads</a:t>
-            </a:r>
-            <a:r>
-              <a:rPr lang="sv-SE" dirty="0"/>
-              <a:t>, </a:t>
-            </a:r>
-            <a:r>
-              <a:rPr lang="sv-SE" dirty="0" err="1"/>
-              <a:t>you</a:t>
-            </a:r>
-            <a:r>
-              <a:rPr lang="sv-SE" dirty="0"/>
-              <a:t> </a:t>
-            </a:r>
-            <a:r>
-              <a:rPr lang="sv-SE" dirty="0" err="1"/>
-              <a:t>will</a:t>
-            </a:r>
-            <a:r>
-              <a:rPr lang="sv-SE" dirty="0"/>
-              <a:t> </a:t>
-            </a:r>
-            <a:r>
-              <a:rPr lang="sv-SE" dirty="0" err="1"/>
-              <a:t>see</a:t>
-            </a:r>
-            <a:r>
-              <a:rPr lang="sv-SE" dirty="0"/>
-              <a:t> it </a:t>
-            </a:r>
-            <a:r>
-              <a:rPr lang="sv-SE" dirty="0" err="1"/>
-              <a:t>also</a:t>
-            </a:r>
-            <a:r>
-              <a:rPr lang="sv-SE" dirty="0"/>
-              <a:t> offers </a:t>
-            </a:r>
-            <a:r>
-              <a:rPr lang="sv-SE" dirty="0" err="1"/>
-              <a:t>synchronization</a:t>
-            </a:r>
-            <a:r>
-              <a:rPr lang="sv-SE" dirty="0"/>
-              <a:t> </a:t>
-            </a:r>
-            <a:r>
-              <a:rPr lang="sv-SE" dirty="0" err="1"/>
-              <a:t>mechanisms</a:t>
-            </a:r>
-            <a:r>
-              <a:rPr lang="sv-SE" dirty="0"/>
-              <a:t> like </a:t>
-            </a:r>
-            <a:r>
-              <a:rPr lang="sv-SE" dirty="0" err="1"/>
-              <a:t>mutex</a:t>
-            </a:r>
-            <a:r>
-              <a:rPr lang="sv-SE" dirty="0"/>
-              <a:t> locks </a:t>
-            </a:r>
-            <a:r>
-              <a:rPr lang="sv-SE" dirty="0" err="1"/>
-              <a:t>with</a:t>
-            </a:r>
-            <a:r>
-              <a:rPr lang="sv-SE" dirty="0"/>
-              <a:t> </a:t>
-            </a:r>
-            <a:r>
-              <a:rPr lang="sv-SE" dirty="0" err="1"/>
-              <a:t>blocking</a:t>
-            </a:r>
-            <a:r>
-              <a:rPr lang="sv-SE" dirty="0"/>
-              <a:t> </a:t>
-            </a:r>
-            <a:r>
-              <a:rPr lang="sv-SE" dirty="0" err="1"/>
-              <a:t>queues</a:t>
-            </a:r>
-            <a:r>
-              <a:rPr lang="sv-SE" dirty="0"/>
-              <a:t>, </a:t>
-            </a:r>
-            <a:r>
-              <a:rPr lang="sv-SE" dirty="0" err="1"/>
-              <a:t>which</a:t>
-            </a:r>
-            <a:r>
-              <a:rPr lang="sv-SE" dirty="0"/>
-              <a:t> </a:t>
-            </a:r>
-            <a:r>
-              <a:rPr lang="sv-SE" dirty="0" err="1"/>
-              <a:t>can</a:t>
-            </a:r>
-            <a:r>
-              <a:rPr lang="sv-SE" dirty="0"/>
-              <a:t> </a:t>
-            </a:r>
-            <a:r>
-              <a:rPr lang="sv-SE" dirty="0" err="1"/>
-              <a:t>also</a:t>
-            </a:r>
-            <a:r>
-              <a:rPr lang="sv-SE" dirty="0"/>
-              <a:t> support </a:t>
-            </a:r>
-            <a:r>
-              <a:rPr lang="sv-SE" dirty="0" err="1"/>
-              <a:t>fairness</a:t>
-            </a:r>
-            <a:r>
-              <a:rPr lang="sv-SE" dirty="0"/>
-              <a:t>, </a:t>
-            </a:r>
-            <a:r>
-              <a:rPr lang="sv-SE" dirty="0" err="1"/>
-              <a:t>condition</a:t>
-            </a:r>
-            <a:r>
-              <a:rPr lang="sv-SE" dirty="0"/>
-              <a:t> </a:t>
-            </a:r>
-            <a:r>
-              <a:rPr lang="sv-SE" dirty="0" err="1"/>
-              <a:t>variables</a:t>
-            </a:r>
-            <a:r>
-              <a:rPr lang="sv-SE" dirty="0"/>
-              <a:t>, and </a:t>
-            </a:r>
-            <a:r>
-              <a:rPr lang="sv-SE" dirty="0" err="1"/>
-              <a:t>other</a:t>
-            </a:r>
-            <a:r>
-              <a:rPr lang="sv-SE" dirty="0"/>
-              <a:t> non-portable extensions.</a:t>
-            </a:r>
-          </a:p>
-          <a:p>
-            <a:endParaRPr lang="sv-SE" dirty="0"/>
-          </a:p>
-          <a:p>
-            <a:r>
-              <a:rPr lang="sv-SE" dirty="0" err="1"/>
-              <a:t>Notice</a:t>
-            </a:r>
-            <a:r>
-              <a:rPr lang="sv-SE" dirty="0"/>
-              <a:t> </a:t>
-            </a:r>
-            <a:r>
-              <a:rPr lang="sv-SE" dirty="0" err="1"/>
-              <a:t>that</a:t>
-            </a:r>
-            <a:r>
-              <a:rPr lang="sv-SE" dirty="0"/>
-              <a:t> an OS </a:t>
-            </a:r>
-            <a:r>
-              <a:rPr lang="sv-SE" dirty="0" err="1"/>
-              <a:t>that</a:t>
-            </a:r>
-            <a:r>
-              <a:rPr lang="sv-SE" dirty="0"/>
-              <a:t> </a:t>
-            </a:r>
-            <a:r>
-              <a:rPr lang="sv-SE" dirty="0" err="1"/>
-              <a:t>defines</a:t>
-            </a:r>
-            <a:r>
-              <a:rPr lang="sv-SE" dirty="0"/>
-              <a:t> and offers </a:t>
-            </a:r>
-            <a:r>
-              <a:rPr lang="sv-SE" dirty="0" err="1"/>
-              <a:t>such</a:t>
-            </a:r>
-            <a:r>
-              <a:rPr lang="sv-SE" dirty="0"/>
-              <a:t> </a:t>
-            </a:r>
-            <a:r>
-              <a:rPr lang="sv-SE" dirty="0" err="1"/>
-              <a:t>synchronization</a:t>
-            </a:r>
-            <a:r>
-              <a:rPr lang="sv-SE" dirty="0"/>
-              <a:t> primitives </a:t>
-            </a:r>
-            <a:r>
-              <a:rPr lang="sv-SE" dirty="0" err="1"/>
-              <a:t>usually</a:t>
-            </a:r>
-            <a:r>
-              <a:rPr lang="sv-SE" dirty="0"/>
-              <a:t> </a:t>
-            </a:r>
-            <a:r>
-              <a:rPr lang="sv-SE" dirty="0" err="1"/>
-              <a:t>needs</a:t>
-            </a:r>
-            <a:r>
-              <a:rPr lang="sv-SE" dirty="0"/>
-              <a:t> </a:t>
-            </a:r>
-            <a:r>
-              <a:rPr lang="sv-SE" dirty="0" err="1"/>
-              <a:t>such</a:t>
-            </a:r>
-            <a:r>
-              <a:rPr lang="sv-SE" dirty="0"/>
-              <a:t> </a:t>
-            </a:r>
-            <a:r>
-              <a:rPr lang="sv-SE" dirty="0" err="1"/>
-              <a:t>synchronization</a:t>
-            </a:r>
-            <a:r>
-              <a:rPr lang="sv-SE" dirty="0"/>
-              <a:t> primitives </a:t>
-            </a:r>
-            <a:r>
-              <a:rPr lang="sv-SE" dirty="0" err="1"/>
-              <a:t>itself</a:t>
-            </a:r>
-            <a:r>
-              <a:rPr lang="sv-SE" dirty="0"/>
-              <a:t>, to </a:t>
-            </a:r>
-            <a:r>
-              <a:rPr lang="sv-SE" dirty="0" err="1"/>
-              <a:t>protect</a:t>
-            </a:r>
-            <a:r>
-              <a:rPr lang="sv-SE" dirty="0"/>
-              <a:t> </a:t>
-            </a:r>
-            <a:r>
-              <a:rPr lang="sv-SE" dirty="0" err="1"/>
-              <a:t>its</a:t>
-            </a:r>
-            <a:r>
-              <a:rPr lang="sv-SE" dirty="0"/>
-              <a:t> </a:t>
-            </a:r>
-            <a:r>
-              <a:rPr lang="sv-SE" dirty="0" err="1"/>
-              <a:t>shared</a:t>
-            </a:r>
-            <a:r>
-              <a:rPr lang="sv-SE" dirty="0"/>
-              <a:t> </a:t>
-            </a:r>
-            <a:r>
-              <a:rPr lang="sv-SE" dirty="0" err="1"/>
-              <a:t>variables</a:t>
-            </a:r>
-            <a:r>
-              <a:rPr lang="sv-SE" dirty="0"/>
-              <a:t> </a:t>
-            </a:r>
-            <a:r>
-              <a:rPr lang="sv-SE" dirty="0" err="1"/>
-              <a:t>when</a:t>
-            </a:r>
-            <a:r>
-              <a:rPr lang="sv-SE" dirty="0"/>
-              <a:t> </a:t>
-            </a:r>
-            <a:r>
-              <a:rPr lang="sv-SE" dirty="0" err="1"/>
-              <a:t>multiple</a:t>
-            </a:r>
-            <a:r>
-              <a:rPr lang="sv-SE" dirty="0"/>
-              <a:t> </a:t>
-            </a:r>
-            <a:r>
-              <a:rPr lang="sv-SE" dirty="0" err="1"/>
-              <a:t>concurrent</a:t>
-            </a:r>
-            <a:r>
-              <a:rPr lang="sv-SE" dirty="0"/>
-              <a:t>/</a:t>
-            </a:r>
-            <a:r>
-              <a:rPr lang="sv-SE" dirty="0" err="1"/>
-              <a:t>parallel</a:t>
-            </a:r>
-            <a:r>
-              <a:rPr lang="sv-SE" dirty="0"/>
-              <a:t> </a:t>
-            </a:r>
-            <a:r>
-              <a:rPr lang="sv-SE" dirty="0" err="1"/>
-              <a:t>threads</a:t>
-            </a:r>
-            <a:r>
-              <a:rPr lang="sv-SE" dirty="0"/>
-              <a:t> </a:t>
-            </a:r>
-            <a:r>
-              <a:rPr lang="sv-SE" dirty="0" err="1"/>
-              <a:t>run</a:t>
-            </a:r>
-            <a:r>
-              <a:rPr lang="sv-SE" dirty="0"/>
-              <a:t> the OS </a:t>
-            </a:r>
-            <a:r>
-              <a:rPr lang="sv-SE" dirty="0" err="1"/>
-              <a:t>code</a:t>
-            </a:r>
-            <a:r>
-              <a:rPr lang="sv-SE" dirty="0"/>
-              <a:t>!</a:t>
-            </a:r>
+              <a:rPr lang="en-US" dirty="0"/>
+              <a:t>2</a:t>
+            </a:r>
+          </a:p>
+        </p:txBody>
+      </p:sp>
+      <p:sp>
+        <p:nvSpPr>
+          <p:cNvPr id="4" name="Slide Number Placeholder 3"/>
+          <p:cNvSpPr>
+            <a:spLocks noGrp="1"/>
+          </p:cNvSpPr>
+          <p:nvPr>
+            <p:ph type="sldNum" sz="quarter" idx="5"/>
+          </p:nvPr>
+        </p:nvSpPr>
+        <p:spPr/>
+        <p:txBody>
+          <a:bodyPr/>
+          <a:lstStyle/>
+          <a:p>
+            <a:fld id="{20BC1079-C5C6-1A45-8E7E-B20B607B09A1}" type="slidenum">
+              <a:rPr lang="en-US" smtClean="0"/>
+              <a:t>48</a:t>
+            </a:fld>
+            <a:endParaRPr lang="en-US"/>
           </a:p>
         </p:txBody>
       </p:sp>
     </p:spTree>
     <p:extLst>
       <p:ext uri="{BB962C8B-B14F-4D97-AF65-F5344CB8AC3E}">
-        <p14:creationId xmlns:p14="http://schemas.microsoft.com/office/powerpoint/2010/main" val="1603240883"/>
+        <p14:creationId xmlns:p14="http://schemas.microsoft.com/office/powerpoint/2010/main" val="1756688380"/>
+      </p:ext>
+    </p:extLst>
+  </p:cSld>
+  <p:clrMapOvr>
+    <a:masterClrMapping/>
+  </p:clrMapOvr>
+</p:notes>
+</file>
+
+<file path=ppt/notesSlides/notesSlide47.xml><?xml version="1.0" encoding="utf-8"?>
+<p:notes xmlns:a="http://schemas.openxmlformats.org/drawingml/2006/main" xmlns:r="http://schemas.openxmlformats.org/officeDocument/2006/relationships" xmlns:p="http://schemas.openxmlformats.org/presentationml/2006/main">
+  <p:cSld>
+    <p:spTree>
+      <p:nvGrpSpPr>
+        <p:cNvPr id="1" name=""/>
+        <p:cNvGrpSpPr/>
+        <p:nvPr/>
+      </p:nvGrpSpPr>
+      <p:grpSpPr>
+        <a:xfrm>
+          <a:off x="0" y="0"/>
+          <a:ext cx="0" cy="0"/>
+          <a:chOff x="0" y="0"/>
+          <a:chExt cx="0" cy="0"/>
+        </a:xfrm>
+      </p:grpSpPr>
+      <p:sp>
+        <p:nvSpPr>
+          <p:cNvPr id="2" name="Slide Image Placeholder 1"/>
+          <p:cNvSpPr>
+            <a:spLocks noGrp="1" noRot="1" noChangeAspect="1"/>
+          </p:cNvSpPr>
+          <p:nvPr>
+            <p:ph type="sldImg"/>
+          </p:nvPr>
+        </p:nvSpPr>
+        <p:spPr/>
+      </p:sp>
+      <p:sp>
+        <p:nvSpPr>
+          <p:cNvPr id="3" name="Notes Placeholder 2"/>
+          <p:cNvSpPr>
+            <a:spLocks noGrp="1"/>
+          </p:cNvSpPr>
+          <p:nvPr>
+            <p:ph type="body" idx="1"/>
+          </p:nvPr>
+        </p:nvSpPr>
+        <p:spPr/>
+        <p:txBody>
+          <a:bodyPr/>
+          <a:lstStyle/>
+          <a:p>
+            <a:r>
+              <a:rPr lang="en-US"/>
+              <a:t>No</a:t>
+            </a:r>
+          </a:p>
+        </p:txBody>
+      </p:sp>
+      <p:sp>
+        <p:nvSpPr>
+          <p:cNvPr id="4" name="Slide Number Placeholder 3"/>
+          <p:cNvSpPr>
+            <a:spLocks noGrp="1"/>
+          </p:cNvSpPr>
+          <p:nvPr>
+            <p:ph type="sldNum" sz="quarter" idx="5"/>
+          </p:nvPr>
+        </p:nvSpPr>
+        <p:spPr/>
+        <p:txBody>
+          <a:bodyPr/>
+          <a:lstStyle/>
+          <a:p>
+            <a:fld id="{20BC1079-C5C6-1A45-8E7E-B20B607B09A1}" type="slidenum">
+              <a:rPr lang="en-US" smtClean="0"/>
+              <a:t>49</a:t>
+            </a:fld>
+            <a:endParaRPr lang="en-US"/>
+          </a:p>
+        </p:txBody>
+      </p:sp>
+    </p:spTree>
+    <p:extLst>
+      <p:ext uri="{BB962C8B-B14F-4D97-AF65-F5344CB8AC3E}">
+        <p14:creationId xmlns:p14="http://schemas.microsoft.com/office/powerpoint/2010/main" val="4002864657"/>
       </p:ext>
     </p:extLst>
   </p:cSld>
@@ -8720,6 +8898,1331 @@
 </p:sldLayout>
 </file>
 
+<file path=ppt/slideLayouts/slideLayout14.xml><?xml version="1.0" encoding="utf-8"?>
+<p:sldLayout xmlns:a="http://schemas.openxmlformats.org/drawingml/2006/main" xmlns:r="http://schemas.openxmlformats.org/officeDocument/2006/relationships" xmlns:p="http://schemas.openxmlformats.org/presentationml/2006/main" type="title" preserve="1">
+  <p:cSld name="Title Slide">
+    <p:spTree>
+      <p:nvGrpSpPr>
+        <p:cNvPr id="1" name=""/>
+        <p:cNvGrpSpPr/>
+        <p:nvPr/>
+      </p:nvGrpSpPr>
+      <p:grpSpPr>
+        <a:xfrm>
+          <a:off x="0" y="0"/>
+          <a:ext cx="0" cy="0"/>
+          <a:chOff x="0" y="0"/>
+          <a:chExt cx="0" cy="0"/>
+        </a:xfrm>
+      </p:grpSpPr>
+      <p:sp>
+        <p:nvSpPr>
+          <p:cNvPr id="2" name="Title 1"/>
+          <p:cNvSpPr>
+            <a:spLocks noGrp="1"/>
+          </p:cNvSpPr>
+          <p:nvPr>
+            <p:ph type="ctrTitle"/>
+          </p:nvPr>
+        </p:nvSpPr>
+        <p:spPr>
+          <a:xfrm>
+            <a:off x="1524000" y="1122363"/>
+            <a:ext cx="9144000" cy="2387600"/>
+          </a:xfrm>
+        </p:spPr>
+        <p:txBody>
+          <a:bodyPr anchor="b"/>
+          <a:lstStyle>
+            <a:lvl1pPr algn="ctr">
+              <a:defRPr sz="4500"/>
+            </a:lvl1pPr>
+          </a:lstStyle>
+          <a:p>
+            <a:r>
+              <a:rPr lang="en-US"/>
+              <a:t>Click to edit Master title style</a:t>
+            </a:r>
+          </a:p>
+        </p:txBody>
+      </p:sp>
+      <p:sp>
+        <p:nvSpPr>
+          <p:cNvPr id="3" name="Subtitle 2"/>
+          <p:cNvSpPr>
+            <a:spLocks noGrp="1"/>
+          </p:cNvSpPr>
+          <p:nvPr>
+            <p:ph type="subTitle" idx="1"/>
+          </p:nvPr>
+        </p:nvSpPr>
+        <p:spPr>
+          <a:xfrm>
+            <a:off x="1524000" y="3602038"/>
+            <a:ext cx="9144000" cy="1655762"/>
+          </a:xfrm>
+        </p:spPr>
+        <p:txBody>
+          <a:bodyPr/>
+          <a:lstStyle>
+            <a:lvl1pPr marL="0" indent="0" algn="ctr">
+              <a:buNone/>
+              <a:defRPr sz="1800"/>
+            </a:lvl1pPr>
+            <a:lvl2pPr marL="342900" indent="0" algn="ctr">
+              <a:buNone/>
+              <a:defRPr sz="1500"/>
+            </a:lvl2pPr>
+            <a:lvl3pPr marL="685800" indent="0" algn="ctr">
+              <a:buNone/>
+              <a:defRPr sz="1350"/>
+            </a:lvl3pPr>
+            <a:lvl4pPr marL="1028700" indent="0" algn="ctr">
+              <a:buNone/>
+              <a:defRPr sz="1200"/>
+            </a:lvl4pPr>
+            <a:lvl5pPr marL="1371600" indent="0" algn="ctr">
+              <a:buNone/>
+              <a:defRPr sz="1200"/>
+            </a:lvl5pPr>
+            <a:lvl6pPr marL="1714500" indent="0" algn="ctr">
+              <a:buNone/>
+              <a:defRPr sz="1200"/>
+            </a:lvl6pPr>
+            <a:lvl7pPr marL="2057400" indent="0" algn="ctr">
+              <a:buNone/>
+              <a:defRPr sz="1200"/>
+            </a:lvl7pPr>
+            <a:lvl8pPr marL="2400300" indent="0" algn="ctr">
+              <a:buNone/>
+              <a:defRPr sz="1200"/>
+            </a:lvl8pPr>
+            <a:lvl9pPr marL="2743200" indent="0" algn="ctr">
+              <a:buNone/>
+              <a:defRPr sz="1200"/>
+            </a:lvl9pPr>
+          </a:lstStyle>
+          <a:p>
+            <a:r>
+              <a:rPr lang="en-US"/>
+              <a:t>Click to edit Master subtitle style</a:t>
+            </a:r>
+          </a:p>
+        </p:txBody>
+      </p:sp>
+      <p:sp>
+        <p:nvSpPr>
+          <p:cNvPr id="4" name="Date Placeholder 3"/>
+          <p:cNvSpPr>
+            <a:spLocks noGrp="1"/>
+          </p:cNvSpPr>
+          <p:nvPr>
+            <p:ph type="dt" sz="half" idx="10"/>
+          </p:nvPr>
+        </p:nvSpPr>
+        <p:spPr/>
+        <p:txBody>
+          <a:bodyPr/>
+          <a:lstStyle/>
+          <a:p>
+            <a:r>
+              <a:rPr lang="en-US"/>
+              <a:t>Vincenzo Gulisano</a:t>
+            </a:r>
+          </a:p>
+        </p:txBody>
+      </p:sp>
+      <p:sp>
+        <p:nvSpPr>
+          <p:cNvPr id="5" name="Footer Placeholder 4"/>
+          <p:cNvSpPr>
+            <a:spLocks noGrp="1"/>
+          </p:cNvSpPr>
+          <p:nvPr>
+            <p:ph type="ftr" sz="quarter" idx="11"/>
+          </p:nvPr>
+        </p:nvSpPr>
+        <p:spPr/>
+        <p:txBody>
+          <a:bodyPr/>
+          <a:lstStyle/>
+          <a:p>
+            <a:r>
+              <a:rPr lang="en-US"/>
+              <a:t>Operating Systems - Processes</a:t>
+            </a:r>
+          </a:p>
+        </p:txBody>
+      </p:sp>
+      <p:sp>
+        <p:nvSpPr>
+          <p:cNvPr id="6" name="Slide Number Placeholder 5"/>
+          <p:cNvSpPr>
+            <a:spLocks noGrp="1"/>
+          </p:cNvSpPr>
+          <p:nvPr>
+            <p:ph type="sldNum" sz="quarter" idx="12"/>
+          </p:nvPr>
+        </p:nvSpPr>
+        <p:spPr/>
+        <p:txBody>
+          <a:bodyPr/>
+          <a:lstStyle/>
+          <a:p>
+            <a:fld id="{95AAEEEC-DCEC-4178-AB14-E7254A15A296}" type="slidenum">
+              <a:rPr lang="en-US" smtClean="0"/>
+              <a:t>‹#›</a:t>
+            </a:fld>
+            <a:endParaRPr lang="en-US"/>
+          </a:p>
+        </p:txBody>
+      </p:sp>
+    </p:spTree>
+    <p:extLst>
+      <p:ext uri="{BB962C8B-B14F-4D97-AF65-F5344CB8AC3E}">
+        <p14:creationId xmlns:p14="http://schemas.microsoft.com/office/powerpoint/2010/main" val="3868661211"/>
+      </p:ext>
+    </p:extLst>
+  </p:cSld>
+  <p:clrMapOvr>
+    <a:masterClrMapping/>
+  </p:clrMapOvr>
+</p:sldLayout>
+</file>
+
+<file path=ppt/slideLayouts/slideLayout15.xml><?xml version="1.0" encoding="utf-8"?>
+<p:sldLayout xmlns:a="http://schemas.openxmlformats.org/drawingml/2006/main" xmlns:r="http://schemas.openxmlformats.org/officeDocument/2006/relationships" xmlns:p="http://schemas.openxmlformats.org/presentationml/2006/main" type="obj" preserve="1">
+  <p:cSld name="Title and Content">
+    <p:spTree>
+      <p:nvGrpSpPr>
+        <p:cNvPr id="1" name=""/>
+        <p:cNvGrpSpPr/>
+        <p:nvPr/>
+      </p:nvGrpSpPr>
+      <p:grpSpPr>
+        <a:xfrm>
+          <a:off x="0" y="0"/>
+          <a:ext cx="0" cy="0"/>
+          <a:chOff x="0" y="0"/>
+          <a:chExt cx="0" cy="0"/>
+        </a:xfrm>
+      </p:grpSpPr>
+      <p:sp>
+        <p:nvSpPr>
+          <p:cNvPr id="2" name="Title 1"/>
+          <p:cNvSpPr>
+            <a:spLocks noGrp="1"/>
+          </p:cNvSpPr>
+          <p:nvPr>
+            <p:ph type="title"/>
+          </p:nvPr>
+        </p:nvSpPr>
+        <p:spPr/>
+        <p:txBody>
+          <a:bodyPr/>
+          <a:lstStyle/>
+          <a:p>
+            <a:r>
+              <a:rPr lang="en-US"/>
+              <a:t>Click to edit Master title style</a:t>
+            </a:r>
+          </a:p>
+        </p:txBody>
+      </p:sp>
+      <p:sp>
+        <p:nvSpPr>
+          <p:cNvPr id="3" name="Content Placeholder 2"/>
+          <p:cNvSpPr>
+            <a:spLocks noGrp="1"/>
+          </p:cNvSpPr>
+          <p:nvPr>
+            <p:ph idx="1"/>
+          </p:nvPr>
+        </p:nvSpPr>
+        <p:spPr/>
+        <p:txBody>
+          <a:bodyPr/>
+          <a:lstStyle/>
+          <a:p>
+            <a:pPr lvl="0"/>
+            <a:r>
+              <a:rPr lang="en-US"/>
+              <a:t>Click to edit Master text styles</a:t>
+            </a:r>
+          </a:p>
+          <a:p>
+            <a:pPr lvl="1"/>
+            <a:r>
+              <a:rPr lang="en-US"/>
+              <a:t>Second level</a:t>
+            </a:r>
+          </a:p>
+          <a:p>
+            <a:pPr lvl="2"/>
+            <a:r>
+              <a:rPr lang="en-US"/>
+              <a:t>Third level</a:t>
+            </a:r>
+          </a:p>
+          <a:p>
+            <a:pPr lvl="3"/>
+            <a:r>
+              <a:rPr lang="en-US"/>
+              <a:t>Fourth level</a:t>
+            </a:r>
+          </a:p>
+          <a:p>
+            <a:pPr lvl="4"/>
+            <a:r>
+              <a:rPr lang="en-US"/>
+              <a:t>Fifth level</a:t>
+            </a:r>
+          </a:p>
+        </p:txBody>
+      </p:sp>
+      <p:sp>
+        <p:nvSpPr>
+          <p:cNvPr id="4" name="Date Placeholder 3"/>
+          <p:cNvSpPr>
+            <a:spLocks noGrp="1"/>
+          </p:cNvSpPr>
+          <p:nvPr>
+            <p:ph type="dt" sz="half" idx="10"/>
+          </p:nvPr>
+        </p:nvSpPr>
+        <p:spPr/>
+        <p:txBody>
+          <a:bodyPr/>
+          <a:lstStyle/>
+          <a:p>
+            <a:r>
+              <a:rPr lang="en-US"/>
+              <a:t>Vincenzo Gulisano</a:t>
+            </a:r>
+          </a:p>
+        </p:txBody>
+      </p:sp>
+      <p:sp>
+        <p:nvSpPr>
+          <p:cNvPr id="5" name="Footer Placeholder 4"/>
+          <p:cNvSpPr>
+            <a:spLocks noGrp="1"/>
+          </p:cNvSpPr>
+          <p:nvPr>
+            <p:ph type="ftr" sz="quarter" idx="11"/>
+          </p:nvPr>
+        </p:nvSpPr>
+        <p:spPr/>
+        <p:txBody>
+          <a:bodyPr/>
+          <a:lstStyle/>
+          <a:p>
+            <a:r>
+              <a:rPr lang="en-US"/>
+              <a:t>Operating Systems - Processes</a:t>
+            </a:r>
+          </a:p>
+        </p:txBody>
+      </p:sp>
+      <p:sp>
+        <p:nvSpPr>
+          <p:cNvPr id="6" name="Slide Number Placeholder 5"/>
+          <p:cNvSpPr>
+            <a:spLocks noGrp="1"/>
+          </p:cNvSpPr>
+          <p:nvPr>
+            <p:ph type="sldNum" sz="quarter" idx="12"/>
+          </p:nvPr>
+        </p:nvSpPr>
+        <p:spPr/>
+        <p:txBody>
+          <a:bodyPr/>
+          <a:lstStyle/>
+          <a:p>
+            <a:fld id="{95AAEEEC-DCEC-4178-AB14-E7254A15A296}" type="slidenum">
+              <a:rPr lang="en-US" smtClean="0"/>
+              <a:t>‹#›</a:t>
+            </a:fld>
+            <a:endParaRPr lang="en-US"/>
+          </a:p>
+        </p:txBody>
+      </p:sp>
+    </p:spTree>
+    <p:extLst>
+      <p:ext uri="{BB962C8B-B14F-4D97-AF65-F5344CB8AC3E}">
+        <p14:creationId xmlns:p14="http://schemas.microsoft.com/office/powerpoint/2010/main" val="4262980891"/>
+      </p:ext>
+    </p:extLst>
+  </p:cSld>
+  <p:clrMapOvr>
+    <a:masterClrMapping/>
+  </p:clrMapOvr>
+</p:sldLayout>
+</file>
+
+<file path=ppt/slideLayouts/slideLayout16.xml><?xml version="1.0" encoding="utf-8"?>
+<p:sldLayout xmlns:a="http://schemas.openxmlformats.org/drawingml/2006/main" xmlns:r="http://schemas.openxmlformats.org/officeDocument/2006/relationships" xmlns:p="http://schemas.openxmlformats.org/presentationml/2006/main" type="secHead" preserve="1">
+  <p:cSld name="Section Header">
+    <p:spTree>
+      <p:nvGrpSpPr>
+        <p:cNvPr id="1" name=""/>
+        <p:cNvGrpSpPr/>
+        <p:nvPr/>
+      </p:nvGrpSpPr>
+      <p:grpSpPr>
+        <a:xfrm>
+          <a:off x="0" y="0"/>
+          <a:ext cx="0" cy="0"/>
+          <a:chOff x="0" y="0"/>
+          <a:chExt cx="0" cy="0"/>
+        </a:xfrm>
+      </p:grpSpPr>
+      <p:sp>
+        <p:nvSpPr>
+          <p:cNvPr id="2" name="Title 1"/>
+          <p:cNvSpPr>
+            <a:spLocks noGrp="1"/>
+          </p:cNvSpPr>
+          <p:nvPr>
+            <p:ph type="title"/>
+          </p:nvPr>
+        </p:nvSpPr>
+        <p:spPr>
+          <a:xfrm>
+            <a:off x="831851" y="1709740"/>
+            <a:ext cx="10515600" cy="2852737"/>
+          </a:xfrm>
+        </p:spPr>
+        <p:txBody>
+          <a:bodyPr anchor="b"/>
+          <a:lstStyle>
+            <a:lvl1pPr>
+              <a:defRPr sz="4500"/>
+            </a:lvl1pPr>
+          </a:lstStyle>
+          <a:p>
+            <a:r>
+              <a:rPr lang="en-US"/>
+              <a:t>Click to edit Master title style</a:t>
+            </a:r>
+          </a:p>
+        </p:txBody>
+      </p:sp>
+      <p:sp>
+        <p:nvSpPr>
+          <p:cNvPr id="3" name="Text Placeholder 2"/>
+          <p:cNvSpPr>
+            <a:spLocks noGrp="1"/>
+          </p:cNvSpPr>
+          <p:nvPr>
+            <p:ph type="body" idx="1"/>
+          </p:nvPr>
+        </p:nvSpPr>
+        <p:spPr>
+          <a:xfrm>
+            <a:off x="831851" y="4589465"/>
+            <a:ext cx="10515600" cy="1500187"/>
+          </a:xfrm>
+        </p:spPr>
+        <p:txBody>
+          <a:bodyPr/>
+          <a:lstStyle>
+            <a:lvl1pPr marL="0" indent="0">
+              <a:buNone/>
+              <a:defRPr sz="1800">
+                <a:solidFill>
+                  <a:schemeClr val="tx1">
+                    <a:tint val="75000"/>
+                  </a:schemeClr>
+                </a:solidFill>
+              </a:defRPr>
+            </a:lvl1pPr>
+            <a:lvl2pPr marL="342900" indent="0">
+              <a:buNone/>
+              <a:defRPr sz="1500">
+                <a:solidFill>
+                  <a:schemeClr val="tx1">
+                    <a:tint val="75000"/>
+                  </a:schemeClr>
+                </a:solidFill>
+              </a:defRPr>
+            </a:lvl2pPr>
+            <a:lvl3pPr marL="685800" indent="0">
+              <a:buNone/>
+              <a:defRPr sz="1350">
+                <a:solidFill>
+                  <a:schemeClr val="tx1">
+                    <a:tint val="75000"/>
+                  </a:schemeClr>
+                </a:solidFill>
+              </a:defRPr>
+            </a:lvl3pPr>
+            <a:lvl4pPr marL="1028700" indent="0">
+              <a:buNone/>
+              <a:defRPr sz="1200">
+                <a:solidFill>
+                  <a:schemeClr val="tx1">
+                    <a:tint val="75000"/>
+                  </a:schemeClr>
+                </a:solidFill>
+              </a:defRPr>
+            </a:lvl4pPr>
+            <a:lvl5pPr marL="1371600" indent="0">
+              <a:buNone/>
+              <a:defRPr sz="1200">
+                <a:solidFill>
+                  <a:schemeClr val="tx1">
+                    <a:tint val="75000"/>
+                  </a:schemeClr>
+                </a:solidFill>
+              </a:defRPr>
+            </a:lvl5pPr>
+            <a:lvl6pPr marL="1714500" indent="0">
+              <a:buNone/>
+              <a:defRPr sz="1200">
+                <a:solidFill>
+                  <a:schemeClr val="tx1">
+                    <a:tint val="75000"/>
+                  </a:schemeClr>
+                </a:solidFill>
+              </a:defRPr>
+            </a:lvl6pPr>
+            <a:lvl7pPr marL="2057400" indent="0">
+              <a:buNone/>
+              <a:defRPr sz="1200">
+                <a:solidFill>
+                  <a:schemeClr val="tx1">
+                    <a:tint val="75000"/>
+                  </a:schemeClr>
+                </a:solidFill>
+              </a:defRPr>
+            </a:lvl7pPr>
+            <a:lvl8pPr marL="2400300" indent="0">
+              <a:buNone/>
+              <a:defRPr sz="1200">
+                <a:solidFill>
+                  <a:schemeClr val="tx1">
+                    <a:tint val="75000"/>
+                  </a:schemeClr>
+                </a:solidFill>
+              </a:defRPr>
+            </a:lvl8pPr>
+            <a:lvl9pPr marL="2743200" indent="0">
+              <a:buNone/>
+              <a:defRPr sz="1200">
+                <a:solidFill>
+                  <a:schemeClr val="tx1">
+                    <a:tint val="75000"/>
+                  </a:schemeClr>
+                </a:solidFill>
+              </a:defRPr>
+            </a:lvl9pPr>
+          </a:lstStyle>
+          <a:p>
+            <a:pPr lvl="0"/>
+            <a:r>
+              <a:rPr lang="en-US"/>
+              <a:t>Click to edit Master text styles</a:t>
+            </a:r>
+          </a:p>
+        </p:txBody>
+      </p:sp>
+      <p:sp>
+        <p:nvSpPr>
+          <p:cNvPr id="4" name="Date Placeholder 3"/>
+          <p:cNvSpPr>
+            <a:spLocks noGrp="1"/>
+          </p:cNvSpPr>
+          <p:nvPr>
+            <p:ph type="dt" sz="half" idx="10"/>
+          </p:nvPr>
+        </p:nvSpPr>
+        <p:spPr/>
+        <p:txBody>
+          <a:bodyPr/>
+          <a:lstStyle/>
+          <a:p>
+            <a:r>
+              <a:rPr lang="en-US"/>
+              <a:t>Vincenzo Gulisano</a:t>
+            </a:r>
+          </a:p>
+        </p:txBody>
+      </p:sp>
+      <p:sp>
+        <p:nvSpPr>
+          <p:cNvPr id="5" name="Footer Placeholder 4"/>
+          <p:cNvSpPr>
+            <a:spLocks noGrp="1"/>
+          </p:cNvSpPr>
+          <p:nvPr>
+            <p:ph type="ftr" sz="quarter" idx="11"/>
+          </p:nvPr>
+        </p:nvSpPr>
+        <p:spPr/>
+        <p:txBody>
+          <a:bodyPr/>
+          <a:lstStyle/>
+          <a:p>
+            <a:r>
+              <a:rPr lang="en-US"/>
+              <a:t>Operating Systems - Processes</a:t>
+            </a:r>
+          </a:p>
+        </p:txBody>
+      </p:sp>
+      <p:sp>
+        <p:nvSpPr>
+          <p:cNvPr id="6" name="Slide Number Placeholder 5"/>
+          <p:cNvSpPr>
+            <a:spLocks noGrp="1"/>
+          </p:cNvSpPr>
+          <p:nvPr>
+            <p:ph type="sldNum" sz="quarter" idx="12"/>
+          </p:nvPr>
+        </p:nvSpPr>
+        <p:spPr/>
+        <p:txBody>
+          <a:bodyPr/>
+          <a:lstStyle/>
+          <a:p>
+            <a:fld id="{95AAEEEC-DCEC-4178-AB14-E7254A15A296}" type="slidenum">
+              <a:rPr lang="en-US" smtClean="0"/>
+              <a:t>‹#›</a:t>
+            </a:fld>
+            <a:endParaRPr lang="en-US"/>
+          </a:p>
+        </p:txBody>
+      </p:sp>
+    </p:spTree>
+    <p:extLst>
+      <p:ext uri="{BB962C8B-B14F-4D97-AF65-F5344CB8AC3E}">
+        <p14:creationId xmlns:p14="http://schemas.microsoft.com/office/powerpoint/2010/main" val="2998671475"/>
+      </p:ext>
+    </p:extLst>
+  </p:cSld>
+  <p:clrMapOvr>
+    <a:masterClrMapping/>
+  </p:clrMapOvr>
+</p:sldLayout>
+</file>
+
+<file path=ppt/slideLayouts/slideLayout17.xml><?xml version="1.0" encoding="utf-8"?>
+<p:sldLayout xmlns:a="http://schemas.openxmlformats.org/drawingml/2006/main" xmlns:r="http://schemas.openxmlformats.org/officeDocument/2006/relationships" xmlns:p="http://schemas.openxmlformats.org/presentationml/2006/main" type="twoObj" preserve="1">
+  <p:cSld name="Two Content">
+    <p:spTree>
+      <p:nvGrpSpPr>
+        <p:cNvPr id="1" name=""/>
+        <p:cNvGrpSpPr/>
+        <p:nvPr/>
+      </p:nvGrpSpPr>
+      <p:grpSpPr>
+        <a:xfrm>
+          <a:off x="0" y="0"/>
+          <a:ext cx="0" cy="0"/>
+          <a:chOff x="0" y="0"/>
+          <a:chExt cx="0" cy="0"/>
+        </a:xfrm>
+      </p:grpSpPr>
+      <p:sp>
+        <p:nvSpPr>
+          <p:cNvPr id="2" name="Title 1"/>
+          <p:cNvSpPr>
+            <a:spLocks noGrp="1"/>
+          </p:cNvSpPr>
+          <p:nvPr>
+            <p:ph type="title"/>
+          </p:nvPr>
+        </p:nvSpPr>
+        <p:spPr/>
+        <p:txBody>
+          <a:bodyPr/>
+          <a:lstStyle/>
+          <a:p>
+            <a:r>
+              <a:rPr lang="en-US"/>
+              <a:t>Click to edit Master title style</a:t>
+            </a:r>
+          </a:p>
+        </p:txBody>
+      </p:sp>
+      <p:sp>
+        <p:nvSpPr>
+          <p:cNvPr id="3" name="Content Placeholder 2"/>
+          <p:cNvSpPr>
+            <a:spLocks noGrp="1"/>
+          </p:cNvSpPr>
+          <p:nvPr>
+            <p:ph sz="half" idx="1"/>
+          </p:nvPr>
+        </p:nvSpPr>
+        <p:spPr>
+          <a:xfrm>
+            <a:off x="838200" y="1825625"/>
+            <a:ext cx="5181600" cy="4351338"/>
+          </a:xfrm>
+        </p:spPr>
+        <p:txBody>
+          <a:bodyPr/>
+          <a:lstStyle/>
+          <a:p>
+            <a:pPr lvl="0"/>
+            <a:r>
+              <a:rPr lang="en-US"/>
+              <a:t>Click to edit Master text styles</a:t>
+            </a:r>
+          </a:p>
+          <a:p>
+            <a:pPr lvl="1"/>
+            <a:r>
+              <a:rPr lang="en-US"/>
+              <a:t>Second level</a:t>
+            </a:r>
+          </a:p>
+          <a:p>
+            <a:pPr lvl="2"/>
+            <a:r>
+              <a:rPr lang="en-US"/>
+              <a:t>Third level</a:t>
+            </a:r>
+          </a:p>
+          <a:p>
+            <a:pPr lvl="3"/>
+            <a:r>
+              <a:rPr lang="en-US"/>
+              <a:t>Fourth level</a:t>
+            </a:r>
+          </a:p>
+          <a:p>
+            <a:pPr lvl="4"/>
+            <a:r>
+              <a:rPr lang="en-US"/>
+              <a:t>Fifth level</a:t>
+            </a:r>
+          </a:p>
+        </p:txBody>
+      </p:sp>
+      <p:sp>
+        <p:nvSpPr>
+          <p:cNvPr id="4" name="Content Placeholder 3"/>
+          <p:cNvSpPr>
+            <a:spLocks noGrp="1"/>
+          </p:cNvSpPr>
+          <p:nvPr>
+            <p:ph sz="half" idx="2"/>
+          </p:nvPr>
+        </p:nvSpPr>
+        <p:spPr>
+          <a:xfrm>
+            <a:off x="6172200" y="1825625"/>
+            <a:ext cx="5181600" cy="4351338"/>
+          </a:xfrm>
+        </p:spPr>
+        <p:txBody>
+          <a:bodyPr/>
+          <a:lstStyle/>
+          <a:p>
+            <a:pPr lvl="0"/>
+            <a:r>
+              <a:rPr lang="en-US"/>
+              <a:t>Click to edit Master text styles</a:t>
+            </a:r>
+          </a:p>
+          <a:p>
+            <a:pPr lvl="1"/>
+            <a:r>
+              <a:rPr lang="en-US"/>
+              <a:t>Second level</a:t>
+            </a:r>
+          </a:p>
+          <a:p>
+            <a:pPr lvl="2"/>
+            <a:r>
+              <a:rPr lang="en-US"/>
+              <a:t>Third level</a:t>
+            </a:r>
+          </a:p>
+          <a:p>
+            <a:pPr lvl="3"/>
+            <a:r>
+              <a:rPr lang="en-US"/>
+              <a:t>Fourth level</a:t>
+            </a:r>
+          </a:p>
+          <a:p>
+            <a:pPr lvl="4"/>
+            <a:r>
+              <a:rPr lang="en-US"/>
+              <a:t>Fifth level</a:t>
+            </a:r>
+          </a:p>
+        </p:txBody>
+      </p:sp>
+      <p:sp>
+        <p:nvSpPr>
+          <p:cNvPr id="5" name="Date Placeholder 4"/>
+          <p:cNvSpPr>
+            <a:spLocks noGrp="1"/>
+          </p:cNvSpPr>
+          <p:nvPr>
+            <p:ph type="dt" sz="half" idx="10"/>
+          </p:nvPr>
+        </p:nvSpPr>
+        <p:spPr/>
+        <p:txBody>
+          <a:bodyPr/>
+          <a:lstStyle/>
+          <a:p>
+            <a:r>
+              <a:rPr lang="en-US"/>
+              <a:t>Vincenzo Gulisano</a:t>
+            </a:r>
+          </a:p>
+        </p:txBody>
+      </p:sp>
+      <p:sp>
+        <p:nvSpPr>
+          <p:cNvPr id="6" name="Footer Placeholder 5"/>
+          <p:cNvSpPr>
+            <a:spLocks noGrp="1"/>
+          </p:cNvSpPr>
+          <p:nvPr>
+            <p:ph type="ftr" sz="quarter" idx="11"/>
+          </p:nvPr>
+        </p:nvSpPr>
+        <p:spPr/>
+        <p:txBody>
+          <a:bodyPr/>
+          <a:lstStyle/>
+          <a:p>
+            <a:r>
+              <a:rPr lang="en-US"/>
+              <a:t>Operating Systems - Processes</a:t>
+            </a:r>
+          </a:p>
+        </p:txBody>
+      </p:sp>
+      <p:sp>
+        <p:nvSpPr>
+          <p:cNvPr id="7" name="Slide Number Placeholder 6"/>
+          <p:cNvSpPr>
+            <a:spLocks noGrp="1"/>
+          </p:cNvSpPr>
+          <p:nvPr>
+            <p:ph type="sldNum" sz="quarter" idx="12"/>
+          </p:nvPr>
+        </p:nvSpPr>
+        <p:spPr/>
+        <p:txBody>
+          <a:bodyPr/>
+          <a:lstStyle/>
+          <a:p>
+            <a:fld id="{95AAEEEC-DCEC-4178-AB14-E7254A15A296}" type="slidenum">
+              <a:rPr lang="en-US" smtClean="0"/>
+              <a:t>‹#›</a:t>
+            </a:fld>
+            <a:endParaRPr lang="en-US"/>
+          </a:p>
+        </p:txBody>
+      </p:sp>
+    </p:spTree>
+    <p:extLst>
+      <p:ext uri="{BB962C8B-B14F-4D97-AF65-F5344CB8AC3E}">
+        <p14:creationId xmlns:p14="http://schemas.microsoft.com/office/powerpoint/2010/main" val="534268747"/>
+      </p:ext>
+    </p:extLst>
+  </p:cSld>
+  <p:clrMapOvr>
+    <a:masterClrMapping/>
+  </p:clrMapOvr>
+</p:sldLayout>
+</file>
+
+<file path=ppt/slideLayouts/slideLayout18.xml><?xml version="1.0" encoding="utf-8"?>
+<p:sldLayout xmlns:a="http://schemas.openxmlformats.org/drawingml/2006/main" xmlns:r="http://schemas.openxmlformats.org/officeDocument/2006/relationships" xmlns:p="http://schemas.openxmlformats.org/presentationml/2006/main" type="twoTxTwoObj" preserve="1">
+  <p:cSld name="Comparison">
+    <p:spTree>
+      <p:nvGrpSpPr>
+        <p:cNvPr id="1" name=""/>
+        <p:cNvGrpSpPr/>
+        <p:nvPr/>
+      </p:nvGrpSpPr>
+      <p:grpSpPr>
+        <a:xfrm>
+          <a:off x="0" y="0"/>
+          <a:ext cx="0" cy="0"/>
+          <a:chOff x="0" y="0"/>
+          <a:chExt cx="0" cy="0"/>
+        </a:xfrm>
+      </p:grpSpPr>
+      <p:sp>
+        <p:nvSpPr>
+          <p:cNvPr id="2" name="Title 1"/>
+          <p:cNvSpPr>
+            <a:spLocks noGrp="1"/>
+          </p:cNvSpPr>
+          <p:nvPr>
+            <p:ph type="title"/>
+          </p:nvPr>
+        </p:nvSpPr>
+        <p:spPr>
+          <a:xfrm>
+            <a:off x="839788" y="365126"/>
+            <a:ext cx="10515600" cy="1325563"/>
+          </a:xfrm>
+        </p:spPr>
+        <p:txBody>
+          <a:bodyPr/>
+          <a:lstStyle/>
+          <a:p>
+            <a:r>
+              <a:rPr lang="en-US"/>
+              <a:t>Click to edit Master title style</a:t>
+            </a:r>
+          </a:p>
+        </p:txBody>
+      </p:sp>
+      <p:sp>
+        <p:nvSpPr>
+          <p:cNvPr id="3" name="Text Placeholder 2"/>
+          <p:cNvSpPr>
+            <a:spLocks noGrp="1"/>
+          </p:cNvSpPr>
+          <p:nvPr>
+            <p:ph type="body" idx="1"/>
+          </p:nvPr>
+        </p:nvSpPr>
+        <p:spPr>
+          <a:xfrm>
+            <a:off x="839789" y="1681163"/>
+            <a:ext cx="5157787" cy="823912"/>
+          </a:xfrm>
+        </p:spPr>
+        <p:txBody>
+          <a:bodyPr anchor="b"/>
+          <a:lstStyle>
+            <a:lvl1pPr marL="0" indent="0">
+              <a:buNone/>
+              <a:defRPr sz="1800" b="1"/>
+            </a:lvl1pPr>
+            <a:lvl2pPr marL="342900" indent="0">
+              <a:buNone/>
+              <a:defRPr sz="1500" b="1"/>
+            </a:lvl2pPr>
+            <a:lvl3pPr marL="685800" indent="0">
+              <a:buNone/>
+              <a:defRPr sz="1350" b="1"/>
+            </a:lvl3pPr>
+            <a:lvl4pPr marL="1028700" indent="0">
+              <a:buNone/>
+              <a:defRPr sz="1200" b="1"/>
+            </a:lvl4pPr>
+            <a:lvl5pPr marL="1371600" indent="0">
+              <a:buNone/>
+              <a:defRPr sz="1200" b="1"/>
+            </a:lvl5pPr>
+            <a:lvl6pPr marL="1714500" indent="0">
+              <a:buNone/>
+              <a:defRPr sz="1200" b="1"/>
+            </a:lvl6pPr>
+            <a:lvl7pPr marL="2057400" indent="0">
+              <a:buNone/>
+              <a:defRPr sz="1200" b="1"/>
+            </a:lvl7pPr>
+            <a:lvl8pPr marL="2400300" indent="0">
+              <a:buNone/>
+              <a:defRPr sz="1200" b="1"/>
+            </a:lvl8pPr>
+            <a:lvl9pPr marL="2743200" indent="0">
+              <a:buNone/>
+              <a:defRPr sz="1200" b="1"/>
+            </a:lvl9pPr>
+          </a:lstStyle>
+          <a:p>
+            <a:pPr lvl="0"/>
+            <a:r>
+              <a:rPr lang="en-US"/>
+              <a:t>Click to edit Master text styles</a:t>
+            </a:r>
+          </a:p>
+        </p:txBody>
+      </p:sp>
+      <p:sp>
+        <p:nvSpPr>
+          <p:cNvPr id="4" name="Content Placeholder 3"/>
+          <p:cNvSpPr>
+            <a:spLocks noGrp="1"/>
+          </p:cNvSpPr>
+          <p:nvPr>
+            <p:ph sz="half" idx="2"/>
+          </p:nvPr>
+        </p:nvSpPr>
+        <p:spPr>
+          <a:xfrm>
+            <a:off x="839789" y="2505075"/>
+            <a:ext cx="5157787" cy="3684588"/>
+          </a:xfrm>
+        </p:spPr>
+        <p:txBody>
+          <a:bodyPr/>
+          <a:lstStyle/>
+          <a:p>
+            <a:pPr lvl="0"/>
+            <a:r>
+              <a:rPr lang="en-US"/>
+              <a:t>Click to edit Master text styles</a:t>
+            </a:r>
+          </a:p>
+          <a:p>
+            <a:pPr lvl="1"/>
+            <a:r>
+              <a:rPr lang="en-US"/>
+              <a:t>Second level</a:t>
+            </a:r>
+          </a:p>
+          <a:p>
+            <a:pPr lvl="2"/>
+            <a:r>
+              <a:rPr lang="en-US"/>
+              <a:t>Third level</a:t>
+            </a:r>
+          </a:p>
+          <a:p>
+            <a:pPr lvl="3"/>
+            <a:r>
+              <a:rPr lang="en-US"/>
+              <a:t>Fourth level</a:t>
+            </a:r>
+          </a:p>
+          <a:p>
+            <a:pPr lvl="4"/>
+            <a:r>
+              <a:rPr lang="en-US"/>
+              <a:t>Fifth level</a:t>
+            </a:r>
+          </a:p>
+        </p:txBody>
+      </p:sp>
+      <p:sp>
+        <p:nvSpPr>
+          <p:cNvPr id="5" name="Text Placeholder 4"/>
+          <p:cNvSpPr>
+            <a:spLocks noGrp="1"/>
+          </p:cNvSpPr>
+          <p:nvPr>
+            <p:ph type="body" sz="quarter" idx="3"/>
+          </p:nvPr>
+        </p:nvSpPr>
+        <p:spPr>
+          <a:xfrm>
+            <a:off x="6172201" y="1681163"/>
+            <a:ext cx="5183188" cy="823912"/>
+          </a:xfrm>
+        </p:spPr>
+        <p:txBody>
+          <a:bodyPr anchor="b"/>
+          <a:lstStyle>
+            <a:lvl1pPr marL="0" indent="0">
+              <a:buNone/>
+              <a:defRPr sz="1800" b="1"/>
+            </a:lvl1pPr>
+            <a:lvl2pPr marL="342900" indent="0">
+              <a:buNone/>
+              <a:defRPr sz="1500" b="1"/>
+            </a:lvl2pPr>
+            <a:lvl3pPr marL="685800" indent="0">
+              <a:buNone/>
+              <a:defRPr sz="1350" b="1"/>
+            </a:lvl3pPr>
+            <a:lvl4pPr marL="1028700" indent="0">
+              <a:buNone/>
+              <a:defRPr sz="1200" b="1"/>
+            </a:lvl4pPr>
+            <a:lvl5pPr marL="1371600" indent="0">
+              <a:buNone/>
+              <a:defRPr sz="1200" b="1"/>
+            </a:lvl5pPr>
+            <a:lvl6pPr marL="1714500" indent="0">
+              <a:buNone/>
+              <a:defRPr sz="1200" b="1"/>
+            </a:lvl6pPr>
+            <a:lvl7pPr marL="2057400" indent="0">
+              <a:buNone/>
+              <a:defRPr sz="1200" b="1"/>
+            </a:lvl7pPr>
+            <a:lvl8pPr marL="2400300" indent="0">
+              <a:buNone/>
+              <a:defRPr sz="1200" b="1"/>
+            </a:lvl8pPr>
+            <a:lvl9pPr marL="2743200" indent="0">
+              <a:buNone/>
+              <a:defRPr sz="1200" b="1"/>
+            </a:lvl9pPr>
+          </a:lstStyle>
+          <a:p>
+            <a:pPr lvl="0"/>
+            <a:r>
+              <a:rPr lang="en-US"/>
+              <a:t>Click to edit Master text styles</a:t>
+            </a:r>
+          </a:p>
+        </p:txBody>
+      </p:sp>
+      <p:sp>
+        <p:nvSpPr>
+          <p:cNvPr id="6" name="Content Placeholder 5"/>
+          <p:cNvSpPr>
+            <a:spLocks noGrp="1"/>
+          </p:cNvSpPr>
+          <p:nvPr>
+            <p:ph sz="quarter" idx="4"/>
+          </p:nvPr>
+        </p:nvSpPr>
+        <p:spPr>
+          <a:xfrm>
+            <a:off x="6172201" y="2505075"/>
+            <a:ext cx="5183188" cy="3684588"/>
+          </a:xfrm>
+        </p:spPr>
+        <p:txBody>
+          <a:bodyPr/>
+          <a:lstStyle/>
+          <a:p>
+            <a:pPr lvl="0"/>
+            <a:r>
+              <a:rPr lang="en-US"/>
+              <a:t>Click to edit Master text styles</a:t>
+            </a:r>
+          </a:p>
+          <a:p>
+            <a:pPr lvl="1"/>
+            <a:r>
+              <a:rPr lang="en-US"/>
+              <a:t>Second level</a:t>
+            </a:r>
+          </a:p>
+          <a:p>
+            <a:pPr lvl="2"/>
+            <a:r>
+              <a:rPr lang="en-US"/>
+              <a:t>Third level</a:t>
+            </a:r>
+          </a:p>
+          <a:p>
+            <a:pPr lvl="3"/>
+            <a:r>
+              <a:rPr lang="en-US"/>
+              <a:t>Fourth level</a:t>
+            </a:r>
+          </a:p>
+          <a:p>
+            <a:pPr lvl="4"/>
+            <a:r>
+              <a:rPr lang="en-US"/>
+              <a:t>Fifth level</a:t>
+            </a:r>
+          </a:p>
+        </p:txBody>
+      </p:sp>
+      <p:sp>
+        <p:nvSpPr>
+          <p:cNvPr id="7" name="Date Placeholder 6"/>
+          <p:cNvSpPr>
+            <a:spLocks noGrp="1"/>
+          </p:cNvSpPr>
+          <p:nvPr>
+            <p:ph type="dt" sz="half" idx="10"/>
+          </p:nvPr>
+        </p:nvSpPr>
+        <p:spPr/>
+        <p:txBody>
+          <a:bodyPr/>
+          <a:lstStyle/>
+          <a:p>
+            <a:r>
+              <a:rPr lang="en-US"/>
+              <a:t>Vincenzo Gulisano</a:t>
+            </a:r>
+          </a:p>
+        </p:txBody>
+      </p:sp>
+      <p:sp>
+        <p:nvSpPr>
+          <p:cNvPr id="8" name="Footer Placeholder 7"/>
+          <p:cNvSpPr>
+            <a:spLocks noGrp="1"/>
+          </p:cNvSpPr>
+          <p:nvPr>
+            <p:ph type="ftr" sz="quarter" idx="11"/>
+          </p:nvPr>
+        </p:nvSpPr>
+        <p:spPr/>
+        <p:txBody>
+          <a:bodyPr/>
+          <a:lstStyle/>
+          <a:p>
+            <a:r>
+              <a:rPr lang="en-US"/>
+              <a:t>Operating Systems - Processes</a:t>
+            </a:r>
+          </a:p>
+        </p:txBody>
+      </p:sp>
+      <p:sp>
+        <p:nvSpPr>
+          <p:cNvPr id="9" name="Slide Number Placeholder 8"/>
+          <p:cNvSpPr>
+            <a:spLocks noGrp="1"/>
+          </p:cNvSpPr>
+          <p:nvPr>
+            <p:ph type="sldNum" sz="quarter" idx="12"/>
+          </p:nvPr>
+        </p:nvSpPr>
+        <p:spPr/>
+        <p:txBody>
+          <a:bodyPr/>
+          <a:lstStyle/>
+          <a:p>
+            <a:fld id="{95AAEEEC-DCEC-4178-AB14-E7254A15A296}" type="slidenum">
+              <a:rPr lang="en-US" smtClean="0"/>
+              <a:t>‹#›</a:t>
+            </a:fld>
+            <a:endParaRPr lang="en-US"/>
+          </a:p>
+        </p:txBody>
+      </p:sp>
+    </p:spTree>
+    <p:extLst>
+      <p:ext uri="{BB962C8B-B14F-4D97-AF65-F5344CB8AC3E}">
+        <p14:creationId xmlns:p14="http://schemas.microsoft.com/office/powerpoint/2010/main" val="3689727079"/>
+      </p:ext>
+    </p:extLst>
+  </p:cSld>
+  <p:clrMapOvr>
+    <a:masterClrMapping/>
+  </p:clrMapOvr>
+</p:sldLayout>
+</file>
+
+<file path=ppt/slideLayouts/slideLayout19.xml><?xml version="1.0" encoding="utf-8"?>
+<p:sldLayout xmlns:a="http://schemas.openxmlformats.org/drawingml/2006/main" xmlns:r="http://schemas.openxmlformats.org/officeDocument/2006/relationships" xmlns:p="http://schemas.openxmlformats.org/presentationml/2006/main" type="titleOnly" preserve="1">
+  <p:cSld name="Title Only">
+    <p:spTree>
+      <p:nvGrpSpPr>
+        <p:cNvPr id="1" name=""/>
+        <p:cNvGrpSpPr/>
+        <p:nvPr/>
+      </p:nvGrpSpPr>
+      <p:grpSpPr>
+        <a:xfrm>
+          <a:off x="0" y="0"/>
+          <a:ext cx="0" cy="0"/>
+          <a:chOff x="0" y="0"/>
+          <a:chExt cx="0" cy="0"/>
+        </a:xfrm>
+      </p:grpSpPr>
+      <p:sp>
+        <p:nvSpPr>
+          <p:cNvPr id="2" name="Title 1"/>
+          <p:cNvSpPr>
+            <a:spLocks noGrp="1"/>
+          </p:cNvSpPr>
+          <p:nvPr>
+            <p:ph type="title"/>
+          </p:nvPr>
+        </p:nvSpPr>
+        <p:spPr/>
+        <p:txBody>
+          <a:bodyPr/>
+          <a:lstStyle/>
+          <a:p>
+            <a:r>
+              <a:rPr lang="en-US"/>
+              <a:t>Click to edit Master title style</a:t>
+            </a:r>
+          </a:p>
+        </p:txBody>
+      </p:sp>
+      <p:sp>
+        <p:nvSpPr>
+          <p:cNvPr id="3" name="Date Placeholder 2"/>
+          <p:cNvSpPr>
+            <a:spLocks noGrp="1"/>
+          </p:cNvSpPr>
+          <p:nvPr>
+            <p:ph type="dt" sz="half" idx="10"/>
+          </p:nvPr>
+        </p:nvSpPr>
+        <p:spPr/>
+        <p:txBody>
+          <a:bodyPr/>
+          <a:lstStyle/>
+          <a:p>
+            <a:r>
+              <a:rPr lang="en-US"/>
+              <a:t>Vincenzo Gulisano</a:t>
+            </a:r>
+          </a:p>
+        </p:txBody>
+      </p:sp>
+      <p:sp>
+        <p:nvSpPr>
+          <p:cNvPr id="4" name="Footer Placeholder 3"/>
+          <p:cNvSpPr>
+            <a:spLocks noGrp="1"/>
+          </p:cNvSpPr>
+          <p:nvPr>
+            <p:ph type="ftr" sz="quarter" idx="11"/>
+          </p:nvPr>
+        </p:nvSpPr>
+        <p:spPr/>
+        <p:txBody>
+          <a:bodyPr/>
+          <a:lstStyle/>
+          <a:p>
+            <a:r>
+              <a:rPr lang="en-US"/>
+              <a:t>Operating Systems - Processes</a:t>
+            </a:r>
+          </a:p>
+        </p:txBody>
+      </p:sp>
+      <p:sp>
+        <p:nvSpPr>
+          <p:cNvPr id="5" name="Slide Number Placeholder 4"/>
+          <p:cNvSpPr>
+            <a:spLocks noGrp="1"/>
+          </p:cNvSpPr>
+          <p:nvPr>
+            <p:ph type="sldNum" sz="quarter" idx="12"/>
+          </p:nvPr>
+        </p:nvSpPr>
+        <p:spPr/>
+        <p:txBody>
+          <a:bodyPr/>
+          <a:lstStyle/>
+          <a:p>
+            <a:fld id="{95AAEEEC-DCEC-4178-AB14-E7254A15A296}" type="slidenum">
+              <a:rPr lang="en-US" smtClean="0"/>
+              <a:t>‹#›</a:t>
+            </a:fld>
+            <a:endParaRPr lang="en-US"/>
+          </a:p>
+        </p:txBody>
+      </p:sp>
+    </p:spTree>
+    <p:extLst>
+      <p:ext uri="{BB962C8B-B14F-4D97-AF65-F5344CB8AC3E}">
+        <p14:creationId xmlns:p14="http://schemas.microsoft.com/office/powerpoint/2010/main" val="2327047870"/>
+      </p:ext>
+    </p:extLst>
+  </p:cSld>
+  <p:clrMapOvr>
+    <a:masterClrMapping/>
+  </p:clrMapOvr>
+</p:sldLayout>
+</file>
+
 <file path=ppt/slideLayouts/slideLayout2.xml><?xml version="1.0" encoding="utf-8"?>
 <p:sldLayout xmlns:a="http://schemas.openxmlformats.org/drawingml/2006/main" xmlns:r="http://schemas.openxmlformats.org/officeDocument/2006/relationships" xmlns:p="http://schemas.openxmlformats.org/presentationml/2006/main" type="obj" preserve="1">
   <p:cSld name="Title and Content">
@@ -8910,6 +10413,1046 @@
     <p:extLst>
       <p:ext uri="{BB962C8B-B14F-4D97-AF65-F5344CB8AC3E}">
         <p14:creationId xmlns:p14="http://schemas.microsoft.com/office/powerpoint/2010/main" val="1546207861"/>
+      </p:ext>
+    </p:extLst>
+  </p:cSld>
+  <p:clrMapOvr>
+    <a:masterClrMapping/>
+  </p:clrMapOvr>
+</p:sldLayout>
+</file>
+
+<file path=ppt/slideLayouts/slideLayout20.xml><?xml version="1.0" encoding="utf-8"?>
+<p:sldLayout xmlns:a="http://schemas.openxmlformats.org/drawingml/2006/main" xmlns:r="http://schemas.openxmlformats.org/officeDocument/2006/relationships" xmlns:p="http://schemas.openxmlformats.org/presentationml/2006/main" type="blank" preserve="1">
+  <p:cSld name="Blank">
+    <p:spTree>
+      <p:nvGrpSpPr>
+        <p:cNvPr id="1" name=""/>
+        <p:cNvGrpSpPr/>
+        <p:nvPr/>
+      </p:nvGrpSpPr>
+      <p:grpSpPr>
+        <a:xfrm>
+          <a:off x="0" y="0"/>
+          <a:ext cx="0" cy="0"/>
+          <a:chOff x="0" y="0"/>
+          <a:chExt cx="0" cy="0"/>
+        </a:xfrm>
+      </p:grpSpPr>
+      <p:sp>
+        <p:nvSpPr>
+          <p:cNvPr id="2" name="Date Placeholder 1"/>
+          <p:cNvSpPr>
+            <a:spLocks noGrp="1"/>
+          </p:cNvSpPr>
+          <p:nvPr>
+            <p:ph type="dt" sz="half" idx="10"/>
+          </p:nvPr>
+        </p:nvSpPr>
+        <p:spPr/>
+        <p:txBody>
+          <a:bodyPr/>
+          <a:lstStyle/>
+          <a:p>
+            <a:r>
+              <a:rPr lang="en-US"/>
+              <a:t>Vincenzo Gulisano</a:t>
+            </a:r>
+          </a:p>
+        </p:txBody>
+      </p:sp>
+      <p:sp>
+        <p:nvSpPr>
+          <p:cNvPr id="3" name="Footer Placeholder 2"/>
+          <p:cNvSpPr>
+            <a:spLocks noGrp="1"/>
+          </p:cNvSpPr>
+          <p:nvPr>
+            <p:ph type="ftr" sz="quarter" idx="11"/>
+          </p:nvPr>
+        </p:nvSpPr>
+        <p:spPr/>
+        <p:txBody>
+          <a:bodyPr/>
+          <a:lstStyle/>
+          <a:p>
+            <a:r>
+              <a:rPr lang="en-US"/>
+              <a:t>Operating Systems - Processes</a:t>
+            </a:r>
+          </a:p>
+        </p:txBody>
+      </p:sp>
+      <p:sp>
+        <p:nvSpPr>
+          <p:cNvPr id="4" name="Slide Number Placeholder 3"/>
+          <p:cNvSpPr>
+            <a:spLocks noGrp="1"/>
+          </p:cNvSpPr>
+          <p:nvPr>
+            <p:ph type="sldNum" sz="quarter" idx="12"/>
+          </p:nvPr>
+        </p:nvSpPr>
+        <p:spPr/>
+        <p:txBody>
+          <a:bodyPr/>
+          <a:lstStyle/>
+          <a:p>
+            <a:fld id="{95AAEEEC-DCEC-4178-AB14-E7254A15A296}" type="slidenum">
+              <a:rPr lang="en-US" smtClean="0"/>
+              <a:t>‹#›</a:t>
+            </a:fld>
+            <a:endParaRPr lang="en-US"/>
+          </a:p>
+        </p:txBody>
+      </p:sp>
+    </p:spTree>
+    <p:extLst>
+      <p:ext uri="{BB962C8B-B14F-4D97-AF65-F5344CB8AC3E}">
+        <p14:creationId xmlns:p14="http://schemas.microsoft.com/office/powerpoint/2010/main" val="2329800962"/>
+      </p:ext>
+    </p:extLst>
+  </p:cSld>
+  <p:clrMapOvr>
+    <a:masterClrMapping/>
+  </p:clrMapOvr>
+</p:sldLayout>
+</file>
+
+<file path=ppt/slideLayouts/slideLayout21.xml><?xml version="1.0" encoding="utf-8"?>
+<p:sldLayout xmlns:a="http://schemas.openxmlformats.org/drawingml/2006/main" xmlns:r="http://schemas.openxmlformats.org/officeDocument/2006/relationships" xmlns:p="http://schemas.openxmlformats.org/presentationml/2006/main" type="objTx" preserve="1">
+  <p:cSld name="Content with Caption">
+    <p:spTree>
+      <p:nvGrpSpPr>
+        <p:cNvPr id="1" name=""/>
+        <p:cNvGrpSpPr/>
+        <p:nvPr/>
+      </p:nvGrpSpPr>
+      <p:grpSpPr>
+        <a:xfrm>
+          <a:off x="0" y="0"/>
+          <a:ext cx="0" cy="0"/>
+          <a:chOff x="0" y="0"/>
+          <a:chExt cx="0" cy="0"/>
+        </a:xfrm>
+      </p:grpSpPr>
+      <p:sp>
+        <p:nvSpPr>
+          <p:cNvPr id="2" name="Title 1"/>
+          <p:cNvSpPr>
+            <a:spLocks noGrp="1"/>
+          </p:cNvSpPr>
+          <p:nvPr>
+            <p:ph type="title"/>
+          </p:nvPr>
+        </p:nvSpPr>
+        <p:spPr>
+          <a:xfrm>
+            <a:off x="839788" y="457200"/>
+            <a:ext cx="3932237" cy="1600200"/>
+          </a:xfrm>
+        </p:spPr>
+        <p:txBody>
+          <a:bodyPr anchor="b"/>
+          <a:lstStyle>
+            <a:lvl1pPr>
+              <a:defRPr sz="2400"/>
+            </a:lvl1pPr>
+          </a:lstStyle>
+          <a:p>
+            <a:r>
+              <a:rPr lang="en-US"/>
+              <a:t>Click to edit Master title style</a:t>
+            </a:r>
+          </a:p>
+        </p:txBody>
+      </p:sp>
+      <p:sp>
+        <p:nvSpPr>
+          <p:cNvPr id="3" name="Content Placeholder 2"/>
+          <p:cNvSpPr>
+            <a:spLocks noGrp="1"/>
+          </p:cNvSpPr>
+          <p:nvPr>
+            <p:ph idx="1"/>
+          </p:nvPr>
+        </p:nvSpPr>
+        <p:spPr>
+          <a:xfrm>
+            <a:off x="5183188" y="987426"/>
+            <a:ext cx="6172200" cy="4873625"/>
+          </a:xfrm>
+        </p:spPr>
+        <p:txBody>
+          <a:bodyPr/>
+          <a:lstStyle>
+            <a:lvl1pPr>
+              <a:defRPr sz="2400"/>
+            </a:lvl1pPr>
+            <a:lvl2pPr>
+              <a:defRPr sz="2100"/>
+            </a:lvl2pPr>
+            <a:lvl3pPr>
+              <a:defRPr sz="1800"/>
+            </a:lvl3pPr>
+            <a:lvl4pPr>
+              <a:defRPr sz="1500"/>
+            </a:lvl4pPr>
+            <a:lvl5pPr>
+              <a:defRPr sz="1500"/>
+            </a:lvl5pPr>
+            <a:lvl6pPr>
+              <a:defRPr sz="1500"/>
+            </a:lvl6pPr>
+            <a:lvl7pPr>
+              <a:defRPr sz="1500"/>
+            </a:lvl7pPr>
+            <a:lvl8pPr>
+              <a:defRPr sz="1500"/>
+            </a:lvl8pPr>
+            <a:lvl9pPr>
+              <a:defRPr sz="1500"/>
+            </a:lvl9pPr>
+          </a:lstStyle>
+          <a:p>
+            <a:pPr lvl="0"/>
+            <a:r>
+              <a:rPr lang="en-US"/>
+              <a:t>Click to edit Master text styles</a:t>
+            </a:r>
+          </a:p>
+          <a:p>
+            <a:pPr lvl="1"/>
+            <a:r>
+              <a:rPr lang="en-US"/>
+              <a:t>Second level</a:t>
+            </a:r>
+          </a:p>
+          <a:p>
+            <a:pPr lvl="2"/>
+            <a:r>
+              <a:rPr lang="en-US"/>
+              <a:t>Third level</a:t>
+            </a:r>
+          </a:p>
+          <a:p>
+            <a:pPr lvl="3"/>
+            <a:r>
+              <a:rPr lang="en-US"/>
+              <a:t>Fourth level</a:t>
+            </a:r>
+          </a:p>
+          <a:p>
+            <a:pPr lvl="4"/>
+            <a:r>
+              <a:rPr lang="en-US"/>
+              <a:t>Fifth level</a:t>
+            </a:r>
+          </a:p>
+        </p:txBody>
+      </p:sp>
+      <p:sp>
+        <p:nvSpPr>
+          <p:cNvPr id="4" name="Text Placeholder 3"/>
+          <p:cNvSpPr>
+            <a:spLocks noGrp="1"/>
+          </p:cNvSpPr>
+          <p:nvPr>
+            <p:ph type="body" sz="half" idx="2"/>
+          </p:nvPr>
+        </p:nvSpPr>
+        <p:spPr>
+          <a:xfrm>
+            <a:off x="839788" y="2057400"/>
+            <a:ext cx="3932237" cy="3811588"/>
+          </a:xfrm>
+        </p:spPr>
+        <p:txBody>
+          <a:bodyPr/>
+          <a:lstStyle>
+            <a:lvl1pPr marL="0" indent="0">
+              <a:buNone/>
+              <a:defRPr sz="1200"/>
+            </a:lvl1pPr>
+            <a:lvl2pPr marL="342900" indent="0">
+              <a:buNone/>
+              <a:defRPr sz="1050"/>
+            </a:lvl2pPr>
+            <a:lvl3pPr marL="685800" indent="0">
+              <a:buNone/>
+              <a:defRPr sz="900"/>
+            </a:lvl3pPr>
+            <a:lvl4pPr marL="1028700" indent="0">
+              <a:buNone/>
+              <a:defRPr sz="750"/>
+            </a:lvl4pPr>
+            <a:lvl5pPr marL="1371600" indent="0">
+              <a:buNone/>
+              <a:defRPr sz="750"/>
+            </a:lvl5pPr>
+            <a:lvl6pPr marL="1714500" indent="0">
+              <a:buNone/>
+              <a:defRPr sz="750"/>
+            </a:lvl6pPr>
+            <a:lvl7pPr marL="2057400" indent="0">
+              <a:buNone/>
+              <a:defRPr sz="750"/>
+            </a:lvl7pPr>
+            <a:lvl8pPr marL="2400300" indent="0">
+              <a:buNone/>
+              <a:defRPr sz="750"/>
+            </a:lvl8pPr>
+            <a:lvl9pPr marL="2743200" indent="0">
+              <a:buNone/>
+              <a:defRPr sz="750"/>
+            </a:lvl9pPr>
+          </a:lstStyle>
+          <a:p>
+            <a:pPr lvl="0"/>
+            <a:r>
+              <a:rPr lang="en-US"/>
+              <a:t>Click to edit Master text styles</a:t>
+            </a:r>
+          </a:p>
+        </p:txBody>
+      </p:sp>
+      <p:sp>
+        <p:nvSpPr>
+          <p:cNvPr id="5" name="Date Placeholder 4"/>
+          <p:cNvSpPr>
+            <a:spLocks noGrp="1"/>
+          </p:cNvSpPr>
+          <p:nvPr>
+            <p:ph type="dt" sz="half" idx="10"/>
+          </p:nvPr>
+        </p:nvSpPr>
+        <p:spPr/>
+        <p:txBody>
+          <a:bodyPr/>
+          <a:lstStyle/>
+          <a:p>
+            <a:r>
+              <a:rPr lang="en-US"/>
+              <a:t>Vincenzo Gulisano</a:t>
+            </a:r>
+          </a:p>
+        </p:txBody>
+      </p:sp>
+      <p:sp>
+        <p:nvSpPr>
+          <p:cNvPr id="6" name="Footer Placeholder 5"/>
+          <p:cNvSpPr>
+            <a:spLocks noGrp="1"/>
+          </p:cNvSpPr>
+          <p:nvPr>
+            <p:ph type="ftr" sz="quarter" idx="11"/>
+          </p:nvPr>
+        </p:nvSpPr>
+        <p:spPr/>
+        <p:txBody>
+          <a:bodyPr/>
+          <a:lstStyle/>
+          <a:p>
+            <a:r>
+              <a:rPr lang="en-US"/>
+              <a:t>Operating Systems - Processes</a:t>
+            </a:r>
+          </a:p>
+        </p:txBody>
+      </p:sp>
+      <p:sp>
+        <p:nvSpPr>
+          <p:cNvPr id="7" name="Slide Number Placeholder 6"/>
+          <p:cNvSpPr>
+            <a:spLocks noGrp="1"/>
+          </p:cNvSpPr>
+          <p:nvPr>
+            <p:ph type="sldNum" sz="quarter" idx="12"/>
+          </p:nvPr>
+        </p:nvSpPr>
+        <p:spPr/>
+        <p:txBody>
+          <a:bodyPr/>
+          <a:lstStyle/>
+          <a:p>
+            <a:fld id="{95AAEEEC-DCEC-4178-AB14-E7254A15A296}" type="slidenum">
+              <a:rPr lang="en-US" smtClean="0"/>
+              <a:t>‹#›</a:t>
+            </a:fld>
+            <a:endParaRPr lang="en-US"/>
+          </a:p>
+        </p:txBody>
+      </p:sp>
+    </p:spTree>
+    <p:extLst>
+      <p:ext uri="{BB962C8B-B14F-4D97-AF65-F5344CB8AC3E}">
+        <p14:creationId xmlns:p14="http://schemas.microsoft.com/office/powerpoint/2010/main" val="3467117139"/>
+      </p:ext>
+    </p:extLst>
+  </p:cSld>
+  <p:clrMapOvr>
+    <a:masterClrMapping/>
+  </p:clrMapOvr>
+</p:sldLayout>
+</file>
+
+<file path=ppt/slideLayouts/slideLayout22.xml><?xml version="1.0" encoding="utf-8"?>
+<p:sldLayout xmlns:a="http://schemas.openxmlformats.org/drawingml/2006/main" xmlns:r="http://schemas.openxmlformats.org/officeDocument/2006/relationships" xmlns:p="http://schemas.openxmlformats.org/presentationml/2006/main" type="picTx" preserve="1">
+  <p:cSld name="Picture with Caption">
+    <p:spTree>
+      <p:nvGrpSpPr>
+        <p:cNvPr id="1" name=""/>
+        <p:cNvGrpSpPr/>
+        <p:nvPr/>
+      </p:nvGrpSpPr>
+      <p:grpSpPr>
+        <a:xfrm>
+          <a:off x="0" y="0"/>
+          <a:ext cx="0" cy="0"/>
+          <a:chOff x="0" y="0"/>
+          <a:chExt cx="0" cy="0"/>
+        </a:xfrm>
+      </p:grpSpPr>
+      <p:sp>
+        <p:nvSpPr>
+          <p:cNvPr id="2" name="Title 1"/>
+          <p:cNvSpPr>
+            <a:spLocks noGrp="1"/>
+          </p:cNvSpPr>
+          <p:nvPr>
+            <p:ph type="title"/>
+          </p:nvPr>
+        </p:nvSpPr>
+        <p:spPr>
+          <a:xfrm>
+            <a:off x="839788" y="457200"/>
+            <a:ext cx="3932237" cy="1600200"/>
+          </a:xfrm>
+        </p:spPr>
+        <p:txBody>
+          <a:bodyPr anchor="b"/>
+          <a:lstStyle>
+            <a:lvl1pPr>
+              <a:defRPr sz="2400"/>
+            </a:lvl1pPr>
+          </a:lstStyle>
+          <a:p>
+            <a:r>
+              <a:rPr lang="en-US"/>
+              <a:t>Click to edit Master title style</a:t>
+            </a:r>
+          </a:p>
+        </p:txBody>
+      </p:sp>
+      <p:sp>
+        <p:nvSpPr>
+          <p:cNvPr id="3" name="Picture Placeholder 2"/>
+          <p:cNvSpPr>
+            <a:spLocks noGrp="1"/>
+          </p:cNvSpPr>
+          <p:nvPr>
+            <p:ph type="pic" idx="1"/>
+          </p:nvPr>
+        </p:nvSpPr>
+        <p:spPr>
+          <a:xfrm>
+            <a:off x="5183188" y="987426"/>
+            <a:ext cx="6172200" cy="4873625"/>
+          </a:xfrm>
+        </p:spPr>
+        <p:txBody>
+          <a:bodyPr/>
+          <a:lstStyle>
+            <a:lvl1pPr marL="0" indent="0">
+              <a:buNone/>
+              <a:defRPr sz="2400"/>
+            </a:lvl1pPr>
+            <a:lvl2pPr marL="342900" indent="0">
+              <a:buNone/>
+              <a:defRPr sz="2100"/>
+            </a:lvl2pPr>
+            <a:lvl3pPr marL="685800" indent="0">
+              <a:buNone/>
+              <a:defRPr sz="1800"/>
+            </a:lvl3pPr>
+            <a:lvl4pPr marL="1028700" indent="0">
+              <a:buNone/>
+              <a:defRPr sz="1500"/>
+            </a:lvl4pPr>
+            <a:lvl5pPr marL="1371600" indent="0">
+              <a:buNone/>
+              <a:defRPr sz="1500"/>
+            </a:lvl5pPr>
+            <a:lvl6pPr marL="1714500" indent="0">
+              <a:buNone/>
+              <a:defRPr sz="1500"/>
+            </a:lvl6pPr>
+            <a:lvl7pPr marL="2057400" indent="0">
+              <a:buNone/>
+              <a:defRPr sz="1500"/>
+            </a:lvl7pPr>
+            <a:lvl8pPr marL="2400300" indent="0">
+              <a:buNone/>
+              <a:defRPr sz="1500"/>
+            </a:lvl8pPr>
+            <a:lvl9pPr marL="2743200" indent="0">
+              <a:buNone/>
+              <a:defRPr sz="1500"/>
+            </a:lvl9pPr>
+          </a:lstStyle>
+          <a:p>
+            <a:endParaRPr lang="en-US"/>
+          </a:p>
+        </p:txBody>
+      </p:sp>
+      <p:sp>
+        <p:nvSpPr>
+          <p:cNvPr id="4" name="Text Placeholder 3"/>
+          <p:cNvSpPr>
+            <a:spLocks noGrp="1"/>
+          </p:cNvSpPr>
+          <p:nvPr>
+            <p:ph type="body" sz="half" idx="2"/>
+          </p:nvPr>
+        </p:nvSpPr>
+        <p:spPr>
+          <a:xfrm>
+            <a:off x="839788" y="2057400"/>
+            <a:ext cx="3932237" cy="3811588"/>
+          </a:xfrm>
+        </p:spPr>
+        <p:txBody>
+          <a:bodyPr/>
+          <a:lstStyle>
+            <a:lvl1pPr marL="0" indent="0">
+              <a:buNone/>
+              <a:defRPr sz="1200"/>
+            </a:lvl1pPr>
+            <a:lvl2pPr marL="342900" indent="0">
+              <a:buNone/>
+              <a:defRPr sz="1050"/>
+            </a:lvl2pPr>
+            <a:lvl3pPr marL="685800" indent="0">
+              <a:buNone/>
+              <a:defRPr sz="900"/>
+            </a:lvl3pPr>
+            <a:lvl4pPr marL="1028700" indent="0">
+              <a:buNone/>
+              <a:defRPr sz="750"/>
+            </a:lvl4pPr>
+            <a:lvl5pPr marL="1371600" indent="0">
+              <a:buNone/>
+              <a:defRPr sz="750"/>
+            </a:lvl5pPr>
+            <a:lvl6pPr marL="1714500" indent="0">
+              <a:buNone/>
+              <a:defRPr sz="750"/>
+            </a:lvl6pPr>
+            <a:lvl7pPr marL="2057400" indent="0">
+              <a:buNone/>
+              <a:defRPr sz="750"/>
+            </a:lvl7pPr>
+            <a:lvl8pPr marL="2400300" indent="0">
+              <a:buNone/>
+              <a:defRPr sz="750"/>
+            </a:lvl8pPr>
+            <a:lvl9pPr marL="2743200" indent="0">
+              <a:buNone/>
+              <a:defRPr sz="750"/>
+            </a:lvl9pPr>
+          </a:lstStyle>
+          <a:p>
+            <a:pPr lvl="0"/>
+            <a:r>
+              <a:rPr lang="en-US"/>
+              <a:t>Click to edit Master text styles</a:t>
+            </a:r>
+          </a:p>
+        </p:txBody>
+      </p:sp>
+      <p:sp>
+        <p:nvSpPr>
+          <p:cNvPr id="5" name="Date Placeholder 4"/>
+          <p:cNvSpPr>
+            <a:spLocks noGrp="1"/>
+          </p:cNvSpPr>
+          <p:nvPr>
+            <p:ph type="dt" sz="half" idx="10"/>
+          </p:nvPr>
+        </p:nvSpPr>
+        <p:spPr/>
+        <p:txBody>
+          <a:bodyPr/>
+          <a:lstStyle/>
+          <a:p>
+            <a:r>
+              <a:rPr lang="en-US"/>
+              <a:t>Vincenzo Gulisano</a:t>
+            </a:r>
+          </a:p>
+        </p:txBody>
+      </p:sp>
+      <p:sp>
+        <p:nvSpPr>
+          <p:cNvPr id="6" name="Footer Placeholder 5"/>
+          <p:cNvSpPr>
+            <a:spLocks noGrp="1"/>
+          </p:cNvSpPr>
+          <p:nvPr>
+            <p:ph type="ftr" sz="quarter" idx="11"/>
+          </p:nvPr>
+        </p:nvSpPr>
+        <p:spPr/>
+        <p:txBody>
+          <a:bodyPr/>
+          <a:lstStyle/>
+          <a:p>
+            <a:r>
+              <a:rPr lang="en-US"/>
+              <a:t>Operating Systems - Processes</a:t>
+            </a:r>
+            <a:endParaRPr lang="en-US" dirty="0"/>
+          </a:p>
+        </p:txBody>
+      </p:sp>
+      <p:sp>
+        <p:nvSpPr>
+          <p:cNvPr id="7" name="Slide Number Placeholder 6"/>
+          <p:cNvSpPr>
+            <a:spLocks noGrp="1"/>
+          </p:cNvSpPr>
+          <p:nvPr>
+            <p:ph type="sldNum" sz="quarter" idx="12"/>
+          </p:nvPr>
+        </p:nvSpPr>
+        <p:spPr/>
+        <p:txBody>
+          <a:bodyPr/>
+          <a:lstStyle/>
+          <a:p>
+            <a:fld id="{95AAEEEC-DCEC-4178-AB14-E7254A15A296}" type="slidenum">
+              <a:rPr lang="en-US" smtClean="0"/>
+              <a:t>‹#›</a:t>
+            </a:fld>
+            <a:endParaRPr lang="en-US"/>
+          </a:p>
+        </p:txBody>
+      </p:sp>
+    </p:spTree>
+    <p:extLst>
+      <p:ext uri="{BB962C8B-B14F-4D97-AF65-F5344CB8AC3E}">
+        <p14:creationId xmlns:p14="http://schemas.microsoft.com/office/powerpoint/2010/main" val="4246178956"/>
+      </p:ext>
+    </p:extLst>
+  </p:cSld>
+  <p:clrMapOvr>
+    <a:masterClrMapping/>
+  </p:clrMapOvr>
+</p:sldLayout>
+</file>
+
+<file path=ppt/slideLayouts/slideLayout23.xml><?xml version="1.0" encoding="utf-8"?>
+<p:sldLayout xmlns:a="http://schemas.openxmlformats.org/drawingml/2006/main" xmlns:r="http://schemas.openxmlformats.org/officeDocument/2006/relationships" xmlns:p="http://schemas.openxmlformats.org/presentationml/2006/main" type="vertTx" preserve="1">
+  <p:cSld name="Title and Vertical Text">
+    <p:spTree>
+      <p:nvGrpSpPr>
+        <p:cNvPr id="1" name=""/>
+        <p:cNvGrpSpPr/>
+        <p:nvPr/>
+      </p:nvGrpSpPr>
+      <p:grpSpPr>
+        <a:xfrm>
+          <a:off x="0" y="0"/>
+          <a:ext cx="0" cy="0"/>
+          <a:chOff x="0" y="0"/>
+          <a:chExt cx="0" cy="0"/>
+        </a:xfrm>
+      </p:grpSpPr>
+      <p:sp>
+        <p:nvSpPr>
+          <p:cNvPr id="2" name="Title 1"/>
+          <p:cNvSpPr>
+            <a:spLocks noGrp="1"/>
+          </p:cNvSpPr>
+          <p:nvPr>
+            <p:ph type="title"/>
+          </p:nvPr>
+        </p:nvSpPr>
+        <p:spPr/>
+        <p:txBody>
+          <a:bodyPr/>
+          <a:lstStyle/>
+          <a:p>
+            <a:r>
+              <a:rPr lang="en-US"/>
+              <a:t>Click to edit Master title style</a:t>
+            </a:r>
+          </a:p>
+        </p:txBody>
+      </p:sp>
+      <p:sp>
+        <p:nvSpPr>
+          <p:cNvPr id="3" name="Vertical Text Placeholder 2"/>
+          <p:cNvSpPr>
+            <a:spLocks noGrp="1"/>
+          </p:cNvSpPr>
+          <p:nvPr>
+            <p:ph type="body" orient="vert" idx="1"/>
+          </p:nvPr>
+        </p:nvSpPr>
+        <p:spPr/>
+        <p:txBody>
+          <a:bodyPr vert="eaVert"/>
+          <a:lstStyle/>
+          <a:p>
+            <a:pPr lvl="0"/>
+            <a:r>
+              <a:rPr lang="en-US"/>
+              <a:t>Click to edit Master text styles</a:t>
+            </a:r>
+          </a:p>
+          <a:p>
+            <a:pPr lvl="1"/>
+            <a:r>
+              <a:rPr lang="en-US"/>
+              <a:t>Second level</a:t>
+            </a:r>
+          </a:p>
+          <a:p>
+            <a:pPr lvl="2"/>
+            <a:r>
+              <a:rPr lang="en-US"/>
+              <a:t>Third level</a:t>
+            </a:r>
+          </a:p>
+          <a:p>
+            <a:pPr lvl="3"/>
+            <a:r>
+              <a:rPr lang="en-US"/>
+              <a:t>Fourth level</a:t>
+            </a:r>
+          </a:p>
+          <a:p>
+            <a:pPr lvl="4"/>
+            <a:r>
+              <a:rPr lang="en-US"/>
+              <a:t>Fifth level</a:t>
+            </a:r>
+          </a:p>
+        </p:txBody>
+      </p:sp>
+      <p:sp>
+        <p:nvSpPr>
+          <p:cNvPr id="4" name="Date Placeholder 3"/>
+          <p:cNvSpPr>
+            <a:spLocks noGrp="1"/>
+          </p:cNvSpPr>
+          <p:nvPr>
+            <p:ph type="dt" sz="half" idx="10"/>
+          </p:nvPr>
+        </p:nvSpPr>
+        <p:spPr/>
+        <p:txBody>
+          <a:bodyPr/>
+          <a:lstStyle/>
+          <a:p>
+            <a:r>
+              <a:rPr lang="en-US"/>
+              <a:t>Vincenzo Gulisano</a:t>
+            </a:r>
+          </a:p>
+        </p:txBody>
+      </p:sp>
+      <p:sp>
+        <p:nvSpPr>
+          <p:cNvPr id="5" name="Footer Placeholder 4"/>
+          <p:cNvSpPr>
+            <a:spLocks noGrp="1"/>
+          </p:cNvSpPr>
+          <p:nvPr>
+            <p:ph type="ftr" sz="quarter" idx="11"/>
+          </p:nvPr>
+        </p:nvSpPr>
+        <p:spPr/>
+        <p:txBody>
+          <a:bodyPr/>
+          <a:lstStyle/>
+          <a:p>
+            <a:r>
+              <a:rPr lang="en-US"/>
+              <a:t>Operating Systems - Processes</a:t>
+            </a:r>
+          </a:p>
+        </p:txBody>
+      </p:sp>
+      <p:sp>
+        <p:nvSpPr>
+          <p:cNvPr id="6" name="Slide Number Placeholder 5"/>
+          <p:cNvSpPr>
+            <a:spLocks noGrp="1"/>
+          </p:cNvSpPr>
+          <p:nvPr>
+            <p:ph type="sldNum" sz="quarter" idx="12"/>
+          </p:nvPr>
+        </p:nvSpPr>
+        <p:spPr/>
+        <p:txBody>
+          <a:bodyPr/>
+          <a:lstStyle/>
+          <a:p>
+            <a:fld id="{95AAEEEC-DCEC-4178-AB14-E7254A15A296}" type="slidenum">
+              <a:rPr lang="en-US" smtClean="0"/>
+              <a:t>‹#›</a:t>
+            </a:fld>
+            <a:endParaRPr lang="en-US"/>
+          </a:p>
+        </p:txBody>
+      </p:sp>
+    </p:spTree>
+    <p:extLst>
+      <p:ext uri="{BB962C8B-B14F-4D97-AF65-F5344CB8AC3E}">
+        <p14:creationId xmlns:p14="http://schemas.microsoft.com/office/powerpoint/2010/main" val="4051011664"/>
+      </p:ext>
+    </p:extLst>
+  </p:cSld>
+  <p:clrMapOvr>
+    <a:masterClrMapping/>
+  </p:clrMapOvr>
+</p:sldLayout>
+</file>
+
+<file path=ppt/slideLayouts/slideLayout24.xml><?xml version="1.0" encoding="utf-8"?>
+<p:sldLayout xmlns:a="http://schemas.openxmlformats.org/drawingml/2006/main" xmlns:r="http://schemas.openxmlformats.org/officeDocument/2006/relationships" xmlns:p="http://schemas.openxmlformats.org/presentationml/2006/main" type="vertTitleAndTx" preserve="1">
+  <p:cSld name="Vertical Title and Text">
+    <p:spTree>
+      <p:nvGrpSpPr>
+        <p:cNvPr id="1" name=""/>
+        <p:cNvGrpSpPr/>
+        <p:nvPr/>
+      </p:nvGrpSpPr>
+      <p:grpSpPr>
+        <a:xfrm>
+          <a:off x="0" y="0"/>
+          <a:ext cx="0" cy="0"/>
+          <a:chOff x="0" y="0"/>
+          <a:chExt cx="0" cy="0"/>
+        </a:xfrm>
+      </p:grpSpPr>
+      <p:sp>
+        <p:nvSpPr>
+          <p:cNvPr id="2" name="Vertical Title 1"/>
+          <p:cNvSpPr>
+            <a:spLocks noGrp="1"/>
+          </p:cNvSpPr>
+          <p:nvPr>
+            <p:ph type="title" orient="vert"/>
+          </p:nvPr>
+        </p:nvSpPr>
+        <p:spPr>
+          <a:xfrm>
+            <a:off x="8724901" y="365125"/>
+            <a:ext cx="2628900" cy="5811838"/>
+          </a:xfrm>
+        </p:spPr>
+        <p:txBody>
+          <a:bodyPr vert="eaVert"/>
+          <a:lstStyle/>
+          <a:p>
+            <a:r>
+              <a:rPr lang="en-US"/>
+              <a:t>Click to edit Master title style</a:t>
+            </a:r>
+          </a:p>
+        </p:txBody>
+      </p:sp>
+      <p:sp>
+        <p:nvSpPr>
+          <p:cNvPr id="3" name="Vertical Text Placeholder 2"/>
+          <p:cNvSpPr>
+            <a:spLocks noGrp="1"/>
+          </p:cNvSpPr>
+          <p:nvPr>
+            <p:ph type="body" orient="vert" idx="1"/>
+          </p:nvPr>
+        </p:nvSpPr>
+        <p:spPr>
+          <a:xfrm>
+            <a:off x="838201" y="365125"/>
+            <a:ext cx="7734300" cy="5811838"/>
+          </a:xfrm>
+        </p:spPr>
+        <p:txBody>
+          <a:bodyPr vert="eaVert"/>
+          <a:lstStyle/>
+          <a:p>
+            <a:pPr lvl="0"/>
+            <a:r>
+              <a:rPr lang="en-US"/>
+              <a:t>Click to edit Master text styles</a:t>
+            </a:r>
+          </a:p>
+          <a:p>
+            <a:pPr lvl="1"/>
+            <a:r>
+              <a:rPr lang="en-US"/>
+              <a:t>Second level</a:t>
+            </a:r>
+          </a:p>
+          <a:p>
+            <a:pPr lvl="2"/>
+            <a:r>
+              <a:rPr lang="en-US"/>
+              <a:t>Third level</a:t>
+            </a:r>
+          </a:p>
+          <a:p>
+            <a:pPr lvl="3"/>
+            <a:r>
+              <a:rPr lang="en-US"/>
+              <a:t>Fourth level</a:t>
+            </a:r>
+          </a:p>
+          <a:p>
+            <a:pPr lvl="4"/>
+            <a:r>
+              <a:rPr lang="en-US"/>
+              <a:t>Fifth level</a:t>
+            </a:r>
+          </a:p>
+        </p:txBody>
+      </p:sp>
+      <p:sp>
+        <p:nvSpPr>
+          <p:cNvPr id="4" name="Date Placeholder 3"/>
+          <p:cNvSpPr>
+            <a:spLocks noGrp="1"/>
+          </p:cNvSpPr>
+          <p:nvPr>
+            <p:ph type="dt" sz="half" idx="10"/>
+          </p:nvPr>
+        </p:nvSpPr>
+        <p:spPr/>
+        <p:txBody>
+          <a:bodyPr/>
+          <a:lstStyle/>
+          <a:p>
+            <a:r>
+              <a:rPr lang="en-US"/>
+              <a:t>Vincenzo Gulisano</a:t>
+            </a:r>
+          </a:p>
+        </p:txBody>
+      </p:sp>
+      <p:sp>
+        <p:nvSpPr>
+          <p:cNvPr id="5" name="Footer Placeholder 4"/>
+          <p:cNvSpPr>
+            <a:spLocks noGrp="1"/>
+          </p:cNvSpPr>
+          <p:nvPr>
+            <p:ph type="ftr" sz="quarter" idx="11"/>
+          </p:nvPr>
+        </p:nvSpPr>
+        <p:spPr/>
+        <p:txBody>
+          <a:bodyPr/>
+          <a:lstStyle/>
+          <a:p>
+            <a:r>
+              <a:rPr lang="en-US"/>
+              <a:t>Operating Systems - Processes</a:t>
+            </a:r>
+          </a:p>
+        </p:txBody>
+      </p:sp>
+      <p:sp>
+        <p:nvSpPr>
+          <p:cNvPr id="6" name="Slide Number Placeholder 5"/>
+          <p:cNvSpPr>
+            <a:spLocks noGrp="1"/>
+          </p:cNvSpPr>
+          <p:nvPr>
+            <p:ph type="sldNum" sz="quarter" idx="12"/>
+          </p:nvPr>
+        </p:nvSpPr>
+        <p:spPr/>
+        <p:txBody>
+          <a:bodyPr/>
+          <a:lstStyle/>
+          <a:p>
+            <a:fld id="{95AAEEEC-DCEC-4178-AB14-E7254A15A296}" type="slidenum">
+              <a:rPr lang="en-US" smtClean="0"/>
+              <a:t>‹#›</a:t>
+            </a:fld>
+            <a:endParaRPr lang="en-US"/>
+          </a:p>
+        </p:txBody>
+      </p:sp>
+    </p:spTree>
+    <p:extLst>
+      <p:ext uri="{BB962C8B-B14F-4D97-AF65-F5344CB8AC3E}">
+        <p14:creationId xmlns:p14="http://schemas.microsoft.com/office/powerpoint/2010/main" val="1615561894"/>
+      </p:ext>
+    </p:extLst>
+  </p:cSld>
+  <p:clrMapOvr>
+    <a:masterClrMapping/>
+  </p:clrMapOvr>
+</p:sldLayout>
+</file>
+
+<file path=ppt/slideLayouts/slideLayout25.xml><?xml version="1.0" encoding="utf-8"?>
+<p:sldLayout xmlns:a="http://schemas.openxmlformats.org/drawingml/2006/main" xmlns:r="http://schemas.openxmlformats.org/officeDocument/2006/relationships" xmlns:p="http://schemas.openxmlformats.org/presentationml/2006/main" type="title">
+  <p:cSld name="1_Title Slide">
+    <p:spTree>
+      <p:nvGrpSpPr>
+        <p:cNvPr id="1" name=""/>
+        <p:cNvGrpSpPr/>
+        <p:nvPr/>
+      </p:nvGrpSpPr>
+      <p:grpSpPr>
+        <a:xfrm>
+          <a:off x="0" y="0"/>
+          <a:ext cx="0" cy="0"/>
+          <a:chOff x="0" y="0"/>
+          <a:chExt cx="0" cy="0"/>
+        </a:xfrm>
+      </p:grpSpPr>
+      <p:sp>
+        <p:nvSpPr>
+          <p:cNvPr id="152578" name="Rectangle 2"/>
+          <p:cNvSpPr>
+            <a:spLocks noGrp="1" noChangeArrowheads="1"/>
+          </p:cNvSpPr>
+          <p:nvPr>
+            <p:ph type="ctrTitle"/>
+          </p:nvPr>
+        </p:nvSpPr>
+        <p:spPr>
+          <a:xfrm>
+            <a:off x="914400" y="685800"/>
+            <a:ext cx="10363200" cy="2127250"/>
+          </a:xfrm>
+        </p:spPr>
+        <p:txBody>
+          <a:bodyPr/>
+          <a:lstStyle>
+            <a:lvl1pPr>
+              <a:defRPr sz="4300"/>
+            </a:lvl1pPr>
+          </a:lstStyle>
+          <a:p>
+            <a:r>
+              <a:rPr lang="en-US" dirty="0"/>
+              <a:t>Click to edit Master title style</a:t>
+            </a:r>
+          </a:p>
+        </p:txBody>
+      </p:sp>
+    </p:spTree>
+    <p:extLst>
+      <p:ext uri="{BB962C8B-B14F-4D97-AF65-F5344CB8AC3E}">
+        <p14:creationId xmlns:p14="http://schemas.microsoft.com/office/powerpoint/2010/main" val="2492188281"/>
       </p:ext>
     </p:extLst>
   </p:cSld>
@@ -11287,6 +13830,548 @@
       </a:lvl8pPr>
       <a:lvl9pPr marL="3657600" algn="l" defTabSz="914400" rtl="0" eaLnBrk="1" latinLnBrk="0" hangingPunct="1">
         <a:defRPr sz="1800" kern="1200">
+          <a:solidFill>
+            <a:schemeClr val="tx1"/>
+          </a:solidFill>
+          <a:latin typeface="+mn-lt"/>
+          <a:ea typeface="+mn-ea"/>
+          <a:cs typeface="+mn-cs"/>
+        </a:defRPr>
+      </a:lvl9pPr>
+    </p:otherStyle>
+  </p:txStyles>
+</p:sldMaster>
+</file>
+
+<file path=ppt/slideMasters/slideMaster2.xml><?xml version="1.0" encoding="utf-8"?>
+<p:sldMaster xmlns:a="http://schemas.openxmlformats.org/drawingml/2006/main" xmlns:r="http://schemas.openxmlformats.org/officeDocument/2006/relationships" xmlns:p="http://schemas.openxmlformats.org/presentationml/2006/main">
+  <p:cSld>
+    <p:bg>
+      <p:bgRef idx="1001">
+        <a:schemeClr val="bg1"/>
+      </p:bgRef>
+    </p:bg>
+    <p:spTree>
+      <p:nvGrpSpPr>
+        <p:cNvPr id="1" name=""/>
+        <p:cNvGrpSpPr/>
+        <p:nvPr/>
+      </p:nvGrpSpPr>
+      <p:grpSpPr>
+        <a:xfrm>
+          <a:off x="0" y="0"/>
+          <a:ext cx="0" cy="0"/>
+          <a:chOff x="0" y="0"/>
+          <a:chExt cx="0" cy="0"/>
+        </a:xfrm>
+      </p:grpSpPr>
+      <p:sp>
+        <p:nvSpPr>
+          <p:cNvPr id="2" name="Title Placeholder 1"/>
+          <p:cNvSpPr>
+            <a:spLocks noGrp="1"/>
+          </p:cNvSpPr>
+          <p:nvPr>
+            <p:ph type="title"/>
+          </p:nvPr>
+        </p:nvSpPr>
+        <p:spPr>
+          <a:xfrm>
+            <a:off x="838200" y="365126"/>
+            <a:ext cx="10515600" cy="1325563"/>
+          </a:xfrm>
+          <a:prstGeom prst="rect">
+            <a:avLst/>
+          </a:prstGeom>
+        </p:spPr>
+        <p:txBody>
+          <a:bodyPr vert="horz" lIns="91440" tIns="45720" rIns="91440" bIns="45720" rtlCol="0" anchor="ctr">
+            <a:normAutofit/>
+          </a:bodyPr>
+          <a:lstStyle/>
+          <a:p>
+            <a:r>
+              <a:rPr lang="en-US"/>
+              <a:t>Click to edit Master title style</a:t>
+            </a:r>
+          </a:p>
+        </p:txBody>
+      </p:sp>
+      <p:sp>
+        <p:nvSpPr>
+          <p:cNvPr id="3" name="Text Placeholder 2"/>
+          <p:cNvSpPr>
+            <a:spLocks noGrp="1"/>
+          </p:cNvSpPr>
+          <p:nvPr>
+            <p:ph type="body" idx="1"/>
+          </p:nvPr>
+        </p:nvSpPr>
+        <p:spPr>
+          <a:xfrm>
+            <a:off x="838200" y="1825625"/>
+            <a:ext cx="10515600" cy="4351338"/>
+          </a:xfrm>
+          <a:prstGeom prst="rect">
+            <a:avLst/>
+          </a:prstGeom>
+        </p:spPr>
+        <p:txBody>
+          <a:bodyPr vert="horz" lIns="91440" tIns="45720" rIns="91440" bIns="45720" rtlCol="0">
+            <a:normAutofit/>
+          </a:bodyPr>
+          <a:lstStyle/>
+          <a:p>
+            <a:pPr lvl="0"/>
+            <a:r>
+              <a:rPr lang="en-US"/>
+              <a:t>Click to edit Master text styles</a:t>
+            </a:r>
+          </a:p>
+          <a:p>
+            <a:pPr lvl="1"/>
+            <a:r>
+              <a:rPr lang="en-US"/>
+              <a:t>Second level</a:t>
+            </a:r>
+          </a:p>
+          <a:p>
+            <a:pPr lvl="2"/>
+            <a:r>
+              <a:rPr lang="en-US"/>
+              <a:t>Third level</a:t>
+            </a:r>
+          </a:p>
+          <a:p>
+            <a:pPr lvl="3"/>
+            <a:r>
+              <a:rPr lang="en-US"/>
+              <a:t>Fourth level</a:t>
+            </a:r>
+          </a:p>
+          <a:p>
+            <a:pPr lvl="4"/>
+            <a:r>
+              <a:rPr lang="en-US"/>
+              <a:t>Fifth level</a:t>
+            </a:r>
+          </a:p>
+        </p:txBody>
+      </p:sp>
+      <p:sp>
+        <p:nvSpPr>
+          <p:cNvPr id="4" name="Date Placeholder 3"/>
+          <p:cNvSpPr>
+            <a:spLocks noGrp="1"/>
+          </p:cNvSpPr>
+          <p:nvPr>
+            <p:ph type="dt" sz="half" idx="2"/>
+          </p:nvPr>
+        </p:nvSpPr>
+        <p:spPr>
+          <a:xfrm>
+            <a:off x="838200" y="6356352"/>
+            <a:ext cx="2743200" cy="365125"/>
+          </a:xfrm>
+          <a:prstGeom prst="rect">
+            <a:avLst/>
+          </a:prstGeom>
+        </p:spPr>
+        <p:txBody>
+          <a:bodyPr vert="horz" lIns="91440" tIns="45720" rIns="91440" bIns="45720" rtlCol="0" anchor="ctr"/>
+          <a:lstStyle>
+            <a:lvl1pPr algn="l">
+              <a:defRPr sz="900">
+                <a:solidFill>
+                  <a:schemeClr val="tx1">
+                    <a:tint val="75000"/>
+                  </a:schemeClr>
+                </a:solidFill>
+              </a:defRPr>
+            </a:lvl1pPr>
+          </a:lstStyle>
+          <a:p>
+            <a:r>
+              <a:rPr lang="en-US"/>
+              <a:t>Vincenzo Gulisano</a:t>
+            </a:r>
+          </a:p>
+        </p:txBody>
+      </p:sp>
+      <p:sp>
+        <p:nvSpPr>
+          <p:cNvPr id="5" name="Footer Placeholder 4"/>
+          <p:cNvSpPr>
+            <a:spLocks noGrp="1"/>
+          </p:cNvSpPr>
+          <p:nvPr>
+            <p:ph type="ftr" sz="quarter" idx="3"/>
+          </p:nvPr>
+        </p:nvSpPr>
+        <p:spPr>
+          <a:xfrm>
+            <a:off x="4038600" y="6356352"/>
+            <a:ext cx="4114800" cy="365125"/>
+          </a:xfrm>
+          <a:prstGeom prst="rect">
+            <a:avLst/>
+          </a:prstGeom>
+        </p:spPr>
+        <p:txBody>
+          <a:bodyPr vert="horz" lIns="91440" tIns="45720" rIns="91440" bIns="45720" rtlCol="0" anchor="ctr"/>
+          <a:lstStyle>
+            <a:lvl1pPr algn="ctr">
+              <a:defRPr sz="900">
+                <a:solidFill>
+                  <a:schemeClr val="tx1">
+                    <a:tint val="75000"/>
+                  </a:schemeClr>
+                </a:solidFill>
+              </a:defRPr>
+            </a:lvl1pPr>
+          </a:lstStyle>
+          <a:p>
+            <a:r>
+              <a:rPr lang="en-US"/>
+              <a:t>Operating Systems - Processes</a:t>
+            </a:r>
+          </a:p>
+        </p:txBody>
+      </p:sp>
+      <p:sp>
+        <p:nvSpPr>
+          <p:cNvPr id="6" name="Slide Number Placeholder 5"/>
+          <p:cNvSpPr>
+            <a:spLocks noGrp="1"/>
+          </p:cNvSpPr>
+          <p:nvPr>
+            <p:ph type="sldNum" sz="quarter" idx="4"/>
+          </p:nvPr>
+        </p:nvSpPr>
+        <p:spPr>
+          <a:xfrm>
+            <a:off x="8610600" y="6356352"/>
+            <a:ext cx="2743200" cy="365125"/>
+          </a:xfrm>
+          <a:prstGeom prst="rect">
+            <a:avLst/>
+          </a:prstGeom>
+        </p:spPr>
+        <p:txBody>
+          <a:bodyPr vert="horz" lIns="91440" tIns="45720" rIns="91440" bIns="45720" rtlCol="0" anchor="ctr"/>
+          <a:lstStyle>
+            <a:lvl1pPr algn="r">
+              <a:defRPr sz="900">
+                <a:solidFill>
+                  <a:schemeClr val="tx1">
+                    <a:tint val="75000"/>
+                  </a:schemeClr>
+                </a:solidFill>
+              </a:defRPr>
+            </a:lvl1pPr>
+          </a:lstStyle>
+          <a:p>
+            <a:fld id="{95AAEEEC-DCEC-4178-AB14-E7254A15A296}" type="slidenum">
+              <a:rPr lang="en-US" smtClean="0"/>
+              <a:t>‹#›</a:t>
+            </a:fld>
+            <a:endParaRPr lang="en-US"/>
+          </a:p>
+        </p:txBody>
+      </p:sp>
+    </p:spTree>
+    <p:extLst>
+      <p:ext uri="{BB962C8B-B14F-4D97-AF65-F5344CB8AC3E}">
+        <p14:creationId xmlns:p14="http://schemas.microsoft.com/office/powerpoint/2010/main" val="3097823348"/>
+      </p:ext>
+    </p:extLst>
+  </p:cSld>
+  <p:clrMap bg1="lt1" tx1="dk1" bg2="lt2" tx2="dk2" accent1="accent1" accent2="accent2" accent3="accent3" accent4="accent4" accent5="accent5" accent6="accent6" hlink="hlink" folHlink="folHlink"/>
+  <p:sldLayoutIdLst>
+    <p:sldLayoutId id="2147483668" r:id="rId1"/>
+    <p:sldLayoutId id="2147483669" r:id="rId2"/>
+    <p:sldLayoutId id="2147483670" r:id="rId3"/>
+    <p:sldLayoutId id="2147483671" r:id="rId4"/>
+    <p:sldLayoutId id="2147483672" r:id="rId5"/>
+    <p:sldLayoutId id="2147483673" r:id="rId6"/>
+    <p:sldLayoutId id="2147483674" r:id="rId7"/>
+    <p:sldLayoutId id="2147483675" r:id="rId8"/>
+    <p:sldLayoutId id="2147483676" r:id="rId9"/>
+    <p:sldLayoutId id="2147483677" r:id="rId10"/>
+    <p:sldLayoutId id="2147483678" r:id="rId11"/>
+    <p:sldLayoutId id="2147483679" r:id="rId12"/>
+  </p:sldLayoutIdLst>
+  <p:hf hdr="0"/>
+  <p:txStyles>
+    <p:titleStyle>
+      <a:lvl1pPr algn="l" defTabSz="685800" rtl="0" eaLnBrk="1" latinLnBrk="0" hangingPunct="1">
+        <a:lnSpc>
+          <a:spcPct val="90000"/>
+        </a:lnSpc>
+        <a:spcBef>
+          <a:spcPct val="0"/>
+        </a:spcBef>
+        <a:buNone/>
+        <a:defRPr sz="3300" kern="1200">
+          <a:solidFill>
+            <a:schemeClr val="tx1"/>
+          </a:solidFill>
+          <a:latin typeface="+mj-lt"/>
+          <a:ea typeface="+mj-ea"/>
+          <a:cs typeface="+mj-cs"/>
+        </a:defRPr>
+      </a:lvl1pPr>
+    </p:titleStyle>
+    <p:bodyStyle>
+      <a:lvl1pPr marL="171450" indent="-171450" algn="l" defTabSz="685800" rtl="0" eaLnBrk="1" latinLnBrk="0" hangingPunct="1">
+        <a:lnSpc>
+          <a:spcPct val="90000"/>
+        </a:lnSpc>
+        <a:spcBef>
+          <a:spcPts val="750"/>
+        </a:spcBef>
+        <a:buFont typeface="Arial" panose="020B0604020202020204" pitchFamily="34" charset="0"/>
+        <a:buChar char="•"/>
+        <a:defRPr sz="2100" kern="1200">
+          <a:solidFill>
+            <a:schemeClr val="tx1"/>
+          </a:solidFill>
+          <a:latin typeface="+mn-lt"/>
+          <a:ea typeface="+mn-ea"/>
+          <a:cs typeface="+mn-cs"/>
+        </a:defRPr>
+      </a:lvl1pPr>
+      <a:lvl2pPr marL="514350" indent="-171450" algn="l" defTabSz="685800" rtl="0" eaLnBrk="1" latinLnBrk="0" hangingPunct="1">
+        <a:lnSpc>
+          <a:spcPct val="90000"/>
+        </a:lnSpc>
+        <a:spcBef>
+          <a:spcPts val="375"/>
+        </a:spcBef>
+        <a:buFont typeface="Arial" panose="020B0604020202020204" pitchFamily="34" charset="0"/>
+        <a:buChar char="•"/>
+        <a:defRPr sz="1800" kern="1200">
+          <a:solidFill>
+            <a:schemeClr val="tx1"/>
+          </a:solidFill>
+          <a:latin typeface="+mn-lt"/>
+          <a:ea typeface="+mn-ea"/>
+          <a:cs typeface="+mn-cs"/>
+        </a:defRPr>
+      </a:lvl2pPr>
+      <a:lvl3pPr marL="857250" indent="-171450" algn="l" defTabSz="685800" rtl="0" eaLnBrk="1" latinLnBrk="0" hangingPunct="1">
+        <a:lnSpc>
+          <a:spcPct val="90000"/>
+        </a:lnSpc>
+        <a:spcBef>
+          <a:spcPts val="375"/>
+        </a:spcBef>
+        <a:buFont typeface="Arial" panose="020B0604020202020204" pitchFamily="34" charset="0"/>
+        <a:buChar char="•"/>
+        <a:defRPr sz="1500" kern="1200">
+          <a:solidFill>
+            <a:schemeClr val="tx1"/>
+          </a:solidFill>
+          <a:latin typeface="+mn-lt"/>
+          <a:ea typeface="+mn-ea"/>
+          <a:cs typeface="+mn-cs"/>
+        </a:defRPr>
+      </a:lvl3pPr>
+      <a:lvl4pPr marL="1200150" indent="-171450" algn="l" defTabSz="685800" rtl="0" eaLnBrk="1" latinLnBrk="0" hangingPunct="1">
+        <a:lnSpc>
+          <a:spcPct val="90000"/>
+        </a:lnSpc>
+        <a:spcBef>
+          <a:spcPts val="375"/>
+        </a:spcBef>
+        <a:buFont typeface="Arial" panose="020B0604020202020204" pitchFamily="34" charset="0"/>
+        <a:buChar char="•"/>
+        <a:defRPr sz="1350" kern="1200">
+          <a:solidFill>
+            <a:schemeClr val="tx1"/>
+          </a:solidFill>
+          <a:latin typeface="+mn-lt"/>
+          <a:ea typeface="+mn-ea"/>
+          <a:cs typeface="+mn-cs"/>
+        </a:defRPr>
+      </a:lvl4pPr>
+      <a:lvl5pPr marL="1543050" indent="-171450" algn="l" defTabSz="685800" rtl="0" eaLnBrk="1" latinLnBrk="0" hangingPunct="1">
+        <a:lnSpc>
+          <a:spcPct val="90000"/>
+        </a:lnSpc>
+        <a:spcBef>
+          <a:spcPts val="375"/>
+        </a:spcBef>
+        <a:buFont typeface="Arial" panose="020B0604020202020204" pitchFamily="34" charset="0"/>
+        <a:buChar char="•"/>
+        <a:defRPr sz="1350" kern="1200">
+          <a:solidFill>
+            <a:schemeClr val="tx1"/>
+          </a:solidFill>
+          <a:latin typeface="+mn-lt"/>
+          <a:ea typeface="+mn-ea"/>
+          <a:cs typeface="+mn-cs"/>
+        </a:defRPr>
+      </a:lvl5pPr>
+      <a:lvl6pPr marL="1885950" indent="-171450" algn="l" defTabSz="685800" rtl="0" eaLnBrk="1" latinLnBrk="0" hangingPunct="1">
+        <a:lnSpc>
+          <a:spcPct val="90000"/>
+        </a:lnSpc>
+        <a:spcBef>
+          <a:spcPts val="375"/>
+        </a:spcBef>
+        <a:buFont typeface="Arial" panose="020B0604020202020204" pitchFamily="34" charset="0"/>
+        <a:buChar char="•"/>
+        <a:defRPr sz="1350" kern="1200">
+          <a:solidFill>
+            <a:schemeClr val="tx1"/>
+          </a:solidFill>
+          <a:latin typeface="+mn-lt"/>
+          <a:ea typeface="+mn-ea"/>
+          <a:cs typeface="+mn-cs"/>
+        </a:defRPr>
+      </a:lvl6pPr>
+      <a:lvl7pPr marL="2228850" indent="-171450" algn="l" defTabSz="685800" rtl="0" eaLnBrk="1" latinLnBrk="0" hangingPunct="1">
+        <a:lnSpc>
+          <a:spcPct val="90000"/>
+        </a:lnSpc>
+        <a:spcBef>
+          <a:spcPts val="375"/>
+        </a:spcBef>
+        <a:buFont typeface="Arial" panose="020B0604020202020204" pitchFamily="34" charset="0"/>
+        <a:buChar char="•"/>
+        <a:defRPr sz="1350" kern="1200">
+          <a:solidFill>
+            <a:schemeClr val="tx1"/>
+          </a:solidFill>
+          <a:latin typeface="+mn-lt"/>
+          <a:ea typeface="+mn-ea"/>
+          <a:cs typeface="+mn-cs"/>
+        </a:defRPr>
+      </a:lvl7pPr>
+      <a:lvl8pPr marL="2571750" indent="-171450" algn="l" defTabSz="685800" rtl="0" eaLnBrk="1" latinLnBrk="0" hangingPunct="1">
+        <a:lnSpc>
+          <a:spcPct val="90000"/>
+        </a:lnSpc>
+        <a:spcBef>
+          <a:spcPts val="375"/>
+        </a:spcBef>
+        <a:buFont typeface="Arial" panose="020B0604020202020204" pitchFamily="34" charset="0"/>
+        <a:buChar char="•"/>
+        <a:defRPr sz="1350" kern="1200">
+          <a:solidFill>
+            <a:schemeClr val="tx1"/>
+          </a:solidFill>
+          <a:latin typeface="+mn-lt"/>
+          <a:ea typeface="+mn-ea"/>
+          <a:cs typeface="+mn-cs"/>
+        </a:defRPr>
+      </a:lvl8pPr>
+      <a:lvl9pPr marL="2914650" indent="-171450" algn="l" defTabSz="685800" rtl="0" eaLnBrk="1" latinLnBrk="0" hangingPunct="1">
+        <a:lnSpc>
+          <a:spcPct val="90000"/>
+        </a:lnSpc>
+        <a:spcBef>
+          <a:spcPts val="375"/>
+        </a:spcBef>
+        <a:buFont typeface="Arial" panose="020B0604020202020204" pitchFamily="34" charset="0"/>
+        <a:buChar char="•"/>
+        <a:defRPr sz="1350" kern="1200">
+          <a:solidFill>
+            <a:schemeClr val="tx1"/>
+          </a:solidFill>
+          <a:latin typeface="+mn-lt"/>
+          <a:ea typeface="+mn-ea"/>
+          <a:cs typeface="+mn-cs"/>
+        </a:defRPr>
+      </a:lvl9pPr>
+    </p:bodyStyle>
+    <p:otherStyle>
+      <a:defPPr>
+        <a:defRPr lang="en-US"/>
+      </a:defPPr>
+      <a:lvl1pPr marL="0" algn="l" defTabSz="685800" rtl="0" eaLnBrk="1" latinLnBrk="0" hangingPunct="1">
+        <a:defRPr sz="1350" kern="1200">
+          <a:solidFill>
+            <a:schemeClr val="tx1"/>
+          </a:solidFill>
+          <a:latin typeface="+mn-lt"/>
+          <a:ea typeface="+mn-ea"/>
+          <a:cs typeface="+mn-cs"/>
+        </a:defRPr>
+      </a:lvl1pPr>
+      <a:lvl2pPr marL="342900" algn="l" defTabSz="685800" rtl="0" eaLnBrk="1" latinLnBrk="0" hangingPunct="1">
+        <a:defRPr sz="1350" kern="1200">
+          <a:solidFill>
+            <a:schemeClr val="tx1"/>
+          </a:solidFill>
+          <a:latin typeface="+mn-lt"/>
+          <a:ea typeface="+mn-ea"/>
+          <a:cs typeface="+mn-cs"/>
+        </a:defRPr>
+      </a:lvl2pPr>
+      <a:lvl3pPr marL="685800" algn="l" defTabSz="685800" rtl="0" eaLnBrk="1" latinLnBrk="0" hangingPunct="1">
+        <a:defRPr sz="1350" kern="1200">
+          <a:solidFill>
+            <a:schemeClr val="tx1"/>
+          </a:solidFill>
+          <a:latin typeface="+mn-lt"/>
+          <a:ea typeface="+mn-ea"/>
+          <a:cs typeface="+mn-cs"/>
+        </a:defRPr>
+      </a:lvl3pPr>
+      <a:lvl4pPr marL="1028700" algn="l" defTabSz="685800" rtl="0" eaLnBrk="1" latinLnBrk="0" hangingPunct="1">
+        <a:defRPr sz="1350" kern="1200">
+          <a:solidFill>
+            <a:schemeClr val="tx1"/>
+          </a:solidFill>
+          <a:latin typeface="+mn-lt"/>
+          <a:ea typeface="+mn-ea"/>
+          <a:cs typeface="+mn-cs"/>
+        </a:defRPr>
+      </a:lvl4pPr>
+      <a:lvl5pPr marL="1371600" algn="l" defTabSz="685800" rtl="0" eaLnBrk="1" latinLnBrk="0" hangingPunct="1">
+        <a:defRPr sz="1350" kern="1200">
+          <a:solidFill>
+            <a:schemeClr val="tx1"/>
+          </a:solidFill>
+          <a:latin typeface="+mn-lt"/>
+          <a:ea typeface="+mn-ea"/>
+          <a:cs typeface="+mn-cs"/>
+        </a:defRPr>
+      </a:lvl5pPr>
+      <a:lvl6pPr marL="1714500" algn="l" defTabSz="685800" rtl="0" eaLnBrk="1" latinLnBrk="0" hangingPunct="1">
+        <a:defRPr sz="1350" kern="1200">
+          <a:solidFill>
+            <a:schemeClr val="tx1"/>
+          </a:solidFill>
+          <a:latin typeface="+mn-lt"/>
+          <a:ea typeface="+mn-ea"/>
+          <a:cs typeface="+mn-cs"/>
+        </a:defRPr>
+      </a:lvl6pPr>
+      <a:lvl7pPr marL="2057400" algn="l" defTabSz="685800" rtl="0" eaLnBrk="1" latinLnBrk="0" hangingPunct="1">
+        <a:defRPr sz="1350" kern="1200">
+          <a:solidFill>
+            <a:schemeClr val="tx1"/>
+          </a:solidFill>
+          <a:latin typeface="+mn-lt"/>
+          <a:ea typeface="+mn-ea"/>
+          <a:cs typeface="+mn-cs"/>
+        </a:defRPr>
+      </a:lvl7pPr>
+      <a:lvl8pPr marL="2400300" algn="l" defTabSz="685800" rtl="0" eaLnBrk="1" latinLnBrk="0" hangingPunct="1">
+        <a:defRPr sz="1350" kern="1200">
+          <a:solidFill>
+            <a:schemeClr val="tx1"/>
+          </a:solidFill>
+          <a:latin typeface="+mn-lt"/>
+          <a:ea typeface="+mn-ea"/>
+          <a:cs typeface="+mn-cs"/>
+        </a:defRPr>
+      </a:lvl8pPr>
+      <a:lvl9pPr marL="2743200" algn="l" defTabSz="685800" rtl="0" eaLnBrk="1" latinLnBrk="0" hangingPunct="1">
+        <a:defRPr sz="1350" kern="1200">
           <a:solidFill>
             <a:schemeClr val="tx1"/>
           </a:solidFill>
@@ -42144,7 +45229,7 @@
           <p:cNvPr id="2" name="Title 1">
             <a:extLst>
               <a:ext uri="{FF2B5EF4-FFF2-40B4-BE49-F238E27FC236}">
-                <a16:creationId xmlns:a16="http://schemas.microsoft.com/office/drawing/2014/main" id="{4B32D54B-AB4D-2C1E-408B-79024E6D4BCF}"/>
+                <a16:creationId xmlns:a16="http://schemas.microsoft.com/office/drawing/2014/main" id="{1376EFEE-458E-925D-5F06-5A04C4F89170}"/>
               </a:ext>
             </a:extLst>
           </p:cNvPr>
@@ -42162,7 +45247,7 @@
           <a:p>
             <a:r>
               <a:rPr lang="en-US" dirty="0"/>
-              <a:t>Question</a:t>
+              <a:t>Agenda</a:t>
             </a:r>
           </a:p>
         </p:txBody>
@@ -42172,7 +45257,7 @@
           <p:cNvPr id="3" name="Content Placeholder 2">
             <a:extLst>
               <a:ext uri="{FF2B5EF4-FFF2-40B4-BE49-F238E27FC236}">
-                <a16:creationId xmlns:a16="http://schemas.microsoft.com/office/drawing/2014/main" id="{92BBEEEA-0D66-BC0A-7051-F11FD6ECDBDB}"/>
+                <a16:creationId xmlns:a16="http://schemas.microsoft.com/office/drawing/2014/main" id="{361CE96F-0172-DEE5-57F1-08778EDB055A}"/>
               </a:ext>
             </a:extLst>
           </p:cNvPr>
@@ -42189,91 +45274,118 @@
           <a:lstStyle/>
           <a:p>
             <a:r>
+              <a:rPr lang="en-US" dirty="0">
+                <a:solidFill>
+                  <a:schemeClr val="bg1">
+                    <a:lumMod val="50000"/>
+                  </a:schemeClr>
+                </a:solidFill>
+              </a:rPr>
+              <a:t>Motivation</a:t>
+            </a:r>
+          </a:p>
+          <a:p>
+            <a:r>
+              <a:rPr lang="en-US" dirty="0">
+                <a:solidFill>
+                  <a:schemeClr val="bg1">
+                    <a:lumMod val="50000"/>
+                  </a:schemeClr>
+                </a:solidFill>
+              </a:rPr>
+              <a:t>The Critical Section problem</a:t>
+            </a:r>
+          </a:p>
+          <a:p>
+            <a:pPr lvl="1"/>
+            <a:r>
+              <a:rPr lang="en-US" dirty="0">
+                <a:solidFill>
+                  <a:schemeClr val="bg1">
+                    <a:lumMod val="50000"/>
+                  </a:schemeClr>
+                </a:solidFill>
+              </a:rPr>
+              <a:t>Check-competition approach</a:t>
+            </a:r>
+          </a:p>
+          <a:p>
+            <a:r>
+              <a:rPr lang="en-US" dirty="0">
+                <a:solidFill>
+                  <a:schemeClr val="bg1">
+                    <a:lumMod val="50000"/>
+                  </a:schemeClr>
+                </a:solidFill>
+              </a:rPr>
+              <a:t>The check-order / after-you approach</a:t>
+            </a:r>
+          </a:p>
+          <a:p>
+            <a:r>
+              <a:rPr lang="en-US" dirty="0">
+                <a:solidFill>
+                  <a:schemeClr val="bg1">
+                    <a:lumMod val="50000"/>
+                  </a:schemeClr>
+                </a:solidFill>
+              </a:rPr>
+              <a:t>Peterson’s Algorithm</a:t>
+            </a:r>
+          </a:p>
+          <a:p>
+            <a:r>
+              <a:rPr lang="en-US" dirty="0">
+                <a:solidFill>
+                  <a:schemeClr val="bg1">
+                    <a:lumMod val="50000"/>
+                  </a:schemeClr>
+                </a:solidFill>
+              </a:rPr>
+              <a:t>Synchronization and hardware support</a:t>
+            </a:r>
+          </a:p>
+          <a:p>
+            <a:pPr lvl="1"/>
+            <a:r>
+              <a:rPr lang="en-US" dirty="0">
+                <a:solidFill>
+                  <a:schemeClr val="bg1">
+                    <a:lumMod val="50000"/>
+                  </a:schemeClr>
+                </a:solidFill>
+              </a:rPr>
+              <a:t>Read-Modify-Write instructions</a:t>
+            </a:r>
+          </a:p>
+          <a:p>
+            <a:r>
+              <a:rPr lang="en-US" dirty="0">
+                <a:solidFill>
+                  <a:schemeClr val="bg1">
+                    <a:lumMod val="50000"/>
+                  </a:schemeClr>
+                </a:solidFill>
+              </a:rPr>
+              <a:t>Semaphores</a:t>
+            </a:r>
+          </a:p>
+          <a:p>
+            <a:r>
               <a:rPr lang="en-US" dirty="0"/>
-              <a:t>Consider the following semaphore setup:</a:t>
-            </a:r>
-          </a:p>
-          <a:p>
-            <a:pPr lvl="1"/>
-            <a:r>
-              <a:rPr lang="en-US" dirty="0" err="1"/>
-              <a:t>semA</a:t>
-            </a:r>
-            <a:r>
-              <a:rPr lang="en-US" dirty="0"/>
-              <a:t> = 1;</a:t>
-            </a:r>
-          </a:p>
-          <a:p>
-            <a:pPr lvl="1"/>
-            <a:r>
-              <a:rPr lang="en-US" dirty="0" err="1"/>
-              <a:t>semB</a:t>
-            </a:r>
-            <a:r>
-              <a:rPr lang="en-US" dirty="0"/>
-              <a:t> = 0;</a:t>
-            </a:r>
-          </a:p>
-          <a:p>
-            <a:pPr lvl="1"/>
-            <a:r>
-              <a:rPr lang="en-US" dirty="0" err="1"/>
-              <a:t>semC</a:t>
-            </a:r>
-            <a:r>
-              <a:rPr lang="en-US" dirty="0"/>
-              <a:t> = 0;</a:t>
-            </a:r>
-          </a:p>
-          <a:p>
-            <a:pPr lvl="1"/>
+              <a:t>Other techniques</a:t>
+            </a:r>
+          </a:p>
+          <a:p>
             <a:endParaRPr lang="en-US" dirty="0"/>
           </a:p>
           <a:p>
-            <a:pPr lvl="1"/>
             <a:endParaRPr lang="en-US" dirty="0"/>
           </a:p>
           <a:p>
-            <a:pPr lvl="1"/>
             <a:endParaRPr lang="en-US" dirty="0"/>
           </a:p>
           <a:p>
-            <a:pPr lvl="1"/>
-            <a:endParaRPr lang="en-US" dirty="0"/>
-          </a:p>
-          <a:p>
-            <a:r>
-              <a:rPr lang="en-US" dirty="0"/>
-              <a:t>Is </a:t>
-            </a:r>
-            <a:r>
-              <a:rPr lang="en-US" dirty="0" err="1"/>
-              <a:t>opY</a:t>
-            </a:r>
-            <a:r>
-              <a:rPr lang="en-US" dirty="0"/>
-              <a:t> → </a:t>
-            </a:r>
-            <a:r>
-              <a:rPr lang="en-US" dirty="0" err="1"/>
-              <a:t>opX</a:t>
-            </a:r>
-            <a:r>
-              <a:rPr lang="en-US" dirty="0"/>
-              <a:t> → </a:t>
-            </a:r>
-            <a:r>
-              <a:rPr lang="en-US" dirty="0" err="1"/>
-              <a:t>opZ</a:t>
-            </a:r>
-            <a:r>
-              <a:rPr lang="en-US" dirty="0"/>
-              <a:t> valid?</a:t>
-            </a:r>
-          </a:p>
-          <a:p>
-            <a:pPr lvl="1"/>
             <a:endParaRPr lang="en-US" dirty="0"/>
           </a:p>
         </p:txBody>
@@ -42283,7 +45395,7 @@
           <p:cNvPr id="4" name="Slide Number Placeholder 3">
             <a:extLst>
               <a:ext uri="{FF2B5EF4-FFF2-40B4-BE49-F238E27FC236}">
-                <a16:creationId xmlns:a16="http://schemas.microsoft.com/office/drawing/2014/main" id="{79814C5F-C448-80CD-ACA2-DC4CD3D121F3}"/>
+                <a16:creationId xmlns:a16="http://schemas.microsoft.com/office/drawing/2014/main" id="{35453510-5B16-5214-21EA-2710E27F17B3}"/>
               </a:ext>
             </a:extLst>
           </p:cNvPr>
@@ -42309,239 +45421,10 @@
       </p:sp>
       <p:sp>
         <p:nvSpPr>
-          <p:cNvPr id="6" name="TextBox 5">
-            <a:extLst>
-              <a:ext uri="{FF2B5EF4-FFF2-40B4-BE49-F238E27FC236}">
-                <a16:creationId xmlns:a16="http://schemas.microsoft.com/office/drawing/2014/main" id="{C9CDFBBC-A9FC-9E9E-BB32-5C02D267E20D}"/>
-              </a:ext>
-            </a:extLst>
-          </p:cNvPr>
-          <p:cNvSpPr txBox="1"/>
-          <p:nvPr/>
-        </p:nvSpPr>
-        <p:spPr>
-          <a:xfrm>
-            <a:off x="4366647" y="3064199"/>
-            <a:ext cx="1584702" cy="1477328"/>
-          </a:xfrm>
-          <a:prstGeom prst="rect">
-            <a:avLst/>
-          </a:prstGeom>
-          <a:noFill/>
-        </p:spPr>
-        <p:txBody>
-          <a:bodyPr wrap="square">
-            <a:spAutoFit/>
-          </a:bodyPr>
-          <a:lstStyle/>
-          <a:p>
-            <a:r>
-              <a:rPr lang="en-US" dirty="0"/>
-              <a:t>THREAD X</a:t>
-            </a:r>
-            <a:br>
-              <a:rPr lang="en-US" dirty="0"/>
-            </a:br>
-            <a:endParaRPr lang="en-US" dirty="0"/>
-          </a:p>
-          <a:p>
-            <a:r>
-              <a:rPr lang="en-US" dirty="0"/>
-              <a:t>wait(</a:t>
-            </a:r>
-            <a:r>
-              <a:rPr lang="en-US" dirty="0" err="1"/>
-              <a:t>semA</a:t>
-            </a:r>
-            <a:r>
-              <a:rPr lang="en-US" dirty="0"/>
-              <a:t>);</a:t>
-            </a:r>
-          </a:p>
-          <a:p>
-            <a:r>
-              <a:rPr lang="en-US" dirty="0" err="1"/>
-              <a:t>opX</a:t>
-            </a:r>
-            <a:r>
-              <a:rPr lang="en-US" dirty="0"/>
-              <a:t>;</a:t>
-            </a:r>
-          </a:p>
-          <a:p>
-            <a:r>
-              <a:rPr lang="en-US" dirty="0"/>
-              <a:t>signal(</a:t>
-            </a:r>
-            <a:r>
-              <a:rPr lang="en-US" dirty="0" err="1"/>
-              <a:t>semB</a:t>
-            </a:r>
-            <a:r>
-              <a:rPr lang="en-US" dirty="0"/>
-              <a:t>);</a:t>
-            </a:r>
-          </a:p>
-        </p:txBody>
-      </p:sp>
-      <p:sp>
-        <p:nvSpPr>
-          <p:cNvPr id="8" name="TextBox 7">
-            <a:extLst>
-              <a:ext uri="{FF2B5EF4-FFF2-40B4-BE49-F238E27FC236}">
-                <a16:creationId xmlns:a16="http://schemas.microsoft.com/office/drawing/2014/main" id="{11FCA536-4919-2995-C128-91B5627DE596}"/>
-              </a:ext>
-            </a:extLst>
-          </p:cNvPr>
-          <p:cNvSpPr txBox="1"/>
-          <p:nvPr/>
-        </p:nvSpPr>
-        <p:spPr>
-          <a:xfrm>
-            <a:off x="6096000" y="3064199"/>
-            <a:ext cx="3046708" cy="1477328"/>
-          </a:xfrm>
-          <a:prstGeom prst="rect">
-            <a:avLst/>
-          </a:prstGeom>
-          <a:noFill/>
-        </p:spPr>
-        <p:txBody>
-          <a:bodyPr wrap="square">
-            <a:spAutoFit/>
-          </a:bodyPr>
-          <a:lstStyle/>
-          <a:p>
-            <a:r>
-              <a:rPr lang="en-US" dirty="0"/>
-              <a:t>THREAD Y</a:t>
-            </a:r>
-          </a:p>
-          <a:p>
-            <a:endParaRPr lang="en-US" dirty="0"/>
-          </a:p>
-          <a:p>
-            <a:r>
-              <a:rPr lang="en-US" dirty="0"/>
-              <a:t>wait(</a:t>
-            </a:r>
-            <a:r>
-              <a:rPr lang="en-US" dirty="0" err="1"/>
-              <a:t>semB</a:t>
-            </a:r>
-            <a:r>
-              <a:rPr lang="en-US" dirty="0"/>
-              <a:t>);</a:t>
-            </a:r>
-          </a:p>
-          <a:p>
-            <a:r>
-              <a:rPr lang="en-US" dirty="0" err="1"/>
-              <a:t>opY</a:t>
-            </a:r>
-            <a:r>
-              <a:rPr lang="en-US" dirty="0"/>
-              <a:t>;</a:t>
-            </a:r>
-          </a:p>
-          <a:p>
-            <a:r>
-              <a:rPr lang="en-US" dirty="0"/>
-              <a:t>signal(</a:t>
-            </a:r>
-            <a:r>
-              <a:rPr lang="en-US" dirty="0" err="1"/>
-              <a:t>semC</a:t>
-            </a:r>
-            <a:r>
-              <a:rPr lang="en-US" dirty="0"/>
-              <a:t>);</a:t>
-            </a:r>
-          </a:p>
-        </p:txBody>
-      </p:sp>
-      <p:sp>
-        <p:nvSpPr>
-          <p:cNvPr id="10" name="TextBox 9">
-            <a:extLst>
-              <a:ext uri="{FF2B5EF4-FFF2-40B4-BE49-F238E27FC236}">
-                <a16:creationId xmlns:a16="http://schemas.microsoft.com/office/drawing/2014/main" id="{27AA2EB2-ADC6-DFDE-A86D-DA018E32B47A}"/>
-              </a:ext>
-            </a:extLst>
-          </p:cNvPr>
-          <p:cNvSpPr txBox="1"/>
-          <p:nvPr/>
-        </p:nvSpPr>
-        <p:spPr>
-          <a:xfrm>
-            <a:off x="8045557" y="3064199"/>
-            <a:ext cx="2483603" cy="1477328"/>
-          </a:xfrm>
-          <a:prstGeom prst="rect">
-            <a:avLst/>
-          </a:prstGeom>
-          <a:noFill/>
-        </p:spPr>
-        <p:txBody>
-          <a:bodyPr wrap="square">
-            <a:spAutoFit/>
-          </a:bodyPr>
-          <a:lstStyle/>
-          <a:p>
-            <a:r>
-              <a:rPr lang="en-US" dirty="0"/>
-              <a:t>THREAD Z</a:t>
-            </a:r>
-          </a:p>
-          <a:p>
-            <a:endParaRPr lang="en-US" dirty="0"/>
-          </a:p>
-          <a:p>
-            <a:r>
-              <a:rPr lang="en-US" dirty="0"/>
-              <a:t>wait(</a:t>
-            </a:r>
-            <a:r>
-              <a:rPr lang="en-US" dirty="0" err="1"/>
-              <a:t>semC</a:t>
-            </a:r>
-            <a:r>
-              <a:rPr lang="en-US" dirty="0"/>
-              <a:t>);</a:t>
-            </a:r>
-          </a:p>
-          <a:p>
-            <a:r>
-              <a:rPr lang="en-US" dirty="0" err="1"/>
-              <a:t>opZ</a:t>
-            </a:r>
-            <a:r>
-              <a:rPr lang="en-US" dirty="0"/>
-              <a:t>;</a:t>
-            </a:r>
-          </a:p>
-          <a:p>
-            <a:r>
-              <a:rPr lang="en-US" dirty="0"/>
-              <a:t>signal(</a:t>
-            </a:r>
-            <a:r>
-              <a:rPr lang="en-US" dirty="0" err="1"/>
-              <a:t>semA</a:t>
-            </a:r>
-            <a:r>
-              <a:rPr lang="en-US" dirty="0"/>
-              <a:t>);</a:t>
-            </a:r>
-          </a:p>
-        </p:txBody>
-      </p:sp>
-      <p:sp>
-        <p:nvSpPr>
           <p:cNvPr id="5" name="Date Placeholder 4">
             <a:extLst>
               <a:ext uri="{FF2B5EF4-FFF2-40B4-BE49-F238E27FC236}">
-                <a16:creationId xmlns:a16="http://schemas.microsoft.com/office/drawing/2014/main" id="{60686EA4-3EF2-9CCB-9B69-DE20621C290E}"/>
+                <a16:creationId xmlns:a16="http://schemas.microsoft.com/office/drawing/2014/main" id="{FDED5A16-2593-A024-3581-4950965F1A9E}"/>
               </a:ext>
             </a:extLst>
           </p:cNvPr>
@@ -42567,7 +45450,7 @@
     </p:spTree>
     <p:extLst>
       <p:ext uri="{BB962C8B-B14F-4D97-AF65-F5344CB8AC3E}">
-        <p14:creationId xmlns:p14="http://schemas.microsoft.com/office/powerpoint/2010/main" val="672151176"/>
+        <p14:creationId xmlns:p14="http://schemas.microsoft.com/office/powerpoint/2010/main" val="1189156546"/>
       </p:ext>
     </p:extLst>
   </p:cSld>
@@ -42831,1181 +45714,6 @@
 </file>
 
 <file path=ppt/slides/slide40.xml><?xml version="1.0" encoding="utf-8"?>
-<p:sld xmlns:a="http://schemas.openxmlformats.org/drawingml/2006/main" xmlns:r="http://schemas.openxmlformats.org/officeDocument/2006/relationships" xmlns:p="http://schemas.openxmlformats.org/presentationml/2006/main">
-  <p:cSld>
-    <p:spTree>
-      <p:nvGrpSpPr>
-        <p:cNvPr id="1" name="">
-          <a:extLst>
-            <a:ext uri="{FF2B5EF4-FFF2-40B4-BE49-F238E27FC236}">
-              <a16:creationId xmlns:a16="http://schemas.microsoft.com/office/drawing/2014/main" id="{89D213B1-ABF0-2E0B-4042-3013B9DEBBCE}"/>
-            </a:ext>
-          </a:extLst>
-        </p:cNvPr>
-        <p:cNvGrpSpPr/>
-        <p:nvPr/>
-      </p:nvGrpSpPr>
-      <p:grpSpPr>
-        <a:xfrm>
-          <a:off x="0" y="0"/>
-          <a:ext cx="0" cy="0"/>
-          <a:chOff x="0" y="0"/>
-          <a:chExt cx="0" cy="0"/>
-        </a:xfrm>
-      </p:grpSpPr>
-      <p:sp>
-        <p:nvSpPr>
-          <p:cNvPr id="2" name="Title 1">
-            <a:extLst>
-              <a:ext uri="{FF2B5EF4-FFF2-40B4-BE49-F238E27FC236}">
-                <a16:creationId xmlns:a16="http://schemas.microsoft.com/office/drawing/2014/main" id="{FAF3AB8A-C7F9-AA12-E5B9-92816D1A8423}"/>
-              </a:ext>
-            </a:extLst>
-          </p:cNvPr>
-          <p:cNvSpPr>
-            <a:spLocks noGrp="1"/>
-          </p:cNvSpPr>
-          <p:nvPr>
-            <p:ph type="title"/>
-          </p:nvPr>
-        </p:nvSpPr>
-        <p:spPr/>
-        <p:txBody>
-          <a:bodyPr/>
-          <a:lstStyle/>
-          <a:p>
-            <a:r>
-              <a:rPr lang="en-US" dirty="0"/>
-              <a:t>Question</a:t>
-            </a:r>
-          </a:p>
-        </p:txBody>
-      </p:sp>
-      <p:sp>
-        <p:nvSpPr>
-          <p:cNvPr id="3" name="Content Placeholder 2">
-            <a:extLst>
-              <a:ext uri="{FF2B5EF4-FFF2-40B4-BE49-F238E27FC236}">
-                <a16:creationId xmlns:a16="http://schemas.microsoft.com/office/drawing/2014/main" id="{0A4E92D1-AAFA-451F-85FB-B8745F330658}"/>
-              </a:ext>
-            </a:extLst>
-          </p:cNvPr>
-          <p:cNvSpPr>
-            <a:spLocks noGrp="1"/>
-          </p:cNvSpPr>
-          <p:nvPr>
-            <p:ph idx="1"/>
-          </p:nvPr>
-        </p:nvSpPr>
-        <p:spPr/>
-        <p:txBody>
-          <a:bodyPr/>
-          <a:lstStyle/>
-          <a:p>
-            <a:r>
-              <a:rPr lang="en-US" dirty="0"/>
-              <a:t>Consider the following semaphore setup:</a:t>
-            </a:r>
-          </a:p>
-          <a:p>
-            <a:pPr lvl="1"/>
-            <a:r>
-              <a:rPr lang="en-US" dirty="0" err="1"/>
-              <a:t>semA</a:t>
-            </a:r>
-            <a:r>
-              <a:rPr lang="en-US" dirty="0"/>
-              <a:t> = 1;</a:t>
-            </a:r>
-          </a:p>
-          <a:p>
-            <a:pPr lvl="1"/>
-            <a:r>
-              <a:rPr lang="en-US" dirty="0" err="1"/>
-              <a:t>semB</a:t>
-            </a:r>
-            <a:r>
-              <a:rPr lang="en-US" dirty="0"/>
-              <a:t> = 0;</a:t>
-            </a:r>
-          </a:p>
-          <a:p>
-            <a:pPr lvl="1"/>
-            <a:r>
-              <a:rPr lang="en-US" dirty="0" err="1"/>
-              <a:t>semC</a:t>
-            </a:r>
-            <a:r>
-              <a:rPr lang="en-US" dirty="0"/>
-              <a:t> = 0;</a:t>
-            </a:r>
-          </a:p>
-          <a:p>
-            <a:pPr lvl="1"/>
-            <a:endParaRPr lang="en-US" dirty="0"/>
-          </a:p>
-          <a:p>
-            <a:pPr lvl="1"/>
-            <a:endParaRPr lang="en-US" dirty="0"/>
-          </a:p>
-          <a:p>
-            <a:pPr lvl="1"/>
-            <a:endParaRPr lang="en-US" dirty="0"/>
-          </a:p>
-          <a:p>
-            <a:pPr lvl="1"/>
-            <a:endParaRPr lang="en-US" dirty="0"/>
-          </a:p>
-          <a:p>
-            <a:r>
-              <a:rPr lang="en-US" dirty="0"/>
-              <a:t>Is sequence is valid?</a:t>
-            </a:r>
-          </a:p>
-          <a:p>
-            <a:pPr lvl="1"/>
-            <a:endParaRPr lang="en-US" dirty="0"/>
-          </a:p>
-        </p:txBody>
-      </p:sp>
-      <p:sp>
-        <p:nvSpPr>
-          <p:cNvPr id="4" name="Slide Number Placeholder 3">
-            <a:extLst>
-              <a:ext uri="{FF2B5EF4-FFF2-40B4-BE49-F238E27FC236}">
-                <a16:creationId xmlns:a16="http://schemas.microsoft.com/office/drawing/2014/main" id="{579ABCBF-3605-9640-3FA9-AF9FB54CB82C}"/>
-              </a:ext>
-            </a:extLst>
-          </p:cNvPr>
-          <p:cNvSpPr>
-            <a:spLocks noGrp="1"/>
-          </p:cNvSpPr>
-          <p:nvPr>
-            <p:ph type="sldNum" sz="quarter" idx="12"/>
-          </p:nvPr>
-        </p:nvSpPr>
-        <p:spPr/>
-        <p:txBody>
-          <a:bodyPr/>
-          <a:lstStyle/>
-          <a:p>
-            <a:fld id="{67FCC1A6-2294-BF46-A2F7-E6BDB92DF1BF}" type="slidenum">
-              <a:rPr lang="en-US" smtClean="0"/>
-              <a:t>40</a:t>
-            </a:fld>
-            <a:endParaRPr lang="en-US"/>
-          </a:p>
-        </p:txBody>
-      </p:sp>
-      <p:sp>
-        <p:nvSpPr>
-          <p:cNvPr id="6" name="TextBox 5">
-            <a:extLst>
-              <a:ext uri="{FF2B5EF4-FFF2-40B4-BE49-F238E27FC236}">
-                <a16:creationId xmlns:a16="http://schemas.microsoft.com/office/drawing/2014/main" id="{53BD2C1C-1390-E365-307C-12071A8A807E}"/>
-              </a:ext>
-            </a:extLst>
-          </p:cNvPr>
-          <p:cNvSpPr txBox="1"/>
-          <p:nvPr/>
-        </p:nvSpPr>
-        <p:spPr>
-          <a:xfrm>
-            <a:off x="4366647" y="3064199"/>
-            <a:ext cx="1584702" cy="1477328"/>
-          </a:xfrm>
-          <a:prstGeom prst="rect">
-            <a:avLst/>
-          </a:prstGeom>
-          <a:noFill/>
-        </p:spPr>
-        <p:txBody>
-          <a:bodyPr wrap="square">
-            <a:spAutoFit/>
-          </a:bodyPr>
-          <a:lstStyle/>
-          <a:p>
-            <a:r>
-              <a:rPr lang="en-US" dirty="0"/>
-              <a:t>THREAD X</a:t>
-            </a:r>
-            <a:br>
-              <a:rPr lang="en-US" dirty="0"/>
-            </a:br>
-            <a:endParaRPr lang="en-US" dirty="0"/>
-          </a:p>
-          <a:p>
-            <a:r>
-              <a:rPr lang="en-US" dirty="0"/>
-              <a:t>wait(</a:t>
-            </a:r>
-            <a:r>
-              <a:rPr lang="en-US" dirty="0" err="1"/>
-              <a:t>semA</a:t>
-            </a:r>
-            <a:r>
-              <a:rPr lang="en-US" dirty="0"/>
-              <a:t>);</a:t>
-            </a:r>
-          </a:p>
-          <a:p>
-            <a:r>
-              <a:rPr lang="en-US" dirty="0" err="1"/>
-              <a:t>opX</a:t>
-            </a:r>
-            <a:r>
-              <a:rPr lang="en-US" dirty="0"/>
-              <a:t>;</a:t>
-            </a:r>
-          </a:p>
-          <a:p>
-            <a:r>
-              <a:rPr lang="en-US" dirty="0"/>
-              <a:t>signal(</a:t>
-            </a:r>
-            <a:r>
-              <a:rPr lang="en-US" dirty="0" err="1"/>
-              <a:t>semB</a:t>
-            </a:r>
-            <a:r>
-              <a:rPr lang="en-US" dirty="0"/>
-              <a:t>);</a:t>
-            </a:r>
-          </a:p>
-        </p:txBody>
-      </p:sp>
-      <p:sp>
-        <p:nvSpPr>
-          <p:cNvPr id="8" name="TextBox 7">
-            <a:extLst>
-              <a:ext uri="{FF2B5EF4-FFF2-40B4-BE49-F238E27FC236}">
-                <a16:creationId xmlns:a16="http://schemas.microsoft.com/office/drawing/2014/main" id="{EE94DE3D-F51D-5B04-E56E-3605BCE8D1CC}"/>
-              </a:ext>
-            </a:extLst>
-          </p:cNvPr>
-          <p:cNvSpPr txBox="1"/>
-          <p:nvPr/>
-        </p:nvSpPr>
-        <p:spPr>
-          <a:xfrm>
-            <a:off x="6096000" y="3064199"/>
-            <a:ext cx="3046708" cy="1477328"/>
-          </a:xfrm>
-          <a:prstGeom prst="rect">
-            <a:avLst/>
-          </a:prstGeom>
-          <a:noFill/>
-        </p:spPr>
-        <p:txBody>
-          <a:bodyPr wrap="square">
-            <a:spAutoFit/>
-          </a:bodyPr>
-          <a:lstStyle/>
-          <a:p>
-            <a:r>
-              <a:rPr lang="en-US" dirty="0"/>
-              <a:t>THREAD Y</a:t>
-            </a:r>
-          </a:p>
-          <a:p>
-            <a:endParaRPr lang="en-US" dirty="0"/>
-          </a:p>
-          <a:p>
-            <a:r>
-              <a:rPr lang="en-US" dirty="0"/>
-              <a:t>wait(</a:t>
-            </a:r>
-            <a:r>
-              <a:rPr lang="en-US" dirty="0" err="1"/>
-              <a:t>semB</a:t>
-            </a:r>
-            <a:r>
-              <a:rPr lang="en-US" dirty="0"/>
-              <a:t>);</a:t>
-            </a:r>
-          </a:p>
-          <a:p>
-            <a:r>
-              <a:rPr lang="en-US" dirty="0" err="1"/>
-              <a:t>opY</a:t>
-            </a:r>
-            <a:r>
-              <a:rPr lang="en-US" dirty="0"/>
-              <a:t>;</a:t>
-            </a:r>
-          </a:p>
-          <a:p>
-            <a:r>
-              <a:rPr lang="en-US" dirty="0"/>
-              <a:t>signal(</a:t>
-            </a:r>
-            <a:r>
-              <a:rPr lang="en-US" dirty="0" err="1"/>
-              <a:t>semC</a:t>
-            </a:r>
-            <a:r>
-              <a:rPr lang="en-US" dirty="0"/>
-              <a:t>);</a:t>
-            </a:r>
-          </a:p>
-        </p:txBody>
-      </p:sp>
-      <p:sp>
-        <p:nvSpPr>
-          <p:cNvPr id="10" name="TextBox 9">
-            <a:extLst>
-              <a:ext uri="{FF2B5EF4-FFF2-40B4-BE49-F238E27FC236}">
-                <a16:creationId xmlns:a16="http://schemas.microsoft.com/office/drawing/2014/main" id="{E424BF86-471D-8962-783B-795BA85D345F}"/>
-              </a:ext>
-            </a:extLst>
-          </p:cNvPr>
-          <p:cNvSpPr txBox="1"/>
-          <p:nvPr/>
-        </p:nvSpPr>
-        <p:spPr>
-          <a:xfrm>
-            <a:off x="8045557" y="3064199"/>
-            <a:ext cx="2483603" cy="1477328"/>
-          </a:xfrm>
-          <a:prstGeom prst="rect">
-            <a:avLst/>
-          </a:prstGeom>
-          <a:noFill/>
-        </p:spPr>
-        <p:txBody>
-          <a:bodyPr wrap="square">
-            <a:spAutoFit/>
-          </a:bodyPr>
-          <a:lstStyle/>
-          <a:p>
-            <a:r>
-              <a:rPr lang="en-US" dirty="0"/>
-              <a:t>THREAD Z</a:t>
-            </a:r>
-          </a:p>
-          <a:p>
-            <a:endParaRPr lang="en-US" dirty="0"/>
-          </a:p>
-          <a:p>
-            <a:r>
-              <a:rPr lang="en-US" dirty="0"/>
-              <a:t>wait(</a:t>
-            </a:r>
-            <a:r>
-              <a:rPr lang="en-US" dirty="0" err="1"/>
-              <a:t>semC</a:t>
-            </a:r>
-            <a:r>
-              <a:rPr lang="en-US" dirty="0"/>
-              <a:t>);</a:t>
-            </a:r>
-          </a:p>
-          <a:p>
-            <a:r>
-              <a:rPr lang="en-US" dirty="0" err="1"/>
-              <a:t>opZ</a:t>
-            </a:r>
-            <a:r>
-              <a:rPr lang="en-US" dirty="0"/>
-              <a:t>;</a:t>
-            </a:r>
-          </a:p>
-          <a:p>
-            <a:r>
-              <a:rPr lang="en-US" dirty="0"/>
-              <a:t>signal(</a:t>
-            </a:r>
-            <a:r>
-              <a:rPr lang="en-US" dirty="0" err="1"/>
-              <a:t>semA</a:t>
-            </a:r>
-            <a:r>
-              <a:rPr lang="en-US" dirty="0"/>
-              <a:t>);</a:t>
-            </a:r>
-          </a:p>
-        </p:txBody>
-      </p:sp>
-      <p:sp>
-        <p:nvSpPr>
-          <p:cNvPr id="5" name="Date Placeholder 4">
-            <a:extLst>
-              <a:ext uri="{FF2B5EF4-FFF2-40B4-BE49-F238E27FC236}">
-                <a16:creationId xmlns:a16="http://schemas.microsoft.com/office/drawing/2014/main" id="{6BC5B370-1790-62C9-8849-5F400FB524DF}"/>
-              </a:ext>
-            </a:extLst>
-          </p:cNvPr>
-          <p:cNvSpPr>
-            <a:spLocks noGrp="1"/>
-          </p:cNvSpPr>
-          <p:nvPr>
-            <p:ph type="dt" sz="half" idx="10"/>
-          </p:nvPr>
-        </p:nvSpPr>
-        <p:spPr/>
-        <p:txBody>
-          <a:bodyPr/>
-          <a:lstStyle/>
-          <a:p>
-            <a:r>
-              <a:rPr lang="en-US"/>
-              <a:t>Vincenzo Gulisano</a:t>
-            </a:r>
-          </a:p>
-        </p:txBody>
-      </p:sp>
-    </p:spTree>
-    <p:extLst>
-      <p:ext uri="{BB962C8B-B14F-4D97-AF65-F5344CB8AC3E}">
-        <p14:creationId xmlns:p14="http://schemas.microsoft.com/office/powerpoint/2010/main" val="2325556078"/>
-      </p:ext>
-    </p:extLst>
-  </p:cSld>
-  <p:clrMapOvr>
-    <a:masterClrMapping/>
-  </p:clrMapOvr>
-</p:sld>
-</file>
-
-<file path=ppt/slides/slide41.xml><?xml version="1.0" encoding="utf-8"?>
-<p:sld xmlns:a="http://schemas.openxmlformats.org/drawingml/2006/main" xmlns:r="http://schemas.openxmlformats.org/officeDocument/2006/relationships" xmlns:p="http://schemas.openxmlformats.org/presentationml/2006/main">
-  <p:cSld>
-    <p:spTree>
-      <p:nvGrpSpPr>
-        <p:cNvPr id="1" name="">
-          <a:extLst>
-            <a:ext uri="{FF2B5EF4-FFF2-40B4-BE49-F238E27FC236}">
-              <a16:creationId xmlns:a16="http://schemas.microsoft.com/office/drawing/2014/main" id="{31967116-A431-8163-2A2B-517716BE1097}"/>
-            </a:ext>
-          </a:extLst>
-        </p:cNvPr>
-        <p:cNvGrpSpPr/>
-        <p:nvPr/>
-      </p:nvGrpSpPr>
-      <p:grpSpPr>
-        <a:xfrm>
-          <a:off x="0" y="0"/>
-          <a:ext cx="0" cy="0"/>
-          <a:chOff x="0" y="0"/>
-          <a:chExt cx="0" cy="0"/>
-        </a:xfrm>
-      </p:grpSpPr>
-      <p:sp>
-        <p:nvSpPr>
-          <p:cNvPr id="2" name="Title 1">
-            <a:extLst>
-              <a:ext uri="{FF2B5EF4-FFF2-40B4-BE49-F238E27FC236}">
-                <a16:creationId xmlns:a16="http://schemas.microsoft.com/office/drawing/2014/main" id="{817425AE-7E58-4942-D74F-0DF8C372A01F}"/>
-              </a:ext>
-            </a:extLst>
-          </p:cNvPr>
-          <p:cNvSpPr>
-            <a:spLocks noGrp="1"/>
-          </p:cNvSpPr>
-          <p:nvPr>
-            <p:ph type="title"/>
-          </p:nvPr>
-        </p:nvSpPr>
-        <p:spPr/>
-        <p:txBody>
-          <a:bodyPr/>
-          <a:lstStyle/>
-          <a:p>
-            <a:r>
-              <a:rPr lang="en-US" dirty="0"/>
-              <a:t>Question</a:t>
-            </a:r>
-          </a:p>
-        </p:txBody>
-      </p:sp>
-      <p:sp>
-        <p:nvSpPr>
-          <p:cNvPr id="3" name="Content Placeholder 2">
-            <a:extLst>
-              <a:ext uri="{FF2B5EF4-FFF2-40B4-BE49-F238E27FC236}">
-                <a16:creationId xmlns:a16="http://schemas.microsoft.com/office/drawing/2014/main" id="{91C2C583-82BF-4E57-1DC6-4D97AE6080E7}"/>
-              </a:ext>
-            </a:extLst>
-          </p:cNvPr>
-          <p:cNvSpPr>
-            <a:spLocks noGrp="1"/>
-          </p:cNvSpPr>
-          <p:nvPr>
-            <p:ph idx="1"/>
-          </p:nvPr>
-        </p:nvSpPr>
-        <p:spPr/>
-        <p:txBody>
-          <a:bodyPr/>
-          <a:lstStyle/>
-          <a:p>
-            <a:r>
-              <a:rPr lang="en-US" dirty="0"/>
-              <a:t>Consider the following semaphore setup:</a:t>
-            </a:r>
-          </a:p>
-          <a:p>
-            <a:pPr lvl="1"/>
-            <a:r>
-              <a:rPr lang="en-US" dirty="0" err="1"/>
-              <a:t>semA</a:t>
-            </a:r>
-            <a:r>
-              <a:rPr lang="en-US" dirty="0"/>
-              <a:t> = 1;</a:t>
-            </a:r>
-          </a:p>
-          <a:p>
-            <a:pPr lvl="1"/>
-            <a:r>
-              <a:rPr lang="en-US" dirty="0" err="1"/>
-              <a:t>semB</a:t>
-            </a:r>
-            <a:r>
-              <a:rPr lang="en-US" dirty="0"/>
-              <a:t> = 1;</a:t>
-            </a:r>
-          </a:p>
-          <a:p>
-            <a:pPr lvl="1"/>
-            <a:r>
-              <a:rPr lang="en-US" dirty="0" err="1"/>
-              <a:t>semC</a:t>
-            </a:r>
-            <a:r>
-              <a:rPr lang="en-US" dirty="0"/>
-              <a:t> = 0;</a:t>
-            </a:r>
-          </a:p>
-          <a:p>
-            <a:pPr lvl="1"/>
-            <a:endParaRPr lang="en-US" dirty="0"/>
-          </a:p>
-          <a:p>
-            <a:pPr lvl="1"/>
-            <a:endParaRPr lang="en-US" dirty="0"/>
-          </a:p>
-          <a:p>
-            <a:pPr lvl="1"/>
-            <a:endParaRPr lang="en-US" dirty="0"/>
-          </a:p>
-          <a:p>
-            <a:pPr lvl="1"/>
-            <a:endParaRPr lang="en-US" dirty="0"/>
-          </a:p>
-          <a:p>
-            <a:r>
-              <a:rPr lang="en-US" dirty="0"/>
-              <a:t>Are </a:t>
-            </a:r>
-            <a:r>
-              <a:rPr lang="en-US" dirty="0" err="1"/>
-              <a:t>opY</a:t>
-            </a:r>
-            <a:r>
-              <a:rPr lang="en-US" dirty="0"/>
-              <a:t> &amp; </a:t>
-            </a:r>
-            <a:r>
-              <a:rPr lang="en-US" dirty="0" err="1"/>
-              <a:t>opX</a:t>
-            </a:r>
-            <a:r>
-              <a:rPr lang="en-US" dirty="0"/>
-              <a:t> → </a:t>
-            </a:r>
-            <a:r>
-              <a:rPr lang="en-US" dirty="0" err="1"/>
-              <a:t>opZ</a:t>
-            </a:r>
-            <a:r>
-              <a:rPr lang="en-US" dirty="0"/>
-              <a:t> and </a:t>
-            </a:r>
-            <a:r>
-              <a:rPr lang="en-US" dirty="0" err="1"/>
-              <a:t>opX</a:t>
-            </a:r>
-            <a:r>
-              <a:rPr lang="en-US" dirty="0"/>
-              <a:t> &amp; </a:t>
-            </a:r>
-            <a:r>
-              <a:rPr lang="en-US" dirty="0" err="1"/>
-              <a:t>opY</a:t>
-            </a:r>
-            <a:r>
-              <a:rPr lang="en-US" dirty="0"/>
-              <a:t> → </a:t>
-            </a:r>
-            <a:r>
-              <a:rPr lang="en-US" dirty="0" err="1"/>
-              <a:t>opZ</a:t>
-            </a:r>
-            <a:r>
-              <a:rPr lang="en-US" dirty="0"/>
-              <a:t> valid?</a:t>
-            </a:r>
-          </a:p>
-          <a:p>
-            <a:pPr lvl="1"/>
-            <a:endParaRPr lang="en-US" dirty="0"/>
-          </a:p>
-        </p:txBody>
-      </p:sp>
-      <p:sp>
-        <p:nvSpPr>
-          <p:cNvPr id="4" name="Slide Number Placeholder 3">
-            <a:extLst>
-              <a:ext uri="{FF2B5EF4-FFF2-40B4-BE49-F238E27FC236}">
-                <a16:creationId xmlns:a16="http://schemas.microsoft.com/office/drawing/2014/main" id="{680A75F0-055A-8911-D78A-9311FF8F81D5}"/>
-              </a:ext>
-            </a:extLst>
-          </p:cNvPr>
-          <p:cNvSpPr>
-            <a:spLocks noGrp="1"/>
-          </p:cNvSpPr>
-          <p:nvPr>
-            <p:ph type="sldNum" sz="quarter" idx="12"/>
-          </p:nvPr>
-        </p:nvSpPr>
-        <p:spPr/>
-        <p:txBody>
-          <a:bodyPr/>
-          <a:lstStyle/>
-          <a:p>
-            <a:fld id="{67FCC1A6-2294-BF46-A2F7-E6BDB92DF1BF}" type="slidenum">
-              <a:rPr lang="en-US" smtClean="0"/>
-              <a:t>41</a:t>
-            </a:fld>
-            <a:endParaRPr lang="en-US"/>
-          </a:p>
-        </p:txBody>
-      </p:sp>
-      <p:sp>
-        <p:nvSpPr>
-          <p:cNvPr id="6" name="TextBox 5">
-            <a:extLst>
-              <a:ext uri="{FF2B5EF4-FFF2-40B4-BE49-F238E27FC236}">
-                <a16:creationId xmlns:a16="http://schemas.microsoft.com/office/drawing/2014/main" id="{244F15DE-8919-AD6D-4646-F9F6E64105F3}"/>
-              </a:ext>
-            </a:extLst>
-          </p:cNvPr>
-          <p:cNvSpPr txBox="1"/>
-          <p:nvPr/>
-        </p:nvSpPr>
-        <p:spPr>
-          <a:xfrm>
-            <a:off x="4366647" y="3064199"/>
-            <a:ext cx="1584702" cy="1477328"/>
-          </a:xfrm>
-          <a:prstGeom prst="rect">
-            <a:avLst/>
-          </a:prstGeom>
-          <a:noFill/>
-        </p:spPr>
-        <p:txBody>
-          <a:bodyPr wrap="square">
-            <a:spAutoFit/>
-          </a:bodyPr>
-          <a:lstStyle/>
-          <a:p>
-            <a:r>
-              <a:rPr lang="en-US" dirty="0"/>
-              <a:t>THREAD X</a:t>
-            </a:r>
-            <a:br>
-              <a:rPr lang="en-US" dirty="0"/>
-            </a:br>
-            <a:endParaRPr lang="en-US" dirty="0"/>
-          </a:p>
-          <a:p>
-            <a:r>
-              <a:rPr lang="en-US" dirty="0"/>
-              <a:t>wait(</a:t>
-            </a:r>
-            <a:r>
-              <a:rPr lang="en-US" dirty="0" err="1"/>
-              <a:t>semA</a:t>
-            </a:r>
-            <a:r>
-              <a:rPr lang="en-US" dirty="0"/>
-              <a:t>);</a:t>
-            </a:r>
-          </a:p>
-          <a:p>
-            <a:r>
-              <a:rPr lang="en-US" dirty="0" err="1"/>
-              <a:t>opX</a:t>
-            </a:r>
-            <a:r>
-              <a:rPr lang="en-US" dirty="0"/>
-              <a:t>;</a:t>
-            </a:r>
-          </a:p>
-          <a:p>
-            <a:r>
-              <a:rPr lang="en-US" dirty="0"/>
-              <a:t>signal(</a:t>
-            </a:r>
-            <a:r>
-              <a:rPr lang="en-US" dirty="0" err="1"/>
-              <a:t>semB</a:t>
-            </a:r>
-            <a:r>
-              <a:rPr lang="en-US" dirty="0"/>
-              <a:t>);</a:t>
-            </a:r>
-          </a:p>
-        </p:txBody>
-      </p:sp>
-      <p:sp>
-        <p:nvSpPr>
-          <p:cNvPr id="8" name="TextBox 7">
-            <a:extLst>
-              <a:ext uri="{FF2B5EF4-FFF2-40B4-BE49-F238E27FC236}">
-                <a16:creationId xmlns:a16="http://schemas.microsoft.com/office/drawing/2014/main" id="{A9AE8E93-6808-816D-9D6C-E43051D41D07}"/>
-              </a:ext>
-            </a:extLst>
-          </p:cNvPr>
-          <p:cNvSpPr txBox="1"/>
-          <p:nvPr/>
-        </p:nvSpPr>
-        <p:spPr>
-          <a:xfrm>
-            <a:off x="6096000" y="3064199"/>
-            <a:ext cx="3046708" cy="1477328"/>
-          </a:xfrm>
-          <a:prstGeom prst="rect">
-            <a:avLst/>
-          </a:prstGeom>
-          <a:noFill/>
-        </p:spPr>
-        <p:txBody>
-          <a:bodyPr wrap="square">
-            <a:spAutoFit/>
-          </a:bodyPr>
-          <a:lstStyle/>
-          <a:p>
-            <a:r>
-              <a:rPr lang="en-US" dirty="0"/>
-              <a:t>THREAD Y</a:t>
-            </a:r>
-          </a:p>
-          <a:p>
-            <a:endParaRPr lang="en-US" dirty="0"/>
-          </a:p>
-          <a:p>
-            <a:r>
-              <a:rPr lang="en-US" dirty="0"/>
-              <a:t>wait(</a:t>
-            </a:r>
-            <a:r>
-              <a:rPr lang="en-US" dirty="0" err="1"/>
-              <a:t>semB</a:t>
-            </a:r>
-            <a:r>
-              <a:rPr lang="en-US" dirty="0"/>
-              <a:t>);</a:t>
-            </a:r>
-          </a:p>
-          <a:p>
-            <a:r>
-              <a:rPr lang="en-US" dirty="0" err="1"/>
-              <a:t>opY</a:t>
-            </a:r>
-            <a:r>
-              <a:rPr lang="en-US" dirty="0"/>
-              <a:t>;</a:t>
-            </a:r>
-          </a:p>
-          <a:p>
-            <a:r>
-              <a:rPr lang="en-US" dirty="0"/>
-              <a:t>signal(</a:t>
-            </a:r>
-            <a:r>
-              <a:rPr lang="en-US" dirty="0" err="1"/>
-              <a:t>semC</a:t>
-            </a:r>
-            <a:r>
-              <a:rPr lang="en-US" dirty="0"/>
-              <a:t>);</a:t>
-            </a:r>
-          </a:p>
-        </p:txBody>
-      </p:sp>
-      <p:sp>
-        <p:nvSpPr>
-          <p:cNvPr id="10" name="TextBox 9">
-            <a:extLst>
-              <a:ext uri="{FF2B5EF4-FFF2-40B4-BE49-F238E27FC236}">
-                <a16:creationId xmlns:a16="http://schemas.microsoft.com/office/drawing/2014/main" id="{6823CFB3-5FCF-1E3A-AC51-903B9A4A6384}"/>
-              </a:ext>
-            </a:extLst>
-          </p:cNvPr>
-          <p:cNvSpPr txBox="1"/>
-          <p:nvPr/>
-        </p:nvSpPr>
-        <p:spPr>
-          <a:xfrm>
-            <a:off x="8045557" y="3064199"/>
-            <a:ext cx="2483603" cy="1477328"/>
-          </a:xfrm>
-          <a:prstGeom prst="rect">
-            <a:avLst/>
-          </a:prstGeom>
-          <a:noFill/>
-        </p:spPr>
-        <p:txBody>
-          <a:bodyPr wrap="square">
-            <a:spAutoFit/>
-          </a:bodyPr>
-          <a:lstStyle/>
-          <a:p>
-            <a:r>
-              <a:rPr lang="en-US" dirty="0"/>
-              <a:t>THREAD Z</a:t>
-            </a:r>
-          </a:p>
-          <a:p>
-            <a:endParaRPr lang="en-US" dirty="0"/>
-          </a:p>
-          <a:p>
-            <a:r>
-              <a:rPr lang="en-US" dirty="0"/>
-              <a:t>wait(</a:t>
-            </a:r>
-            <a:r>
-              <a:rPr lang="en-US" dirty="0" err="1"/>
-              <a:t>semC</a:t>
-            </a:r>
-            <a:r>
-              <a:rPr lang="en-US" dirty="0"/>
-              <a:t>);</a:t>
-            </a:r>
-          </a:p>
-          <a:p>
-            <a:r>
-              <a:rPr lang="en-US" dirty="0" err="1"/>
-              <a:t>opZ</a:t>
-            </a:r>
-            <a:r>
-              <a:rPr lang="en-US" dirty="0"/>
-              <a:t>;</a:t>
-            </a:r>
-          </a:p>
-          <a:p>
-            <a:r>
-              <a:rPr lang="en-US" dirty="0"/>
-              <a:t>signal(</a:t>
-            </a:r>
-            <a:r>
-              <a:rPr lang="en-US" dirty="0" err="1"/>
-              <a:t>semA</a:t>
-            </a:r>
-            <a:r>
-              <a:rPr lang="en-US" dirty="0"/>
-              <a:t>);</a:t>
-            </a:r>
-          </a:p>
-        </p:txBody>
-      </p:sp>
-      <p:sp>
-        <p:nvSpPr>
-          <p:cNvPr id="5" name="Date Placeholder 4">
-            <a:extLst>
-              <a:ext uri="{FF2B5EF4-FFF2-40B4-BE49-F238E27FC236}">
-                <a16:creationId xmlns:a16="http://schemas.microsoft.com/office/drawing/2014/main" id="{220F3303-F6E2-D538-3110-41892067A978}"/>
-              </a:ext>
-            </a:extLst>
-          </p:cNvPr>
-          <p:cNvSpPr>
-            <a:spLocks noGrp="1"/>
-          </p:cNvSpPr>
-          <p:nvPr>
-            <p:ph type="dt" sz="half" idx="10"/>
-          </p:nvPr>
-        </p:nvSpPr>
-        <p:spPr/>
-        <p:txBody>
-          <a:bodyPr/>
-          <a:lstStyle/>
-          <a:p>
-            <a:r>
-              <a:rPr lang="en-US"/>
-              <a:t>Vincenzo Gulisano</a:t>
-            </a:r>
-          </a:p>
-        </p:txBody>
-      </p:sp>
-    </p:spTree>
-    <p:extLst>
-      <p:ext uri="{BB962C8B-B14F-4D97-AF65-F5344CB8AC3E}">
-        <p14:creationId xmlns:p14="http://schemas.microsoft.com/office/powerpoint/2010/main" val="277847942"/>
-      </p:ext>
-    </p:extLst>
-  </p:cSld>
-  <p:clrMapOvr>
-    <a:masterClrMapping/>
-  </p:clrMapOvr>
-</p:sld>
-</file>
-
-<file path=ppt/slides/slide42.xml><?xml version="1.0" encoding="utf-8"?>
-<p:sld xmlns:a="http://schemas.openxmlformats.org/drawingml/2006/main" xmlns:r="http://schemas.openxmlformats.org/officeDocument/2006/relationships" xmlns:p="http://schemas.openxmlformats.org/presentationml/2006/main">
-  <p:cSld>
-    <p:spTree>
-      <p:nvGrpSpPr>
-        <p:cNvPr id="1" name=""/>
-        <p:cNvGrpSpPr/>
-        <p:nvPr/>
-      </p:nvGrpSpPr>
-      <p:grpSpPr>
-        <a:xfrm>
-          <a:off x="0" y="0"/>
-          <a:ext cx="0" cy="0"/>
-          <a:chOff x="0" y="0"/>
-          <a:chExt cx="0" cy="0"/>
-        </a:xfrm>
-      </p:grpSpPr>
-      <p:sp>
-        <p:nvSpPr>
-          <p:cNvPr id="2" name="Title 1">
-            <a:extLst>
-              <a:ext uri="{FF2B5EF4-FFF2-40B4-BE49-F238E27FC236}">
-                <a16:creationId xmlns:a16="http://schemas.microsoft.com/office/drawing/2014/main" id="{1376EFEE-458E-925D-5F06-5A04C4F89170}"/>
-              </a:ext>
-            </a:extLst>
-          </p:cNvPr>
-          <p:cNvSpPr>
-            <a:spLocks noGrp="1"/>
-          </p:cNvSpPr>
-          <p:nvPr>
-            <p:ph type="title"/>
-          </p:nvPr>
-        </p:nvSpPr>
-        <p:spPr/>
-        <p:txBody>
-          <a:bodyPr/>
-          <a:lstStyle/>
-          <a:p>
-            <a:r>
-              <a:rPr lang="en-US" dirty="0"/>
-              <a:t>Agenda</a:t>
-            </a:r>
-          </a:p>
-        </p:txBody>
-      </p:sp>
-      <p:sp>
-        <p:nvSpPr>
-          <p:cNvPr id="3" name="Content Placeholder 2">
-            <a:extLst>
-              <a:ext uri="{FF2B5EF4-FFF2-40B4-BE49-F238E27FC236}">
-                <a16:creationId xmlns:a16="http://schemas.microsoft.com/office/drawing/2014/main" id="{361CE96F-0172-DEE5-57F1-08778EDB055A}"/>
-              </a:ext>
-            </a:extLst>
-          </p:cNvPr>
-          <p:cNvSpPr>
-            <a:spLocks noGrp="1"/>
-          </p:cNvSpPr>
-          <p:nvPr>
-            <p:ph idx="1"/>
-          </p:nvPr>
-        </p:nvSpPr>
-        <p:spPr/>
-        <p:txBody>
-          <a:bodyPr/>
-          <a:lstStyle/>
-          <a:p>
-            <a:r>
-              <a:rPr lang="en-US" dirty="0">
-                <a:solidFill>
-                  <a:schemeClr val="bg1">
-                    <a:lumMod val="50000"/>
-                  </a:schemeClr>
-                </a:solidFill>
-              </a:rPr>
-              <a:t>Motivation</a:t>
-            </a:r>
-          </a:p>
-          <a:p>
-            <a:r>
-              <a:rPr lang="en-US" dirty="0">
-                <a:solidFill>
-                  <a:schemeClr val="bg1">
-                    <a:lumMod val="50000"/>
-                  </a:schemeClr>
-                </a:solidFill>
-              </a:rPr>
-              <a:t>The Critical Section problem</a:t>
-            </a:r>
-          </a:p>
-          <a:p>
-            <a:pPr lvl="1"/>
-            <a:r>
-              <a:rPr lang="en-US" dirty="0">
-                <a:solidFill>
-                  <a:schemeClr val="bg1">
-                    <a:lumMod val="50000"/>
-                  </a:schemeClr>
-                </a:solidFill>
-              </a:rPr>
-              <a:t>Check-competition approach</a:t>
-            </a:r>
-          </a:p>
-          <a:p>
-            <a:r>
-              <a:rPr lang="en-US" dirty="0">
-                <a:solidFill>
-                  <a:schemeClr val="bg1">
-                    <a:lumMod val="50000"/>
-                  </a:schemeClr>
-                </a:solidFill>
-              </a:rPr>
-              <a:t>The check-order / after-you approach</a:t>
-            </a:r>
-          </a:p>
-          <a:p>
-            <a:r>
-              <a:rPr lang="en-US" dirty="0">
-                <a:solidFill>
-                  <a:schemeClr val="bg1">
-                    <a:lumMod val="50000"/>
-                  </a:schemeClr>
-                </a:solidFill>
-              </a:rPr>
-              <a:t>Peterson’s Algorithm</a:t>
-            </a:r>
-          </a:p>
-          <a:p>
-            <a:r>
-              <a:rPr lang="en-US" dirty="0">
-                <a:solidFill>
-                  <a:schemeClr val="bg1">
-                    <a:lumMod val="50000"/>
-                  </a:schemeClr>
-                </a:solidFill>
-              </a:rPr>
-              <a:t>Synchronization and hardware support</a:t>
-            </a:r>
-          </a:p>
-          <a:p>
-            <a:pPr lvl="1"/>
-            <a:r>
-              <a:rPr lang="en-US" dirty="0">
-                <a:solidFill>
-                  <a:schemeClr val="bg1">
-                    <a:lumMod val="50000"/>
-                  </a:schemeClr>
-                </a:solidFill>
-              </a:rPr>
-              <a:t>Read-Modify-Write instructions</a:t>
-            </a:r>
-          </a:p>
-          <a:p>
-            <a:r>
-              <a:rPr lang="en-US" dirty="0">
-                <a:solidFill>
-                  <a:schemeClr val="bg1">
-                    <a:lumMod val="50000"/>
-                  </a:schemeClr>
-                </a:solidFill>
-              </a:rPr>
-              <a:t>Semaphores</a:t>
-            </a:r>
-          </a:p>
-          <a:p>
-            <a:r>
-              <a:rPr lang="en-US" dirty="0"/>
-              <a:t>Other techniques</a:t>
-            </a:r>
-          </a:p>
-          <a:p>
-            <a:endParaRPr lang="en-US" dirty="0"/>
-          </a:p>
-          <a:p>
-            <a:endParaRPr lang="en-US" dirty="0"/>
-          </a:p>
-          <a:p>
-            <a:endParaRPr lang="en-US" dirty="0"/>
-          </a:p>
-          <a:p>
-            <a:endParaRPr lang="en-US" dirty="0"/>
-          </a:p>
-        </p:txBody>
-      </p:sp>
-      <p:sp>
-        <p:nvSpPr>
-          <p:cNvPr id="4" name="Slide Number Placeholder 3">
-            <a:extLst>
-              <a:ext uri="{FF2B5EF4-FFF2-40B4-BE49-F238E27FC236}">
-                <a16:creationId xmlns:a16="http://schemas.microsoft.com/office/drawing/2014/main" id="{35453510-5B16-5214-21EA-2710E27F17B3}"/>
-              </a:ext>
-            </a:extLst>
-          </p:cNvPr>
-          <p:cNvSpPr>
-            <a:spLocks noGrp="1"/>
-          </p:cNvSpPr>
-          <p:nvPr>
-            <p:ph type="sldNum" sz="quarter" idx="12"/>
-          </p:nvPr>
-        </p:nvSpPr>
-        <p:spPr/>
-        <p:txBody>
-          <a:bodyPr/>
-          <a:lstStyle/>
-          <a:p>
-            <a:fld id="{67FCC1A6-2294-BF46-A2F7-E6BDB92DF1BF}" type="slidenum">
-              <a:rPr lang="en-US" smtClean="0"/>
-              <a:t>42</a:t>
-            </a:fld>
-            <a:endParaRPr lang="en-US"/>
-          </a:p>
-        </p:txBody>
-      </p:sp>
-      <p:sp>
-        <p:nvSpPr>
-          <p:cNvPr id="5" name="Date Placeholder 4">
-            <a:extLst>
-              <a:ext uri="{FF2B5EF4-FFF2-40B4-BE49-F238E27FC236}">
-                <a16:creationId xmlns:a16="http://schemas.microsoft.com/office/drawing/2014/main" id="{FDED5A16-2593-A024-3581-4950965F1A9E}"/>
-              </a:ext>
-            </a:extLst>
-          </p:cNvPr>
-          <p:cNvSpPr>
-            <a:spLocks noGrp="1"/>
-          </p:cNvSpPr>
-          <p:nvPr>
-            <p:ph type="dt" sz="half" idx="10"/>
-          </p:nvPr>
-        </p:nvSpPr>
-        <p:spPr/>
-        <p:txBody>
-          <a:bodyPr/>
-          <a:lstStyle/>
-          <a:p>
-            <a:r>
-              <a:rPr lang="en-US"/>
-              <a:t>Vincenzo Gulisano</a:t>
-            </a:r>
-          </a:p>
-        </p:txBody>
-      </p:sp>
-    </p:spTree>
-    <p:extLst>
-      <p:ext uri="{BB962C8B-B14F-4D97-AF65-F5344CB8AC3E}">
-        <p14:creationId xmlns:p14="http://schemas.microsoft.com/office/powerpoint/2010/main" val="1189156546"/>
-      </p:ext>
-    </p:extLst>
-  </p:cSld>
-  <p:clrMapOvr>
-    <a:masterClrMapping/>
-  </p:clrMapOvr>
-</p:sld>
-</file>
-
-<file path=ppt/slides/slide43.xml><?xml version="1.0" encoding="utf-8"?>
 <p:sld xmlns:a="http://schemas.openxmlformats.org/drawingml/2006/main" xmlns:r="http://schemas.openxmlformats.org/officeDocument/2006/relationships" xmlns:p="http://schemas.openxmlformats.org/presentationml/2006/main">
   <p:cSld>
     <p:spTree>
@@ -44672,7 +46380,7 @@
                 <a:tabLst/>
                 <a:defRPr/>
               </a:pPr>
-              <a:t>43</a:t>
+              <a:t>40</a:t>
             </a:fld>
             <a:endParaRPr kumimoji="0" lang="en-US" sz="1200" b="0" i="0" u="none" strike="noStrike" kern="1200" cap="none" spc="0" normalizeH="0" baseline="0" noProof="0">
               <a:ln>
@@ -44734,7 +46442,7 @@
 </p:sld>
 </file>
 
-<file path=ppt/slides/slide44.xml><?xml version="1.0" encoding="utf-8"?>
+<file path=ppt/slides/slide41.xml><?xml version="1.0" encoding="utf-8"?>
 <p:sld xmlns:a="http://schemas.openxmlformats.org/drawingml/2006/main" xmlns:r="http://schemas.openxmlformats.org/officeDocument/2006/relationships" xmlns:p="http://schemas.openxmlformats.org/presentationml/2006/main">
   <p:cSld>
     <p:spTree>
@@ -44989,7 +46697,7 @@
                 <a:tabLst/>
                 <a:defRPr/>
               </a:pPr>
-              <a:t>44</a:t>
+              <a:t>41</a:t>
             </a:fld>
             <a:endParaRPr kumimoji="0" lang="en-US" sz="1200" b="0" i="0" u="none" strike="noStrike" kern="1200" cap="none" spc="0" normalizeH="0" baseline="0" noProof="0">
               <a:ln>
@@ -45051,7 +46759,7 @@
 </p:sld>
 </file>
 
-<file path=ppt/slides/slide45.xml><?xml version="1.0" encoding="utf-8"?>
+<file path=ppt/slides/slide42.xml><?xml version="1.0" encoding="utf-8"?>
 <p:sld xmlns:a="http://schemas.openxmlformats.org/drawingml/2006/main" xmlns:r="http://schemas.openxmlformats.org/officeDocument/2006/relationships" xmlns:p="http://schemas.openxmlformats.org/presentationml/2006/main">
   <p:cSld>
     <p:spTree>
@@ -45301,7 +47009,7 @@
                 <a:tabLst/>
                 <a:defRPr/>
               </a:pPr>
-              <a:t>45</a:t>
+              <a:t>42</a:t>
             </a:fld>
             <a:endParaRPr kumimoji="0" lang="en-US" sz="1200" b="0" i="0" u="none" strike="noStrike" kern="1200" cap="none" spc="0" normalizeH="0" baseline="0" noProof="0">
               <a:ln>
@@ -45562,7 +47270,7 @@
 </p:sld>
 </file>
 
-<file path=ppt/slides/slide46.xml><?xml version="1.0" encoding="utf-8"?>
+<file path=ppt/slides/slide43.xml><?xml version="1.0" encoding="utf-8"?>
 <p:sld xmlns:a="http://schemas.openxmlformats.org/drawingml/2006/main" xmlns:r="http://schemas.openxmlformats.org/officeDocument/2006/relationships" xmlns:p="http://schemas.openxmlformats.org/presentationml/2006/main">
   <p:cSld>
     <p:spTree>
@@ -45775,6 +47483,2133 @@
     <p:extLst>
       <p:ext uri="{BB962C8B-B14F-4D97-AF65-F5344CB8AC3E}">
         <p14:creationId xmlns:p14="http://schemas.microsoft.com/office/powerpoint/2010/main" val="1147235343"/>
+      </p:ext>
+    </p:extLst>
+  </p:cSld>
+  <p:clrMapOvr>
+    <a:masterClrMapping/>
+  </p:clrMapOvr>
+</p:sld>
+</file>
+
+<file path=ppt/slides/slide44.xml><?xml version="1.0" encoding="utf-8"?>
+<p:sld xmlns:a="http://schemas.openxmlformats.org/drawingml/2006/main" xmlns:r="http://schemas.openxmlformats.org/officeDocument/2006/relationships" xmlns:p="http://schemas.openxmlformats.org/presentationml/2006/main">
+  <p:cSld>
+    <p:bg>
+      <p:bgPr>
+        <a:solidFill>
+          <a:schemeClr val="bg1"/>
+        </a:solidFill>
+        <a:effectLst/>
+      </p:bgPr>
+    </p:bg>
+    <p:spTree>
+      <p:nvGrpSpPr>
+        <p:cNvPr id="1" name=""/>
+        <p:cNvGrpSpPr/>
+        <p:nvPr/>
+      </p:nvGrpSpPr>
+      <p:grpSpPr>
+        <a:xfrm>
+          <a:off x="0" y="0"/>
+          <a:ext cx="0" cy="0"/>
+          <a:chOff x="0" y="0"/>
+          <a:chExt cx="0" cy="0"/>
+        </a:xfrm>
+      </p:grpSpPr>
+      <p:sp useBgFill="1">
+        <p:nvSpPr>
+          <p:cNvPr id="7" name="Rectangle 6">
+            <a:extLst>
+              <a:ext uri="{FF2B5EF4-FFF2-40B4-BE49-F238E27FC236}">
+                <a16:creationId xmlns:a16="http://schemas.microsoft.com/office/drawing/2014/main" id="{934F1179-B481-4F9E-BCA3-AFB972070F83}"/>
+              </a:ext>
+              <a:ext uri="{C183D7F6-B498-43B3-948B-1728B52AA6E4}">
+                <adec:decorative xmlns:adec="http://schemas.microsoft.com/office/drawing/2017/decorative" val="1"/>
+              </a:ext>
+            </a:extLst>
+          </p:cNvPr>
+          <p:cNvSpPr>
+            <a:spLocks noGrp="1" noRot="1" noChangeAspect="1" noMove="1" noResize="1" noEditPoints="1" noAdjustHandles="1" noChangeArrowheads="1" noChangeShapeType="1" noTextEdit="1"/>
+          </p:cNvSpPr>
+          <p:nvPr>
+            <p:extLst>
+              <p:ext uri="{386F3935-93C4-4BCD-93E2-E3B085C9AB24}">
+                <p16:designElem xmlns:p16="http://schemas.microsoft.com/office/powerpoint/2015/main" val="1"/>
+              </p:ext>
+            </p:extLst>
+          </p:nvPr>
+        </p:nvSpPr>
+        <p:spPr>
+          <a:xfrm>
+            <a:off x="1524000" y="0"/>
+            <a:ext cx="9144000" cy="6858000"/>
+          </a:xfrm>
+          <a:prstGeom prst="rect">
+            <a:avLst/>
+          </a:prstGeom>
+          <a:ln>
+            <a:noFill/>
+          </a:ln>
+        </p:spPr>
+        <p:style>
+          <a:lnRef idx="2">
+            <a:schemeClr val="accent1">
+              <a:shade val="50000"/>
+            </a:schemeClr>
+          </a:lnRef>
+          <a:fillRef idx="1">
+            <a:schemeClr val="accent1"/>
+          </a:fillRef>
+          <a:effectRef idx="0">
+            <a:schemeClr val="accent1"/>
+          </a:effectRef>
+          <a:fontRef idx="minor">
+            <a:schemeClr val="lt1"/>
+          </a:fontRef>
+        </p:style>
+        <p:txBody>
+          <a:bodyPr rtlCol="0" anchor="ctr"/>
+          <a:lstStyle/>
+          <a:p>
+            <a:pPr algn="ctr" eaLnBrk="0" fontAlgn="base" hangingPunct="0">
+              <a:spcBef>
+                <a:spcPct val="0"/>
+              </a:spcBef>
+              <a:spcAft>
+                <a:spcPct val="0"/>
+              </a:spcAft>
+            </a:pPr>
+            <a:endParaRPr lang="en-US">
+              <a:solidFill>
+                <a:prstClr val="white"/>
+              </a:solidFill>
+              <a:latin typeface="Garamond" panose="02020404030301010803"/>
+            </a:endParaRPr>
+          </a:p>
+        </p:txBody>
+      </p:sp>
+      <p:sp>
+        <p:nvSpPr>
+          <p:cNvPr id="9" name="Right Triangle 8">
+            <a:extLst>
+              <a:ext uri="{FF2B5EF4-FFF2-40B4-BE49-F238E27FC236}">
+                <a16:creationId xmlns:a16="http://schemas.microsoft.com/office/drawing/2014/main" id="{827DC2C4-B485-428A-BF4A-472D2967F47F}"/>
+              </a:ext>
+              <a:ext uri="{C183D7F6-B498-43B3-948B-1728B52AA6E4}">
+                <adec:decorative xmlns:adec="http://schemas.microsoft.com/office/drawing/2017/decorative" val="1"/>
+              </a:ext>
+            </a:extLst>
+          </p:cNvPr>
+          <p:cNvSpPr>
+            <a:spLocks noGrp="1" noRot="1" noChangeAspect="1" noMove="1" noResize="1" noEditPoints="1" noAdjustHandles="1" noChangeArrowheads="1" noChangeShapeType="1" noTextEdit="1"/>
+          </p:cNvSpPr>
+          <p:nvPr>
+            <p:extLst>
+              <p:ext uri="{386F3935-93C4-4BCD-93E2-E3B085C9AB24}">
+                <p16:designElem xmlns:p16="http://schemas.microsoft.com/office/powerpoint/2015/main" val="1"/>
+              </p:ext>
+            </p:extLst>
+          </p:nvPr>
+        </p:nvSpPr>
+        <p:spPr>
+          <a:xfrm flipH="1">
+            <a:off x="7956540" y="3335867"/>
+            <a:ext cx="2468880" cy="3200400"/>
+          </a:xfrm>
+          <a:prstGeom prst="rtTriangle">
+            <a:avLst/>
+          </a:prstGeom>
+          <a:solidFill>
+            <a:schemeClr val="accent4"/>
+          </a:solidFill>
+          <a:ln>
+            <a:noFill/>
+          </a:ln>
+        </p:spPr>
+        <p:style>
+          <a:lnRef idx="2">
+            <a:schemeClr val="accent1">
+              <a:shade val="50000"/>
+            </a:schemeClr>
+          </a:lnRef>
+          <a:fillRef idx="1">
+            <a:schemeClr val="accent1"/>
+          </a:fillRef>
+          <a:effectRef idx="0">
+            <a:schemeClr val="accent1"/>
+          </a:effectRef>
+          <a:fontRef idx="minor">
+            <a:schemeClr val="lt1"/>
+          </a:fontRef>
+        </p:style>
+        <p:txBody>
+          <a:bodyPr rtlCol="0" anchor="ctr"/>
+          <a:lstStyle/>
+          <a:p>
+            <a:pPr algn="ctr" eaLnBrk="0" fontAlgn="base" hangingPunct="0">
+              <a:spcBef>
+                <a:spcPct val="0"/>
+              </a:spcBef>
+              <a:spcAft>
+                <a:spcPct val="0"/>
+              </a:spcAft>
+            </a:pPr>
+            <a:endParaRPr lang="en-US" dirty="0">
+              <a:solidFill>
+                <a:prstClr val="white"/>
+              </a:solidFill>
+              <a:latin typeface="Garamond" panose="02020404030301010803"/>
+            </a:endParaRPr>
+          </a:p>
+        </p:txBody>
+      </p:sp>
+      <p:sp>
+        <p:nvSpPr>
+          <p:cNvPr id="11" name="Rectangle 10">
+            <a:extLst>
+              <a:ext uri="{FF2B5EF4-FFF2-40B4-BE49-F238E27FC236}">
+                <a16:creationId xmlns:a16="http://schemas.microsoft.com/office/drawing/2014/main" id="{EE04B5EB-F158-4507-90DD-BD23620C7CC9}"/>
+              </a:ext>
+              <a:ext uri="{C183D7F6-B498-43B3-948B-1728B52AA6E4}">
+                <adec:decorative xmlns:adec="http://schemas.microsoft.com/office/drawing/2017/decorative" val="1"/>
+              </a:ext>
+            </a:extLst>
+          </p:cNvPr>
+          <p:cNvSpPr>
+            <a:spLocks noGrp="1" noRot="1" noChangeAspect="1" noMove="1" noResize="1" noEditPoints="1" noAdjustHandles="1" noChangeArrowheads="1" noChangeShapeType="1" noTextEdit="1"/>
+          </p:cNvSpPr>
+          <p:nvPr>
+            <p:extLst>
+              <p:ext uri="{386F3935-93C4-4BCD-93E2-E3B085C9AB24}">
+                <p16:designElem xmlns:p16="http://schemas.microsoft.com/office/powerpoint/2015/main" val="1"/>
+              </p:ext>
+            </p:extLst>
+          </p:nvPr>
+        </p:nvSpPr>
+        <p:spPr>
+          <a:xfrm>
+            <a:off x="2005330" y="623275"/>
+            <a:ext cx="8178790" cy="5607882"/>
+          </a:xfrm>
+          <a:prstGeom prst="rect">
+            <a:avLst/>
+          </a:prstGeom>
+          <a:noFill/>
+          <a:ln w="19050">
+            <a:solidFill>
+              <a:schemeClr val="tx1">
+                <a:lumMod val="75000"/>
+                <a:lumOff val="25000"/>
+              </a:schemeClr>
+            </a:solidFill>
+          </a:ln>
+        </p:spPr>
+        <p:style>
+          <a:lnRef idx="2">
+            <a:schemeClr val="accent1">
+              <a:shade val="50000"/>
+            </a:schemeClr>
+          </a:lnRef>
+          <a:fillRef idx="1">
+            <a:schemeClr val="accent1"/>
+          </a:fillRef>
+          <a:effectRef idx="0">
+            <a:schemeClr val="accent1"/>
+          </a:effectRef>
+          <a:fontRef idx="minor">
+            <a:schemeClr val="lt1"/>
+          </a:fontRef>
+        </p:style>
+        <p:txBody>
+          <a:bodyPr rtlCol="0" anchor="ctr"/>
+          <a:lstStyle/>
+          <a:p>
+            <a:pPr algn="ctr" eaLnBrk="0" fontAlgn="base" hangingPunct="0">
+              <a:spcBef>
+                <a:spcPct val="0"/>
+              </a:spcBef>
+              <a:spcAft>
+                <a:spcPct val="0"/>
+              </a:spcAft>
+            </a:pPr>
+            <a:endParaRPr lang="en-US">
+              <a:solidFill>
+                <a:prstClr val="white"/>
+              </a:solidFill>
+              <a:latin typeface="Garamond" panose="02020404030301010803"/>
+            </a:endParaRPr>
+          </a:p>
+        </p:txBody>
+      </p:sp>
+      <p:sp>
+        <p:nvSpPr>
+          <p:cNvPr id="2" name="Title 1">
+            <a:extLst>
+              <a:ext uri="{FF2B5EF4-FFF2-40B4-BE49-F238E27FC236}">
+                <a16:creationId xmlns:a16="http://schemas.microsoft.com/office/drawing/2014/main" id="{9DE59AC3-12A8-FDCB-9131-00A43318B574}"/>
+              </a:ext>
+            </a:extLst>
+          </p:cNvPr>
+          <p:cNvSpPr>
+            <a:spLocks noGrp="1"/>
+          </p:cNvSpPr>
+          <p:nvPr>
+            <p:ph type="title"/>
+          </p:nvPr>
+        </p:nvSpPr>
+        <p:spPr>
+          <a:xfrm>
+            <a:off x="2487930" y="1008994"/>
+            <a:ext cx="6923558" cy="3542045"/>
+          </a:xfrm>
+        </p:spPr>
+        <p:txBody>
+          <a:bodyPr vert="horz" lIns="91440" tIns="45720" rIns="91440" bIns="45720" rtlCol="0" anchor="b">
+            <a:normAutofit/>
+          </a:bodyPr>
+          <a:lstStyle/>
+          <a:p>
+            <a:pPr defTabSz="914400"/>
+            <a:r>
+              <a:rPr lang="en-US" sz="10000"/>
+              <a:t>Questions</a:t>
+            </a:r>
+          </a:p>
+        </p:txBody>
+      </p:sp>
+      <p:sp>
+        <p:nvSpPr>
+          <p:cNvPr id="3" name="Date Placeholder 2">
+            <a:extLst>
+              <a:ext uri="{FF2B5EF4-FFF2-40B4-BE49-F238E27FC236}">
+                <a16:creationId xmlns:a16="http://schemas.microsoft.com/office/drawing/2014/main" id="{CBEB3DD1-3C6D-EC88-D98D-B9996992F81A}"/>
+              </a:ext>
+            </a:extLst>
+          </p:cNvPr>
+          <p:cNvSpPr>
+            <a:spLocks noGrp="1"/>
+          </p:cNvSpPr>
+          <p:nvPr>
+            <p:ph type="dt" sz="half" idx="10"/>
+          </p:nvPr>
+        </p:nvSpPr>
+        <p:spPr/>
+        <p:txBody>
+          <a:bodyPr/>
+          <a:lstStyle/>
+          <a:p>
+            <a:pPr eaLnBrk="0" fontAlgn="base" hangingPunct="0">
+              <a:spcBef>
+                <a:spcPct val="0"/>
+              </a:spcBef>
+              <a:spcAft>
+                <a:spcPct val="0"/>
+              </a:spcAft>
+            </a:pPr>
+            <a:r>
+              <a:rPr lang="en-US">
+                <a:solidFill>
+                  <a:prstClr val="black">
+                    <a:tint val="75000"/>
+                  </a:prstClr>
+                </a:solidFill>
+                <a:latin typeface="Verdana" panose="020B0604030504040204" pitchFamily="34" charset="0"/>
+                <a:ea typeface="MS PGothic" panose="020B0600070205080204" pitchFamily="34" charset="-128"/>
+              </a:rPr>
+              <a:t>Vincenzo Gulisano</a:t>
+            </a:r>
+          </a:p>
+        </p:txBody>
+      </p:sp>
+      <p:sp>
+        <p:nvSpPr>
+          <p:cNvPr id="4" name="Footer Placeholder 3">
+            <a:extLst>
+              <a:ext uri="{FF2B5EF4-FFF2-40B4-BE49-F238E27FC236}">
+                <a16:creationId xmlns:a16="http://schemas.microsoft.com/office/drawing/2014/main" id="{564DBAEA-6B43-ECC3-AD74-5067BCEEECDF}"/>
+              </a:ext>
+            </a:extLst>
+          </p:cNvPr>
+          <p:cNvSpPr>
+            <a:spLocks noGrp="1"/>
+          </p:cNvSpPr>
+          <p:nvPr>
+            <p:ph type="ftr" sz="quarter" idx="11"/>
+          </p:nvPr>
+        </p:nvSpPr>
+        <p:spPr/>
+        <p:txBody>
+          <a:bodyPr/>
+          <a:lstStyle/>
+          <a:p>
+            <a:pPr eaLnBrk="0" fontAlgn="base" hangingPunct="0">
+              <a:spcBef>
+                <a:spcPct val="0"/>
+              </a:spcBef>
+              <a:spcAft>
+                <a:spcPct val="0"/>
+              </a:spcAft>
+            </a:pPr>
+            <a:r>
+              <a:rPr lang="en-US">
+                <a:solidFill>
+                  <a:prstClr val="black">
+                    <a:tint val="75000"/>
+                  </a:prstClr>
+                </a:solidFill>
+                <a:latin typeface="Verdana" panose="020B0604030504040204" pitchFamily="34" charset="0"/>
+                <a:ea typeface="MS PGothic" panose="020B0600070205080204" pitchFamily="34" charset="-128"/>
+              </a:rPr>
+              <a:t>Operating Systems - Processes</a:t>
+            </a:r>
+          </a:p>
+        </p:txBody>
+      </p:sp>
+      <p:sp>
+        <p:nvSpPr>
+          <p:cNvPr id="5" name="Slide Number Placeholder 4">
+            <a:extLst>
+              <a:ext uri="{FF2B5EF4-FFF2-40B4-BE49-F238E27FC236}">
+                <a16:creationId xmlns:a16="http://schemas.microsoft.com/office/drawing/2014/main" id="{6A6197B8-E5A9-12D1-240C-0B03B2DD07E2}"/>
+              </a:ext>
+            </a:extLst>
+          </p:cNvPr>
+          <p:cNvSpPr>
+            <a:spLocks noGrp="1"/>
+          </p:cNvSpPr>
+          <p:nvPr>
+            <p:ph type="sldNum" sz="quarter" idx="12"/>
+          </p:nvPr>
+        </p:nvSpPr>
+        <p:spPr/>
+        <p:txBody>
+          <a:bodyPr/>
+          <a:lstStyle/>
+          <a:p>
+            <a:pPr eaLnBrk="0" fontAlgn="base" hangingPunct="0">
+              <a:spcBef>
+                <a:spcPct val="0"/>
+              </a:spcBef>
+              <a:spcAft>
+                <a:spcPct val="0"/>
+              </a:spcAft>
+            </a:pPr>
+            <a:fld id="{95AAEEEC-DCEC-4178-AB14-E7254A15A296}" type="slidenum">
+              <a:rPr lang="en-US">
+                <a:solidFill>
+                  <a:prstClr val="black">
+                    <a:tint val="75000"/>
+                  </a:prstClr>
+                </a:solidFill>
+                <a:latin typeface="Verdana" panose="020B0604030504040204" pitchFamily="34" charset="0"/>
+                <a:ea typeface="MS PGothic" panose="020B0600070205080204" pitchFamily="34" charset="-128"/>
+              </a:rPr>
+              <a:pPr eaLnBrk="0" fontAlgn="base" hangingPunct="0">
+                <a:spcBef>
+                  <a:spcPct val="0"/>
+                </a:spcBef>
+                <a:spcAft>
+                  <a:spcPct val="0"/>
+                </a:spcAft>
+              </a:pPr>
+              <a:t>44</a:t>
+            </a:fld>
+            <a:endParaRPr lang="en-US">
+              <a:solidFill>
+                <a:prstClr val="black">
+                  <a:tint val="75000"/>
+                </a:prstClr>
+              </a:solidFill>
+              <a:latin typeface="Verdana" panose="020B0604030504040204" pitchFamily="34" charset="0"/>
+              <a:ea typeface="MS PGothic" panose="020B0600070205080204" pitchFamily="34" charset="-128"/>
+            </a:endParaRPr>
+          </a:p>
+        </p:txBody>
+      </p:sp>
+    </p:spTree>
+    <p:extLst>
+      <p:ext uri="{BB962C8B-B14F-4D97-AF65-F5344CB8AC3E}">
+        <p14:creationId xmlns:p14="http://schemas.microsoft.com/office/powerpoint/2010/main" val="4045996436"/>
+      </p:ext>
+    </p:extLst>
+  </p:cSld>
+  <p:clrMapOvr>
+    <a:masterClrMapping/>
+  </p:clrMapOvr>
+</p:sld>
+</file>
+
+<file path=ppt/slides/slide45.xml><?xml version="1.0" encoding="utf-8"?>
+<p:sld xmlns:a="http://schemas.openxmlformats.org/drawingml/2006/main" xmlns:r="http://schemas.openxmlformats.org/officeDocument/2006/relationships" xmlns:p="http://schemas.openxmlformats.org/presentationml/2006/main">
+  <p:cSld>
+    <p:spTree>
+      <p:nvGrpSpPr>
+        <p:cNvPr id="1" name=""/>
+        <p:cNvGrpSpPr/>
+        <p:nvPr/>
+      </p:nvGrpSpPr>
+      <p:grpSpPr>
+        <a:xfrm>
+          <a:off x="0" y="0"/>
+          <a:ext cx="0" cy="0"/>
+          <a:chOff x="0" y="0"/>
+          <a:chExt cx="0" cy="0"/>
+        </a:xfrm>
+      </p:grpSpPr>
+      <p:sp>
+        <p:nvSpPr>
+          <p:cNvPr id="2" name="Title 1">
+            <a:extLst>
+              <a:ext uri="{FF2B5EF4-FFF2-40B4-BE49-F238E27FC236}">
+                <a16:creationId xmlns:a16="http://schemas.microsoft.com/office/drawing/2014/main" id="{4B32D54B-AB4D-2C1E-408B-79024E6D4BCF}"/>
+              </a:ext>
+            </a:extLst>
+          </p:cNvPr>
+          <p:cNvSpPr>
+            <a:spLocks noGrp="1"/>
+          </p:cNvSpPr>
+          <p:nvPr>
+            <p:ph type="title"/>
+          </p:nvPr>
+        </p:nvSpPr>
+        <p:spPr/>
+        <p:txBody>
+          <a:bodyPr/>
+          <a:lstStyle/>
+          <a:p>
+            <a:r>
+              <a:rPr lang="en-US" dirty="0"/>
+              <a:t>Question</a:t>
+            </a:r>
+          </a:p>
+        </p:txBody>
+      </p:sp>
+      <p:sp>
+        <p:nvSpPr>
+          <p:cNvPr id="3" name="Content Placeholder 2">
+            <a:extLst>
+              <a:ext uri="{FF2B5EF4-FFF2-40B4-BE49-F238E27FC236}">
+                <a16:creationId xmlns:a16="http://schemas.microsoft.com/office/drawing/2014/main" id="{92BBEEEA-0D66-BC0A-7051-F11FD6ECDBDB}"/>
+              </a:ext>
+            </a:extLst>
+          </p:cNvPr>
+          <p:cNvSpPr>
+            <a:spLocks noGrp="1"/>
+          </p:cNvSpPr>
+          <p:nvPr>
+            <p:ph idx="1"/>
+          </p:nvPr>
+        </p:nvSpPr>
+        <p:spPr/>
+        <p:txBody>
+          <a:bodyPr/>
+          <a:lstStyle/>
+          <a:p>
+            <a:r>
+              <a:rPr lang="en-US" dirty="0"/>
+              <a:t>Consider the following semaphore setup:</a:t>
+            </a:r>
+          </a:p>
+          <a:p>
+            <a:pPr lvl="1"/>
+            <a:r>
+              <a:rPr lang="en-US" dirty="0" err="1"/>
+              <a:t>semA</a:t>
+            </a:r>
+            <a:r>
+              <a:rPr lang="en-US" dirty="0"/>
+              <a:t> = 1;</a:t>
+            </a:r>
+          </a:p>
+          <a:p>
+            <a:pPr lvl="1"/>
+            <a:r>
+              <a:rPr lang="en-US" dirty="0" err="1"/>
+              <a:t>semB</a:t>
+            </a:r>
+            <a:r>
+              <a:rPr lang="en-US" dirty="0"/>
+              <a:t> = 0;</a:t>
+            </a:r>
+          </a:p>
+          <a:p>
+            <a:pPr lvl="1"/>
+            <a:r>
+              <a:rPr lang="en-US" dirty="0" err="1"/>
+              <a:t>semC</a:t>
+            </a:r>
+            <a:r>
+              <a:rPr lang="en-US" dirty="0"/>
+              <a:t> = 0;</a:t>
+            </a:r>
+          </a:p>
+          <a:p>
+            <a:pPr lvl="1"/>
+            <a:endParaRPr lang="en-US" dirty="0"/>
+          </a:p>
+          <a:p>
+            <a:pPr lvl="1"/>
+            <a:endParaRPr lang="en-US" dirty="0"/>
+          </a:p>
+          <a:p>
+            <a:pPr lvl="1"/>
+            <a:endParaRPr lang="en-US" dirty="0"/>
+          </a:p>
+          <a:p>
+            <a:pPr lvl="1"/>
+            <a:endParaRPr lang="en-US" dirty="0"/>
+          </a:p>
+          <a:p>
+            <a:r>
+              <a:rPr lang="en-US" dirty="0"/>
+              <a:t>Is </a:t>
+            </a:r>
+            <a:r>
+              <a:rPr lang="en-US" dirty="0" err="1"/>
+              <a:t>opY</a:t>
+            </a:r>
+            <a:r>
+              <a:rPr lang="en-US" dirty="0"/>
+              <a:t> → </a:t>
+            </a:r>
+            <a:r>
+              <a:rPr lang="en-US" dirty="0" err="1"/>
+              <a:t>opX</a:t>
+            </a:r>
+            <a:r>
+              <a:rPr lang="en-US" dirty="0"/>
+              <a:t> → </a:t>
+            </a:r>
+            <a:r>
+              <a:rPr lang="en-US" dirty="0" err="1"/>
+              <a:t>opZ</a:t>
+            </a:r>
+            <a:r>
+              <a:rPr lang="en-US" dirty="0"/>
+              <a:t> valid?</a:t>
+            </a:r>
+          </a:p>
+          <a:p>
+            <a:pPr lvl="1"/>
+            <a:endParaRPr lang="en-US" dirty="0"/>
+          </a:p>
+        </p:txBody>
+      </p:sp>
+      <p:sp>
+        <p:nvSpPr>
+          <p:cNvPr id="4" name="Slide Number Placeholder 3">
+            <a:extLst>
+              <a:ext uri="{FF2B5EF4-FFF2-40B4-BE49-F238E27FC236}">
+                <a16:creationId xmlns:a16="http://schemas.microsoft.com/office/drawing/2014/main" id="{79814C5F-C448-80CD-ACA2-DC4CD3D121F3}"/>
+              </a:ext>
+            </a:extLst>
+          </p:cNvPr>
+          <p:cNvSpPr>
+            <a:spLocks noGrp="1"/>
+          </p:cNvSpPr>
+          <p:nvPr>
+            <p:ph type="sldNum" sz="quarter" idx="12"/>
+          </p:nvPr>
+        </p:nvSpPr>
+        <p:spPr/>
+        <p:txBody>
+          <a:bodyPr/>
+          <a:lstStyle/>
+          <a:p>
+            <a:fld id="{67FCC1A6-2294-BF46-A2F7-E6BDB92DF1BF}" type="slidenum">
+              <a:rPr lang="en-US" smtClean="0"/>
+              <a:t>45</a:t>
+            </a:fld>
+            <a:endParaRPr lang="en-US"/>
+          </a:p>
+        </p:txBody>
+      </p:sp>
+      <p:sp>
+        <p:nvSpPr>
+          <p:cNvPr id="6" name="TextBox 5">
+            <a:extLst>
+              <a:ext uri="{FF2B5EF4-FFF2-40B4-BE49-F238E27FC236}">
+                <a16:creationId xmlns:a16="http://schemas.microsoft.com/office/drawing/2014/main" id="{C9CDFBBC-A9FC-9E9E-BB32-5C02D267E20D}"/>
+              </a:ext>
+            </a:extLst>
+          </p:cNvPr>
+          <p:cNvSpPr txBox="1"/>
+          <p:nvPr/>
+        </p:nvSpPr>
+        <p:spPr>
+          <a:xfrm>
+            <a:off x="4366647" y="3064199"/>
+            <a:ext cx="1584702" cy="1477328"/>
+          </a:xfrm>
+          <a:prstGeom prst="rect">
+            <a:avLst/>
+          </a:prstGeom>
+          <a:noFill/>
+        </p:spPr>
+        <p:txBody>
+          <a:bodyPr wrap="square">
+            <a:spAutoFit/>
+          </a:bodyPr>
+          <a:lstStyle/>
+          <a:p>
+            <a:r>
+              <a:rPr lang="en-US" dirty="0"/>
+              <a:t>THREAD X</a:t>
+            </a:r>
+            <a:br>
+              <a:rPr lang="en-US" dirty="0"/>
+            </a:br>
+            <a:endParaRPr lang="en-US" dirty="0"/>
+          </a:p>
+          <a:p>
+            <a:r>
+              <a:rPr lang="en-US" dirty="0"/>
+              <a:t>wait(</a:t>
+            </a:r>
+            <a:r>
+              <a:rPr lang="en-US" dirty="0" err="1"/>
+              <a:t>semA</a:t>
+            </a:r>
+            <a:r>
+              <a:rPr lang="en-US" dirty="0"/>
+              <a:t>);</a:t>
+            </a:r>
+          </a:p>
+          <a:p>
+            <a:r>
+              <a:rPr lang="en-US" dirty="0" err="1"/>
+              <a:t>opX</a:t>
+            </a:r>
+            <a:r>
+              <a:rPr lang="en-US" dirty="0"/>
+              <a:t>;</a:t>
+            </a:r>
+          </a:p>
+          <a:p>
+            <a:r>
+              <a:rPr lang="en-US" dirty="0"/>
+              <a:t>signal(</a:t>
+            </a:r>
+            <a:r>
+              <a:rPr lang="en-US" dirty="0" err="1"/>
+              <a:t>semB</a:t>
+            </a:r>
+            <a:r>
+              <a:rPr lang="en-US" dirty="0"/>
+              <a:t>);</a:t>
+            </a:r>
+          </a:p>
+        </p:txBody>
+      </p:sp>
+      <p:sp>
+        <p:nvSpPr>
+          <p:cNvPr id="8" name="TextBox 7">
+            <a:extLst>
+              <a:ext uri="{FF2B5EF4-FFF2-40B4-BE49-F238E27FC236}">
+                <a16:creationId xmlns:a16="http://schemas.microsoft.com/office/drawing/2014/main" id="{11FCA536-4919-2995-C128-91B5627DE596}"/>
+              </a:ext>
+            </a:extLst>
+          </p:cNvPr>
+          <p:cNvSpPr txBox="1"/>
+          <p:nvPr/>
+        </p:nvSpPr>
+        <p:spPr>
+          <a:xfrm>
+            <a:off x="6096000" y="3064199"/>
+            <a:ext cx="3046708" cy="1477328"/>
+          </a:xfrm>
+          <a:prstGeom prst="rect">
+            <a:avLst/>
+          </a:prstGeom>
+          <a:noFill/>
+        </p:spPr>
+        <p:txBody>
+          <a:bodyPr wrap="square">
+            <a:spAutoFit/>
+          </a:bodyPr>
+          <a:lstStyle/>
+          <a:p>
+            <a:r>
+              <a:rPr lang="en-US" dirty="0"/>
+              <a:t>THREAD Y</a:t>
+            </a:r>
+          </a:p>
+          <a:p>
+            <a:endParaRPr lang="en-US" dirty="0"/>
+          </a:p>
+          <a:p>
+            <a:r>
+              <a:rPr lang="en-US" dirty="0"/>
+              <a:t>wait(</a:t>
+            </a:r>
+            <a:r>
+              <a:rPr lang="en-US" dirty="0" err="1"/>
+              <a:t>semB</a:t>
+            </a:r>
+            <a:r>
+              <a:rPr lang="en-US" dirty="0"/>
+              <a:t>);</a:t>
+            </a:r>
+          </a:p>
+          <a:p>
+            <a:r>
+              <a:rPr lang="en-US" dirty="0" err="1"/>
+              <a:t>opY</a:t>
+            </a:r>
+            <a:r>
+              <a:rPr lang="en-US" dirty="0"/>
+              <a:t>;</a:t>
+            </a:r>
+          </a:p>
+          <a:p>
+            <a:r>
+              <a:rPr lang="en-US" dirty="0"/>
+              <a:t>signal(</a:t>
+            </a:r>
+            <a:r>
+              <a:rPr lang="en-US" dirty="0" err="1"/>
+              <a:t>semC</a:t>
+            </a:r>
+            <a:r>
+              <a:rPr lang="en-US" dirty="0"/>
+              <a:t>);</a:t>
+            </a:r>
+          </a:p>
+        </p:txBody>
+      </p:sp>
+      <p:sp>
+        <p:nvSpPr>
+          <p:cNvPr id="10" name="TextBox 9">
+            <a:extLst>
+              <a:ext uri="{FF2B5EF4-FFF2-40B4-BE49-F238E27FC236}">
+                <a16:creationId xmlns:a16="http://schemas.microsoft.com/office/drawing/2014/main" id="{27AA2EB2-ADC6-DFDE-A86D-DA018E32B47A}"/>
+              </a:ext>
+            </a:extLst>
+          </p:cNvPr>
+          <p:cNvSpPr txBox="1"/>
+          <p:nvPr/>
+        </p:nvSpPr>
+        <p:spPr>
+          <a:xfrm>
+            <a:off x="8045557" y="3064199"/>
+            <a:ext cx="2483603" cy="1477328"/>
+          </a:xfrm>
+          <a:prstGeom prst="rect">
+            <a:avLst/>
+          </a:prstGeom>
+          <a:noFill/>
+        </p:spPr>
+        <p:txBody>
+          <a:bodyPr wrap="square">
+            <a:spAutoFit/>
+          </a:bodyPr>
+          <a:lstStyle/>
+          <a:p>
+            <a:r>
+              <a:rPr lang="en-US" dirty="0"/>
+              <a:t>THREAD Z</a:t>
+            </a:r>
+          </a:p>
+          <a:p>
+            <a:endParaRPr lang="en-US" dirty="0"/>
+          </a:p>
+          <a:p>
+            <a:r>
+              <a:rPr lang="en-US" dirty="0"/>
+              <a:t>wait(</a:t>
+            </a:r>
+            <a:r>
+              <a:rPr lang="en-US" dirty="0" err="1"/>
+              <a:t>semC</a:t>
+            </a:r>
+            <a:r>
+              <a:rPr lang="en-US" dirty="0"/>
+              <a:t>);</a:t>
+            </a:r>
+          </a:p>
+          <a:p>
+            <a:r>
+              <a:rPr lang="en-US" dirty="0" err="1"/>
+              <a:t>opZ</a:t>
+            </a:r>
+            <a:r>
+              <a:rPr lang="en-US" dirty="0"/>
+              <a:t>;</a:t>
+            </a:r>
+          </a:p>
+          <a:p>
+            <a:r>
+              <a:rPr lang="en-US" dirty="0"/>
+              <a:t>signal(</a:t>
+            </a:r>
+            <a:r>
+              <a:rPr lang="en-US" dirty="0" err="1"/>
+              <a:t>semA</a:t>
+            </a:r>
+            <a:r>
+              <a:rPr lang="en-US" dirty="0"/>
+              <a:t>);</a:t>
+            </a:r>
+          </a:p>
+        </p:txBody>
+      </p:sp>
+      <p:sp>
+        <p:nvSpPr>
+          <p:cNvPr id="5" name="Date Placeholder 4">
+            <a:extLst>
+              <a:ext uri="{FF2B5EF4-FFF2-40B4-BE49-F238E27FC236}">
+                <a16:creationId xmlns:a16="http://schemas.microsoft.com/office/drawing/2014/main" id="{60686EA4-3EF2-9CCB-9B69-DE20621C290E}"/>
+              </a:ext>
+            </a:extLst>
+          </p:cNvPr>
+          <p:cNvSpPr>
+            <a:spLocks noGrp="1"/>
+          </p:cNvSpPr>
+          <p:nvPr>
+            <p:ph type="dt" sz="half" idx="10"/>
+          </p:nvPr>
+        </p:nvSpPr>
+        <p:spPr/>
+        <p:txBody>
+          <a:bodyPr/>
+          <a:lstStyle/>
+          <a:p>
+            <a:r>
+              <a:rPr lang="en-US"/>
+              <a:t>Vincenzo Gulisano</a:t>
+            </a:r>
+          </a:p>
+        </p:txBody>
+      </p:sp>
+    </p:spTree>
+    <p:extLst>
+      <p:ext uri="{BB962C8B-B14F-4D97-AF65-F5344CB8AC3E}">
+        <p14:creationId xmlns:p14="http://schemas.microsoft.com/office/powerpoint/2010/main" val="672151176"/>
+      </p:ext>
+    </p:extLst>
+  </p:cSld>
+  <p:clrMapOvr>
+    <a:masterClrMapping/>
+  </p:clrMapOvr>
+</p:sld>
+</file>
+
+<file path=ppt/slides/slide46.xml><?xml version="1.0" encoding="utf-8"?>
+<p:sld xmlns:a="http://schemas.openxmlformats.org/drawingml/2006/main" xmlns:r="http://schemas.openxmlformats.org/officeDocument/2006/relationships" xmlns:p="http://schemas.openxmlformats.org/presentationml/2006/main">
+  <p:cSld>
+    <p:spTree>
+      <p:nvGrpSpPr>
+        <p:cNvPr id="1" name="">
+          <a:extLst>
+            <a:ext uri="{FF2B5EF4-FFF2-40B4-BE49-F238E27FC236}">
+              <a16:creationId xmlns:a16="http://schemas.microsoft.com/office/drawing/2014/main" id="{89D213B1-ABF0-2E0B-4042-3013B9DEBBCE}"/>
+            </a:ext>
+          </a:extLst>
+        </p:cNvPr>
+        <p:cNvGrpSpPr/>
+        <p:nvPr/>
+      </p:nvGrpSpPr>
+      <p:grpSpPr>
+        <a:xfrm>
+          <a:off x="0" y="0"/>
+          <a:ext cx="0" cy="0"/>
+          <a:chOff x="0" y="0"/>
+          <a:chExt cx="0" cy="0"/>
+        </a:xfrm>
+      </p:grpSpPr>
+      <p:sp>
+        <p:nvSpPr>
+          <p:cNvPr id="2" name="Title 1">
+            <a:extLst>
+              <a:ext uri="{FF2B5EF4-FFF2-40B4-BE49-F238E27FC236}">
+                <a16:creationId xmlns:a16="http://schemas.microsoft.com/office/drawing/2014/main" id="{FAF3AB8A-C7F9-AA12-E5B9-92816D1A8423}"/>
+              </a:ext>
+            </a:extLst>
+          </p:cNvPr>
+          <p:cNvSpPr>
+            <a:spLocks noGrp="1"/>
+          </p:cNvSpPr>
+          <p:nvPr>
+            <p:ph type="title"/>
+          </p:nvPr>
+        </p:nvSpPr>
+        <p:spPr/>
+        <p:txBody>
+          <a:bodyPr/>
+          <a:lstStyle/>
+          <a:p>
+            <a:r>
+              <a:rPr lang="en-US" dirty="0"/>
+              <a:t>Question</a:t>
+            </a:r>
+          </a:p>
+        </p:txBody>
+      </p:sp>
+      <p:sp>
+        <p:nvSpPr>
+          <p:cNvPr id="3" name="Content Placeholder 2">
+            <a:extLst>
+              <a:ext uri="{FF2B5EF4-FFF2-40B4-BE49-F238E27FC236}">
+                <a16:creationId xmlns:a16="http://schemas.microsoft.com/office/drawing/2014/main" id="{0A4E92D1-AAFA-451F-85FB-B8745F330658}"/>
+              </a:ext>
+            </a:extLst>
+          </p:cNvPr>
+          <p:cNvSpPr>
+            <a:spLocks noGrp="1"/>
+          </p:cNvSpPr>
+          <p:nvPr>
+            <p:ph idx="1"/>
+          </p:nvPr>
+        </p:nvSpPr>
+        <p:spPr/>
+        <p:txBody>
+          <a:bodyPr/>
+          <a:lstStyle/>
+          <a:p>
+            <a:r>
+              <a:rPr lang="en-US" dirty="0"/>
+              <a:t>Consider the following semaphore setup:</a:t>
+            </a:r>
+          </a:p>
+          <a:p>
+            <a:pPr lvl="1"/>
+            <a:r>
+              <a:rPr lang="en-US" dirty="0" err="1"/>
+              <a:t>semA</a:t>
+            </a:r>
+            <a:r>
+              <a:rPr lang="en-US" dirty="0"/>
+              <a:t> = 1;</a:t>
+            </a:r>
+          </a:p>
+          <a:p>
+            <a:pPr lvl="1"/>
+            <a:r>
+              <a:rPr lang="en-US" dirty="0" err="1"/>
+              <a:t>semB</a:t>
+            </a:r>
+            <a:r>
+              <a:rPr lang="en-US" dirty="0"/>
+              <a:t> = 0;</a:t>
+            </a:r>
+          </a:p>
+          <a:p>
+            <a:pPr lvl="1"/>
+            <a:r>
+              <a:rPr lang="en-US" dirty="0" err="1"/>
+              <a:t>semC</a:t>
+            </a:r>
+            <a:r>
+              <a:rPr lang="en-US" dirty="0"/>
+              <a:t> = 0;</a:t>
+            </a:r>
+          </a:p>
+          <a:p>
+            <a:pPr lvl="1"/>
+            <a:endParaRPr lang="en-US" dirty="0"/>
+          </a:p>
+          <a:p>
+            <a:pPr lvl="1"/>
+            <a:endParaRPr lang="en-US" dirty="0"/>
+          </a:p>
+          <a:p>
+            <a:pPr lvl="1"/>
+            <a:endParaRPr lang="en-US" dirty="0"/>
+          </a:p>
+          <a:p>
+            <a:pPr lvl="1"/>
+            <a:endParaRPr lang="en-US" dirty="0"/>
+          </a:p>
+          <a:p>
+            <a:r>
+              <a:rPr lang="en-US" dirty="0"/>
+              <a:t>Is sequence is valid?</a:t>
+            </a:r>
+          </a:p>
+          <a:p>
+            <a:pPr lvl="1"/>
+            <a:endParaRPr lang="en-US" dirty="0"/>
+          </a:p>
+        </p:txBody>
+      </p:sp>
+      <p:sp>
+        <p:nvSpPr>
+          <p:cNvPr id="4" name="Slide Number Placeholder 3">
+            <a:extLst>
+              <a:ext uri="{FF2B5EF4-FFF2-40B4-BE49-F238E27FC236}">
+                <a16:creationId xmlns:a16="http://schemas.microsoft.com/office/drawing/2014/main" id="{579ABCBF-3605-9640-3FA9-AF9FB54CB82C}"/>
+              </a:ext>
+            </a:extLst>
+          </p:cNvPr>
+          <p:cNvSpPr>
+            <a:spLocks noGrp="1"/>
+          </p:cNvSpPr>
+          <p:nvPr>
+            <p:ph type="sldNum" sz="quarter" idx="12"/>
+          </p:nvPr>
+        </p:nvSpPr>
+        <p:spPr/>
+        <p:txBody>
+          <a:bodyPr/>
+          <a:lstStyle/>
+          <a:p>
+            <a:fld id="{67FCC1A6-2294-BF46-A2F7-E6BDB92DF1BF}" type="slidenum">
+              <a:rPr lang="en-US" smtClean="0"/>
+              <a:t>46</a:t>
+            </a:fld>
+            <a:endParaRPr lang="en-US"/>
+          </a:p>
+        </p:txBody>
+      </p:sp>
+      <p:sp>
+        <p:nvSpPr>
+          <p:cNvPr id="6" name="TextBox 5">
+            <a:extLst>
+              <a:ext uri="{FF2B5EF4-FFF2-40B4-BE49-F238E27FC236}">
+                <a16:creationId xmlns:a16="http://schemas.microsoft.com/office/drawing/2014/main" id="{53BD2C1C-1390-E365-307C-12071A8A807E}"/>
+              </a:ext>
+            </a:extLst>
+          </p:cNvPr>
+          <p:cNvSpPr txBox="1"/>
+          <p:nvPr/>
+        </p:nvSpPr>
+        <p:spPr>
+          <a:xfrm>
+            <a:off x="4366647" y="3064199"/>
+            <a:ext cx="1584702" cy="1477328"/>
+          </a:xfrm>
+          <a:prstGeom prst="rect">
+            <a:avLst/>
+          </a:prstGeom>
+          <a:noFill/>
+        </p:spPr>
+        <p:txBody>
+          <a:bodyPr wrap="square">
+            <a:spAutoFit/>
+          </a:bodyPr>
+          <a:lstStyle/>
+          <a:p>
+            <a:r>
+              <a:rPr lang="en-US" dirty="0"/>
+              <a:t>THREAD X</a:t>
+            </a:r>
+            <a:br>
+              <a:rPr lang="en-US" dirty="0"/>
+            </a:br>
+            <a:endParaRPr lang="en-US" dirty="0"/>
+          </a:p>
+          <a:p>
+            <a:r>
+              <a:rPr lang="en-US" dirty="0"/>
+              <a:t>wait(</a:t>
+            </a:r>
+            <a:r>
+              <a:rPr lang="en-US" dirty="0" err="1"/>
+              <a:t>semA</a:t>
+            </a:r>
+            <a:r>
+              <a:rPr lang="en-US" dirty="0"/>
+              <a:t>);</a:t>
+            </a:r>
+          </a:p>
+          <a:p>
+            <a:r>
+              <a:rPr lang="en-US" dirty="0" err="1"/>
+              <a:t>opX</a:t>
+            </a:r>
+            <a:r>
+              <a:rPr lang="en-US" dirty="0"/>
+              <a:t>;</a:t>
+            </a:r>
+          </a:p>
+          <a:p>
+            <a:r>
+              <a:rPr lang="en-US" dirty="0"/>
+              <a:t>signal(</a:t>
+            </a:r>
+            <a:r>
+              <a:rPr lang="en-US" dirty="0" err="1"/>
+              <a:t>semB</a:t>
+            </a:r>
+            <a:r>
+              <a:rPr lang="en-US" dirty="0"/>
+              <a:t>);</a:t>
+            </a:r>
+          </a:p>
+        </p:txBody>
+      </p:sp>
+      <p:sp>
+        <p:nvSpPr>
+          <p:cNvPr id="8" name="TextBox 7">
+            <a:extLst>
+              <a:ext uri="{FF2B5EF4-FFF2-40B4-BE49-F238E27FC236}">
+                <a16:creationId xmlns:a16="http://schemas.microsoft.com/office/drawing/2014/main" id="{EE94DE3D-F51D-5B04-E56E-3605BCE8D1CC}"/>
+              </a:ext>
+            </a:extLst>
+          </p:cNvPr>
+          <p:cNvSpPr txBox="1"/>
+          <p:nvPr/>
+        </p:nvSpPr>
+        <p:spPr>
+          <a:xfrm>
+            <a:off x="6096000" y="3064199"/>
+            <a:ext cx="3046708" cy="1477328"/>
+          </a:xfrm>
+          <a:prstGeom prst="rect">
+            <a:avLst/>
+          </a:prstGeom>
+          <a:noFill/>
+        </p:spPr>
+        <p:txBody>
+          <a:bodyPr wrap="square">
+            <a:spAutoFit/>
+          </a:bodyPr>
+          <a:lstStyle/>
+          <a:p>
+            <a:r>
+              <a:rPr lang="en-US" dirty="0"/>
+              <a:t>THREAD Y</a:t>
+            </a:r>
+          </a:p>
+          <a:p>
+            <a:endParaRPr lang="en-US" dirty="0"/>
+          </a:p>
+          <a:p>
+            <a:r>
+              <a:rPr lang="en-US" dirty="0"/>
+              <a:t>wait(</a:t>
+            </a:r>
+            <a:r>
+              <a:rPr lang="en-US" dirty="0" err="1"/>
+              <a:t>semB</a:t>
+            </a:r>
+            <a:r>
+              <a:rPr lang="en-US" dirty="0"/>
+              <a:t>);</a:t>
+            </a:r>
+          </a:p>
+          <a:p>
+            <a:r>
+              <a:rPr lang="en-US" dirty="0" err="1"/>
+              <a:t>opY</a:t>
+            </a:r>
+            <a:r>
+              <a:rPr lang="en-US" dirty="0"/>
+              <a:t>;</a:t>
+            </a:r>
+          </a:p>
+          <a:p>
+            <a:r>
+              <a:rPr lang="en-US" dirty="0"/>
+              <a:t>signal(</a:t>
+            </a:r>
+            <a:r>
+              <a:rPr lang="en-US" dirty="0" err="1"/>
+              <a:t>semC</a:t>
+            </a:r>
+            <a:r>
+              <a:rPr lang="en-US" dirty="0"/>
+              <a:t>);</a:t>
+            </a:r>
+          </a:p>
+        </p:txBody>
+      </p:sp>
+      <p:sp>
+        <p:nvSpPr>
+          <p:cNvPr id="10" name="TextBox 9">
+            <a:extLst>
+              <a:ext uri="{FF2B5EF4-FFF2-40B4-BE49-F238E27FC236}">
+                <a16:creationId xmlns:a16="http://schemas.microsoft.com/office/drawing/2014/main" id="{E424BF86-471D-8962-783B-795BA85D345F}"/>
+              </a:ext>
+            </a:extLst>
+          </p:cNvPr>
+          <p:cNvSpPr txBox="1"/>
+          <p:nvPr/>
+        </p:nvSpPr>
+        <p:spPr>
+          <a:xfrm>
+            <a:off x="8045557" y="3064199"/>
+            <a:ext cx="2483603" cy="1477328"/>
+          </a:xfrm>
+          <a:prstGeom prst="rect">
+            <a:avLst/>
+          </a:prstGeom>
+          <a:noFill/>
+        </p:spPr>
+        <p:txBody>
+          <a:bodyPr wrap="square">
+            <a:spAutoFit/>
+          </a:bodyPr>
+          <a:lstStyle/>
+          <a:p>
+            <a:r>
+              <a:rPr lang="en-US" dirty="0"/>
+              <a:t>THREAD Z</a:t>
+            </a:r>
+          </a:p>
+          <a:p>
+            <a:endParaRPr lang="en-US" dirty="0"/>
+          </a:p>
+          <a:p>
+            <a:r>
+              <a:rPr lang="en-US" dirty="0"/>
+              <a:t>wait(</a:t>
+            </a:r>
+            <a:r>
+              <a:rPr lang="en-US" dirty="0" err="1"/>
+              <a:t>semC</a:t>
+            </a:r>
+            <a:r>
+              <a:rPr lang="en-US" dirty="0"/>
+              <a:t>);</a:t>
+            </a:r>
+          </a:p>
+          <a:p>
+            <a:r>
+              <a:rPr lang="en-US" dirty="0" err="1"/>
+              <a:t>opZ</a:t>
+            </a:r>
+            <a:r>
+              <a:rPr lang="en-US" dirty="0"/>
+              <a:t>;</a:t>
+            </a:r>
+          </a:p>
+          <a:p>
+            <a:r>
+              <a:rPr lang="en-US" dirty="0"/>
+              <a:t>signal(</a:t>
+            </a:r>
+            <a:r>
+              <a:rPr lang="en-US" dirty="0" err="1"/>
+              <a:t>semA</a:t>
+            </a:r>
+            <a:r>
+              <a:rPr lang="en-US" dirty="0"/>
+              <a:t>);</a:t>
+            </a:r>
+          </a:p>
+        </p:txBody>
+      </p:sp>
+      <p:sp>
+        <p:nvSpPr>
+          <p:cNvPr id="5" name="Date Placeholder 4">
+            <a:extLst>
+              <a:ext uri="{FF2B5EF4-FFF2-40B4-BE49-F238E27FC236}">
+                <a16:creationId xmlns:a16="http://schemas.microsoft.com/office/drawing/2014/main" id="{6BC5B370-1790-62C9-8849-5F400FB524DF}"/>
+              </a:ext>
+            </a:extLst>
+          </p:cNvPr>
+          <p:cNvSpPr>
+            <a:spLocks noGrp="1"/>
+          </p:cNvSpPr>
+          <p:nvPr>
+            <p:ph type="dt" sz="half" idx="10"/>
+          </p:nvPr>
+        </p:nvSpPr>
+        <p:spPr/>
+        <p:txBody>
+          <a:bodyPr/>
+          <a:lstStyle/>
+          <a:p>
+            <a:r>
+              <a:rPr lang="en-US"/>
+              <a:t>Vincenzo Gulisano</a:t>
+            </a:r>
+          </a:p>
+        </p:txBody>
+      </p:sp>
+    </p:spTree>
+    <p:extLst>
+      <p:ext uri="{BB962C8B-B14F-4D97-AF65-F5344CB8AC3E}">
+        <p14:creationId xmlns:p14="http://schemas.microsoft.com/office/powerpoint/2010/main" val="2325556078"/>
+      </p:ext>
+    </p:extLst>
+  </p:cSld>
+  <p:clrMapOvr>
+    <a:masterClrMapping/>
+  </p:clrMapOvr>
+</p:sld>
+</file>
+
+<file path=ppt/slides/slide47.xml><?xml version="1.0" encoding="utf-8"?>
+<p:sld xmlns:a="http://schemas.openxmlformats.org/drawingml/2006/main" xmlns:r="http://schemas.openxmlformats.org/officeDocument/2006/relationships" xmlns:p="http://schemas.openxmlformats.org/presentationml/2006/main">
+  <p:cSld>
+    <p:spTree>
+      <p:nvGrpSpPr>
+        <p:cNvPr id="1" name="">
+          <a:extLst>
+            <a:ext uri="{FF2B5EF4-FFF2-40B4-BE49-F238E27FC236}">
+              <a16:creationId xmlns:a16="http://schemas.microsoft.com/office/drawing/2014/main" id="{31967116-A431-8163-2A2B-517716BE1097}"/>
+            </a:ext>
+          </a:extLst>
+        </p:cNvPr>
+        <p:cNvGrpSpPr/>
+        <p:nvPr/>
+      </p:nvGrpSpPr>
+      <p:grpSpPr>
+        <a:xfrm>
+          <a:off x="0" y="0"/>
+          <a:ext cx="0" cy="0"/>
+          <a:chOff x="0" y="0"/>
+          <a:chExt cx="0" cy="0"/>
+        </a:xfrm>
+      </p:grpSpPr>
+      <p:sp>
+        <p:nvSpPr>
+          <p:cNvPr id="2" name="Title 1">
+            <a:extLst>
+              <a:ext uri="{FF2B5EF4-FFF2-40B4-BE49-F238E27FC236}">
+                <a16:creationId xmlns:a16="http://schemas.microsoft.com/office/drawing/2014/main" id="{817425AE-7E58-4942-D74F-0DF8C372A01F}"/>
+              </a:ext>
+            </a:extLst>
+          </p:cNvPr>
+          <p:cNvSpPr>
+            <a:spLocks noGrp="1"/>
+          </p:cNvSpPr>
+          <p:nvPr>
+            <p:ph type="title"/>
+          </p:nvPr>
+        </p:nvSpPr>
+        <p:spPr/>
+        <p:txBody>
+          <a:bodyPr/>
+          <a:lstStyle/>
+          <a:p>
+            <a:r>
+              <a:rPr lang="en-US" dirty="0"/>
+              <a:t>Question</a:t>
+            </a:r>
+          </a:p>
+        </p:txBody>
+      </p:sp>
+      <p:sp>
+        <p:nvSpPr>
+          <p:cNvPr id="3" name="Content Placeholder 2">
+            <a:extLst>
+              <a:ext uri="{FF2B5EF4-FFF2-40B4-BE49-F238E27FC236}">
+                <a16:creationId xmlns:a16="http://schemas.microsoft.com/office/drawing/2014/main" id="{91C2C583-82BF-4E57-1DC6-4D97AE6080E7}"/>
+              </a:ext>
+            </a:extLst>
+          </p:cNvPr>
+          <p:cNvSpPr>
+            <a:spLocks noGrp="1"/>
+          </p:cNvSpPr>
+          <p:nvPr>
+            <p:ph idx="1"/>
+          </p:nvPr>
+        </p:nvSpPr>
+        <p:spPr/>
+        <p:txBody>
+          <a:bodyPr/>
+          <a:lstStyle/>
+          <a:p>
+            <a:r>
+              <a:rPr lang="en-US" dirty="0"/>
+              <a:t>Consider the following semaphore setup:</a:t>
+            </a:r>
+          </a:p>
+          <a:p>
+            <a:pPr lvl="1"/>
+            <a:r>
+              <a:rPr lang="en-US" dirty="0" err="1"/>
+              <a:t>semA</a:t>
+            </a:r>
+            <a:r>
+              <a:rPr lang="en-US" dirty="0"/>
+              <a:t> = 1;</a:t>
+            </a:r>
+          </a:p>
+          <a:p>
+            <a:pPr lvl="1"/>
+            <a:r>
+              <a:rPr lang="en-US" dirty="0" err="1"/>
+              <a:t>semB</a:t>
+            </a:r>
+            <a:r>
+              <a:rPr lang="en-US" dirty="0"/>
+              <a:t> = 1;</a:t>
+            </a:r>
+          </a:p>
+          <a:p>
+            <a:pPr lvl="1"/>
+            <a:r>
+              <a:rPr lang="en-US" dirty="0" err="1"/>
+              <a:t>semC</a:t>
+            </a:r>
+            <a:r>
+              <a:rPr lang="en-US" dirty="0"/>
+              <a:t> = 0;</a:t>
+            </a:r>
+          </a:p>
+          <a:p>
+            <a:pPr lvl="1"/>
+            <a:endParaRPr lang="en-US" dirty="0"/>
+          </a:p>
+          <a:p>
+            <a:pPr lvl="1"/>
+            <a:endParaRPr lang="en-US" dirty="0"/>
+          </a:p>
+          <a:p>
+            <a:pPr lvl="1"/>
+            <a:endParaRPr lang="en-US" dirty="0"/>
+          </a:p>
+          <a:p>
+            <a:pPr lvl="1"/>
+            <a:endParaRPr lang="en-US" dirty="0"/>
+          </a:p>
+          <a:p>
+            <a:r>
+              <a:rPr lang="en-US" dirty="0"/>
+              <a:t>Are </a:t>
+            </a:r>
+            <a:r>
+              <a:rPr lang="en-US" dirty="0" err="1"/>
+              <a:t>opY</a:t>
+            </a:r>
+            <a:r>
+              <a:rPr lang="en-US" dirty="0"/>
+              <a:t> &amp; </a:t>
+            </a:r>
+            <a:r>
+              <a:rPr lang="en-US" dirty="0" err="1"/>
+              <a:t>opX</a:t>
+            </a:r>
+            <a:r>
+              <a:rPr lang="en-US" dirty="0"/>
+              <a:t> → </a:t>
+            </a:r>
+            <a:r>
+              <a:rPr lang="en-US" dirty="0" err="1"/>
+              <a:t>opZ</a:t>
+            </a:r>
+            <a:r>
+              <a:rPr lang="en-US" dirty="0"/>
+              <a:t> and </a:t>
+            </a:r>
+            <a:r>
+              <a:rPr lang="en-US" dirty="0" err="1"/>
+              <a:t>opX</a:t>
+            </a:r>
+            <a:r>
+              <a:rPr lang="en-US" dirty="0"/>
+              <a:t> &amp; </a:t>
+            </a:r>
+            <a:r>
+              <a:rPr lang="en-US" dirty="0" err="1"/>
+              <a:t>opY</a:t>
+            </a:r>
+            <a:r>
+              <a:rPr lang="en-US" dirty="0"/>
+              <a:t> → </a:t>
+            </a:r>
+            <a:r>
+              <a:rPr lang="en-US" dirty="0" err="1"/>
+              <a:t>opZ</a:t>
+            </a:r>
+            <a:r>
+              <a:rPr lang="en-US" dirty="0"/>
+              <a:t> valid?</a:t>
+            </a:r>
+          </a:p>
+          <a:p>
+            <a:pPr lvl="1"/>
+            <a:endParaRPr lang="en-US" dirty="0"/>
+          </a:p>
+        </p:txBody>
+      </p:sp>
+      <p:sp>
+        <p:nvSpPr>
+          <p:cNvPr id="4" name="Slide Number Placeholder 3">
+            <a:extLst>
+              <a:ext uri="{FF2B5EF4-FFF2-40B4-BE49-F238E27FC236}">
+                <a16:creationId xmlns:a16="http://schemas.microsoft.com/office/drawing/2014/main" id="{680A75F0-055A-8911-D78A-9311FF8F81D5}"/>
+              </a:ext>
+            </a:extLst>
+          </p:cNvPr>
+          <p:cNvSpPr>
+            <a:spLocks noGrp="1"/>
+          </p:cNvSpPr>
+          <p:nvPr>
+            <p:ph type="sldNum" sz="quarter" idx="12"/>
+          </p:nvPr>
+        </p:nvSpPr>
+        <p:spPr/>
+        <p:txBody>
+          <a:bodyPr/>
+          <a:lstStyle/>
+          <a:p>
+            <a:fld id="{67FCC1A6-2294-BF46-A2F7-E6BDB92DF1BF}" type="slidenum">
+              <a:rPr lang="en-US" smtClean="0"/>
+              <a:t>47</a:t>
+            </a:fld>
+            <a:endParaRPr lang="en-US"/>
+          </a:p>
+        </p:txBody>
+      </p:sp>
+      <p:sp>
+        <p:nvSpPr>
+          <p:cNvPr id="6" name="TextBox 5">
+            <a:extLst>
+              <a:ext uri="{FF2B5EF4-FFF2-40B4-BE49-F238E27FC236}">
+                <a16:creationId xmlns:a16="http://schemas.microsoft.com/office/drawing/2014/main" id="{244F15DE-8919-AD6D-4646-F9F6E64105F3}"/>
+              </a:ext>
+            </a:extLst>
+          </p:cNvPr>
+          <p:cNvSpPr txBox="1"/>
+          <p:nvPr/>
+        </p:nvSpPr>
+        <p:spPr>
+          <a:xfrm>
+            <a:off x="4366647" y="3064199"/>
+            <a:ext cx="1584702" cy="1477328"/>
+          </a:xfrm>
+          <a:prstGeom prst="rect">
+            <a:avLst/>
+          </a:prstGeom>
+          <a:noFill/>
+        </p:spPr>
+        <p:txBody>
+          <a:bodyPr wrap="square">
+            <a:spAutoFit/>
+          </a:bodyPr>
+          <a:lstStyle/>
+          <a:p>
+            <a:r>
+              <a:rPr lang="en-US" dirty="0"/>
+              <a:t>THREAD X</a:t>
+            </a:r>
+            <a:br>
+              <a:rPr lang="en-US" dirty="0"/>
+            </a:br>
+            <a:endParaRPr lang="en-US" dirty="0"/>
+          </a:p>
+          <a:p>
+            <a:r>
+              <a:rPr lang="en-US" dirty="0"/>
+              <a:t>wait(</a:t>
+            </a:r>
+            <a:r>
+              <a:rPr lang="en-US" dirty="0" err="1"/>
+              <a:t>semA</a:t>
+            </a:r>
+            <a:r>
+              <a:rPr lang="en-US" dirty="0"/>
+              <a:t>);</a:t>
+            </a:r>
+          </a:p>
+          <a:p>
+            <a:r>
+              <a:rPr lang="en-US" dirty="0" err="1"/>
+              <a:t>opX</a:t>
+            </a:r>
+            <a:r>
+              <a:rPr lang="en-US" dirty="0"/>
+              <a:t>;</a:t>
+            </a:r>
+          </a:p>
+          <a:p>
+            <a:r>
+              <a:rPr lang="en-US" dirty="0"/>
+              <a:t>signal(</a:t>
+            </a:r>
+            <a:r>
+              <a:rPr lang="en-US" dirty="0" err="1"/>
+              <a:t>semB</a:t>
+            </a:r>
+            <a:r>
+              <a:rPr lang="en-US" dirty="0"/>
+              <a:t>);</a:t>
+            </a:r>
+          </a:p>
+        </p:txBody>
+      </p:sp>
+      <p:sp>
+        <p:nvSpPr>
+          <p:cNvPr id="8" name="TextBox 7">
+            <a:extLst>
+              <a:ext uri="{FF2B5EF4-FFF2-40B4-BE49-F238E27FC236}">
+                <a16:creationId xmlns:a16="http://schemas.microsoft.com/office/drawing/2014/main" id="{A9AE8E93-6808-816D-9D6C-E43051D41D07}"/>
+              </a:ext>
+            </a:extLst>
+          </p:cNvPr>
+          <p:cNvSpPr txBox="1"/>
+          <p:nvPr/>
+        </p:nvSpPr>
+        <p:spPr>
+          <a:xfrm>
+            <a:off x="6096000" y="3064199"/>
+            <a:ext cx="3046708" cy="1477328"/>
+          </a:xfrm>
+          <a:prstGeom prst="rect">
+            <a:avLst/>
+          </a:prstGeom>
+          <a:noFill/>
+        </p:spPr>
+        <p:txBody>
+          <a:bodyPr wrap="square">
+            <a:spAutoFit/>
+          </a:bodyPr>
+          <a:lstStyle/>
+          <a:p>
+            <a:r>
+              <a:rPr lang="en-US" dirty="0"/>
+              <a:t>THREAD Y</a:t>
+            </a:r>
+          </a:p>
+          <a:p>
+            <a:endParaRPr lang="en-US" dirty="0"/>
+          </a:p>
+          <a:p>
+            <a:r>
+              <a:rPr lang="en-US" dirty="0"/>
+              <a:t>wait(</a:t>
+            </a:r>
+            <a:r>
+              <a:rPr lang="en-US" dirty="0" err="1"/>
+              <a:t>semB</a:t>
+            </a:r>
+            <a:r>
+              <a:rPr lang="en-US" dirty="0"/>
+              <a:t>);</a:t>
+            </a:r>
+          </a:p>
+          <a:p>
+            <a:r>
+              <a:rPr lang="en-US" dirty="0" err="1"/>
+              <a:t>opY</a:t>
+            </a:r>
+            <a:r>
+              <a:rPr lang="en-US" dirty="0"/>
+              <a:t>;</a:t>
+            </a:r>
+          </a:p>
+          <a:p>
+            <a:r>
+              <a:rPr lang="en-US" dirty="0"/>
+              <a:t>signal(</a:t>
+            </a:r>
+            <a:r>
+              <a:rPr lang="en-US" dirty="0" err="1"/>
+              <a:t>semC</a:t>
+            </a:r>
+            <a:r>
+              <a:rPr lang="en-US" dirty="0"/>
+              <a:t>);</a:t>
+            </a:r>
+          </a:p>
+        </p:txBody>
+      </p:sp>
+      <p:sp>
+        <p:nvSpPr>
+          <p:cNvPr id="10" name="TextBox 9">
+            <a:extLst>
+              <a:ext uri="{FF2B5EF4-FFF2-40B4-BE49-F238E27FC236}">
+                <a16:creationId xmlns:a16="http://schemas.microsoft.com/office/drawing/2014/main" id="{6823CFB3-5FCF-1E3A-AC51-903B9A4A6384}"/>
+              </a:ext>
+            </a:extLst>
+          </p:cNvPr>
+          <p:cNvSpPr txBox="1"/>
+          <p:nvPr/>
+        </p:nvSpPr>
+        <p:spPr>
+          <a:xfrm>
+            <a:off x="8045557" y="3064199"/>
+            <a:ext cx="2483603" cy="1477328"/>
+          </a:xfrm>
+          <a:prstGeom prst="rect">
+            <a:avLst/>
+          </a:prstGeom>
+          <a:noFill/>
+        </p:spPr>
+        <p:txBody>
+          <a:bodyPr wrap="square">
+            <a:spAutoFit/>
+          </a:bodyPr>
+          <a:lstStyle/>
+          <a:p>
+            <a:r>
+              <a:rPr lang="en-US" dirty="0"/>
+              <a:t>THREAD Z</a:t>
+            </a:r>
+          </a:p>
+          <a:p>
+            <a:endParaRPr lang="en-US" dirty="0"/>
+          </a:p>
+          <a:p>
+            <a:r>
+              <a:rPr lang="en-US" dirty="0"/>
+              <a:t>wait(</a:t>
+            </a:r>
+            <a:r>
+              <a:rPr lang="en-US" dirty="0" err="1"/>
+              <a:t>semC</a:t>
+            </a:r>
+            <a:r>
+              <a:rPr lang="en-US" dirty="0"/>
+              <a:t>);</a:t>
+            </a:r>
+          </a:p>
+          <a:p>
+            <a:r>
+              <a:rPr lang="en-US" dirty="0" err="1"/>
+              <a:t>opZ</a:t>
+            </a:r>
+            <a:r>
+              <a:rPr lang="en-US" dirty="0"/>
+              <a:t>;</a:t>
+            </a:r>
+          </a:p>
+          <a:p>
+            <a:r>
+              <a:rPr lang="en-US" dirty="0"/>
+              <a:t>signal(</a:t>
+            </a:r>
+            <a:r>
+              <a:rPr lang="en-US" dirty="0" err="1"/>
+              <a:t>semA</a:t>
+            </a:r>
+            <a:r>
+              <a:rPr lang="en-US" dirty="0"/>
+              <a:t>);</a:t>
+            </a:r>
+          </a:p>
+        </p:txBody>
+      </p:sp>
+      <p:sp>
+        <p:nvSpPr>
+          <p:cNvPr id="5" name="Date Placeholder 4">
+            <a:extLst>
+              <a:ext uri="{FF2B5EF4-FFF2-40B4-BE49-F238E27FC236}">
+                <a16:creationId xmlns:a16="http://schemas.microsoft.com/office/drawing/2014/main" id="{220F3303-F6E2-D538-3110-41892067A978}"/>
+              </a:ext>
+            </a:extLst>
+          </p:cNvPr>
+          <p:cNvSpPr>
+            <a:spLocks noGrp="1"/>
+          </p:cNvSpPr>
+          <p:nvPr>
+            <p:ph type="dt" sz="half" idx="10"/>
+          </p:nvPr>
+        </p:nvSpPr>
+        <p:spPr/>
+        <p:txBody>
+          <a:bodyPr/>
+          <a:lstStyle/>
+          <a:p>
+            <a:r>
+              <a:rPr lang="en-US"/>
+              <a:t>Vincenzo Gulisano</a:t>
+            </a:r>
+          </a:p>
+        </p:txBody>
+      </p:sp>
+    </p:spTree>
+    <p:extLst>
+      <p:ext uri="{BB962C8B-B14F-4D97-AF65-F5344CB8AC3E}">
+        <p14:creationId xmlns:p14="http://schemas.microsoft.com/office/powerpoint/2010/main" val="277847942"/>
+      </p:ext>
+    </p:extLst>
+  </p:cSld>
+  <p:clrMapOvr>
+    <a:masterClrMapping/>
+  </p:clrMapOvr>
+</p:sld>
+</file>
+
+<file path=ppt/slides/slide48.xml><?xml version="1.0" encoding="utf-8"?>
+<p:sld xmlns:a="http://schemas.openxmlformats.org/drawingml/2006/main" xmlns:r="http://schemas.openxmlformats.org/officeDocument/2006/relationships" xmlns:p="http://schemas.openxmlformats.org/presentationml/2006/main">
+  <p:cSld>
+    <p:spTree>
+      <p:nvGrpSpPr>
+        <p:cNvPr id="1" name=""/>
+        <p:cNvGrpSpPr/>
+        <p:nvPr/>
+      </p:nvGrpSpPr>
+      <p:grpSpPr>
+        <a:xfrm>
+          <a:off x="0" y="0"/>
+          <a:ext cx="0" cy="0"/>
+          <a:chOff x="0" y="0"/>
+          <a:chExt cx="0" cy="0"/>
+        </a:xfrm>
+      </p:grpSpPr>
+      <p:sp>
+        <p:nvSpPr>
+          <p:cNvPr id="3" name="Content Placeholder 2">
+            <a:extLst>
+              <a:ext uri="{FF2B5EF4-FFF2-40B4-BE49-F238E27FC236}">
+                <a16:creationId xmlns:a16="http://schemas.microsoft.com/office/drawing/2014/main" id="{841873B2-11C8-784E-5D69-ED0966228813}"/>
+              </a:ext>
+            </a:extLst>
+          </p:cNvPr>
+          <p:cNvSpPr>
+            <a:spLocks noGrp="1"/>
+          </p:cNvSpPr>
+          <p:nvPr>
+            <p:ph idx="1"/>
+          </p:nvPr>
+        </p:nvSpPr>
+        <p:spPr/>
+        <p:txBody>
+          <a:bodyPr/>
+          <a:lstStyle/>
+          <a:p>
+            <a:pPr marL="0" indent="0">
+              <a:buNone/>
+            </a:pPr>
+            <a:r>
+              <a:rPr lang="en-US" dirty="0"/>
+              <a:t>If two threads share memory, one thread with high priority wants to enter the critical section but another thread with lower priority was in the CS before, and the scheduling is non-preemptive priority based, that could lead to:</a:t>
+            </a:r>
+          </a:p>
+          <a:p>
+            <a:pPr marL="457200" indent="-457200">
+              <a:buFont typeface="+mj-lt"/>
+              <a:buAutoNum type="arabicPeriod"/>
+            </a:pPr>
+            <a:r>
+              <a:rPr lang="en-US" dirty="0"/>
+              <a:t>Unfair sharing of CPU time</a:t>
+            </a:r>
+          </a:p>
+          <a:p>
+            <a:pPr marL="457200" indent="-457200">
+              <a:buFont typeface="+mj-lt"/>
+              <a:buAutoNum type="arabicPeriod"/>
+            </a:pPr>
+            <a:r>
+              <a:rPr lang="en-US" dirty="0"/>
+              <a:t>Deadlock</a:t>
+            </a:r>
+          </a:p>
+          <a:p>
+            <a:pPr marL="457200" indent="-457200">
+              <a:buFont typeface="+mj-lt"/>
+              <a:buAutoNum type="arabicPeriod"/>
+            </a:pPr>
+            <a:r>
+              <a:rPr lang="en-US" dirty="0"/>
+              <a:t>Violation of mutual exclusion</a:t>
+            </a:r>
+          </a:p>
+          <a:p>
+            <a:endParaRPr lang="en-US" dirty="0"/>
+          </a:p>
+        </p:txBody>
+      </p:sp>
+      <p:sp>
+        <p:nvSpPr>
+          <p:cNvPr id="4" name="Date Placeholder 3">
+            <a:extLst>
+              <a:ext uri="{FF2B5EF4-FFF2-40B4-BE49-F238E27FC236}">
+                <a16:creationId xmlns:a16="http://schemas.microsoft.com/office/drawing/2014/main" id="{7C097E0E-0BB1-87A1-F97E-9A97A43EFCA2}"/>
+              </a:ext>
+            </a:extLst>
+          </p:cNvPr>
+          <p:cNvSpPr>
+            <a:spLocks noGrp="1"/>
+          </p:cNvSpPr>
+          <p:nvPr>
+            <p:ph type="dt" sz="half" idx="10"/>
+          </p:nvPr>
+        </p:nvSpPr>
+        <p:spPr/>
+        <p:txBody>
+          <a:bodyPr/>
+          <a:lstStyle/>
+          <a:p>
+            <a:r>
+              <a:rPr lang="en-US"/>
+              <a:t>Vincenzo Gulisano</a:t>
+            </a:r>
+          </a:p>
+        </p:txBody>
+      </p:sp>
+      <p:sp>
+        <p:nvSpPr>
+          <p:cNvPr id="5" name="Slide Number Placeholder 4">
+            <a:extLst>
+              <a:ext uri="{FF2B5EF4-FFF2-40B4-BE49-F238E27FC236}">
+                <a16:creationId xmlns:a16="http://schemas.microsoft.com/office/drawing/2014/main" id="{A59E56E9-2437-3371-663A-07F48BB6BA1B}"/>
+              </a:ext>
+            </a:extLst>
+          </p:cNvPr>
+          <p:cNvSpPr>
+            <a:spLocks noGrp="1"/>
+          </p:cNvSpPr>
+          <p:nvPr>
+            <p:ph type="sldNum" sz="quarter" idx="12"/>
+          </p:nvPr>
+        </p:nvSpPr>
+        <p:spPr/>
+        <p:txBody>
+          <a:bodyPr/>
+          <a:lstStyle/>
+          <a:p>
+            <a:fld id="{67FCC1A6-2294-BF46-A2F7-E6BDB92DF1BF}" type="slidenum">
+              <a:rPr lang="en-US" smtClean="0"/>
+              <a:t>48</a:t>
+            </a:fld>
+            <a:endParaRPr lang="en-US"/>
+          </a:p>
+        </p:txBody>
+      </p:sp>
+    </p:spTree>
+    <p:extLst>
+      <p:ext uri="{BB962C8B-B14F-4D97-AF65-F5344CB8AC3E}">
+        <p14:creationId xmlns:p14="http://schemas.microsoft.com/office/powerpoint/2010/main" val="1004857785"/>
+      </p:ext>
+    </p:extLst>
+  </p:cSld>
+  <p:clrMapOvr>
+    <a:masterClrMapping/>
+  </p:clrMapOvr>
+</p:sld>
+</file>
+
+<file path=ppt/slides/slide49.xml><?xml version="1.0" encoding="utf-8"?>
+<p:sld xmlns:a="http://schemas.openxmlformats.org/drawingml/2006/main" xmlns:r="http://schemas.openxmlformats.org/officeDocument/2006/relationships" xmlns:p="http://schemas.openxmlformats.org/presentationml/2006/main">
+  <p:cSld>
+    <p:spTree>
+      <p:nvGrpSpPr>
+        <p:cNvPr id="1" name=""/>
+        <p:cNvGrpSpPr/>
+        <p:nvPr/>
+      </p:nvGrpSpPr>
+      <p:grpSpPr>
+        <a:xfrm>
+          <a:off x="0" y="0"/>
+          <a:ext cx="0" cy="0"/>
+          <a:chOff x="0" y="0"/>
+          <a:chExt cx="0" cy="0"/>
+        </a:xfrm>
+      </p:grpSpPr>
+      <p:sp>
+        <p:nvSpPr>
+          <p:cNvPr id="2" name="Title 1">
+            <a:extLst>
+              <a:ext uri="{FF2B5EF4-FFF2-40B4-BE49-F238E27FC236}">
+                <a16:creationId xmlns:a16="http://schemas.microsoft.com/office/drawing/2014/main" id="{D4E39F1F-B927-B5A1-36C9-BA8B0DC2DAB3}"/>
+              </a:ext>
+            </a:extLst>
+          </p:cNvPr>
+          <p:cNvSpPr>
+            <a:spLocks noGrp="1"/>
+          </p:cNvSpPr>
+          <p:nvPr>
+            <p:ph type="title"/>
+          </p:nvPr>
+        </p:nvSpPr>
+        <p:spPr/>
+        <p:txBody>
+          <a:bodyPr/>
+          <a:lstStyle/>
+          <a:p>
+            <a:r>
+              <a:rPr lang="en-US" dirty="0"/>
+              <a:t>Is mutual exclusion guaranteed by this approach?</a:t>
+            </a:r>
+          </a:p>
+        </p:txBody>
+      </p:sp>
+      <p:sp>
+        <p:nvSpPr>
+          <p:cNvPr id="4" name="Date Placeholder 3">
+            <a:extLst>
+              <a:ext uri="{FF2B5EF4-FFF2-40B4-BE49-F238E27FC236}">
+                <a16:creationId xmlns:a16="http://schemas.microsoft.com/office/drawing/2014/main" id="{53B0A70A-9D04-00BA-930B-37C6FBC4AE9A}"/>
+              </a:ext>
+            </a:extLst>
+          </p:cNvPr>
+          <p:cNvSpPr>
+            <a:spLocks noGrp="1"/>
+          </p:cNvSpPr>
+          <p:nvPr>
+            <p:ph type="dt" sz="half" idx="10"/>
+          </p:nvPr>
+        </p:nvSpPr>
+        <p:spPr/>
+        <p:txBody>
+          <a:bodyPr/>
+          <a:lstStyle/>
+          <a:p>
+            <a:r>
+              <a:rPr lang="en-US"/>
+              <a:t>Vincenzo Gulisano</a:t>
+            </a:r>
+          </a:p>
+        </p:txBody>
+      </p:sp>
+      <p:sp>
+        <p:nvSpPr>
+          <p:cNvPr id="5" name="Slide Number Placeholder 4">
+            <a:extLst>
+              <a:ext uri="{FF2B5EF4-FFF2-40B4-BE49-F238E27FC236}">
+                <a16:creationId xmlns:a16="http://schemas.microsoft.com/office/drawing/2014/main" id="{1039D5B2-5398-8070-B55C-81D561F8F15E}"/>
+              </a:ext>
+            </a:extLst>
+          </p:cNvPr>
+          <p:cNvSpPr>
+            <a:spLocks noGrp="1"/>
+          </p:cNvSpPr>
+          <p:nvPr>
+            <p:ph type="sldNum" sz="quarter" idx="12"/>
+          </p:nvPr>
+        </p:nvSpPr>
+        <p:spPr/>
+        <p:txBody>
+          <a:bodyPr/>
+          <a:lstStyle/>
+          <a:p>
+            <a:fld id="{67FCC1A6-2294-BF46-A2F7-E6BDB92DF1BF}" type="slidenum">
+              <a:rPr lang="en-US" smtClean="0"/>
+              <a:t>49</a:t>
+            </a:fld>
+            <a:endParaRPr lang="en-US"/>
+          </a:p>
+        </p:txBody>
+      </p:sp>
+      <p:pic>
+        <p:nvPicPr>
+          <p:cNvPr id="6" name="Graphic 5">
+            <a:extLst>
+              <a:ext uri="{FF2B5EF4-FFF2-40B4-BE49-F238E27FC236}">
+                <a16:creationId xmlns:a16="http://schemas.microsoft.com/office/drawing/2014/main" id="{ADF92F92-99D5-C9D1-887E-9C1CC9CEDB4B}"/>
+              </a:ext>
+            </a:extLst>
+          </p:cNvPr>
+          <p:cNvPicPr>
+            <a:picLocks noChangeAspect="1"/>
+          </p:cNvPicPr>
+          <p:nvPr/>
+        </p:nvPicPr>
+        <p:blipFill>
+          <a:blip>
+            <a:extLst>
+              <a:ext uri="{96DAC541-7B7A-43D3-8B79-37D633B846F1}">
+                <asvg:svgBlip xmlns:asvg="http://schemas.microsoft.com/office/drawing/2016/SVG/main" r:embed="rId3"/>
+              </a:ext>
+            </a:extLst>
+          </a:blip>
+          <a:stretch>
+            <a:fillRect/>
+          </a:stretch>
+        </p:blipFill>
+        <p:spPr>
+          <a:xfrm>
+            <a:off x="2789560" y="2120470"/>
+            <a:ext cx="5501000" cy="3806098"/>
+          </a:xfrm>
+          <a:prstGeom prst="rect">
+            <a:avLst/>
+          </a:prstGeom>
+        </p:spPr>
+      </p:pic>
+    </p:spTree>
+    <p:extLst>
+      <p:ext uri="{BB962C8B-B14F-4D97-AF65-F5344CB8AC3E}">
+        <p14:creationId xmlns:p14="http://schemas.microsoft.com/office/powerpoint/2010/main" val="1221292455"/>
       </p:ext>
     </p:extLst>
   </p:cSld>
@@ -51682,6 +55517,267 @@
 </file>
 
 <file path=ppt/theme/theme2.xml><?xml version="1.0" encoding="utf-8"?>
+<a:theme xmlns:a="http://schemas.openxmlformats.org/drawingml/2006/main" name="1_Office Theme">
+  <a:themeElements>
+    <a:clrScheme name="Office">
+      <a:dk1>
+        <a:sysClr val="windowText" lastClr="000000"/>
+      </a:dk1>
+      <a:lt1>
+        <a:sysClr val="window" lastClr="FFFFFF"/>
+      </a:lt1>
+      <a:dk2>
+        <a:srgbClr val="44546A"/>
+      </a:dk2>
+      <a:lt2>
+        <a:srgbClr val="E7E6E6"/>
+      </a:lt2>
+      <a:accent1>
+        <a:srgbClr val="5B9BD5"/>
+      </a:accent1>
+      <a:accent2>
+        <a:srgbClr val="ED7D31"/>
+      </a:accent2>
+      <a:accent3>
+        <a:srgbClr val="A5A5A5"/>
+      </a:accent3>
+      <a:accent4>
+        <a:srgbClr val="FFC000"/>
+      </a:accent4>
+      <a:accent5>
+        <a:srgbClr val="4472C4"/>
+      </a:accent5>
+      <a:accent6>
+        <a:srgbClr val="70AD47"/>
+      </a:accent6>
+      <a:hlink>
+        <a:srgbClr val="0563C1"/>
+      </a:hlink>
+      <a:folHlink>
+        <a:srgbClr val="954F72"/>
+      </a:folHlink>
+    </a:clrScheme>
+    <a:fontScheme name="Garamond">
+      <a:majorFont>
+        <a:latin typeface="Garamond" panose="02020404030301010803"/>
+        <a:ea typeface=""/>
+        <a:cs typeface=""/>
+        <a:font script="Jpan" typeface="ＭＳ Ｐゴシック"/>
+        <a:font script="Hang" typeface="돋움"/>
+        <a:font script="Hans" typeface="方正舒体"/>
+        <a:font script="Hant" typeface="微軟正黑體"/>
+        <a:font script="Arab" typeface="Arial"/>
+        <a:font script="Hebr" typeface="Arial"/>
+        <a:font script="Thai" typeface="Cordia New"/>
+        <a:font script="Ethi" typeface="Nyala"/>
+        <a:font script="Beng" typeface="Vrinda"/>
+        <a:font script="Gujr" typeface="Shruti"/>
+        <a:font script="Khmr" typeface="DaunPenh"/>
+        <a:font script="Knda" typeface="Tunga"/>
+        <a:font script="Guru" typeface="Raavi"/>
+        <a:font script="Cans" typeface="Euphemia"/>
+        <a:font script="Cher" typeface="Plantagenet Cherokee"/>
+        <a:font script="Yiii" typeface="Microsoft Yi Baiti"/>
+        <a:font script="Tibt" typeface="Microsoft Himalaya"/>
+        <a:font script="Thaa" typeface="MV Boli"/>
+        <a:font script="Deva" typeface="Mangal"/>
+        <a:font script="Telu" typeface="Gautami"/>
+        <a:font script="Taml" typeface="Latha"/>
+        <a:font script="Syrc" typeface="Estrangelo Edessa"/>
+        <a:font script="Orya" typeface="Kalinga"/>
+        <a:font script="Mlym" typeface="Kartika"/>
+        <a:font script="Laoo" typeface="DokChampa"/>
+        <a:font script="Sinh" typeface="Iskoola Pota"/>
+        <a:font script="Mong" typeface="Mongolian Baiti"/>
+        <a:font script="Viet" typeface="Arial"/>
+        <a:font script="Uigh" typeface="Microsoft Uighur"/>
+        <a:font script="Geor" typeface="Sylfaen"/>
+      </a:majorFont>
+      <a:minorFont>
+        <a:latin typeface="Garamond" panose="02020404030301010803"/>
+        <a:ea typeface=""/>
+        <a:cs typeface=""/>
+        <a:font script="Jpan" typeface="ＭＳ Ｐゴシック"/>
+        <a:font script="Hang" typeface="돋움"/>
+        <a:font script="Hans" typeface="方正舒体"/>
+        <a:font script="Hant" typeface="微軟正黑體"/>
+        <a:font script="Arab" typeface="Arial"/>
+        <a:font script="Hebr" typeface="Arial"/>
+        <a:font script="Thai" typeface="Cordia New"/>
+        <a:font script="Ethi" typeface="Nyala"/>
+        <a:font script="Beng" typeface="Vrinda"/>
+        <a:font script="Gujr" typeface="Shruti"/>
+        <a:font script="Khmr" typeface="DaunPenh"/>
+        <a:font script="Knda" typeface="Tunga"/>
+        <a:font script="Guru" typeface="Raavi"/>
+        <a:font script="Cans" typeface="Euphemia"/>
+        <a:font script="Cher" typeface="Plantagenet Cherokee"/>
+        <a:font script="Yiii" typeface="Microsoft Yi Baiti"/>
+        <a:font script="Tibt" typeface="Microsoft Himalaya"/>
+        <a:font script="Thaa" typeface="MV Boli"/>
+        <a:font script="Deva" typeface="Mangal"/>
+        <a:font script="Telu" typeface="Gautami"/>
+        <a:font script="Taml" typeface="Latha"/>
+        <a:font script="Syrc" typeface="Estrangelo Edessa"/>
+        <a:font script="Orya" typeface="Kalinga"/>
+        <a:font script="Mlym" typeface="Kartika"/>
+        <a:font script="Laoo" typeface="DokChampa"/>
+        <a:font script="Sinh" typeface="Iskoola Pota"/>
+        <a:font script="Mong" typeface="Mongolian Baiti"/>
+        <a:font script="Viet" typeface="Arial"/>
+        <a:font script="Uigh" typeface="Microsoft Uighur"/>
+        <a:font script="Geor" typeface="Sylfaen"/>
+      </a:minorFont>
+    </a:fontScheme>
+    <a:fmtScheme name="Office">
+      <a:fillStyleLst>
+        <a:solidFill>
+          <a:schemeClr val="phClr"/>
+        </a:solidFill>
+        <a:gradFill rotWithShape="1">
+          <a:gsLst>
+            <a:gs pos="0">
+              <a:schemeClr val="phClr">
+                <a:lumMod val="110000"/>
+                <a:satMod val="105000"/>
+                <a:tint val="67000"/>
+              </a:schemeClr>
+            </a:gs>
+            <a:gs pos="50000">
+              <a:schemeClr val="phClr">
+                <a:lumMod val="105000"/>
+                <a:satMod val="103000"/>
+                <a:tint val="73000"/>
+              </a:schemeClr>
+            </a:gs>
+            <a:gs pos="100000">
+              <a:schemeClr val="phClr">
+                <a:lumMod val="105000"/>
+                <a:satMod val="109000"/>
+                <a:tint val="81000"/>
+              </a:schemeClr>
+            </a:gs>
+          </a:gsLst>
+          <a:lin ang="5400000" scaled="0"/>
+        </a:gradFill>
+        <a:gradFill rotWithShape="1">
+          <a:gsLst>
+            <a:gs pos="0">
+              <a:schemeClr val="phClr">
+                <a:satMod val="103000"/>
+                <a:lumMod val="102000"/>
+                <a:tint val="94000"/>
+              </a:schemeClr>
+            </a:gs>
+            <a:gs pos="50000">
+              <a:schemeClr val="phClr">
+                <a:satMod val="110000"/>
+                <a:lumMod val="100000"/>
+                <a:shade val="100000"/>
+              </a:schemeClr>
+            </a:gs>
+            <a:gs pos="100000">
+              <a:schemeClr val="phClr">
+                <a:lumMod val="99000"/>
+                <a:satMod val="120000"/>
+                <a:shade val="78000"/>
+              </a:schemeClr>
+            </a:gs>
+          </a:gsLst>
+          <a:lin ang="5400000" scaled="0"/>
+        </a:gradFill>
+      </a:fillStyleLst>
+      <a:lnStyleLst>
+        <a:ln w="6350" cap="flat" cmpd="sng" algn="ctr">
+          <a:solidFill>
+            <a:schemeClr val="phClr"/>
+          </a:solidFill>
+          <a:prstDash val="solid"/>
+          <a:miter lim="800000"/>
+        </a:ln>
+        <a:ln w="12700" cap="flat" cmpd="sng" algn="ctr">
+          <a:solidFill>
+            <a:schemeClr val="phClr"/>
+          </a:solidFill>
+          <a:prstDash val="solid"/>
+          <a:miter lim="800000"/>
+        </a:ln>
+        <a:ln w="19050" cap="flat" cmpd="sng" algn="ctr">
+          <a:solidFill>
+            <a:schemeClr val="phClr"/>
+          </a:solidFill>
+          <a:prstDash val="solid"/>
+          <a:miter lim="800000"/>
+        </a:ln>
+      </a:lnStyleLst>
+      <a:effectStyleLst>
+        <a:effectStyle>
+          <a:effectLst/>
+        </a:effectStyle>
+        <a:effectStyle>
+          <a:effectLst/>
+        </a:effectStyle>
+        <a:effectStyle>
+          <a:effectLst>
+            <a:outerShdw blurRad="57150" dist="19050" dir="5400000" algn="ctr" rotWithShape="0">
+              <a:srgbClr val="000000">
+                <a:alpha val="63000"/>
+              </a:srgbClr>
+            </a:outerShdw>
+          </a:effectLst>
+        </a:effectStyle>
+      </a:effectStyleLst>
+      <a:bgFillStyleLst>
+        <a:solidFill>
+          <a:schemeClr val="phClr"/>
+        </a:solidFill>
+        <a:solidFill>
+          <a:schemeClr val="phClr">
+            <a:tint val="95000"/>
+            <a:satMod val="170000"/>
+          </a:schemeClr>
+        </a:solidFill>
+        <a:gradFill rotWithShape="1">
+          <a:gsLst>
+            <a:gs pos="0">
+              <a:schemeClr val="phClr">
+                <a:tint val="93000"/>
+                <a:satMod val="150000"/>
+                <a:shade val="98000"/>
+                <a:lumMod val="102000"/>
+              </a:schemeClr>
+            </a:gs>
+            <a:gs pos="50000">
+              <a:schemeClr val="phClr">
+                <a:tint val="98000"/>
+                <a:satMod val="130000"/>
+                <a:shade val="90000"/>
+                <a:lumMod val="103000"/>
+              </a:schemeClr>
+            </a:gs>
+            <a:gs pos="100000">
+              <a:schemeClr val="phClr">
+                <a:shade val="63000"/>
+                <a:satMod val="120000"/>
+              </a:schemeClr>
+            </a:gs>
+          </a:gsLst>
+          <a:lin ang="5400000" scaled="0"/>
+        </a:gradFill>
+      </a:bgFillStyleLst>
+    </a:fmtScheme>
+  </a:themeElements>
+  <a:objectDefaults/>
+  <a:extraClrSchemeLst/>
+  <a:extLst>
+    <a:ext uri="{05A4C25C-085E-4340-85A3-A5531E510DB2}">
+      <thm15:themeFamily xmlns:thm15="http://schemas.microsoft.com/office/thememl/2012/main" name="Office Theme" id="{62F939B6-93AF-4DB8-9C6B-D6C7DFDC589F}" vid="{4A3C46E8-61CC-4603-A589-7422A47A8E4A}"/>
+    </a:ext>
+  </a:extLst>
+</a:theme>
+</file>
+
+<file path=ppt/theme/theme3.xml><?xml version="1.0" encoding="utf-8"?>
 <a:theme xmlns:a="http://schemas.openxmlformats.org/drawingml/2006/main" name="Office Theme">
   <a:themeElements>
     <a:clrScheme name="Office">
